--- a/assets/plc/2026-10-28_Science_Department_PD_Strengthening_Science_Literacy.pptx
+++ b/assets/plc/2026-10-28_Science_Department_PD_Strengthening_Science_Literacy.pptx
@@ -6231,7 +6231,7 @@
                 <a:ea typeface="Inter" pitchFamily="34" charset="-122"/>
                 <a:cs typeface="Inter" pitchFamily="34" charset="-120"/>
               </a:rPr>
-              <a:t>Revise, explain, compare, annotate, correct, or apply.</a:t>
+              <a:t>Identify, complete, or revise CER; then explain, compare, correct, or apply.</a:t>
             </a:r>
             <a:endParaRPr lang="en-US" sz="2000" dirty="0"/>
           </a:p>
@@ -6510,7 +6510,7 @@
                 <a:ea typeface="Inter" pitchFamily="34" charset="-122"/>
                 <a:cs typeface="Inter" pitchFamily="34" charset="-120"/>
               </a:rPr>
-              <a:t>“Identify the evidence that best supports your claim. Then revise your explanation so a reader can see how the evidence connects to the science idea.”</a:t>
+              <a:t>“Identify the evidence that best supports your claim. Then complete or revise your reasoning so a reader can see how the evidence connects to the science idea.”</a:t>
             </a:r>
             <a:endParaRPr lang="en-US" sz="2100" dirty="0"/>
           </a:p>

--- a/assets/plc/2026-10-28_Science_Department_PD_Strengthening_Science_Literacy.pptx
+++ b/assets/plc/2026-10-28_Science_Department_PD_Strengthening_Science_Literacy.pptx
@@ -1575,7 +1575,7 @@
     <p:bg>
       <p:bgPr>
         <a:solidFill>
-          <a:srgbClr val="202124"/>
+          <a:srgbClr val="FFFFFF"/>
         </a:solidFill>
       </p:bgPr>
     </p:bg>
@@ -1602,7 +1602,27 @@
         <p:spPr>
           <a:xfrm>
             <a:off x="0" y="0"/>
-            <a:ext cx="355600" cy="9144000"/>
+            <a:ext cx="16256000" cy="1168400"/>
+          </a:xfrm>
+          <a:prstGeom prst="rect">
+            <a:avLst/>
+          </a:prstGeom>
+          <a:solidFill>
+            <a:srgbClr val="202124"/>
+          </a:solidFill>
+          <a:ln/>
+        </p:spPr>
+      </p:sp>
+      <p:sp>
+        <p:nvSpPr>
+          <p:cNvPr id="3" name="cover-shape-2"/>
+          <p:cNvSpPr/>
+          <p:nvPr/>
+        </p:nvSpPr>
+        <p:spPr>
+          <a:xfrm>
+            <a:off x="0" y="1168400"/>
+            <a:ext cx="16256000" cy="101600"/>
           </a:xfrm>
           <a:prstGeom prst="rect">
             <a:avLst/>
@@ -1615,34 +1635,14 @@
       </p:sp>
       <p:sp>
         <p:nvSpPr>
-          <p:cNvPr id="3" name="cover-shape-2"/>
-          <p:cNvSpPr/>
-          <p:nvPr/>
-        </p:nvSpPr>
-        <p:spPr>
-          <a:xfrm>
-            <a:off x="889000" y="1168400"/>
-            <a:ext cx="1905000" cy="101600"/>
-          </a:xfrm>
-          <a:prstGeom prst="rect">
-            <a:avLst/>
-          </a:prstGeom>
-          <a:solidFill>
-            <a:srgbClr val="C41220"/>
-          </a:solidFill>
-          <a:ln/>
-        </p:spPr>
-      </p:sp>
-      <p:sp>
-        <p:nvSpPr>
           <p:cNvPr id="4" name="kicker"/>
           <p:cNvSpPr/>
           <p:nvPr/>
         </p:nvSpPr>
         <p:spPr>
           <a:xfrm>
-            <a:off x="889000" y="1600200"/>
-            <a:ext cx="12065000" cy="355600"/>
+            <a:off x="736600" y="381000"/>
+            <a:ext cx="12700000" cy="279400"/>
           </a:xfrm>
           <a:prstGeom prst="rect">
             <a:avLst/>
@@ -1658,9 +1658,9 @@
               <a:buNone/>
             </a:pPr>
             <a:r>
-              <a:rPr lang="en-US" altLang="en-US" sz="1700" dirty="0">
-                <a:solidFill>
-                  <a:srgbClr val="D1D5DB"/>
+              <a:rPr lang="en-US" altLang="en-US" sz="1600" dirty="0">
+                <a:solidFill>
+                  <a:srgbClr val="F1F3F4"/>
                 </a:solidFill>
                 <a:latin typeface="Inter" pitchFamily="34" charset="0"/>
                 <a:ea typeface="Inter" pitchFamily="34" charset="-122"/>
@@ -1668,7 +1668,7 @@
               </a:rPr>
               <a:t>NEW BEDFORD HIGH SCHOOL  •  SCIENCE DEPARTMENT PD  •  WEDNESDAY, OCTOBER 28, 2026  •  2:30–3:30 P.M.</a:t>
             </a:r>
-            <a:endParaRPr lang="en-US" sz="1700" dirty="0"/>
+            <a:endParaRPr lang="en-US" sz="1600" dirty="0"/>
           </a:p>
         </p:txBody>
       </p:sp>
@@ -1680,8 +1680,8 @@
         </p:nvSpPr>
         <p:spPr>
           <a:xfrm>
-            <a:off x="889000" y="2387600"/>
-            <a:ext cx="13335000" cy="1625600"/>
+            <a:off x="736600" y="1917700"/>
+            <a:ext cx="11938000" cy="1473200"/>
           </a:xfrm>
           <a:prstGeom prst="rect">
             <a:avLst/>
@@ -1697,62 +1697,107 @@
           <a:p>
             <a:pPr algn="l" indent="0" marL="0">
               <a:lnSpc>
-                <a:spcPts val="4860"/>
+                <a:spcPts val="4644"/>
               </a:lnSpc>
               <a:buNone/>
             </a:pPr>
             <a:r>
-              <a:rPr lang="en-US" altLang="en-US" sz="4500" dirty="0">
-                <a:solidFill>
-                  <a:srgbClr val="FFFFFF"/>
-                </a:solidFill>
-                <a:latin typeface="Inter" pitchFamily="34" charset="0"/>
-                <a:ea typeface="Inter" pitchFamily="34" charset="-122"/>
-                <a:cs typeface="Inter" pitchFamily="34" charset="-120"/>
-              </a:rPr>
-              <a:t>Strengthening Science Literacy</a:t>
-            </a:r>
-            <a:endParaRPr lang="en-US" sz="4500" dirty="0"/>
+              <a:rPr lang="en-US" altLang="en-US" sz="4300" dirty="0">
+                <a:solidFill>
+                  <a:srgbClr val="202124"/>
+                </a:solidFill>
+                <a:latin typeface="Inter" pitchFamily="34" charset="0"/>
+                <a:ea typeface="Inter" pitchFamily="34" charset="-122"/>
+                <a:cs typeface="Inter" pitchFamily="34" charset="-120"/>
+              </a:rPr>
+              <a:t>Teaching Students to Analyze</a:t>
+            </a:r>
+            <a:endParaRPr lang="en-US" sz="4300" dirty="0"/>
           </a:p>
           <a:p>
             <a:pPr algn="l" indent="0" marL="0">
               <a:lnSpc>
-                <a:spcPts val="4860"/>
+                <a:spcPts val="4644"/>
               </a:lnSpc>
               <a:buNone/>
             </a:pPr>
             <a:r>
-              <a:rPr lang="en-US" altLang="en-US" sz="4500" dirty="0">
-                <a:solidFill>
-                  <a:srgbClr val="FFFFFF"/>
-                </a:solidFill>
-                <a:latin typeface="Inter" pitchFamily="34" charset="0"/>
-                <a:ea typeface="Inter" pitchFamily="34" charset="-122"/>
-                <a:cs typeface="Inter" pitchFamily="34" charset="-120"/>
-              </a:rPr>
-              <a:t>Calibrating Writing Benchmarks, Feedback, and Revision</a:t>
-            </a:r>
-            <a:endParaRPr lang="en-US" sz="4500" dirty="0"/>
-          </a:p>
-        </p:txBody>
-      </p:sp>
-      <p:sp>
-        <p:nvSpPr>
-          <p:cNvPr id="6" name="cover-shape-5"/>
-          <p:cNvSpPr/>
-          <p:nvPr/>
-        </p:nvSpPr>
-        <p:spPr>
-          <a:xfrm>
-            <a:off x="889000" y="4597400"/>
-            <a:ext cx="12954000" cy="9144"/>
-          </a:xfrm>
-          <a:prstGeom prst="line">
-            <a:avLst/>
-          </a:prstGeom>
-          <a:ln w="12700">
+              <a:rPr lang="en-US" altLang="en-US" sz="4300" dirty="0">
+                <a:solidFill>
+                  <a:srgbClr val="202124"/>
+                </a:solidFill>
+                <a:latin typeface="Inter" pitchFamily="34" charset="0"/>
+                <a:ea typeface="Inter" pitchFamily="34" charset="-122"/>
+                <a:cs typeface="Inter" pitchFamily="34" charset="-120"/>
+              </a:rPr>
+              <a:t>Science Texts With CUBS + CER</a:t>
+            </a:r>
+            <a:endParaRPr lang="en-US" sz="4300" dirty="0"/>
+          </a:p>
+        </p:txBody>
+      </p:sp>
+      <p:sp>
+        <p:nvSpPr>
+          <p:cNvPr id="6" name="subtitle"/>
+          <p:cNvSpPr/>
+          <p:nvPr/>
+        </p:nvSpPr>
+        <p:spPr>
+          <a:xfrm>
+            <a:off x="736600" y="3797300"/>
+            <a:ext cx="10820400" cy="1092200"/>
+          </a:xfrm>
+          <a:prstGeom prst="rect">
+            <a:avLst/>
+          </a:prstGeom>
+          <a:noFill/>
+          <a:ln/>
+        </p:spPr>
+        <p:txBody>
+          <a:bodyPr wrap="square" lIns="0" tIns="0" rIns="0" bIns="0" rtlCol="0" anchor="t"/>
+          <a:lstStyle/>
+          <a:p>
+            <a:pPr algn="l" indent="0" marL="0">
+              <a:lnSpc>
+                <a:spcPts val="3050"/>
+              </a:lnSpc>
+              <a:buNone/>
+            </a:pPr>
+            <a:r>
+              <a:rPr lang="en-US" altLang="en-US" sz="2500" dirty="0">
+                <a:solidFill>
+                  <a:srgbClr val="3C4043"/>
+                </a:solidFill>
+                <a:latin typeface="Inter" pitchFamily="34" charset="0"/>
+                <a:ea typeface="Inter" pitchFamily="34" charset="-122"/>
+                <a:cs typeface="Inter" pitchFamily="34" charset="-120"/>
+              </a:rPr>
+              <a:t>Learn and rehearse student-facing routines that help students analyze a science article, visual, data display, or text before constructing an evidence-based explanation.</a:t>
+            </a:r>
+            <a:endParaRPr lang="en-US" sz="2500" dirty="0"/>
+          </a:p>
+        </p:txBody>
+      </p:sp>
+      <p:sp>
+        <p:nvSpPr>
+          <p:cNvPr id="7" name="cover-shape-6"/>
+          <p:cNvSpPr/>
+          <p:nvPr/>
+        </p:nvSpPr>
+        <p:spPr>
+          <a:xfrm>
+            <a:off x="12242800" y="2057400"/>
+            <a:ext cx="3200400" cy="2984500"/>
+          </a:xfrm>
+          <a:prstGeom prst="rect">
+            <a:avLst/>
+          </a:prstGeom>
+          <a:solidFill>
+            <a:srgbClr val="FCE8EA"/>
+          </a:solidFill>
+          <a:ln w="25400">
             <a:solidFill>
-              <a:srgbClr val="72777D"/>
+              <a:srgbClr val="C41220"/>
             </a:solidFill>
             <a:prstDash val="solid"/>
           </a:ln>
@@ -1760,14 +1805,120 @@
       </p:sp>
       <p:sp>
         <p:nvSpPr>
-          <p:cNvPr id="7" name="subtitle"/>
-          <p:cNvSpPr/>
-          <p:nvPr/>
-        </p:nvSpPr>
-        <p:spPr>
-          <a:xfrm>
-            <a:off x="889000" y="5016500"/>
-            <a:ext cx="10668000" cy="939800"/>
+          <p:cNvPr id="8" name="focus-label"/>
+          <p:cNvSpPr/>
+          <p:nvPr/>
+        </p:nvSpPr>
+        <p:spPr>
+          <a:xfrm>
+            <a:off x="12573000" y="2438400"/>
+            <a:ext cx="2540000" cy="254000"/>
+          </a:xfrm>
+          <a:prstGeom prst="rect">
+            <a:avLst/>
+          </a:prstGeom>
+          <a:noFill/>
+          <a:ln/>
+        </p:spPr>
+        <p:txBody>
+          <a:bodyPr wrap="square" lIns="0" tIns="0" rIns="0" bIns="0" rtlCol="0" anchor="t"/>
+          <a:lstStyle/>
+          <a:p>
+            <a:pPr algn="ctr" indent="0" marL="0">
+              <a:buNone/>
+            </a:pPr>
+            <a:r>
+              <a:rPr lang="en-US" altLang="en-US" sz="1400" dirty="0">
+                <a:solidFill>
+                  <a:srgbClr val="C41220"/>
+                </a:solidFill>
+                <a:latin typeface="Inter" pitchFamily="34" charset="0"/>
+                <a:ea typeface="Inter" pitchFamily="34" charset="-122"/>
+                <a:cs typeface="Inter" pitchFamily="34" charset="-120"/>
+              </a:rPr>
+              <a:t>WORKING SESSION OUTCOME</a:t>
+            </a:r>
+            <a:endParaRPr lang="en-US" sz="1400" dirty="0"/>
+          </a:p>
+        </p:txBody>
+      </p:sp>
+      <p:sp>
+        <p:nvSpPr>
+          <p:cNvPr id="9" name="focus-copy"/>
+          <p:cNvSpPr/>
+          <p:nvPr/>
+        </p:nvSpPr>
+        <p:spPr>
+          <a:xfrm>
+            <a:off x="12547600" y="3035300"/>
+            <a:ext cx="2590800" cy="1358900"/>
+          </a:xfrm>
+          <a:prstGeom prst="rect">
+            <a:avLst/>
+          </a:prstGeom>
+          <a:noFill/>
+          <a:ln/>
+        </p:spPr>
+        <p:txBody>
+          <a:bodyPr wrap="square" lIns="0" tIns="0" rIns="0" bIns="0" rtlCol="0" anchor="ctr"/>
+          <a:lstStyle/>
+          <a:p>
+            <a:pPr algn="ctr" indent="0" marL="0">
+              <a:lnSpc>
+                <a:spcPts val="2400"/>
+              </a:lnSpc>
+              <a:buNone/>
+            </a:pPr>
+            <a:r>
+              <a:rPr lang="en-US" altLang="en-US" sz="2000" dirty="0">
+                <a:solidFill>
+                  <a:srgbClr val="3C4043"/>
+                </a:solidFill>
+                <a:latin typeface="Inter" pitchFamily="34" charset="0"/>
+                <a:ea typeface="Inter" pitchFamily="34" charset="-122"/>
+                <a:cs typeface="Inter" pitchFamily="34" charset="-120"/>
+              </a:rPr>
+              <a:t>One ready-to-teach CUBS/CER routine, student directions, and a check for understanding.</a:t>
+            </a:r>
+            <a:endParaRPr lang="en-US" sz="2000" dirty="0"/>
+          </a:p>
+        </p:txBody>
+      </p:sp>
+      <p:sp>
+        <p:nvSpPr>
+          <p:cNvPr id="10" name="cover-shape-9"/>
+          <p:cNvSpPr/>
+          <p:nvPr/>
+        </p:nvSpPr>
+        <p:spPr>
+          <a:xfrm>
+            <a:off x="736600" y="5842000"/>
+            <a:ext cx="14706600" cy="1422400"/>
+          </a:xfrm>
+          <a:prstGeom prst="rect">
+            <a:avLst/>
+          </a:prstGeom>
+          <a:solidFill>
+            <a:srgbClr val="F3F4F6"/>
+          </a:solidFill>
+          <a:ln w="12700">
+            <a:solidFill>
+              <a:srgbClr val="D1D5DB"/>
+            </a:solidFill>
+            <a:prstDash val="solid"/>
+          </a:ln>
+        </p:spPr>
+      </p:sp>
+      <p:sp>
+        <p:nvSpPr>
+          <p:cNvPr id="11" name="anchor"/>
+          <p:cNvSpPr/>
+          <p:nvPr/>
+        </p:nvSpPr>
+        <p:spPr>
+          <a:xfrm>
+            <a:off x="1117600" y="6172200"/>
+            <a:ext cx="13919200" cy="787400"/>
           </a:xfrm>
           <a:prstGeom prst="rect">
             <a:avLst/>
@@ -1781,79 +1932,120 @@
           <a:p>
             <a:pPr algn="l" indent="0" marL="0">
               <a:lnSpc>
-                <a:spcPts val="2950"/>
+                <a:spcPts val="2684"/>
               </a:lnSpc>
               <a:buNone/>
             </a:pPr>
             <a:r>
-              <a:rPr lang="en-US" altLang="en-US" sz="2500" dirty="0">
-                <a:solidFill>
-                  <a:srgbClr val="F1F3F4"/>
-                </a:solidFill>
-                <a:latin typeface="Inter" pitchFamily="34" charset="0"/>
-                <a:ea typeface="Inter" pitchFamily="34" charset="-122"/>
-                <a:cs typeface="Inter" pitchFamily="34" charset="-120"/>
-              </a:rPr>
-              <a:t>Use the same benchmark task from Monday and Tuesday to calibrate expectations, feedback, student action, and the evidence teachers will bring to Friday.</a:t>
-            </a:r>
-            <a:endParaRPr lang="en-US" sz="2500" dirty="0"/>
-          </a:p>
-        </p:txBody>
-      </p:sp>
-      <p:sp>
-        <p:nvSpPr>
-          <p:cNvPr id="8" name="cover-shape-7"/>
-          <p:cNvSpPr/>
-          <p:nvPr/>
-        </p:nvSpPr>
-        <p:spPr>
-          <a:xfrm>
-            <a:off x="11912600" y="5308600"/>
-            <a:ext cx="3098800" cy="1727200"/>
-          </a:xfrm>
-          <a:prstGeom prst="rect">
-            <a:avLst/>
-          </a:prstGeom>
-          <a:solidFill>
-            <a:srgbClr val="C41220"/>
-          </a:solidFill>
-          <a:ln/>
-        </p:spPr>
-      </p:sp>
-      <p:sp>
-        <p:nvSpPr>
-          <p:cNvPr id="9" name="focus-label"/>
-          <p:cNvSpPr/>
-          <p:nvPr/>
-        </p:nvSpPr>
-        <p:spPr>
-          <a:xfrm>
-            <a:off x="12166600" y="5588000"/>
-            <a:ext cx="2590800" cy="228600"/>
-          </a:xfrm>
-          <a:prstGeom prst="rect">
-            <a:avLst/>
-          </a:prstGeom>
-          <a:noFill/>
-          <a:ln/>
-        </p:spPr>
-        <p:txBody>
-          <a:bodyPr wrap="none" lIns="0" tIns="0" rIns="0" bIns="0" rtlCol="0" anchor="t"/>
-          <a:lstStyle/>
-          <a:p>
-            <a:pPr algn="ctr" indent="0" marL="0">
+              <a:rPr lang="en-US" altLang="en-US" sz="2200" b="1" dirty="0">
+                <a:solidFill>
+                  <a:srgbClr val="C41220"/>
+                </a:solidFill>
+                <a:latin typeface="Inter" pitchFamily="34" charset="0"/>
+                <a:ea typeface="Inter" pitchFamily="34" charset="-122"/>
+                <a:cs typeface="Inter" pitchFamily="34" charset="-120"/>
+              </a:rPr>
+              <a:t>The shared model is Biology Benchmark #1.</a:t>
+            </a:r>
+            <a:r>
+              <a:rPr lang="en-US" altLang="en-US" sz="2200" dirty="0">
+                <a:solidFill>
+                  <a:srgbClr val="3C4043"/>
+                </a:solidFill>
+                <a:latin typeface="Inter" pitchFamily="34" charset="0"/>
+                <a:ea typeface="Inter" pitchFamily="34" charset="-122"/>
+                <a:cs typeface="Inter" pitchFamily="34" charset="-120"/>
+              </a:rPr>
+              <a:t> Each science team will adapt the strategy to an appropriate article, text, data display, model, investigation prompt, or constructed-response task.</a:t>
+            </a:r>
+            <a:endParaRPr lang="en-US" sz="2200" dirty="0"/>
+          </a:p>
+        </p:txBody>
+      </p:sp>
+      <p:sp>
+        <p:nvSpPr>
+          <p:cNvPr id="12" name="footer"/>
+          <p:cNvSpPr/>
+          <p:nvPr/>
+        </p:nvSpPr>
+        <p:spPr>
+          <a:xfrm>
+            <a:off x="736600" y="7975600"/>
+            <a:ext cx="12827000" cy="431800"/>
+          </a:xfrm>
+          <a:prstGeom prst="rect">
+            <a:avLst/>
+          </a:prstGeom>
+          <a:noFill/>
+          <a:ln/>
+        </p:spPr>
+        <p:txBody>
+          <a:bodyPr wrap="square" lIns="0" tIns="0" rIns="0" bIns="0" rtlCol="0" anchor="t"/>
+          <a:lstStyle/>
+          <a:p>
+            <a:pPr algn="l" indent="0" marL="0">
+              <a:buNone/>
+            </a:pPr>
+            <a:r>
+              <a:rPr lang="en-US" altLang="en-US" sz="2100" b="1" dirty="0">
+                <a:solidFill>
+                  <a:srgbClr val="C41220"/>
+                </a:solidFill>
+                <a:latin typeface="Inter" pitchFamily="34" charset="0"/>
+                <a:ea typeface="Inter" pitchFamily="34" charset="-122"/>
+                <a:cs typeface="Inter" pitchFamily="34" charset="-120"/>
+              </a:rPr>
+              <a:t>Lesson Internalization Tool:</a:t>
+            </a:r>
+            <a:r>
+              <a:rPr lang="en-US" altLang="en-US" sz="2100" dirty="0">
+                <a:solidFill>
+                  <a:srgbClr val="3C4043"/>
+                </a:solidFill>
+                <a:latin typeface="Inter" pitchFamily="34" charset="0"/>
+                <a:ea typeface="Inter" pitchFamily="34" charset="-122"/>
+                <a:cs typeface="Inter" pitchFamily="34" charset="-120"/>
+              </a:rPr>
+              <a:t> Every Day Questions 1, 3, and 4; Team Deep Dive Steps 2–4.</a:t>
+            </a:r>
+            <a:endParaRPr lang="en-US" sz="2100" dirty="0"/>
+          </a:p>
+        </p:txBody>
+      </p:sp>
+      <p:sp>
+        <p:nvSpPr>
+          <p:cNvPr id="13" name="page"/>
+          <p:cNvSpPr/>
+          <p:nvPr/>
+        </p:nvSpPr>
+        <p:spPr>
+          <a:xfrm>
+            <a:off x="14732000" y="8432800"/>
+            <a:ext cx="736600" cy="228600"/>
+          </a:xfrm>
+          <a:prstGeom prst="rect">
+            <a:avLst/>
+          </a:prstGeom>
+          <a:noFill/>
+          <a:ln/>
+        </p:spPr>
+        <p:txBody>
+          <a:bodyPr wrap="square" lIns="0" tIns="0" rIns="0" bIns="0" rtlCol="0" anchor="t"/>
+          <a:lstStyle/>
+          <a:p>
+            <a:pPr algn="r" indent="0" marL="0">
               <a:buNone/>
             </a:pPr>
             <a:r>
               <a:rPr lang="en-US" altLang="en-US" sz="1300" dirty="0">
                 <a:solidFill>
-                  <a:srgbClr val="FDECEC"/>
-                </a:solidFill>
-                <a:latin typeface="Inter" pitchFamily="34" charset="0"/>
-                <a:ea typeface="Inter" pitchFamily="34" charset="-122"/>
-                <a:cs typeface="Inter" pitchFamily="34" charset="-120"/>
-              </a:rPr>
-              <a:t>WORKING SESSION OUTCOME</a:t>
+                  <a:srgbClr val="6B7280"/>
+                </a:solidFill>
+                <a:latin typeface="Inter" pitchFamily="34" charset="0"/>
+                <a:ea typeface="Inter" pitchFamily="34" charset="-122"/>
+                <a:cs typeface="Inter" pitchFamily="34" charset="-120"/>
+              </a:rPr>
+              <a:t>01</a:t>
             </a:r>
             <a:endParaRPr lang="en-US" sz="1300" dirty="0"/>
           </a:p>
@@ -1861,141 +2053,7 @@
       </p:sp>
       <p:sp>
         <p:nvSpPr>
-          <p:cNvPr id="10" name="focus-copy"/>
-          <p:cNvSpPr/>
-          <p:nvPr/>
-        </p:nvSpPr>
-        <p:spPr>
-          <a:xfrm>
-            <a:off x="12141200" y="5969000"/>
-            <a:ext cx="2641600" cy="762000"/>
-          </a:xfrm>
-          <a:prstGeom prst="rect">
-            <a:avLst/>
-          </a:prstGeom>
-          <a:noFill/>
-          <a:ln/>
-        </p:spPr>
-        <p:txBody>
-          <a:bodyPr wrap="square" lIns="0" tIns="0" rIns="0" bIns="0" rtlCol="0" anchor="t"/>
-          <a:lstStyle/>
-          <a:p>
-            <a:pPr algn="ctr" indent="0" marL="0">
-              <a:lnSpc>
-                <a:spcPts val="1972"/>
-              </a:lnSpc>
-              <a:buNone/>
-            </a:pPr>
-            <a:r>
-              <a:rPr lang="en-US" altLang="en-US" sz="1700" dirty="0">
-                <a:solidFill>
-                  <a:srgbClr val="FFFFFF"/>
-                </a:solidFill>
-                <a:latin typeface="Inter" pitchFamily="34" charset="0"/>
-                <a:ea typeface="Inter" pitchFamily="34" charset="-122"/>
-                <a:cs typeface="Inter" pitchFamily="34" charset="-120"/>
-              </a:rPr>
-              <a:t>One calibrated task, one usable feedback loop, and one clear evidence plan.</a:t>
-            </a:r>
-            <a:endParaRPr lang="en-US" sz="1700" dirty="0"/>
-          </a:p>
-        </p:txBody>
-      </p:sp>
-      <p:sp>
-        <p:nvSpPr>
-          <p:cNvPr id="11" name="footer"/>
-          <p:cNvSpPr/>
-          <p:nvPr/>
-        </p:nvSpPr>
-        <p:spPr>
-          <a:xfrm>
-            <a:off x="889000" y="7493000"/>
-            <a:ext cx="12446000" cy="533400"/>
-          </a:xfrm>
-          <a:prstGeom prst="rect">
-            <a:avLst/>
-          </a:prstGeom>
-          <a:noFill/>
-          <a:ln/>
-        </p:spPr>
-        <p:txBody>
-          <a:bodyPr wrap="square" lIns="0" tIns="0" rIns="0" bIns="0" rtlCol="0" anchor="t"/>
-          <a:lstStyle/>
-          <a:p>
-            <a:pPr algn="l" indent="0" marL="0">
-              <a:lnSpc>
-                <a:spcPts val="2596"/>
-              </a:lnSpc>
-              <a:buNone/>
-            </a:pPr>
-            <a:r>
-              <a:rPr lang="en-US" altLang="en-US" sz="2200" b="1" dirty="0">
-                <a:solidFill>
-                  <a:srgbClr val="F6B4BA"/>
-                </a:solidFill>
-                <a:latin typeface="Inter" pitchFamily="34" charset="0"/>
-                <a:ea typeface="Inter" pitchFamily="34" charset="-122"/>
-                <a:cs typeface="Inter" pitchFamily="34" charset="-120"/>
-              </a:rPr>
-              <a:t>Lesson Internalization Tool:</a:t>
-            </a:r>
-            <a:r>
-              <a:rPr lang="en-US" altLang="en-US" sz="2200" dirty="0">
-                <a:solidFill>
-                  <a:srgbClr val="D1D5DB"/>
-                </a:solidFill>
-                <a:latin typeface="Inter" pitchFamily="34" charset="0"/>
-                <a:ea typeface="Inter" pitchFamily="34" charset="-122"/>
-                <a:cs typeface="Inter" pitchFamily="34" charset="-120"/>
-              </a:rPr>
-              <a:t> Every Day Questions 1, 3, and 4; Team Deep Dive Steps 3–4.</a:t>
-            </a:r>
-            <a:endParaRPr lang="en-US" sz="2200" dirty="0"/>
-          </a:p>
-        </p:txBody>
-      </p:sp>
-      <p:sp>
-        <p:nvSpPr>
-          <p:cNvPr id="12" name="page"/>
-          <p:cNvSpPr/>
-          <p:nvPr/>
-        </p:nvSpPr>
-        <p:spPr>
-          <a:xfrm>
-            <a:off x="14478000" y="8407400"/>
-            <a:ext cx="762000" cy="228600"/>
-          </a:xfrm>
-          <a:prstGeom prst="rect">
-            <a:avLst/>
-          </a:prstGeom>
-          <a:noFill/>
-          <a:ln/>
-        </p:spPr>
-        <p:txBody>
-          <a:bodyPr wrap="square" lIns="0" tIns="0" rIns="0" bIns="0" rtlCol="0" anchor="t"/>
-          <a:lstStyle/>
-          <a:p>
-            <a:pPr algn="r" indent="0" marL="0">
-              <a:buNone/>
-            </a:pPr>
-            <a:r>
-              <a:rPr lang="en-US" altLang="en-US" sz="1300" dirty="0">
-                <a:solidFill>
-                  <a:srgbClr val="D1D5DB"/>
-                </a:solidFill>
-                <a:latin typeface="Inter" pitchFamily="34" charset="0"/>
-                <a:ea typeface="Inter" pitchFamily="34" charset="-122"/>
-                <a:cs typeface="Inter" pitchFamily="34" charset="-120"/>
-              </a:rPr>
-              <a:t>01</a:t>
-            </a:r>
-            <a:endParaRPr lang="en-US" sz="1300" dirty="0"/>
-          </a:p>
-        </p:txBody>
-      </p:sp>
-      <p:sp>
-        <p:nvSpPr>
-          <p:cNvPr id="13" name="cover-shape-12"/>
+          <p:cNvPr id="14" name="cover-shape-13"/>
           <p:cNvSpPr/>
           <p:nvPr/>
         </p:nvSpPr>
@@ -2137,7 +2195,7 @@
                 <a:ea typeface="Inter" pitchFamily="34" charset="-122"/>
                 <a:cs typeface="Inter" pitchFamily="34" charset="-120"/>
               </a:rPr>
-              <a:t>2:30–2:36  •  6 MIN</a:t>
+              <a:t>2:30–2:35  •  5 MIN</a:t>
             </a:r>
             <a:endParaRPr lang="en-US" sz="1600" dirty="0"/>
           </a:p>
@@ -2179,7 +2237,7 @@
                 <a:ea typeface="Inter" pitchFamily="34" charset="-122"/>
                 <a:cs typeface="Inter" pitchFamily="34" charset="-120"/>
               </a:rPr>
-              <a:t>Leave with one course-specific evidence task and a clear path from success criteria to feedback, student action, and the evidence that will inform the next lesson.</a:t>
+              <a:t>Leave with a clear, student-facing way to move from reading/analyzing a source to constructing, color-coding, and revising a science Claim–Evidence–Reasoning response.</a:t>
             </a:r>
             <a:endParaRPr lang="en-US" sz="2300" dirty="0"/>
           </a:p>
@@ -2369,7 +2427,7 @@
                 <a:ea typeface="Inter" pitchFamily="34" charset="-122"/>
                 <a:cs typeface="Inter" pitchFamily="34" charset="-120"/>
               </a:rPr>
-              <a:t>Select the same task</a:t>
+              <a:t>Model CUBS</a:t>
             </a:r>
             <a:endParaRPr lang="en-US" sz="2000" dirty="0"/>
           </a:p>
@@ -2392,7 +2450,7 @@
                 <a:ea typeface="Inter" pitchFamily="34" charset="-122"/>
                 <a:cs typeface="Inter" pitchFamily="34" charset="-120"/>
               </a:rPr>
-              <a:t>Benchmark prompt, source/evidence, and student product.</a:t>
+              <a:t>Make the source-analysis moves visible.</a:t>
             </a:r>
             <a:endParaRPr lang="en-US" sz="2000" dirty="0"/>
           </a:p>
@@ -2457,7 +2515,7 @@
                 <a:ea typeface="Inter" pitchFamily="34" charset="-122"/>
                 <a:cs typeface="Inter" pitchFamily="34" charset="-120"/>
               </a:rPr>
-              <a:t>Name the bar</a:t>
+              <a:t>Practice on a source</a:t>
             </a:r>
             <a:endParaRPr lang="en-US" sz="2000" dirty="0"/>
           </a:p>
@@ -2480,7 +2538,7 @@
                 <a:ea typeface="Inter" pitchFamily="34" charset="-122"/>
                 <a:cs typeface="Inter" pitchFamily="34" charset="-120"/>
               </a:rPr>
-              <a:t>Clear, student-usable success criteria.</a:t>
+              <a:t>Annotate a science text, visual, or data display.</a:t>
             </a:r>
             <a:endParaRPr lang="en-US" sz="2000" dirty="0"/>
           </a:p>
@@ -2545,7 +2603,7 @@
                 <a:ea typeface="Inter" pitchFamily="34" charset="-122"/>
                 <a:cs typeface="Inter" pitchFamily="34" charset="-120"/>
               </a:rPr>
-              <a:t>Calibrate a small sample</a:t>
+              <a:t>Model CER colors</a:t>
             </a:r>
             <a:endParaRPr lang="en-US" sz="2000" dirty="0"/>
           </a:p>
@@ -2568,7 +2626,7 @@
                 <a:ea typeface="Inter" pitchFamily="34" charset="-122"/>
                 <a:cs typeface="Inter" pitchFamily="34" charset="-120"/>
               </a:rPr>
-              <a:t>Notice evidence in work or anticipated responses.</a:t>
+              <a:t>See claim, evidence, reasoning, and transitions.</a:t>
             </a:r>
             <a:endParaRPr lang="en-US" sz="2000" dirty="0"/>
           </a:p>
@@ -2633,7 +2691,7 @@
                 <a:ea typeface="Inter" pitchFamily="34" charset="-122"/>
                 <a:cs typeface="Inter" pitchFamily="34" charset="-120"/>
               </a:rPr>
-              <a:t>Refine feedback + action</a:t>
+              <a:t>Adapt the routine</a:t>
             </a:r>
             <a:endParaRPr lang="en-US" sz="2000" dirty="0"/>
           </a:p>
@@ -2656,7 +2714,7 @@
                 <a:ea typeface="Inter" pitchFamily="34" charset="-122"/>
                 <a:cs typeface="Inter" pitchFamily="34" charset="-120"/>
               </a:rPr>
-              <a:t>Protect student responsibility for the science thinking.</a:t>
+              <a:t>Write student directions and a check for understanding.</a:t>
             </a:r>
             <a:endParaRPr lang="en-US" sz="2000" dirty="0"/>
           </a:p>
@@ -2721,7 +2779,7 @@
                 <a:ea typeface="Inter" pitchFamily="34" charset="-122"/>
                 <a:cs typeface="Inter" pitchFamily="34" charset="-120"/>
               </a:rPr>
-              <a:t>Plan Friday evidence</a:t>
+              <a:t>Use the evidence</a:t>
             </a:r>
             <a:endParaRPr lang="en-US" sz="2000" dirty="0"/>
           </a:p>
@@ -2744,7 +2802,7 @@
                 <a:ea typeface="Inter" pitchFamily="34" charset="-122"/>
                 <a:cs typeface="Inter" pitchFamily="34" charset="-120"/>
               </a:rPr>
-              <a:t>Bring writing samples and related unit-test evidence where available.</a:t>
+              <a:t>Collect completed writing for Friday’s feedback and next-step work.</a:t>
             </a:r>
             <a:endParaRPr lang="en-US" sz="2000" dirty="0"/>
           </a:p>
@@ -2806,7 +2864,7 @@
                 <a:ea typeface="Inter" pitchFamily="34" charset="-122"/>
                 <a:cs typeface="Inter" pitchFamily="34" charset="-120"/>
               </a:rPr>
-              <a:t>This is not a separate initiative.</a:t>
+              <a:t>This is a student-thinking routine.</a:t>
             </a:r>
             <a:r>
               <a:rPr lang="en-US" altLang="en-US" sz="2100" dirty="0">
@@ -2817,7 +2875,7 @@
                 <a:ea typeface="Inter" pitchFamily="34" charset="-122"/>
                 <a:cs typeface="Inter" pitchFamily="34" charset="-120"/>
               </a:rPr>
-              <a:t> It strengthens the same benchmark and Lesson Internalization cycle already in progress.</a:t>
+              <a:t> Use it to help students do the task; do not turn it into a separate graded assignment.</a:t>
             </a:r>
             <a:endParaRPr lang="en-US" sz="2100" dirty="0"/>
           </a:p>
@@ -2967,7 +3025,7 @@
                 <a:ea typeface="Inter" pitchFamily="34" charset="-122"/>
                 <a:cs typeface="Inter" pitchFamily="34" charset="-120"/>
               </a:rPr>
-              <a:t>The Same Benchmark Evidence Cycle</a:t>
+              <a:t>The Same Benchmark, Now With a Teachable Routine</a:t>
             </a:r>
             <a:endParaRPr lang="en-US" sz="3000" dirty="0"/>
           </a:p>
@@ -3006,7 +3064,7 @@
                 <a:ea typeface="Inter" pitchFamily="34" charset="-122"/>
                 <a:cs typeface="Inter" pitchFamily="34" charset="-120"/>
               </a:rPr>
-              <a:t>2:36–2:41  •  5 MIN</a:t>
+              <a:t>2:35–2:41  •  6 MIN</a:t>
             </a:r>
             <a:endParaRPr lang="en-US" sz="1600" dirty="0"/>
           </a:p>
@@ -3045,7 +3103,7 @@
                 <a:ea typeface="Inter" pitchFamily="34" charset="-122"/>
                 <a:cs typeface="Inter" pitchFamily="34" charset="-120"/>
               </a:rPr>
-              <a:t>Wednesday is the calibration bridge: it connects Monday/Tuesday planning to Friday’s evidence-based adjustment of the next learning experience.</a:t>
+              <a:t>The strategy is not an add-on: it helps students do the same source analysis and evidence-based writing teachers rehearsed Monday and planned Tuesday.</a:t>
             </a:r>
             <a:endParaRPr lang="en-US" sz="2300" dirty="0"/>
           </a:p>
@@ -3135,7 +3193,7 @@
                 <a:ea typeface="Inter" pitchFamily="34" charset="-122"/>
                 <a:cs typeface="Inter" pitchFamily="34" charset="-120"/>
               </a:rPr>
-              <a:t>Internalize benchmark</a:t>
+              <a:t>Experience the task</a:t>
             </a:r>
             <a:endParaRPr lang="en-US" sz="2000" dirty="0"/>
           </a:p>
@@ -3158,7 +3216,7 @@
                 <a:ea typeface="Inter" pitchFamily="34" charset="-122"/>
                 <a:cs typeface="Inter" pitchFamily="34" charset="-120"/>
               </a:rPr>
-              <a:t>Task, criteria, source, anticipated student thinking.</a:t>
+              <a:t>Teachers completed and analyzed the benchmark as students.</a:t>
             </a:r>
             <a:endParaRPr lang="en-US" sz="2000" dirty="0"/>
           </a:p>
@@ -3287,7 +3345,7 @@
                 <a:ea typeface="Inter" pitchFamily="34" charset="-122"/>
                 <a:cs typeface="Inter" pitchFamily="34" charset="-120"/>
               </a:rPr>
-              <a:t>Plan action</a:t>
+              <a:t>Plan for learning</a:t>
             </a:r>
             <a:endParaRPr lang="en-US" sz="2000" dirty="0"/>
           </a:p>
@@ -3310,7 +3368,7 @@
                 <a:ea typeface="Inter" pitchFamily="34" charset="-122"/>
                 <a:cs typeface="Inter" pitchFamily="34" charset="-120"/>
               </a:rPr>
-              <a:t>Criterion, feedback prompt, student action, evidence look-for.</a:t>
+              <a:t>Teams planned access, facilitation, feedback, and revision.</a:t>
             </a:r>
             <a:endParaRPr lang="en-US" sz="2000" dirty="0"/>
           </a:p>
@@ -3439,7 +3497,7 @@
                 <a:ea typeface="Inter" pitchFamily="34" charset="-122"/>
                 <a:cs typeface="Inter" pitchFamily="34" charset="-120"/>
               </a:rPr>
-              <a:t>Calibrate expectations</a:t>
+              <a:t>Teach CUBS + CER</a:t>
             </a:r>
             <a:endParaRPr lang="en-US" sz="2000" dirty="0"/>
           </a:p>
@@ -3462,7 +3520,7 @@
                 <a:ea typeface="Inter" pitchFamily="34" charset="-122"/>
                 <a:cs typeface="Inter" pitchFamily="34" charset="-120"/>
               </a:rPr>
-              <a:t>Task, samples, criteria, feedback, and revision.</a:t>
+              <a:t>Model and adapt the student routine for an authentic science source/task.</a:t>
             </a:r>
             <a:endParaRPr lang="en-US" sz="2000" dirty="0"/>
           </a:p>
@@ -3586,7 +3644,7 @@
                 <a:ea typeface="Inter" pitchFamily="34" charset="-122"/>
                 <a:cs typeface="Inter" pitchFamily="34" charset="-120"/>
               </a:rPr>
-              <a:t>Triangulate evidence + adjust</a:t>
+              <a:t>Read writing + respond</a:t>
             </a:r>
             <a:endParaRPr lang="en-US" sz="2000" dirty="0"/>
           </a:p>
@@ -3609,7 +3667,7 @@
                 <a:ea typeface="Inter" pitchFamily="34" charset="-122"/>
                 <a:cs typeface="Inter" pitchFamily="34" charset="-120"/>
               </a:rPr>
-              <a:t>Writing samples plus unit-test-by-standard/question evidence where available → supported learning pattern → next lesson action.</a:t>
+              <a:t>Analyze completed student work, provide written feedback, and plan a precise mastery next step.</a:t>
             </a:r>
             <a:endParaRPr lang="en-US" sz="2000" dirty="0"/>
           </a:p>
@@ -3676,7 +3734,7 @@
                 <a:ea typeface="Inter" pitchFamily="34" charset="-122"/>
                 <a:cs typeface="Inter" pitchFamily="34" charset="-120"/>
               </a:rPr>
-              <a:t>Keep the unit of analysis instructional:</a:t>
+              <a:t>Keep the work transferable:</a:t>
             </a:r>
             <a:r>
               <a:rPr lang="en-US" altLang="en-US" sz="2100" dirty="0">
@@ -3687,7 +3745,7 @@
                 <a:ea typeface="Inter" pitchFamily="34" charset="-122"/>
                 <a:cs typeface="Inter" pitchFamily="34" charset="-120"/>
               </a:rPr>
-              <a:t> no rankings of teachers, students, or courses; no labels applied to people; no broad reteach plan.</a:t>
+              <a:t> all high-school science teachers adapt the routine to their own course task while holding the same expectations for evidence-based thinking.</a:t>
             </a:r>
             <a:endParaRPr lang="en-US" sz="2100" dirty="0"/>
           </a:p>
@@ -3837,7 +3895,7 @@
                 <a:ea typeface="Inter" pitchFamily="34" charset="-122"/>
                 <a:cs typeface="Inter" pitchFamily="34" charset="-120"/>
               </a:rPr>
-              <a:t>Calibrate the Bar for This Benchmark</a:t>
+              <a:t>Model CUBS: Analyze the Source Before Writing</a:t>
             </a:r>
             <a:endParaRPr lang="en-US" sz="3000" dirty="0"/>
           </a:p>
@@ -3940,7 +3998,7 @@
                 <a:ea typeface="Inter" pitchFamily="34" charset="-122"/>
                 <a:cs typeface="Inter" pitchFamily="34" charset="-120"/>
               </a:rPr>
-              <a:t>Before reviewing a response, clarify the intended science thinking, student product, exemplar, and criteria for success.</a:t>
+              <a:t>Think aloud: make the reading, visual-analysis, vocabulary, and question-asking moves visible before asking students to write.</a:t>
             </a:r>
             <a:endParaRPr lang="en-US" sz="2000" dirty="0"/>
           </a:p>
@@ -3961,11 +4019,11 @@
             <a:avLst/>
           </a:prstGeom>
           <a:solidFill>
-            <a:srgbClr val="F3F4F6"/>
-          </a:solidFill>
-          <a:ln w="12700">
+            <a:srgbClr val="EAF5EC"/>
+          </a:solidFill>
+          <a:ln w="25400">
             <a:solidFill>
-              <a:srgbClr val="D1D5DB"/>
+              <a:srgbClr val="238636"/>
             </a:solidFill>
             <a:prstDash val="solid"/>
           </a:ln>
@@ -4001,13 +4059,13 @@
             <a:r>
               <a:rPr lang="en-US" altLang="en-US" sz="2100" b="1" dirty="0">
                 <a:solidFill>
-                  <a:srgbClr val="C41220"/>
-                </a:solidFill>
-                <a:latin typeface="Inter" pitchFamily="34" charset="0"/>
-                <a:ea typeface="Inter" pitchFamily="34" charset="-122"/>
-                <a:cs typeface="Inter" pitchFamily="34" charset="-120"/>
-              </a:rPr>
-              <a:t>1. CONTENT + CLAIM</a:t>
+                  <a:srgbClr val="238636"/>
+                </a:solidFill>
+                <a:latin typeface="Inter" pitchFamily="34" charset="0"/>
+                <a:ea typeface="Inter" pitchFamily="34" charset="-122"/>
+                <a:cs typeface="Inter" pitchFamily="34" charset="-120"/>
+              </a:rPr>
+              <a:t>C — CIRCLE</a:t>
             </a:r>
             <a:endParaRPr lang="en-US" sz="2100" dirty="0"/>
           </a:p>
@@ -4030,7 +4088,7 @@
                 <a:ea typeface="Inter" pitchFamily="34" charset="-122"/>
                 <a:cs typeface="Inter" pitchFamily="34" charset="-120"/>
               </a:rPr>
-              <a:t>What accurate science idea, conclusion, or explanation should be visible?</a:t>
+              <a:t>Circle the main idea or the part of the source that names the central question, claim, or phenomenon.</a:t>
             </a:r>
             <a:endParaRPr lang="en-US" sz="2100" dirty="0"/>
           </a:p>
@@ -4051,11 +4109,11 @@
             <a:avLst/>
           </a:prstGeom>
           <a:solidFill>
-            <a:srgbClr val="F3F4F6"/>
-          </a:solidFill>
-          <a:ln w="12700">
+            <a:srgbClr val="EAF2FC"/>
+          </a:solidFill>
+          <a:ln w="25400">
             <a:solidFill>
-              <a:srgbClr val="D1D5DB"/>
+              <a:srgbClr val="1D4ED8"/>
             </a:solidFill>
             <a:prstDash val="solid"/>
           </a:ln>
@@ -4097,7 +4155,7 @@
                 <a:ea typeface="Inter" pitchFamily="34" charset="-122"/>
                 <a:cs typeface="Inter" pitchFamily="34" charset="-120"/>
               </a:rPr>
-              <a:t>2. EVIDENCE</a:t>
+              <a:t>U — UNDERLINE</a:t>
             </a:r>
             <a:endParaRPr lang="en-US" sz="2100" dirty="0"/>
           </a:p>
@@ -4120,7 +4178,7 @@
                 <a:ea typeface="Inter" pitchFamily="34" charset="-122"/>
                 <a:cs typeface="Inter" pitchFamily="34" charset="-120"/>
               </a:rPr>
-              <a:t>Which data, observation, source detail, model feature, or result should students use accurately?</a:t>
+              <a:t>Underline supporting details, observations, data, or relationships students may use as evidence.</a:t>
             </a:r>
             <a:endParaRPr lang="en-US" sz="2100" dirty="0"/>
           </a:p>
@@ -4141,11 +4199,11 @@
             <a:avLst/>
           </a:prstGeom>
           <a:solidFill>
-            <a:srgbClr val="F3F4F6"/>
-          </a:solidFill>
-          <a:ln w="12700">
+            <a:srgbClr val="FFF1E7"/>
+          </a:solidFill>
+          <a:ln w="25400">
             <a:solidFill>
-              <a:srgbClr val="D1D5DB"/>
+              <a:srgbClr val="C56B00"/>
             </a:solidFill>
             <a:prstDash val="solid"/>
           </a:ln>
@@ -4187,7 +4245,7 @@
                 <a:ea typeface="Inter" pitchFamily="34" charset="-122"/>
                 <a:cs typeface="Inter" pitchFamily="34" charset="-120"/>
               </a:rPr>
-              <a:t>3. REASONING</a:t>
+              <a:t>B — BOX</a:t>
             </a:r>
             <a:endParaRPr lang="en-US" sz="2100" dirty="0"/>
           </a:p>
@@ -4210,7 +4268,7 @@
                 <a:ea typeface="Inter" pitchFamily="34" charset="-122"/>
                 <a:cs typeface="Inter" pitchFamily="34" charset="-120"/>
               </a:rPr>
-              <a:t>How should students connect their evidence to the science idea or explanation?</a:t>
+              <a:t>Box unfamiliar or high-leverage words. Ask: what does this term mean here and why does it matter?</a:t>
             </a:r>
             <a:endParaRPr lang="en-US" sz="2100" dirty="0"/>
           </a:p>
@@ -4231,11 +4289,11 @@
             <a:avLst/>
           </a:prstGeom>
           <a:solidFill>
-            <a:srgbClr val="FCE8EA"/>
+            <a:srgbClr val="F3ECFB"/>
           </a:solidFill>
           <a:ln w="25400">
             <a:solidFill>
-              <a:srgbClr val="C41220"/>
+              <a:srgbClr val="7C3AED"/>
             </a:solidFill>
             <a:prstDash val="solid"/>
           </a:ln>
@@ -4277,7 +4335,7 @@
                 <a:ea typeface="Inter" pitchFamily="34" charset="-122"/>
                 <a:cs typeface="Inter" pitchFamily="34" charset="-120"/>
               </a:rPr>
-              <a:t>4. LANGUAGE + REPRESENTATION</a:t>
+              <a:t>S — SUMMARIZE</a:t>
             </a:r>
             <a:endParaRPr lang="en-US" sz="2100" dirty="0"/>
           </a:p>
@@ -4300,7 +4358,7 @@
                 <a:ea typeface="Inter" pitchFamily="34" charset="-122"/>
                 <a:cs typeface="Inter" pitchFamily="34" charset="-120"/>
               </a:rPr>
-              <a:t>Which vocabulary, transitions, labels, or representation choices make the thinking understandable?</a:t>
+              <a:t>Summarize the science idea or record the question the source helps answer.</a:t>
             </a:r>
             <a:endParaRPr lang="en-US" sz="2100" dirty="0"/>
           </a:p>
@@ -4359,7 +4417,18 @@
                 <a:ea typeface="Inter" pitchFamily="34" charset="-122"/>
                 <a:cs typeface="Inter" pitchFamily="34" charset="-120"/>
               </a:rPr>
-              <a:t>Calibration begins with the task and criteria—not a score, a person, or a comparison across classrooms.</a:t>
+              <a:t>Student directions:</a:t>
+            </a:r>
+            <a:r>
+              <a:rPr lang="en-US" altLang="en-US" sz="2000" dirty="0">
+                <a:solidFill>
+                  <a:srgbClr val="FFFFFF"/>
+                </a:solidFill>
+                <a:latin typeface="Inter" pitchFamily="34" charset="0"/>
+                <a:ea typeface="Inter" pitchFamily="34" charset="-122"/>
+                <a:cs typeface="Inter" pitchFamily="34" charset="-120"/>
+              </a:rPr>
+              <a:t> “Read and annotate today’s source. Record any questions you still have on your paper.”</a:t>
             </a:r>
             <a:endParaRPr lang="en-US" sz="2000" dirty="0"/>
           </a:p>
@@ -4485,7 +4554,7 @@
         <p:spPr>
           <a:xfrm>
             <a:off x="508000" y="292100"/>
-            <a:ext cx="11430000" cy="482600"/>
+            <a:ext cx="11811000" cy="482600"/>
           </a:xfrm>
           <a:prstGeom prst="rect">
             <a:avLst/>
@@ -4509,7 +4578,7 @@
                 <a:ea typeface="Inter" pitchFamily="34" charset="-122"/>
                 <a:cs typeface="Inter" pitchFamily="34" charset="-120"/>
               </a:rPr>
-              <a:t>Calibrate a Small Response Set or Anticipated Responses</a:t>
+              <a:t>Practice CUBS Before Constructing the CER</a:t>
             </a:r>
             <a:endParaRPr lang="en-US" sz="3000" dirty="0"/>
           </a:p>
@@ -4548,7 +4617,7 @@
                 <a:ea typeface="Inter" pitchFamily="34" charset="-122"/>
                 <a:cs typeface="Inter" pitchFamily="34" charset="-120"/>
               </a:rPr>
-              <a:t>2:50–3:02  •  12 MIN</a:t>
+              <a:t>2:50–3:00  •  10 MIN</a:t>
             </a:r>
             <a:endParaRPr lang="en-US" sz="1600" dirty="0"/>
           </a:p>
@@ -4587,7 +4656,7 @@
                 <a:ea typeface="Inter" pitchFamily="34" charset="-122"/>
                 <a:cs typeface="Inter" pitchFamily="34" charset="-120"/>
               </a:rPr>
-              <a:t>Use the same criteria to discuss a few de-identified writing samples, an exemplar, or anticipated responses. Describe evidence in the work—not students or teachers.</a:t>
+              <a:t>Use the food web and Question 5 from the benchmark as a shared visual/text example. The exact same routine can be used with a science article, data display, model, or investigation result.</a:t>
             </a:r>
             <a:endParaRPr lang="en-US" sz="2300" dirty="0"/>
           </a:p>
@@ -4601,14 +4670,14 @@
         </p:nvSpPr>
         <p:spPr>
           <a:xfrm>
-            <a:off x="508000" y="2730500"/>
-            <a:ext cx="3556000" cy="3810000"/>
-          </a:xfrm>
-          <a:prstGeom prst="rect">
-            <a:avLst/>
-          </a:prstGeom>
-          <a:solidFill>
-            <a:srgbClr val="F3F4F6"/>
+            <a:off x="508000" y="2413000"/>
+            <a:ext cx="6604000" cy="4953000"/>
+          </a:xfrm>
+          <a:prstGeom prst="rect">
+            <a:avLst/>
+          </a:prstGeom>
+          <a:solidFill>
+            <a:srgbClr val="F8F9FA"/>
           </a:solidFill>
           <a:ln w="12700">
             <a:solidFill>
@@ -4618,71 +4687,29 @@
           </a:ln>
         </p:spPr>
       </p:sp>
-      <p:sp>
-        <p:nvSpPr>
-          <p:cNvPr id="7" name="p1"/>
-          <p:cNvSpPr/>
-          <p:nvPr/>
-        </p:nvSpPr>
-        <p:spPr>
-          <a:xfrm>
-            <a:off x="825500" y="3086100"/>
-            <a:ext cx="2921000" cy="2730500"/>
-          </a:xfrm>
-          <a:prstGeom prst="rect">
-            <a:avLst/>
-          </a:prstGeom>
-          <a:noFill/>
-          <a:ln/>
-        </p:spPr>
-        <p:txBody>
-          <a:bodyPr wrap="square" lIns="0" tIns="0" rIns="0" bIns="0" rtlCol="0" anchor="t"/>
-          <a:lstStyle/>
-          <a:p>
-            <a:pPr algn="l" indent="0" marL="0">
-              <a:lnSpc>
-                <a:spcPts val="2562"/>
-              </a:lnSpc>
-              <a:buNone/>
-            </a:pPr>
-            <a:r>
-              <a:rPr lang="en-US" altLang="en-US" sz="2100" b="1" dirty="0">
-                <a:solidFill>
-                  <a:srgbClr val="C41220"/>
-                </a:solidFill>
-                <a:latin typeface="Inter" pitchFamily="34" charset="0"/>
-                <a:ea typeface="Inter" pitchFamily="34" charset="-122"/>
-                <a:cs typeface="Inter" pitchFamily="34" charset="-120"/>
-              </a:rPr>
-              <a:t>1. READ ALONE</a:t>
-            </a:r>
-            <a:endParaRPr lang="en-US" sz="2100" dirty="0"/>
-          </a:p>
-          <a:p>
-            <a:pPr algn="l" indent="0" marL="0">
-              <a:lnSpc>
-                <a:spcPts val="2562"/>
-              </a:lnSpc>
-              <a:spcBef>
-                <a:spcPts val="1600"/>
-              </a:spcBef>
-              <a:buNone/>
-            </a:pPr>
-            <a:r>
-              <a:rPr lang="en-US" altLang="en-US" sz="2100" dirty="0">
-                <a:solidFill>
-                  <a:srgbClr val="3C4043"/>
-                </a:solidFill>
-                <a:latin typeface="Inter" pitchFamily="34" charset="0"/>
-                <a:ea typeface="Inter" pitchFamily="34" charset="-122"/>
-                <a:cs typeface="Inter" pitchFamily="34" charset="-120"/>
-              </a:rPr>
-              <a:t>Mark what is visible for the selected criterion. Avoid scoring or assigning a level.</a:t>
-            </a:r>
-            <a:endParaRPr lang="en-US" sz="2100" dirty="0"/>
-          </a:p>
-        </p:txBody>
-      </p:sp>
+      <p:pic>
+        <p:nvPicPr>
+          <p:cNvPr id="7" name="benchmark-practice" descr="preencoded.png">    </p:cNvPr>
+          <p:cNvPicPr>
+            <a:picLocks noChangeAspect="1"/>
+          </p:cNvPicPr>
+          <p:nvPr/>
+        </p:nvPicPr>
+        <p:blipFill>
+          <a:blip r:embed="rId1"/>
+          <a:srcRect l="-38072" r="-38072" t="0" b="0"/>
+          <a:stretch/>
+        </p:blipFill>
+        <p:spPr>
+          <a:xfrm>
+            <a:off x="698500" y="2603500"/>
+            <a:ext cx="6223000" cy="4572000"/>
+          </a:xfrm>
+          <a:prstGeom prst="rect">
+            <a:avLst/>
+          </a:prstGeom>
+        </p:spPr>
+      </p:pic>
       <p:sp>
         <p:nvSpPr>
           <p:cNvPr id="8" name="calibration-shape-7"/>
@@ -4691,8 +4718,8 @@
         </p:nvSpPr>
         <p:spPr>
           <a:xfrm>
-            <a:off x="4445000" y="2730500"/>
-            <a:ext cx="3556000" cy="3810000"/>
+            <a:off x="7493000" y="2413000"/>
+            <a:ext cx="8255000" cy="4953000"/>
           </a:xfrm>
           <a:prstGeom prst="rect">
             <a:avLst/>
@@ -4710,14 +4737,53 @@
       </p:sp>
       <p:sp>
         <p:nvSpPr>
-          <p:cNvPr id="9" name="p2"/>
-          <p:cNvSpPr/>
-          <p:nvPr/>
-        </p:nvSpPr>
-        <p:spPr>
-          <a:xfrm>
-            <a:off x="4762500" y="3086100"/>
-            <a:ext cx="2921000" cy="2730500"/>
+          <p:cNvPr id="9" name="protocol-title"/>
+          <p:cNvSpPr/>
+          <p:nvPr/>
+        </p:nvSpPr>
+        <p:spPr>
+          <a:xfrm>
+            <a:off x="7874000" y="2781300"/>
+            <a:ext cx="7239000" cy="381000"/>
+          </a:xfrm>
+          <a:prstGeom prst="rect">
+            <a:avLst/>
+          </a:prstGeom>
+          <a:noFill/>
+          <a:ln/>
+        </p:spPr>
+        <p:txBody>
+          <a:bodyPr wrap="square" lIns="0" tIns="0" rIns="0" bIns="0" rtlCol="0" anchor="t"/>
+          <a:lstStyle/>
+          <a:p>
+            <a:pPr algn="l" indent="0" marL="0">
+              <a:buNone/>
+            </a:pPr>
+            <a:r>
+              <a:rPr lang="en-US" altLang="en-US" sz="2500" dirty="0">
+                <a:solidFill>
+                  <a:srgbClr val="3C4043"/>
+                </a:solidFill>
+                <a:latin typeface="Inter" pitchFamily="34" charset="0"/>
+                <a:ea typeface="Inter" pitchFamily="34" charset="-122"/>
+                <a:cs typeface="Inter" pitchFamily="34" charset="-120"/>
+              </a:rPr>
+              <a:t>PAIR PRACTICE: WHAT WILL STUDENTS NEED TO NOTICE?</a:t>
+            </a:r>
+            <a:endParaRPr lang="en-US" sz="2500" dirty="0"/>
+          </a:p>
+        </p:txBody>
+      </p:sp>
+      <p:sp>
+        <p:nvSpPr>
+          <p:cNvPr id="10" name="protocol"/>
+          <p:cNvSpPr/>
+          <p:nvPr/>
+        </p:nvSpPr>
+        <p:spPr>
+          <a:xfrm>
+            <a:off x="7874000" y="3467100"/>
+            <a:ext cx="7112000" cy="3175000"/>
           </a:xfrm>
           <a:prstGeom prst="rect">
             <a:avLst/>
@@ -4731,33 +4797,52 @@
           <a:p>
             <a:pPr algn="l" indent="0" marL="0">
               <a:lnSpc>
-                <a:spcPts val="2562"/>
+                <a:spcPts val="2583"/>
               </a:lnSpc>
               <a:buNone/>
             </a:pPr>
             <a:r>
               <a:rPr lang="en-US" altLang="en-US" sz="2100" b="1" dirty="0">
                 <a:solidFill>
-                  <a:srgbClr val="1D4ED8"/>
-                </a:solidFill>
-                <a:latin typeface="Inter" pitchFamily="34" charset="0"/>
-                <a:ea typeface="Inter" pitchFamily="34" charset="-122"/>
-                <a:cs typeface="Inter" pitchFamily="34" charset="-120"/>
-              </a:rPr>
-              <a:t>2. COMPARE OBSERVATIONS</a:t>
+                  <a:srgbClr val="238636"/>
+                </a:solidFill>
+                <a:latin typeface="Inter" pitchFamily="34" charset="0"/>
+                <a:ea typeface="Inter" pitchFamily="34" charset="-122"/>
+                <a:cs typeface="Inter" pitchFamily="34" charset="-120"/>
+              </a:rPr>
+              <a:t>1. Circle</a:t>
+            </a:r>
+            <a:r>
+              <a:rPr lang="en-US" altLang="en-US" sz="2100" dirty="0">
+                <a:solidFill>
+                  <a:srgbClr val="3C4043"/>
+                </a:solidFill>
+                <a:latin typeface="Inter" pitchFamily="34" charset="0"/>
+                <a:ea typeface="Inter" pitchFamily="34" charset="-122"/>
+                <a:cs typeface="Inter" pitchFamily="34" charset="-120"/>
+              </a:rPr>
+              <a:t> the prediction question and central relationship.</a:t>
             </a:r>
             <a:endParaRPr lang="en-US" sz="2100" dirty="0"/>
           </a:p>
           <a:p>
             <a:pPr algn="l" indent="0" marL="0">
               <a:lnSpc>
-                <a:spcPts val="2562"/>
+                <a:spcPts val="2583"/>
               </a:lnSpc>
-              <a:spcBef>
-                <a:spcPts val="1600"/>
-              </a:spcBef>
-              <a:buNone/>
-            </a:pPr>
+              <a:buNone/>
+            </a:pPr>
+            <a:r>
+              <a:rPr lang="en-US" altLang="en-US" sz="2100" b="1" dirty="0">
+                <a:solidFill>
+                  <a:srgbClr val="1D4ED8"/>
+                </a:solidFill>
+                <a:latin typeface="Inter" pitchFamily="34" charset="0"/>
+                <a:ea typeface="Inter" pitchFamily="34" charset="-122"/>
+                <a:cs typeface="Inter" pitchFamily="34" charset="-120"/>
+              </a:rPr>
+              <a:t>2. Underline</a:t>
+            </a:r>
             <a:r>
               <a:rPr lang="en-US" altLang="en-US" sz="2100" dirty="0">
                 <a:solidFill>
@@ -4767,61 +4852,14 @@
                 <a:ea typeface="Inter" pitchFamily="34" charset="-122"/>
                 <a:cs typeface="Inter" pitchFamily="34" charset="-120"/>
               </a:rPr>
-              <a:t>What evidence supports the observation? What would a reader see or hear in the response?</a:t>
+              <a:t> the graph and food-web details a student could use as evidence.</a:t>
             </a:r>
             <a:endParaRPr lang="en-US" sz="2100" dirty="0"/>
           </a:p>
-        </p:txBody>
-      </p:sp>
-      <p:sp>
-        <p:nvSpPr>
-          <p:cNvPr id="10" name="calibration-shape-9"/>
-          <p:cNvSpPr/>
-          <p:nvPr/>
-        </p:nvSpPr>
-        <p:spPr>
-          <a:xfrm>
-            <a:off x="8382000" y="2730500"/>
-            <a:ext cx="3556000" cy="3810000"/>
-          </a:xfrm>
-          <a:prstGeom prst="rect">
-            <a:avLst/>
-          </a:prstGeom>
-          <a:solidFill>
-            <a:srgbClr val="F3F4F6"/>
-          </a:solidFill>
-          <a:ln w="12700">
-            <a:solidFill>
-              <a:srgbClr val="D1D5DB"/>
-            </a:solidFill>
-            <a:prstDash val="solid"/>
-          </a:ln>
-        </p:spPr>
-      </p:sp>
-      <p:sp>
-        <p:nvSpPr>
-          <p:cNvPr id="11" name="p3"/>
-          <p:cNvSpPr/>
-          <p:nvPr/>
-        </p:nvSpPr>
-        <p:spPr>
-          <a:xfrm>
-            <a:off x="8699500" y="3086100"/>
-            <a:ext cx="2921000" cy="2730500"/>
-          </a:xfrm>
-          <a:prstGeom prst="rect">
-            <a:avLst/>
-          </a:prstGeom>
-          <a:noFill/>
-          <a:ln/>
-        </p:spPr>
-        <p:txBody>
-          <a:bodyPr wrap="square" lIns="0" tIns="0" rIns="0" bIns="0" rtlCol="0" anchor="t"/>
-          <a:lstStyle/>
           <a:p>
             <a:pPr algn="l" indent="0" marL="0">
               <a:lnSpc>
-                <a:spcPts val="2562"/>
+                <a:spcPts val="2583"/>
               </a:lnSpc>
               <a:buNone/>
             </a:pPr>
@@ -4834,20 +4872,39 @@
                 <a:ea typeface="Inter" pitchFamily="34" charset="-122"/>
                 <a:cs typeface="Inter" pitchFamily="34" charset="-120"/>
               </a:rPr>
-              <a:t>3. NAME ONE NEED</a:t>
+              <a:t>3. Box</a:t>
+            </a:r>
+            <a:r>
+              <a:rPr lang="en-US" altLang="en-US" sz="2100" dirty="0">
+                <a:solidFill>
+                  <a:srgbClr val="3C4043"/>
+                </a:solidFill>
+                <a:latin typeface="Inter" pitchFamily="34" charset="0"/>
+                <a:ea typeface="Inter" pitchFamily="34" charset="-122"/>
+                <a:cs typeface="Inter" pitchFamily="34" charset="-120"/>
+              </a:rPr>
+              <a:t> terms that could prevent access to the task.</a:t>
             </a:r>
             <a:endParaRPr lang="en-US" sz="2100" dirty="0"/>
           </a:p>
           <a:p>
             <a:pPr algn="l" indent="0" marL="0">
               <a:lnSpc>
-                <a:spcPts val="2562"/>
+                <a:spcPts val="2583"/>
               </a:lnSpc>
-              <a:spcBef>
-                <a:spcPts val="1600"/>
-              </a:spcBef>
-              <a:buNone/>
-            </a:pPr>
+              <a:buNone/>
+            </a:pPr>
+            <a:r>
+              <a:rPr lang="en-US" altLang="en-US" sz="2100" b="1" dirty="0">
+                <a:solidFill>
+                  <a:srgbClr val="7C3AED"/>
+                </a:solidFill>
+                <a:latin typeface="Inter" pitchFamily="34" charset="0"/>
+                <a:ea typeface="Inter" pitchFamily="34" charset="-122"/>
+                <a:cs typeface="Inter" pitchFamily="34" charset="-120"/>
+              </a:rPr>
+              <a:t>4. Summarize</a:t>
+            </a:r>
             <a:r>
               <a:rPr lang="en-US" altLang="en-US" sz="2100" dirty="0">
                 <a:solidFill>
@@ -4857,7 +4914,7 @@
                 <a:ea typeface="Inter" pitchFamily="34" charset="-122"/>
                 <a:cs typeface="Inter" pitchFamily="34" charset="-120"/>
               </a:rPr>
-              <a:t>Select one high-leverage criterion to strengthen in the next student action.</a:t>
+              <a:t> the explanation a student will need to construct.</a:t>
             </a:r>
             <a:endParaRPr lang="en-US" sz="2100" dirty="0"/>
           </a:p>
@@ -4865,39 +4922,34 @@
       </p:sp>
       <p:sp>
         <p:nvSpPr>
-          <p:cNvPr id="12" name="calibration-shape-11"/>
-          <p:cNvSpPr/>
-          <p:nvPr/>
-        </p:nvSpPr>
-        <p:spPr>
-          <a:xfrm>
-            <a:off x="12319000" y="2730500"/>
-            <a:ext cx="3429000" cy="3810000"/>
-          </a:xfrm>
-          <a:prstGeom prst="rect">
-            <a:avLst/>
-          </a:prstGeom>
-          <a:solidFill>
-            <a:srgbClr val="FCE8EA"/>
-          </a:solidFill>
-          <a:ln w="25400">
-            <a:solidFill>
-              <a:srgbClr val="C41220"/>
-            </a:solidFill>
-            <a:prstDash val="solid"/>
-          </a:ln>
-        </p:spPr>
-      </p:sp>
-      <p:sp>
-        <p:nvSpPr>
-          <p:cNvPr id="13" name="p4"/>
-          <p:cNvSpPr/>
-          <p:nvPr/>
-        </p:nvSpPr>
-        <p:spPr>
-          <a:xfrm>
-            <a:off x="12636500" y="3086100"/>
-            <a:ext cx="2794000" cy="2730500"/>
+          <p:cNvPr id="11" name="calibration-shape-10"/>
+          <p:cNvSpPr/>
+          <p:nvPr/>
+        </p:nvSpPr>
+        <p:spPr>
+          <a:xfrm>
+            <a:off x="508000" y="7747000"/>
+            <a:ext cx="15240000" cy="546100"/>
+          </a:xfrm>
+          <a:prstGeom prst="rect">
+            <a:avLst/>
+          </a:prstGeom>
+          <a:solidFill>
+            <a:srgbClr val="202124"/>
+          </a:solidFill>
+          <a:ln/>
+        </p:spPr>
+      </p:sp>
+      <p:sp>
+        <p:nvSpPr>
+          <p:cNvPr id="12" name="transfer"/>
+          <p:cNvSpPr/>
+          <p:nvPr/>
+        </p:nvSpPr>
+        <p:spPr>
+          <a:xfrm>
+            <a:off x="825500" y="7874000"/>
+            <a:ext cx="14351000" cy="279400"/>
           </a:xfrm>
           <a:prstGeom prst="rect">
             <a:avLst/>
@@ -4909,96 +4961,11 @@
           <a:bodyPr wrap="square" lIns="0" tIns="0" rIns="0" bIns="0" rtlCol="0" anchor="t"/>
           <a:lstStyle/>
           <a:p>
-            <a:pPr algn="l" indent="0" marL="0">
-              <a:lnSpc>
-                <a:spcPts val="2562"/>
-              </a:lnSpc>
-              <a:buNone/>
-            </a:pPr>
-            <a:r>
-              <a:rPr lang="en-US" altLang="en-US" sz="2100" b="1" dirty="0">
-                <a:solidFill>
-                  <a:srgbClr val="7C3AED"/>
-                </a:solidFill>
-                <a:latin typeface="Inter" pitchFamily="34" charset="0"/>
-                <a:ea typeface="Inter" pitchFamily="34" charset="-122"/>
-                <a:cs typeface="Inter" pitchFamily="34" charset="-120"/>
-              </a:rPr>
-              <a:t>4. PLAN THE RESPONSE</a:t>
-            </a:r>
-            <a:endParaRPr lang="en-US" sz="2100" dirty="0"/>
-          </a:p>
-          <a:p>
-            <a:pPr algn="l" indent="0" marL="0">
-              <a:lnSpc>
-                <a:spcPts val="2562"/>
-              </a:lnSpc>
-              <a:spcBef>
-                <a:spcPts val="1600"/>
-              </a:spcBef>
-              <a:buNone/>
-            </a:pPr>
-            <a:r>
-              <a:rPr lang="en-US" altLang="en-US" sz="2100" dirty="0">
-                <a:solidFill>
-                  <a:srgbClr val="3C4043"/>
-                </a:solidFill>
-                <a:latin typeface="Inter" pitchFamily="34" charset="0"/>
-                <a:ea typeface="Inter" pitchFamily="34" charset="-122"/>
-                <a:cs typeface="Inter" pitchFamily="34" charset="-120"/>
-              </a:rPr>
-              <a:t>Agree on a feedback prompt, student action, and the next evidence to collect.</a:t>
-            </a:r>
-            <a:endParaRPr lang="en-US" sz="2100" dirty="0"/>
-          </a:p>
-        </p:txBody>
-      </p:sp>
-      <p:sp>
-        <p:nvSpPr>
-          <p:cNvPr id="14" name="calibration-shape-13"/>
-          <p:cNvSpPr/>
-          <p:nvPr/>
-        </p:nvSpPr>
-        <p:spPr>
-          <a:xfrm>
-            <a:off x="508000" y="7200900"/>
-            <a:ext cx="15240000" cy="711200"/>
-          </a:xfrm>
-          <a:prstGeom prst="rect">
-            <a:avLst/>
-          </a:prstGeom>
-          <a:solidFill>
-            <a:srgbClr val="202124"/>
-          </a:solidFill>
-          <a:ln/>
-        </p:spPr>
-      </p:sp>
-      <p:sp>
-        <p:nvSpPr>
-          <p:cNvPr id="15" name="protocol"/>
-          <p:cNvSpPr/>
-          <p:nvPr/>
-        </p:nvSpPr>
-        <p:spPr>
-          <a:xfrm>
-            <a:off x="838200" y="7391400"/>
-            <a:ext cx="14452600" cy="355600"/>
-          </a:xfrm>
-          <a:prstGeom prst="rect">
-            <a:avLst/>
-          </a:prstGeom>
-          <a:noFill/>
-          <a:ln/>
-        </p:spPr>
-        <p:txBody>
-          <a:bodyPr wrap="square" lIns="0" tIns="0" rIns="0" bIns="0" rtlCol="0" anchor="t"/>
-          <a:lstStyle/>
-          <a:p>
             <a:pPr algn="ctr" indent="0" marL="0">
               <a:buNone/>
             </a:pPr>
             <a:r>
-              <a:rPr lang="en-US" altLang="en-US" sz="2000" b="1" dirty="0">
+              <a:rPr lang="en-US" altLang="en-US" sz="1800" b="1" dirty="0">
                 <a:solidFill>
                   <a:srgbClr val="F6B4BA"/>
                 </a:solidFill>
@@ -5006,10 +4973,10 @@
                 <a:ea typeface="Inter" pitchFamily="34" charset="-122"/>
                 <a:cs typeface="Inter" pitchFamily="34" charset="-120"/>
               </a:rPr>
-              <a:t>Protocol:</a:t>
-            </a:r>
-            <a:r>
-              <a:rPr lang="en-US" altLang="en-US" sz="2000" dirty="0">
+              <a:t>Debrief:</a:t>
+            </a:r>
+            <a:r>
+              <a:rPr lang="en-US" altLang="en-US" sz="1800" dirty="0">
                 <a:solidFill>
                   <a:srgbClr val="FFFFFF"/>
                 </a:solidFill>
@@ -5017,15 +4984,15 @@
                 <a:ea typeface="Inter" pitchFamily="34" charset="-122"/>
                 <a:cs typeface="Inter" pitchFamily="34" charset="-120"/>
               </a:rPr>
-              <a:t> evidence in the work → supported observation → one focused need → one student-facing next move.</a:t>
-            </a:r>
-            <a:endParaRPr lang="en-US" sz="2000" dirty="0"/>
-          </a:p>
-        </p:txBody>
-      </p:sp>
-      <p:sp>
-        <p:nvSpPr>
-          <p:cNvPr id="16" name="page"/>
+              <a:t> Which annotation decision will make a stronger student CER more likely? Which question will you ask before students write?</a:t>
+            </a:r>
+            <a:endParaRPr lang="en-US" sz="1800" dirty="0"/>
+          </a:p>
+        </p:txBody>
+      </p:sp>
+      <p:sp>
+        <p:nvSpPr>
+          <p:cNvPr id="13" name="page"/>
           <p:cNvSpPr/>
           <p:nvPr/>
         </p:nvSpPr>
@@ -5064,7 +5031,7 @@
       </p:sp>
       <p:sp>
         <p:nvSpPr>
-          <p:cNvPr id="17" name="calibration-shape-16"/>
+          <p:cNvPr id="14" name="calibration-shape-13"/>
           <p:cNvSpPr/>
           <p:nvPr/>
         </p:nvSpPr>
@@ -5167,7 +5134,7 @@
                 <a:ea typeface="Inter" pitchFamily="34" charset="-122"/>
                 <a:cs typeface="Inter" pitchFamily="34" charset="-120"/>
               </a:rPr>
-              <a:t>Use Literacy Routines to Make Thinking Visible</a:t>
+              <a:t>Model Color-Coded CER: See the Response Structure</a:t>
             </a:r>
             <a:endParaRPr lang="en-US" sz="3000" dirty="0"/>
           </a:p>
@@ -5206,7 +5173,7 @@
                 <a:ea typeface="Inter" pitchFamily="34" charset="-122"/>
                 <a:cs typeface="Inter" pitchFamily="34" charset="-120"/>
               </a:rPr>
-              <a:t>3:02–3:08  •  6 MIN</a:t>
+              <a:t>3:00–3:08  •  8 MIN</a:t>
             </a:r>
             <a:endParaRPr lang="en-US" sz="1600" dirty="0"/>
           </a:p>
@@ -5245,7 +5212,7 @@
                 <a:ea typeface="Inter" pitchFamily="34" charset="-122"/>
                 <a:cs typeface="Inter" pitchFamily="34" charset="-120"/>
               </a:rPr>
-              <a:t>Use a routine only when it makes the task more accessible or helps students see their own science thinking. Equivalent course-appropriate structures are welcome.</a:t>
+              <a:t>Color coding is a visibility routine. It helps students identify what each sentence is doing and check whether the explanation includes all of the thinking the task requires.</a:t>
             </a:r>
             <a:endParaRPr lang="en-US" sz="2300" dirty="0"/>
           </a:p>
@@ -5260,17 +5227,17 @@
         <p:spPr>
           <a:xfrm>
             <a:off x="508000" y="2730500"/>
-            <a:ext cx="6959600" cy="3962400"/>
-          </a:xfrm>
-          <a:prstGeom prst="rect">
-            <a:avLst/>
-          </a:prstGeom>
-          <a:solidFill>
-            <a:srgbClr val="F3F4F6"/>
-          </a:solidFill>
-          <a:ln w="12700">
+            <a:ext cx="3530600" cy="3962400"/>
+          </a:xfrm>
+          <a:prstGeom prst="rect">
+            <a:avLst/>
+          </a:prstGeom>
+          <a:solidFill>
+            <a:srgbClr val="EAF5EC"/>
+          </a:solidFill>
+          <a:ln w="25400">
             <a:solidFill>
-              <a:srgbClr val="D1D5DB"/>
+              <a:srgbClr val="238636"/>
             </a:solidFill>
             <a:prstDash val="solid"/>
           </a:ln>
@@ -5278,14 +5245,14 @@
       </p:sp>
       <p:sp>
         <p:nvSpPr>
-          <p:cNvPr id="7" name="left-title"/>
-          <p:cNvSpPr/>
-          <p:nvPr/>
-        </p:nvSpPr>
-        <p:spPr>
-          <a:xfrm>
-            <a:off x="863600" y="3111500"/>
-            <a:ext cx="5715000" cy="444500"/>
+          <p:cNvPr id="7" name="claim"/>
+          <p:cNvSpPr/>
+          <p:nvPr/>
+        </p:nvSpPr>
+        <p:spPr>
+          <a:xfrm>
+            <a:off x="838200" y="3111500"/>
+            <a:ext cx="2921000" cy="2857500"/>
           </a:xfrm>
           <a:prstGeom prst="rect">
             <a:avLst/>
@@ -5298,61 +5265,34 @@
           <a:lstStyle/>
           <a:p>
             <a:pPr algn="l" indent="0" marL="0">
-              <a:buNone/>
-            </a:pPr>
-            <a:r>
-              <a:rPr lang="en-US" altLang="en-US" sz="2400" dirty="0">
-                <a:solidFill>
-                  <a:srgbClr val="3C4043"/>
-                </a:solidFill>
-                <a:latin typeface="Inter" pitchFamily="34" charset="0"/>
-                <a:ea typeface="Inter" pitchFamily="34" charset="-122"/>
-                <a:cs typeface="Inter" pitchFamily="34" charset="-120"/>
-              </a:rPr>
-              <a:t>CUBS: READ THE SOURCE</a:t>
-            </a:r>
-            <a:endParaRPr lang="en-US" sz="2400" dirty="0"/>
-          </a:p>
-        </p:txBody>
-      </p:sp>
-      <p:sp>
-        <p:nvSpPr>
-          <p:cNvPr id="8" name="left-copy"/>
-          <p:cNvSpPr/>
-          <p:nvPr/>
-        </p:nvSpPr>
-        <p:spPr>
-          <a:xfrm>
-            <a:off x="863600" y="3835400"/>
-            <a:ext cx="5867400" cy="2095500"/>
-          </a:xfrm>
-          <a:prstGeom prst="rect">
-            <a:avLst/>
-          </a:prstGeom>
-          <a:noFill/>
-          <a:ln/>
-        </p:spPr>
-        <p:txBody>
-          <a:bodyPr wrap="square" lIns="0" tIns="0" rIns="0" bIns="0" rtlCol="0" anchor="t"/>
-          <a:lstStyle/>
+              <a:lnSpc>
+                <a:spcPts val="3000"/>
+              </a:lnSpc>
+              <a:buNone/>
+            </a:pPr>
+            <a:r>
+              <a:rPr lang="en-US" altLang="en-US" sz="2400" b="1" dirty="0">
+                <a:solidFill>
+                  <a:srgbClr val="238636"/>
+                </a:solidFill>
+                <a:latin typeface="Inter" pitchFamily="34" charset="0"/>
+                <a:ea typeface="Inter" pitchFamily="34" charset="-122"/>
+                <a:cs typeface="Inter" pitchFamily="34" charset="-120"/>
+              </a:rPr>
+              <a:t>CLAIM</a:t>
+            </a:r>
+            <a:endParaRPr lang="en-US" sz="2100" dirty="0"/>
+          </a:p>
           <a:p>
             <a:pPr algn="l" indent="0" marL="0">
               <a:lnSpc>
                 <a:spcPts val="2625"/>
               </a:lnSpc>
-              <a:buNone/>
-            </a:pPr>
-            <a:r>
-              <a:rPr lang="en-US" altLang="en-US" sz="2100" b="1" dirty="0">
-                <a:solidFill>
-                  <a:srgbClr val="C41220"/>
-                </a:solidFill>
-                <a:latin typeface="Inter" pitchFamily="34" charset="0"/>
-                <a:ea typeface="Inter" pitchFamily="34" charset="-122"/>
-                <a:cs typeface="Inter" pitchFamily="34" charset="-120"/>
-              </a:rPr>
-              <a:t>C</a:t>
-            </a:r>
+              <a:spcBef>
+                <a:spcPts val="1200"/>
+              </a:spcBef>
+              <a:buNone/>
+            </a:pPr>
             <a:r>
               <a:rPr lang="en-US" altLang="en-US" sz="2100" dirty="0">
                 <a:solidFill>
@@ -5362,7 +5302,74 @@
                 <a:ea typeface="Inter" pitchFamily="34" charset="-122"/>
                 <a:cs typeface="Inter" pitchFamily="34" charset="-120"/>
               </a:rPr>
-              <a:t>ircle the central idea.</a:t>
+              <a:t>The answer, prediction, conclusion, or explanation that responds to the question.</a:t>
+            </a:r>
+            <a:endParaRPr lang="en-US" sz="2100" dirty="0"/>
+          </a:p>
+        </p:txBody>
+      </p:sp>
+      <p:sp>
+        <p:nvSpPr>
+          <p:cNvPr id="8" name="literacy-shape-7"/>
+          <p:cNvSpPr/>
+          <p:nvPr/>
+        </p:nvSpPr>
+        <p:spPr>
+          <a:xfrm>
+            <a:off x="4292600" y="2730500"/>
+            <a:ext cx="3530600" cy="3962400"/>
+          </a:xfrm>
+          <a:prstGeom prst="rect">
+            <a:avLst/>
+          </a:prstGeom>
+          <a:solidFill>
+            <a:srgbClr val="EAF2FC"/>
+          </a:solidFill>
+          <a:ln w="25400">
+            <a:solidFill>
+              <a:srgbClr val="1D4ED8"/>
+            </a:solidFill>
+            <a:prstDash val="solid"/>
+          </a:ln>
+        </p:spPr>
+      </p:sp>
+      <p:sp>
+        <p:nvSpPr>
+          <p:cNvPr id="9" name="evidence"/>
+          <p:cNvSpPr/>
+          <p:nvPr/>
+        </p:nvSpPr>
+        <p:spPr>
+          <a:xfrm>
+            <a:off x="4622800" y="3111500"/>
+            <a:ext cx="2921000" cy="2857500"/>
+          </a:xfrm>
+          <a:prstGeom prst="rect">
+            <a:avLst/>
+          </a:prstGeom>
+          <a:noFill/>
+          <a:ln/>
+        </p:spPr>
+        <p:txBody>
+          <a:bodyPr wrap="square" lIns="0" tIns="0" rIns="0" bIns="0" rtlCol="0" anchor="t"/>
+          <a:lstStyle/>
+          <a:p>
+            <a:pPr algn="l" indent="0" marL="0">
+              <a:lnSpc>
+                <a:spcPts val="3000"/>
+              </a:lnSpc>
+              <a:buNone/>
+            </a:pPr>
+            <a:r>
+              <a:rPr lang="en-US" altLang="en-US" sz="2400" b="1" dirty="0">
+                <a:solidFill>
+                  <a:srgbClr val="1D4ED8"/>
+                </a:solidFill>
+                <a:latin typeface="Inter" pitchFamily="34" charset="0"/>
+                <a:ea typeface="Inter" pitchFamily="34" charset="-122"/>
+                <a:cs typeface="Inter" pitchFamily="34" charset="-120"/>
+              </a:rPr>
+              <a:t>EVIDENCE</a:t>
             </a:r>
             <a:endParaRPr lang="en-US" sz="2100" dirty="0"/>
           </a:p>
@@ -5371,19 +5378,11 @@
               <a:lnSpc>
                 <a:spcPts val="2625"/>
               </a:lnSpc>
-              <a:buNone/>
-            </a:pPr>
-            <a:r>
-              <a:rPr lang="en-US" altLang="en-US" sz="2100" b="1" dirty="0">
-                <a:solidFill>
-                  <a:srgbClr val="C41220"/>
-                </a:solidFill>
-                <a:latin typeface="Inter" pitchFamily="34" charset="0"/>
-                <a:ea typeface="Inter" pitchFamily="34" charset="-122"/>
-                <a:cs typeface="Inter" pitchFamily="34" charset="-120"/>
-              </a:rPr>
-              <a:t>U</a:t>
-            </a:r>
+              <a:spcBef>
+                <a:spcPts val="1200"/>
+              </a:spcBef>
+              <a:buNone/>
+            </a:pPr>
             <a:r>
               <a:rPr lang="en-US" altLang="en-US" sz="2100" dirty="0">
                 <a:solidFill>
@@ -5393,7 +5392,74 @@
                 <a:ea typeface="Inter" pitchFamily="34" charset="-122"/>
                 <a:cs typeface="Inter" pitchFamily="34" charset="-120"/>
               </a:rPr>
-              <a:t>nderline evidence students can use.</a:t>
+              <a:t>Accurate, relevant details from a text, graph, data set, observation, model, or investigation.</a:t>
+            </a:r>
+            <a:endParaRPr lang="en-US" sz="2100" dirty="0"/>
+          </a:p>
+        </p:txBody>
+      </p:sp>
+      <p:sp>
+        <p:nvSpPr>
+          <p:cNvPr id="10" name="literacy-shape-9"/>
+          <p:cNvSpPr/>
+          <p:nvPr/>
+        </p:nvSpPr>
+        <p:spPr>
+          <a:xfrm>
+            <a:off x="8077200" y="2730500"/>
+            <a:ext cx="3530600" cy="3962400"/>
+          </a:xfrm>
+          <a:prstGeom prst="rect">
+            <a:avLst/>
+          </a:prstGeom>
+          <a:solidFill>
+            <a:srgbClr val="FFF1E7"/>
+          </a:solidFill>
+          <a:ln w="25400">
+            <a:solidFill>
+              <a:srgbClr val="C56B00"/>
+            </a:solidFill>
+            <a:prstDash val="solid"/>
+          </a:ln>
+        </p:spPr>
+      </p:sp>
+      <p:sp>
+        <p:nvSpPr>
+          <p:cNvPr id="11" name="reasoning"/>
+          <p:cNvSpPr/>
+          <p:nvPr/>
+        </p:nvSpPr>
+        <p:spPr>
+          <a:xfrm>
+            <a:off x="8407400" y="3111500"/>
+            <a:ext cx="2921000" cy="2857500"/>
+          </a:xfrm>
+          <a:prstGeom prst="rect">
+            <a:avLst/>
+          </a:prstGeom>
+          <a:noFill/>
+          <a:ln/>
+        </p:spPr>
+        <p:txBody>
+          <a:bodyPr wrap="square" lIns="0" tIns="0" rIns="0" bIns="0" rtlCol="0" anchor="t"/>
+          <a:lstStyle/>
+          <a:p>
+            <a:pPr algn="l" indent="0" marL="0">
+              <a:lnSpc>
+                <a:spcPts val="3000"/>
+              </a:lnSpc>
+              <a:buNone/>
+            </a:pPr>
+            <a:r>
+              <a:rPr lang="en-US" altLang="en-US" sz="2400" b="1" dirty="0">
+                <a:solidFill>
+                  <a:srgbClr val="C56B00"/>
+                </a:solidFill>
+                <a:latin typeface="Inter" pitchFamily="34" charset="0"/>
+                <a:ea typeface="Inter" pitchFamily="34" charset="-122"/>
+                <a:cs typeface="Inter" pitchFamily="34" charset="-120"/>
+              </a:rPr>
+              <a:t>REASONING</a:t>
             </a:r>
             <a:endParaRPr lang="en-US" sz="2100" dirty="0"/>
           </a:p>
@@ -5402,19 +5468,11 @@
               <a:lnSpc>
                 <a:spcPts val="2625"/>
               </a:lnSpc>
-              <a:buNone/>
-            </a:pPr>
-            <a:r>
-              <a:rPr lang="en-US" altLang="en-US" sz="2100" b="1" dirty="0">
-                <a:solidFill>
-                  <a:srgbClr val="C41220"/>
-                </a:solidFill>
-                <a:latin typeface="Inter" pitchFamily="34" charset="0"/>
-                <a:ea typeface="Inter" pitchFamily="34" charset="-122"/>
-                <a:cs typeface="Inter" pitchFamily="34" charset="-120"/>
-              </a:rPr>
-              <a:t>B</a:t>
-            </a:r>
+              <a:spcBef>
+                <a:spcPts val="1200"/>
+              </a:spcBef>
+              <a:buNone/>
+            </a:pPr>
             <a:r>
               <a:rPr lang="en-US" altLang="en-US" sz="2100" dirty="0">
                 <a:solidFill>
@@ -5424,7 +5482,74 @@
                 <a:ea typeface="Inter" pitchFamily="34" charset="-122"/>
                 <a:cs typeface="Inter" pitchFamily="34" charset="-120"/>
               </a:rPr>
-              <a:t>ox language that may block access.</a:t>
+              <a:t>The scientific explanation of why the evidence supports the claim.</a:t>
+            </a:r>
+            <a:endParaRPr lang="en-US" sz="2100" dirty="0"/>
+          </a:p>
+        </p:txBody>
+      </p:sp>
+      <p:sp>
+        <p:nvSpPr>
+          <p:cNvPr id="12" name="literacy-shape-11"/>
+          <p:cNvSpPr/>
+          <p:nvPr/>
+        </p:nvSpPr>
+        <p:spPr>
+          <a:xfrm>
+            <a:off x="11861800" y="2730500"/>
+            <a:ext cx="3886200" cy="3962400"/>
+          </a:xfrm>
+          <a:prstGeom prst="rect">
+            <a:avLst/>
+          </a:prstGeom>
+          <a:solidFill>
+            <a:srgbClr val="F3ECFB"/>
+          </a:solidFill>
+          <a:ln w="25400">
+            <a:solidFill>
+              <a:srgbClr val="7C3AED"/>
+            </a:solidFill>
+            <a:prstDash val="solid"/>
+          </a:ln>
+        </p:spPr>
+      </p:sp>
+      <p:sp>
+        <p:nvSpPr>
+          <p:cNvPr id="13" name="links"/>
+          <p:cNvSpPr/>
+          <p:nvPr/>
+        </p:nvSpPr>
+        <p:spPr>
+          <a:xfrm>
+            <a:off x="12192000" y="3111500"/>
+            <a:ext cx="3276600" cy="2857500"/>
+          </a:xfrm>
+          <a:prstGeom prst="rect">
+            <a:avLst/>
+          </a:prstGeom>
+          <a:noFill/>
+          <a:ln/>
+        </p:spPr>
+        <p:txBody>
+          <a:bodyPr wrap="square" lIns="0" tIns="0" rIns="0" bIns="0" rtlCol="0" anchor="t"/>
+          <a:lstStyle/>
+          <a:p>
+            <a:pPr algn="l" indent="0" marL="0">
+              <a:lnSpc>
+                <a:spcPts val="3000"/>
+              </a:lnSpc>
+              <a:buNone/>
+            </a:pPr>
+            <a:r>
+              <a:rPr lang="en-US" altLang="en-US" sz="2400" b="1" dirty="0">
+                <a:solidFill>
+                  <a:srgbClr val="7C3AED"/>
+                </a:solidFill>
+                <a:latin typeface="Inter" pitchFamily="34" charset="0"/>
+                <a:ea typeface="Inter" pitchFamily="34" charset="-122"/>
+                <a:cs typeface="Inter" pitchFamily="34" charset="-120"/>
+              </a:rPr>
+              <a:t>LINKS + TRANSITIONS</a:t>
             </a:r>
             <a:endParaRPr lang="en-US" sz="2100" dirty="0"/>
           </a:p>
@@ -5433,19 +5558,11 @@
               <a:lnSpc>
                 <a:spcPts val="2625"/>
               </a:lnSpc>
-              <a:buNone/>
-            </a:pPr>
-            <a:r>
-              <a:rPr lang="en-US" altLang="en-US" sz="2100" b="1" dirty="0">
-                <a:solidFill>
-                  <a:srgbClr val="C41220"/>
-                </a:solidFill>
-                <a:latin typeface="Inter" pitchFamily="34" charset="0"/>
-                <a:ea typeface="Inter" pitchFamily="34" charset="-122"/>
-                <a:cs typeface="Inter" pitchFamily="34" charset="-120"/>
-              </a:rPr>
-              <a:t>S</a:t>
-            </a:r>
+              <a:spcBef>
+                <a:spcPts val="1200"/>
+              </a:spcBef>
+              <a:buNone/>
+            </a:pPr>
             <a:r>
               <a:rPr lang="en-US" altLang="en-US" sz="2100" dirty="0">
                 <a:solidFill>
@@ -5455,7 +5572,7 @@
                 <a:ea typeface="Inter" pitchFamily="34" charset="-122"/>
                 <a:cs typeface="Inter" pitchFamily="34" charset="-120"/>
               </a:rPr>
-              <a:t>ummarize the science idea or question.</a:t>
+              <a:t>Words and sentences that make the logic clear: therefore, because, this shows, as a result.</a:t>
             </a:r>
             <a:endParaRPr lang="en-US" sz="2100" dirty="0"/>
           </a:p>
@@ -5463,217 +5580,7 @@
       </p:sp>
       <p:sp>
         <p:nvSpPr>
-          <p:cNvPr id="9" name="literacy-shape-8"/>
-          <p:cNvSpPr/>
-          <p:nvPr/>
-        </p:nvSpPr>
-        <p:spPr>
-          <a:xfrm>
-            <a:off x="8026400" y="2730500"/>
-            <a:ext cx="7721600" cy="3962400"/>
-          </a:xfrm>
-          <a:prstGeom prst="rect">
-            <a:avLst/>
-          </a:prstGeom>
-          <a:solidFill>
-            <a:srgbClr val="FCE8EA"/>
-          </a:solidFill>
-          <a:ln w="25400">
-            <a:solidFill>
-              <a:srgbClr val="C41220"/>
-            </a:solidFill>
-            <a:prstDash val="solid"/>
-          </a:ln>
-        </p:spPr>
-      </p:sp>
-      <p:sp>
-        <p:nvSpPr>
-          <p:cNvPr id="10" name="right-title"/>
-          <p:cNvSpPr/>
-          <p:nvPr/>
-        </p:nvSpPr>
-        <p:spPr>
-          <a:xfrm>
-            <a:off x="8382000" y="3111500"/>
-            <a:ext cx="6350000" cy="444500"/>
-          </a:xfrm>
-          <a:prstGeom prst="rect">
-            <a:avLst/>
-          </a:prstGeom>
-          <a:noFill/>
-          <a:ln/>
-        </p:spPr>
-        <p:txBody>
-          <a:bodyPr wrap="square" lIns="0" tIns="0" rIns="0" bIns="0" rtlCol="0" anchor="t"/>
-          <a:lstStyle/>
-          <a:p>
-            <a:pPr algn="l" indent="0" marL="0">
-              <a:buNone/>
-            </a:pPr>
-            <a:r>
-              <a:rPr lang="en-US" altLang="en-US" sz="2400" dirty="0">
-                <a:solidFill>
-                  <a:srgbClr val="3C4043"/>
-                </a:solidFill>
-                <a:latin typeface="Inter" pitchFamily="34" charset="0"/>
-                <a:ea typeface="Inter" pitchFamily="34" charset="-122"/>
-                <a:cs typeface="Inter" pitchFamily="34" charset="-120"/>
-              </a:rPr>
-              <a:t>COLOR-CODED CER: SEE THE RESPONSE</a:t>
-            </a:r>
-            <a:endParaRPr lang="en-US" sz="2400" dirty="0"/>
-          </a:p>
-        </p:txBody>
-      </p:sp>
-      <p:sp>
-        <p:nvSpPr>
-          <p:cNvPr id="11" name="right-copy"/>
-          <p:cNvSpPr/>
-          <p:nvPr/>
-        </p:nvSpPr>
-        <p:spPr>
-          <a:xfrm>
-            <a:off x="8382000" y="3835400"/>
-            <a:ext cx="6604000" cy="2095500"/>
-          </a:xfrm>
-          <a:prstGeom prst="rect">
-            <a:avLst/>
-          </a:prstGeom>
-          <a:noFill/>
-          <a:ln/>
-        </p:spPr>
-        <p:txBody>
-          <a:bodyPr wrap="square" lIns="0" tIns="0" rIns="0" bIns="0" rtlCol="0" anchor="t"/>
-          <a:lstStyle/>
-          <a:p>
-            <a:pPr algn="l" indent="0" marL="0">
-              <a:lnSpc>
-                <a:spcPts val="2625"/>
-              </a:lnSpc>
-              <a:buNone/>
-            </a:pPr>
-            <a:r>
-              <a:rPr lang="en-US" altLang="en-US" sz="2100" b="1" dirty="0">
-                <a:solidFill>
-                  <a:srgbClr val="238636"/>
-                </a:solidFill>
-                <a:latin typeface="Inter" pitchFamily="34" charset="0"/>
-                <a:ea typeface="Inter" pitchFamily="34" charset="-122"/>
-                <a:cs typeface="Inter" pitchFamily="34" charset="-120"/>
-              </a:rPr>
-              <a:t>Claim</a:t>
-            </a:r>
-            <a:r>
-              <a:rPr lang="en-US" altLang="en-US" sz="2100" dirty="0">
-                <a:solidFill>
-                  <a:srgbClr val="3C4043"/>
-                </a:solidFill>
-                <a:latin typeface="Inter" pitchFamily="34" charset="0"/>
-                <a:ea typeface="Inter" pitchFamily="34" charset="-122"/>
-                <a:cs typeface="Inter" pitchFamily="34" charset="-120"/>
-              </a:rPr>
-              <a:t> — answer, conclusion, or explanation.</a:t>
-            </a:r>
-            <a:endParaRPr lang="en-US" sz="2100" dirty="0"/>
-          </a:p>
-          <a:p>
-            <a:pPr algn="l" indent="0" marL="0">
-              <a:lnSpc>
-                <a:spcPts val="2625"/>
-              </a:lnSpc>
-              <a:buNone/>
-            </a:pPr>
-            <a:r>
-              <a:rPr lang="en-US" altLang="en-US" sz="2100" b="1" dirty="0">
-                <a:solidFill>
-                  <a:srgbClr val="1D4ED8"/>
-                </a:solidFill>
-                <a:latin typeface="Inter" pitchFamily="34" charset="0"/>
-                <a:ea typeface="Inter" pitchFamily="34" charset="-122"/>
-                <a:cs typeface="Inter" pitchFamily="34" charset="-120"/>
-              </a:rPr>
-              <a:t>Evidence</a:t>
-            </a:r>
-            <a:r>
-              <a:rPr lang="en-US" altLang="en-US" sz="2100" dirty="0">
-                <a:solidFill>
-                  <a:srgbClr val="3C4043"/>
-                </a:solidFill>
-                <a:latin typeface="Inter" pitchFamily="34" charset="0"/>
-                <a:ea typeface="Inter" pitchFamily="34" charset="-122"/>
-                <a:cs typeface="Inter" pitchFamily="34" charset="-120"/>
-              </a:rPr>
-              <a:t> — accurate, relevant source/data detail.</a:t>
-            </a:r>
-            <a:endParaRPr lang="en-US" sz="2100" dirty="0"/>
-          </a:p>
-          <a:p>
-            <a:pPr algn="l" indent="0" marL="0">
-              <a:lnSpc>
-                <a:spcPts val="2625"/>
-              </a:lnSpc>
-              <a:buNone/>
-            </a:pPr>
-            <a:r>
-              <a:rPr lang="en-US" altLang="en-US" sz="2100" b="1" dirty="0">
-                <a:solidFill>
-                  <a:srgbClr val="C56B00"/>
-                </a:solidFill>
-                <a:latin typeface="Inter" pitchFamily="34" charset="0"/>
-                <a:ea typeface="Inter" pitchFamily="34" charset="-122"/>
-                <a:cs typeface="Inter" pitchFamily="34" charset="-120"/>
-              </a:rPr>
-              <a:t>Reasoning</a:t>
-            </a:r>
-            <a:r>
-              <a:rPr lang="en-US" altLang="en-US" sz="2100" dirty="0">
-                <a:solidFill>
-                  <a:srgbClr val="3C4043"/>
-                </a:solidFill>
-                <a:latin typeface="Inter" pitchFamily="34" charset="0"/>
-                <a:ea typeface="Inter" pitchFamily="34" charset="-122"/>
-                <a:cs typeface="Inter" pitchFamily="34" charset="-120"/>
-              </a:rPr>
-              <a:t> — why the evidence supports the science idea.</a:t>
-            </a:r>
-            <a:endParaRPr lang="en-US" sz="2100" dirty="0"/>
-          </a:p>
-          <a:p>
-            <a:pPr algn="l" indent="0" marL="0">
-              <a:lnSpc>
-                <a:spcPts val="2625"/>
-              </a:lnSpc>
-              <a:buNone/>
-            </a:pPr>
-            <a:r>
-              <a:rPr lang="en-US" altLang="en-US" sz="2100" b="1" dirty="0">
-                <a:solidFill>
-                  <a:srgbClr val="7C3AED"/>
-                </a:solidFill>
-                <a:latin typeface="Inter" pitchFamily="34" charset="0"/>
-                <a:ea typeface="Inter" pitchFamily="34" charset="-122"/>
-                <a:cs typeface="Inter" pitchFamily="34" charset="-120"/>
-              </a:rPr>
-              <a:t>Links</a:t>
-            </a:r>
-            <a:r>
-              <a:rPr lang="en-US" altLang="en-US" sz="2100" dirty="0">
-                <a:solidFill>
-                  <a:srgbClr val="3C4043"/>
-                </a:solidFill>
-                <a:latin typeface="Inter" pitchFamily="34" charset="0"/>
-                <a:ea typeface="Inter" pitchFamily="34" charset="-122"/>
-                <a:cs typeface="Inter" pitchFamily="34" charset="-120"/>
-              </a:rPr>
-              <a:t> — language that makes the thinking coherent.</a:t>
-            </a:r>
-            <a:endParaRPr lang="en-US" sz="2100" dirty="0"/>
-          </a:p>
-        </p:txBody>
-      </p:sp>
-      <p:sp>
-        <p:nvSpPr>
-          <p:cNvPr id="12" name="literacy-shape-11"/>
+          <p:cNvPr id="14" name="literacy-shape-13"/>
           <p:cNvSpPr/>
           <p:nvPr/>
         </p:nvSpPr>
@@ -5693,7 +5600,7 @@
       </p:sp>
       <p:sp>
         <p:nvSpPr>
-          <p:cNvPr id="13" name="note"/>
+          <p:cNvPr id="15" name="note"/>
           <p:cNvSpPr/>
           <p:nvPr/>
         </p:nvSpPr>
@@ -5724,7 +5631,7 @@
                 <a:ea typeface="Inter" pitchFamily="34" charset="-122"/>
                 <a:cs typeface="Inter" pitchFamily="34" charset="-120"/>
               </a:rPr>
-              <a:t>Routine check:</a:t>
+              <a:t>Student check:</a:t>
             </a:r>
             <a:r>
               <a:rPr lang="en-US" altLang="en-US" sz="2000" dirty="0">
@@ -5735,7 +5642,7 @@
                 <a:ea typeface="Inter" pitchFamily="34" charset="-122"/>
                 <a:cs typeface="Inter" pitchFamily="34" charset="-120"/>
               </a:rPr>
-              <a:t> it should help students do the task; it should not become an additional task or grading system.</a:t>
+              <a:t> “Highlight or label each part. Which part is missing, weak, or not yet connected to the science idea?”</a:t>
             </a:r>
             <a:endParaRPr lang="en-US" sz="2000" dirty="0"/>
           </a:p>
@@ -5743,7 +5650,7 @@
       </p:sp>
       <p:sp>
         <p:nvSpPr>
-          <p:cNvPr id="14" name="page"/>
+          <p:cNvPr id="16" name="page"/>
           <p:cNvSpPr/>
           <p:nvPr/>
         </p:nvSpPr>
@@ -5782,7 +5689,7 @@
       </p:sp>
       <p:sp>
         <p:nvSpPr>
-          <p:cNvPr id="15" name="literacy-shape-14"/>
+          <p:cNvPr id="17" name="literacy-shape-16"/>
           <p:cNvSpPr/>
           <p:nvPr/>
         </p:nvSpPr>
@@ -5885,7 +5792,7 @@
                 <a:ea typeface="Inter" pitchFamily="34" charset="-122"/>
                 <a:cs typeface="Inter" pitchFamily="34" charset="-120"/>
               </a:rPr>
-              <a:t>Feedback Must Cause a Next Student Move</a:t>
+              <a:t>Teach the Routine—Do Not Complete the Thinking</a:t>
             </a:r>
             <a:endParaRPr lang="en-US" sz="3000" dirty="0"/>
           </a:p>
@@ -5963,7 +5870,7 @@
                 <a:ea typeface="Inter" pitchFamily="34" charset="-122"/>
                 <a:cs typeface="Inter" pitchFamily="34" charset="-120"/>
               </a:rPr>
-              <a:t>The feedback loop is complete only when students act on a criterion and their next response gives teachers evidence for the next instructional decision.</a:t>
+              <a:t>Use explicit modeling, student practice, and feedback that sends students back to the source and their own response. The routine should increase—not replace—student analysis.</a:t>
             </a:r>
             <a:endParaRPr lang="en-US" sz="2300" dirty="0"/>
           </a:p>
@@ -6102,7 +6009,7 @@
                 <a:ea typeface="Inter" pitchFamily="34" charset="-122"/>
                 <a:cs typeface="Inter" pitchFamily="34" charset="-120"/>
               </a:rPr>
-              <a:t>1. CRITERION</a:t>
+              <a:t>1. THINK ALOUD</a:t>
             </a:r>
             <a:endParaRPr lang="en-US" sz="2000" dirty="0"/>
           </a:p>
@@ -6119,7 +6026,7 @@
                 <a:ea typeface="Inter" pitchFamily="34" charset="-122"/>
                 <a:cs typeface="Inter" pitchFamily="34" charset="-120"/>
               </a:rPr>
-              <a:t>Identify the one quality feature that matters most now.</a:t>
+              <a:t>Model how to use CUBS or identify a CER part.</a:t>
             </a:r>
             <a:endParaRPr lang="en-US" sz="2000" dirty="0"/>
           </a:p>
@@ -6158,7 +6065,7 @@
                 <a:ea typeface="Inter" pitchFamily="34" charset="-122"/>
                 <a:cs typeface="Inter" pitchFamily="34" charset="-120"/>
               </a:rPr>
-              <a:t>2. FEEDBACK PROMPT</a:t>
+              <a:t>2. PROMPT</a:t>
             </a:r>
             <a:endParaRPr lang="en-US" sz="2000" dirty="0"/>
           </a:p>
@@ -6175,7 +6082,7 @@
                 <a:ea typeface="Inter" pitchFamily="34" charset="-122"/>
                 <a:cs typeface="Inter" pitchFamily="34" charset="-120"/>
               </a:rPr>
-              <a:t>Point students to evidence in the source or response.</a:t>
+              <a:t>Ask students what the source shows and why it matters.</a:t>
             </a:r>
             <a:endParaRPr lang="en-US" sz="2000" dirty="0"/>
           </a:p>
@@ -6214,7 +6121,7 @@
                 <a:ea typeface="Inter" pitchFamily="34" charset="-122"/>
                 <a:cs typeface="Inter" pitchFamily="34" charset="-120"/>
               </a:rPr>
-              <a:t>3. STUDENT ACTION</a:t>
+              <a:t>3. WRITE + CODE</a:t>
             </a:r>
             <a:endParaRPr lang="en-US" sz="2000" dirty="0"/>
           </a:p>
@@ -6231,7 +6138,7 @@
                 <a:ea typeface="Inter" pitchFamily="34" charset="-122"/>
                 <a:cs typeface="Inter" pitchFamily="34" charset="-120"/>
               </a:rPr>
-              <a:t>Identify, complete, or revise CER; then explain, compare, correct, or apply.</a:t>
+              <a:t>Students construct the response and label claim, evidence, and reasoning.</a:t>
             </a:r>
             <a:endParaRPr lang="en-US" sz="2000" dirty="0"/>
           </a:p>
@@ -6270,7 +6177,7 @@
                 <a:ea typeface="Inter" pitchFamily="34" charset="-122"/>
                 <a:cs typeface="Inter" pitchFamily="34" charset="-120"/>
               </a:rPr>
-              <a:t>4. NEW EVIDENCE</a:t>
+              <a:t>4. REVISE</a:t>
             </a:r>
             <a:endParaRPr lang="en-US" sz="2000" dirty="0"/>
           </a:p>
@@ -6287,7 +6194,7 @@
                 <a:ea typeface="Inter" pitchFamily="34" charset="-122"/>
                 <a:cs typeface="Inter" pitchFamily="34" charset="-120"/>
               </a:rPr>
-              <a:t>Collect a response that makes the changed thinking visible.</a:t>
+              <a:t>Students act on one criterion-based written feedback prompt.</a:t>
             </a:r>
             <a:endParaRPr lang="en-US" sz="2000" dirty="0"/>
           </a:p>
@@ -6510,7 +6417,7 @@
                 <a:ea typeface="Inter" pitchFamily="34" charset="-122"/>
                 <a:cs typeface="Inter" pitchFamily="34" charset="-120"/>
               </a:rPr>
-              <a:t>“Identify the evidence that best supports your claim. Then complete or revise your reasoning so a reader can see how the evidence connects to the science idea.”</a:t>
+              <a:t>“Underline the evidence you selected. Then add or revise a reasoning sentence that explains how this evidence supports your claim.”</a:t>
             </a:r>
             <a:endParaRPr lang="en-US" sz="2100" dirty="0"/>
           </a:p>
@@ -6636,7 +6543,7 @@
         <p:spPr>
           <a:xfrm>
             <a:off x="508000" y="292100"/>
-            <a:ext cx="10795000" cy="482600"/>
+            <a:ext cx="11430000" cy="482600"/>
           </a:xfrm>
           <a:prstGeom prst="rect">
             <a:avLst/>
@@ -6660,7 +6567,7 @@
                 <a:ea typeface="Inter" pitchFamily="34" charset="-122"/>
                 <a:cs typeface="Inter" pitchFamily="34" charset="-120"/>
               </a:rPr>
-              <a:t>Protected Course-Alike Refinement</a:t>
+              <a:t>Protected Course-Alike Application</a:t>
             </a:r>
             <a:endParaRPr lang="en-US" sz="3000" dirty="0"/>
           </a:p>
@@ -6861,7 +6768,7 @@
                 <a:ea typeface="Inter" pitchFamily="34" charset="-122"/>
                 <a:cs typeface="Inter" pitchFamily="34" charset="-120"/>
               </a:rPr>
-              <a:t>Make one ready-to-use decision. Then use colleagues to calibrate—not replace—your thinking.</a:t>
+              <a:t>Draft your own student routine first. Then use colleagues to test clarity, rigor, access, and the thinking it requires.</a:t>
             </a:r>
             <a:endParaRPr lang="en-US" sz="2000" dirty="0"/>
           </a:p>
@@ -6928,7 +6835,7 @@
                 <a:ea typeface="Inter" pitchFamily="34" charset="-122"/>
                 <a:cs typeface="Inter" pitchFamily="34" charset="-120"/>
               </a:rPr>
-              <a:t>1. Confirm the task + bar.</a:t>
+              <a:t>1. Choose the source/task.</a:t>
             </a:r>
             <a:r>
               <a:rPr lang="en-US" altLang="en-US" sz="2100" dirty="0">
@@ -6939,7 +6846,7 @@
                 <a:ea typeface="Inter" pitchFamily="34" charset="-122"/>
                 <a:cs typeface="Inter" pitchFamily="34" charset="-120"/>
               </a:rPr>
-              <a:t> Make the priority science thinking and success criteria clear enough for students to use.</a:t>
+              <a:t> Use an article, text set, data display, model, investigation prompt, or constructed-response task connected to your current standard.</a:t>
             </a:r>
             <a:endParaRPr lang="en-US" sz="2100" dirty="0"/>
           </a:p>
@@ -7006,7 +6913,7 @@
                 <a:ea typeface="Inter" pitchFamily="34" charset="-122"/>
                 <a:cs typeface="Inter" pitchFamily="34" charset="-120"/>
               </a:rPr>
-              <a:t>2. Refine feedback + student action.</a:t>
+              <a:t>2. Write the student directions.</a:t>
             </a:r>
             <a:r>
               <a:rPr lang="en-US" altLang="en-US" sz="2100" dirty="0">
@@ -7017,7 +6924,7 @@
                 <a:ea typeface="Inter" pitchFamily="34" charset="-122"/>
                 <a:cs typeface="Inter" pitchFamily="34" charset="-120"/>
               </a:rPr>
-              <a:t> One prompt should preserve cognitive demand and lead to an observable revision, explanation, or application.</a:t>
+              <a:t> Specify what students will CUBS, what they will identify or color-code in CER, and what they will do with the annotation.</a:t>
             </a:r>
             <a:endParaRPr lang="en-US" sz="2100" dirty="0"/>
           </a:p>
@@ -7084,7 +6991,7 @@
                 <a:ea typeface="Inter" pitchFamily="34" charset="-122"/>
                 <a:cs typeface="Inter" pitchFamily="34" charset="-120"/>
               </a:rPr>
-              <a:t>3. Plan Friday evidence.</a:t>
+              <a:t>3. Plan a check + feedback step.</a:t>
             </a:r>
             <a:r>
               <a:rPr lang="en-US" altLang="en-US" sz="2100" dirty="0">
@@ -7095,7 +7002,7 @@
                 <a:ea typeface="Inter" pitchFamily="34" charset="-122"/>
                 <a:cs typeface="Inter" pitchFamily="34" charset="-120"/>
               </a:rPr>
-              <a:t> Decide which small writing samples to collect and, if available, which unit-test standard/question evidence could add context to the instructional pattern.</a:t>
+              <a:t> Name the prompt, partner talk, annotation check, or short response that will reveal student thinking and lead to a written-feedback/revision opportunity.</a:t>
             </a:r>
             <a:endParaRPr lang="en-US" sz="2100" dirty="0"/>
           </a:p>
@@ -7174,7 +7081,7 @@
     <p:bg>
       <p:bgPr>
         <a:solidFill>
-          <a:srgbClr val="202124"/>
+          <a:srgbClr val="FFFFFF"/>
         </a:solidFill>
       </p:bgPr>
     </p:bg>
@@ -7201,13 +7108,13 @@
         <p:spPr>
           <a:xfrm>
             <a:off x="0" y="0"/>
-            <a:ext cx="355600" cy="9144000"/>
-          </a:xfrm>
-          <a:prstGeom prst="rect">
-            <a:avLst/>
-          </a:prstGeom>
-          <a:solidFill>
-            <a:srgbClr val="C41220"/>
+            <a:ext cx="16256000" cy="1016000"/>
+          </a:xfrm>
+          <a:prstGeom prst="rect">
+            <a:avLst/>
+          </a:prstGeom>
+          <a:solidFill>
+            <a:srgbClr val="202124"/>
           </a:solidFill>
           <a:ln/>
         </p:spPr>
@@ -7220,8 +7127,8 @@
         </p:nvSpPr>
         <p:spPr>
           <a:xfrm>
-            <a:off x="889000" y="1168400"/>
-            <a:ext cx="10795000" cy="330200"/>
+            <a:off x="736600" y="342900"/>
+            <a:ext cx="11430000" cy="330200"/>
           </a:xfrm>
           <a:prstGeom prst="rect">
             <a:avLst/>
@@ -7237,17 +7144,17 @@
               <a:buNone/>
             </a:pPr>
             <a:r>
-              <a:rPr lang="en-US" altLang="en-US" sz="1700" dirty="0">
-                <a:solidFill>
-                  <a:srgbClr val="D1D5DB"/>
-                </a:solidFill>
-                <a:latin typeface="Inter" pitchFamily="34" charset="0"/>
-                <a:ea typeface="Inter" pitchFamily="34" charset="-122"/>
-                <a:cs typeface="Inter" pitchFamily="34" charset="-120"/>
-              </a:rPr>
-              <a:t>CLOSE + PREPARE FOR EVIDENCE REVIEW  •  3:28–3:30 P.M.  •  2 MIN</a:t>
-            </a:r>
-            <a:endParaRPr lang="en-US" sz="1700" dirty="0"/>
+              <a:rPr lang="en-US" altLang="en-US" sz="1600" dirty="0">
+                <a:solidFill>
+                  <a:srgbClr val="F1F3F4"/>
+                </a:solidFill>
+                <a:latin typeface="Inter" pitchFamily="34" charset="0"/>
+                <a:ea typeface="Inter" pitchFamily="34" charset="-122"/>
+                <a:cs typeface="Inter" pitchFamily="34" charset="-120"/>
+              </a:rPr>
+              <a:t>CLOSE + PREPARE FOR STUDENT WORK REVIEW  •  3:28–3:30 P.M.  •  2 MIN</a:t>
+            </a:r>
+            <a:endParaRPr lang="en-US" sz="1600" dirty="0"/>
           </a:p>
         </p:txBody>
       </p:sp>
@@ -7259,8 +7166,8 @@
         </p:nvSpPr>
         <p:spPr>
           <a:xfrm>
-            <a:off x="889000" y="1917700"/>
-            <a:ext cx="12446000" cy="787400"/>
+            <a:off x="736600" y="1689100"/>
+            <a:ext cx="13208000" cy="787400"/>
           </a:xfrm>
           <a:prstGeom prst="rect">
             <a:avLst/>
@@ -7276,17 +7183,17 @@
               <a:buNone/>
             </a:pPr>
             <a:r>
-              <a:rPr lang="en-US" altLang="en-US" sz="4400" dirty="0">
-                <a:solidFill>
-                  <a:srgbClr val="FFFFFF"/>
-                </a:solidFill>
-                <a:latin typeface="Inter" pitchFamily="34" charset="0"/>
-                <a:ea typeface="Inter" pitchFamily="34" charset="-122"/>
-                <a:cs typeface="Inter" pitchFamily="34" charset="-120"/>
-              </a:rPr>
-              <a:t>Use the work. Collect a small amount of evidence. Revisit it Friday.</a:t>
-            </a:r>
-            <a:endParaRPr lang="en-US" sz="4400" dirty="0"/>
+              <a:rPr lang="en-US" altLang="en-US" sz="4300" dirty="0">
+                <a:solidFill>
+                  <a:srgbClr val="202124"/>
+                </a:solidFill>
+                <a:latin typeface="Inter" pitchFamily="34" charset="0"/>
+                <a:ea typeface="Inter" pitchFamily="34" charset="-122"/>
+                <a:cs typeface="Inter" pitchFamily="34" charset="-120"/>
+              </a:rPr>
+              <a:t>Use the routine. Collect completed writing. Return Friday.</a:t>
+            </a:r>
+            <a:endParaRPr lang="en-US" sz="4300" dirty="0"/>
           </a:p>
         </p:txBody>
       </p:sp>
@@ -7298,18 +7205,18 @@
         </p:nvSpPr>
         <p:spPr>
           <a:xfrm>
-            <a:off x="889000" y="3302000"/>
-            <a:ext cx="13716000" cy="3581400"/>
-          </a:xfrm>
-          <a:prstGeom prst="rect">
-            <a:avLst/>
-          </a:prstGeom>
-          <a:solidFill>
-            <a:srgbClr val="2D2E31"/>
+            <a:off x="736600" y="3136900"/>
+            <a:ext cx="14706600" cy="3505200"/>
+          </a:xfrm>
+          <a:prstGeom prst="rect">
+            <a:avLst/>
+          </a:prstGeom>
+          <a:solidFill>
+            <a:srgbClr val="F3F4F6"/>
           </a:solidFill>
           <a:ln w="12700">
             <a:solidFill>
-              <a:srgbClr val="72777D"/>
+              <a:srgbClr val="D1D5DB"/>
             </a:solidFill>
             <a:prstDash val="solid"/>
           </a:ln>
@@ -7323,18 +7230,18 @@
         </p:nvSpPr>
         <p:spPr>
           <a:xfrm>
-            <a:off x="1270000" y="3746500"/>
-            <a:ext cx="3810000" cy="2413000"/>
-          </a:xfrm>
-          <a:prstGeom prst="rect">
-            <a:avLst/>
-          </a:prstGeom>
-          <a:solidFill>
-            <a:srgbClr val="3A3B3D"/>
+            <a:off x="1092200" y="3543300"/>
+            <a:ext cx="4292600" cy="2324100"/>
+          </a:xfrm>
+          <a:prstGeom prst="rect">
+            <a:avLst/>
+          </a:prstGeom>
+          <a:solidFill>
+            <a:srgbClr val="FCE8EA"/>
           </a:solidFill>
           <a:ln w="12700">
             <a:solidFill>
-              <a:srgbClr val="62666B"/>
+              <a:srgbClr val="C41220"/>
             </a:solidFill>
             <a:prstDash val="solid"/>
           </a:ln>
@@ -7348,18 +7255,18 @@
         </p:nvSpPr>
         <p:spPr>
           <a:xfrm>
-            <a:off x="6223000" y="3746500"/>
-            <a:ext cx="3810000" cy="2413000"/>
-          </a:xfrm>
-          <a:prstGeom prst="rect">
-            <a:avLst/>
-          </a:prstGeom>
-          <a:solidFill>
-            <a:srgbClr val="3A3B3D"/>
+            <a:off x="5981700" y="3543300"/>
+            <a:ext cx="4292600" cy="2324100"/>
+          </a:xfrm>
+          <a:prstGeom prst="rect">
+            <a:avLst/>
+          </a:prstGeom>
+          <a:solidFill>
+            <a:srgbClr val="F8F9FA"/>
           </a:solidFill>
           <a:ln w="12700">
             <a:solidFill>
-              <a:srgbClr val="62666B"/>
+              <a:srgbClr val="D1D5DB"/>
             </a:solidFill>
             <a:prstDash val="solid"/>
           </a:ln>
@@ -7373,18 +7280,18 @@
         </p:nvSpPr>
         <p:spPr>
           <a:xfrm>
-            <a:off x="11176000" y="3746500"/>
-            <a:ext cx="3048000" cy="2413000"/>
-          </a:xfrm>
-          <a:prstGeom prst="rect">
-            <a:avLst/>
-          </a:prstGeom>
-          <a:solidFill>
-            <a:srgbClr val="3A3B3D"/>
+            <a:off x="10871200" y="3543300"/>
+            <a:ext cx="4216400" cy="2324100"/>
+          </a:xfrm>
+          <a:prstGeom prst="rect">
+            <a:avLst/>
+          </a:prstGeom>
+          <a:solidFill>
+            <a:srgbClr val="F8F9FA"/>
           </a:solidFill>
           <a:ln w="12700">
             <a:solidFill>
-              <a:srgbClr val="62666B"/>
+              <a:srgbClr val="D1D5DB"/>
             </a:solidFill>
             <a:prstDash val="solid"/>
           </a:ln>
@@ -7398,8 +7305,8 @@
         </p:nvSpPr>
         <p:spPr>
           <a:xfrm>
-            <a:off x="1574800" y="4064000"/>
-            <a:ext cx="3200400" cy="1600200"/>
+            <a:off x="1346200" y="3835400"/>
+            <a:ext cx="3784600" cy="1714500"/>
           </a:xfrm>
           <a:prstGeom prst="rect">
             <a:avLst/>
@@ -7413,14 +7320,14 @@
           <a:p>
             <a:pPr algn="l" indent="0" marL="0">
               <a:lnSpc>
-                <a:spcPts val="2562"/>
+                <a:spcPts val="1680"/>
               </a:lnSpc>
               <a:buNone/>
             </a:pPr>
             <a:r>
-              <a:rPr lang="en-US" altLang="en-US" sz="2100" b="1" dirty="0">
-                <a:solidFill>
-                  <a:srgbClr val="F6B4BA"/>
+              <a:rPr lang="en-US" altLang="en-US" sz="1400" b="1" dirty="0">
+                <a:solidFill>
+                  <a:srgbClr val="C41220"/>
                 </a:solidFill>
                 <a:latin typeface="Inter" pitchFamily="34" charset="0"/>
                 <a:ea typeface="Inter" pitchFamily="34" charset="-122"/>
@@ -7428,30 +7335,30 @@
               </a:rPr>
               <a:t>USE</a:t>
             </a:r>
-            <a:endParaRPr lang="en-US" sz="2100" dirty="0"/>
+            <a:endParaRPr lang="en-US" sz="2000" dirty="0"/>
           </a:p>
           <a:p>
             <a:pPr algn="l" indent="0" marL="0">
               <a:lnSpc>
-                <a:spcPts val="2562"/>
+                <a:spcPts val="2400"/>
               </a:lnSpc>
               <a:spcBef>
-                <a:spcPts val="1000"/>
+                <a:spcPts val="900"/>
               </a:spcBef>
               <a:buNone/>
             </a:pPr>
             <a:r>
-              <a:rPr lang="en-US" altLang="en-US" sz="2100" dirty="0">
-                <a:solidFill>
-                  <a:srgbClr val="FFFFFF"/>
-                </a:solidFill>
-                <a:latin typeface="Inter" pitchFamily="34" charset="0"/>
-                <a:ea typeface="Inter" pitchFamily="34" charset="-122"/>
-                <a:cs typeface="Inter" pitchFamily="34" charset="-120"/>
-              </a:rPr>
-              <a:t>Teach the refined task, support, feedback prompt, and student action.</a:t>
-            </a:r>
-            <a:endParaRPr lang="en-US" sz="2100" dirty="0"/>
+              <a:rPr lang="en-US" altLang="en-US" sz="2000" b="1" dirty="0">
+                <a:solidFill>
+                  <a:srgbClr val="3C4043"/>
+                </a:solidFill>
+                <a:latin typeface="Inter" pitchFamily="34" charset="0"/>
+                <a:ea typeface="Inter" pitchFamily="34" charset="-122"/>
+                <a:cs typeface="Inter" pitchFamily="34" charset="-120"/>
+              </a:rPr>
+              <a:t>Teach the CUBS/CER routine with the planned source and writing task.</a:t>
+            </a:r>
+            <a:endParaRPr lang="en-US" sz="2000" dirty="0"/>
           </a:p>
         </p:txBody>
       </p:sp>
@@ -7463,8 +7370,8 @@
         </p:nvSpPr>
         <p:spPr>
           <a:xfrm>
-            <a:off x="6527800" y="4064000"/>
-            <a:ext cx="3200400" cy="1600200"/>
+            <a:off x="6235700" y="3835400"/>
+            <a:ext cx="3784600" cy="1714500"/>
           </a:xfrm>
           <a:prstGeom prst="rect">
             <a:avLst/>
@@ -7478,14 +7385,14 @@
           <a:p>
             <a:pPr algn="l" indent="0" marL="0">
               <a:lnSpc>
-                <a:spcPts val="2562"/>
+                <a:spcPts val="1680"/>
               </a:lnSpc>
               <a:buNone/>
             </a:pPr>
             <a:r>
-              <a:rPr lang="en-US" altLang="en-US" sz="2100" b="1" dirty="0">
-                <a:solidFill>
-                  <a:srgbClr val="F6B4BA"/>
+              <a:rPr lang="en-US" altLang="en-US" sz="1400" b="1" dirty="0">
+                <a:solidFill>
+                  <a:srgbClr val="C41220"/>
                 </a:solidFill>
                 <a:latin typeface="Inter" pitchFamily="34" charset="0"/>
                 <a:ea typeface="Inter" pitchFamily="34" charset="-122"/>
@@ -7493,30 +7400,30 @@
               </a:rPr>
               <a:t>COLLECT</a:t>
             </a:r>
-            <a:endParaRPr lang="en-US" sz="2100" dirty="0"/>
+            <a:endParaRPr lang="en-US" sz="2000" dirty="0"/>
           </a:p>
           <a:p>
             <a:pPr algn="l" indent="0" marL="0">
               <a:lnSpc>
-                <a:spcPts val="2562"/>
+                <a:spcPts val="2400"/>
               </a:lnSpc>
               <a:spcBef>
-                <a:spcPts val="1000"/>
+                <a:spcPts val="900"/>
               </a:spcBef>
               <a:buNone/>
             </a:pPr>
             <a:r>
-              <a:rPr lang="en-US" altLang="en-US" sz="2100" dirty="0">
-                <a:solidFill>
-                  <a:srgbClr val="FFFFFF"/>
-                </a:solidFill>
-                <a:latin typeface="Inter" pitchFamily="34" charset="0"/>
-                <a:ea typeface="Inter" pitchFamily="34" charset="-122"/>
-                <a:cs typeface="Inter" pitchFamily="34" charset="-120"/>
-              </a:rPr>
-              <a:t>Bring a few de-identified writing samples that show the evidence of student thinking.</a:t>
-            </a:r>
-            <a:endParaRPr lang="en-US" sz="2100" dirty="0"/>
+              <a:rPr lang="en-US" altLang="en-US" sz="2000" b="1" dirty="0">
+                <a:solidFill>
+                  <a:srgbClr val="3C4043"/>
+                </a:solidFill>
+                <a:latin typeface="Inter" pitchFamily="34" charset="0"/>
+                <a:ea typeface="Inter" pitchFamily="34" charset="-122"/>
+                <a:cs typeface="Inter" pitchFamily="34" charset="-120"/>
+              </a:rPr>
+              <a:t>Bring a small de-identified set of completed student writing and notes on written feedback.</a:t>
+            </a:r>
+            <a:endParaRPr lang="en-US" sz="2000" dirty="0"/>
           </a:p>
         </p:txBody>
       </p:sp>
@@ -7528,8 +7435,8 @@
         </p:nvSpPr>
         <p:spPr>
           <a:xfrm>
-            <a:off x="11480800" y="4064000"/>
-            <a:ext cx="2438400" cy="1600200"/>
+            <a:off x="11125200" y="3835400"/>
+            <a:ext cx="3708400" cy="1714500"/>
           </a:xfrm>
           <a:prstGeom prst="rect">
             <a:avLst/>
@@ -7543,45 +7450,45 @@
           <a:p>
             <a:pPr algn="l" indent="0" marL="0">
               <a:lnSpc>
-                <a:spcPts val="2562"/>
+                <a:spcPts val="1680"/>
               </a:lnSpc>
               <a:buNone/>
             </a:pPr>
             <a:r>
-              <a:rPr lang="en-US" altLang="en-US" sz="2100" b="1" dirty="0">
-                <a:solidFill>
-                  <a:srgbClr val="F6B4BA"/>
-                </a:solidFill>
-                <a:latin typeface="Inter" pitchFamily="34" charset="0"/>
-                <a:ea typeface="Inter" pitchFamily="34" charset="-122"/>
-                <a:cs typeface="Inter" pitchFamily="34" charset="-120"/>
-              </a:rPr>
-              <a:t>REVISIT</a:t>
-            </a:r>
-            <a:endParaRPr lang="en-US" sz="2100" dirty="0"/>
+              <a:rPr lang="en-US" altLang="en-US" sz="1400" b="1" dirty="0">
+                <a:solidFill>
+                  <a:srgbClr val="C41220"/>
+                </a:solidFill>
+                <a:latin typeface="Inter" pitchFamily="34" charset="0"/>
+                <a:ea typeface="Inter" pitchFamily="34" charset="-122"/>
+                <a:cs typeface="Inter" pitchFamily="34" charset="-120"/>
+              </a:rPr>
+              <a:t>REVISIT FRIDAY</a:t>
+            </a:r>
+            <a:endParaRPr lang="en-US" sz="2000" dirty="0"/>
           </a:p>
           <a:p>
             <a:pPr algn="l" indent="0" marL="0">
               <a:lnSpc>
-                <a:spcPts val="2562"/>
+                <a:spcPts val="2400"/>
               </a:lnSpc>
               <a:spcBef>
-                <a:spcPts val="1000"/>
+                <a:spcPts val="900"/>
               </a:spcBef>
               <a:buNone/>
             </a:pPr>
             <a:r>
-              <a:rPr lang="en-US" altLang="en-US" sz="2100" dirty="0">
-                <a:solidFill>
-                  <a:srgbClr val="FFFFFF"/>
-                </a:solidFill>
-                <a:latin typeface="Inter" pitchFamily="34" charset="0"/>
-                <a:ea typeface="Inter" pitchFamily="34" charset="-122"/>
-                <a:cs typeface="Inter" pitchFamily="34" charset="-120"/>
-              </a:rPr>
-              <a:t>Add unit-test-by-standard/question context where available.</a:t>
-            </a:r>
-            <a:endParaRPr lang="en-US" sz="2100" dirty="0"/>
+              <a:rPr lang="en-US" altLang="en-US" sz="2000" b="1" dirty="0">
+                <a:solidFill>
+                  <a:srgbClr val="3C4043"/>
+                </a:solidFill>
+                <a:latin typeface="Inter" pitchFamily="34" charset="0"/>
+                <a:ea typeface="Inter" pitchFamily="34" charset="-122"/>
+                <a:cs typeface="Inter" pitchFamily="34" charset="-120"/>
+              </a:rPr>
+              <a:t>Use the mastery bar to analyze writing, provide feedback, and plan the next standard-focused step.</a:t>
+            </a:r>
+            <a:endParaRPr lang="en-US" sz="2000" dirty="0"/>
           </a:p>
         </p:txBody>
       </p:sp>
@@ -7593,8 +7500,8 @@
         </p:nvSpPr>
         <p:spPr>
           <a:xfrm>
-            <a:off x="889000" y="7429500"/>
-            <a:ext cx="13208000" cy="533400"/>
+            <a:off x="736600" y="7289800"/>
+            <a:ext cx="14198600" cy="457200"/>
           </a:xfrm>
           <a:prstGeom prst="rect">
             <a:avLst/>
@@ -7606,21 +7513,32 @@
           <a:bodyPr wrap="square" lIns="0" tIns="0" rIns="0" bIns="0" rtlCol="0" anchor="t"/>
           <a:lstStyle/>
           <a:p>
-            <a:pPr algn="l" indent="0" marL="0">
-              <a:buNone/>
-            </a:pPr>
-            <a:r>
-              <a:rPr lang="en-US" altLang="en-US" sz="2300" dirty="0">
-                <a:solidFill>
-                  <a:srgbClr val="F1F3F4"/>
-                </a:solidFill>
-                <a:latin typeface="Inter" pitchFamily="34" charset="0"/>
-                <a:ea typeface="Inter" pitchFamily="34" charset="-122"/>
-                <a:cs typeface="Inter" pitchFamily="34" charset="-120"/>
-              </a:rPr>
-              <a:t>Friday focus: evidence → supported learning pattern → next student action → adjusted learning experience.</a:t>
-            </a:r>
-            <a:endParaRPr lang="en-US" sz="2300" dirty="0"/>
+            <a:pPr algn="ctr" indent="0" marL="0">
+              <a:buNone/>
+            </a:pPr>
+            <a:r>
+              <a:rPr lang="en-US" altLang="en-US" sz="2200" b="1" dirty="0">
+                <a:solidFill>
+                  <a:srgbClr val="C41220"/>
+                </a:solidFill>
+                <a:latin typeface="Inter" pitchFamily="34" charset="0"/>
+                <a:ea typeface="Inter" pitchFamily="34" charset="-122"/>
+                <a:cs typeface="Inter" pitchFamily="34" charset="-120"/>
+              </a:rPr>
+              <a:t>Remember:</a:t>
+            </a:r>
+            <a:r>
+              <a:rPr lang="en-US" altLang="en-US" sz="2200" dirty="0">
+                <a:solidFill>
+                  <a:srgbClr val="3C4043"/>
+                </a:solidFill>
+                <a:latin typeface="Inter" pitchFamily="34" charset="0"/>
+                <a:ea typeface="Inter" pitchFamily="34" charset="-122"/>
+                <a:cs typeface="Inter" pitchFamily="34" charset="-120"/>
+              </a:rPr>
+              <a:t> the routine supports students’ own analysis and explanation; it does not provide the answer.</a:t>
+            </a:r>
+            <a:endParaRPr lang="en-US" sz="2200" dirty="0"/>
           </a:p>
         </p:txBody>
       </p:sp>
@@ -7632,8 +7550,8 @@
         </p:nvSpPr>
         <p:spPr>
           <a:xfrm>
-            <a:off x="14478000" y="8407400"/>
-            <a:ext cx="762000" cy="228600"/>
+            <a:off x="14732000" y="8432800"/>
+            <a:ext cx="736600" cy="228600"/>
           </a:xfrm>
           <a:prstGeom prst="rect">
             <a:avLst/>
@@ -7651,7 +7569,7 @@
             <a:r>
               <a:rPr lang="en-US" altLang="en-US" sz="1300" dirty="0">
                 <a:solidFill>
-                  <a:srgbClr val="D1D5DB"/>
+                  <a:srgbClr val="6B7280"/>
                 </a:solidFill>
                 <a:latin typeface="Inter" pitchFamily="34" charset="0"/>
                 <a:ea typeface="Inter" pitchFamily="34" charset="-122"/>

--- a/assets/plc/2026-10-28_Science_Department_PD_Strengthening_Science_Literacy.pptx
+++ b/assets/plc/2026-10-28_Science_Department_PD_Strengthening_Science_Literacy.pptx
@@ -1680,8 +1680,8 @@
         </p:nvSpPr>
         <p:spPr>
           <a:xfrm>
-            <a:off x="736600" y="1917700"/>
-            <a:ext cx="11938000" cy="1473200"/>
+            <a:off x="736600" y="1739900"/>
+            <a:ext cx="10985500" cy="1778000"/>
           </a:xfrm>
           <a:prstGeom prst="rect">
             <a:avLst/>
@@ -1697,12 +1697,12 @@
           <a:p>
             <a:pPr algn="l" indent="0" marL="0">
               <a:lnSpc>
-                <a:spcPts val="4644"/>
+                <a:spcPts val="4173"/>
               </a:lnSpc>
               <a:buNone/>
             </a:pPr>
             <a:r>
-              <a:rPr lang="en-US" altLang="en-US" sz="4300" dirty="0">
+              <a:rPr lang="en-US" altLang="en-US" sz="3900" dirty="0">
                 <a:solidFill>
                   <a:srgbClr val="202124"/>
                 </a:solidFill>
@@ -1710,19 +1710,19 @@
                 <a:ea typeface="Inter" pitchFamily="34" charset="-122"/>
                 <a:cs typeface="Inter" pitchFamily="34" charset="-120"/>
               </a:rPr>
-              <a:t>Teaching Students to Analyze</a:t>
-            </a:r>
-            <a:endParaRPr lang="en-US" sz="4300" dirty="0"/>
+              <a:t>Strengthening Science Literacy:</a:t>
+            </a:r>
+            <a:endParaRPr lang="en-US" sz="3900" dirty="0"/>
           </a:p>
           <a:p>
             <a:pPr algn="l" indent="0" marL="0">
               <a:lnSpc>
-                <a:spcPts val="4644"/>
+                <a:spcPts val="4173"/>
               </a:lnSpc>
               <a:buNone/>
             </a:pPr>
             <a:r>
-              <a:rPr lang="en-US" altLang="en-US" sz="4300" dirty="0">
+              <a:rPr lang="en-US" altLang="en-US" sz="3900" dirty="0">
                 <a:solidFill>
                   <a:srgbClr val="202124"/>
                 </a:solidFill>
@@ -1730,9 +1730,29 @@
                 <a:ea typeface="Inter" pitchFamily="34" charset="-122"/>
                 <a:cs typeface="Inter" pitchFamily="34" charset="-120"/>
               </a:rPr>
-              <a:t>Science Texts With CUBS + CER</a:t>
-            </a:r>
-            <a:endParaRPr lang="en-US" sz="4300" dirty="0"/>
+              <a:t>Calibrating Writing Benchmarks,</a:t>
+            </a:r>
+            <a:endParaRPr lang="en-US" sz="3900" dirty="0"/>
+          </a:p>
+          <a:p>
+            <a:pPr algn="l" indent="0" marL="0">
+              <a:lnSpc>
+                <a:spcPts val="4173"/>
+              </a:lnSpc>
+              <a:buNone/>
+            </a:pPr>
+            <a:r>
+              <a:rPr lang="en-US" altLang="en-US" sz="3900" dirty="0">
+                <a:solidFill>
+                  <a:srgbClr val="202124"/>
+                </a:solidFill>
+                <a:latin typeface="Inter" pitchFamily="34" charset="0"/>
+                <a:ea typeface="Inter" pitchFamily="34" charset="-122"/>
+                <a:cs typeface="Inter" pitchFamily="34" charset="-120"/>
+              </a:rPr>
+              <a:t>Feedback, and Revision</a:t>
+            </a:r>
+            <a:endParaRPr lang="en-US" sz="3900" dirty="0"/>
           </a:p>
         </p:txBody>
       </p:sp>
@@ -1744,8 +1764,8 @@
         </p:nvSpPr>
         <p:spPr>
           <a:xfrm>
-            <a:off x="736600" y="3797300"/>
-            <a:ext cx="10820400" cy="1092200"/>
+            <a:off x="736600" y="3848100"/>
+            <a:ext cx="10922000" cy="1320800"/>
           </a:xfrm>
           <a:prstGeom prst="rect">
             <a:avLst/>
@@ -1759,12 +1779,32 @@
           <a:p>
             <a:pPr algn="l" indent="0" marL="0">
               <a:lnSpc>
-                <a:spcPts val="3050"/>
+                <a:spcPts val="2760"/>
               </a:lnSpc>
               <a:buNone/>
             </a:pPr>
             <a:r>
-              <a:rPr lang="en-US" altLang="en-US" sz="2500" dirty="0">
+              <a:rPr lang="en-US" altLang="en-US" sz="2300" b="1" dirty="0">
+                <a:solidFill>
+                  <a:srgbClr val="C41220"/>
+                </a:solidFill>
+                <a:latin typeface="Inter" pitchFamily="34" charset="0"/>
+                <a:ea typeface="Inter" pitchFamily="34" charset="-122"/>
+                <a:cs typeface="Inter" pitchFamily="34" charset="-120"/>
+              </a:rPr>
+              <a:t>Strategy Focus: Teaching Students to Analyze Science Texts With CUBS + CER.</a:t>
+            </a:r>
+            <a:endParaRPr lang="en-US" sz="2300" dirty="0"/>
+          </a:p>
+          <a:p>
+            <a:pPr algn="l" indent="0" marL="0">
+              <a:lnSpc>
+                <a:spcPts val="2760"/>
+              </a:lnSpc>
+              <a:buNone/>
+            </a:pPr>
+            <a:r>
+              <a:rPr lang="en-US" altLang="en-US" sz="2300" dirty="0">
                 <a:solidFill>
                   <a:srgbClr val="3C4043"/>
                 </a:solidFill>
@@ -1772,9 +1812,9 @@
                 <a:ea typeface="Inter" pitchFamily="34" charset="-122"/>
                 <a:cs typeface="Inter" pitchFamily="34" charset="-120"/>
               </a:rPr>
-              <a:t>Learn and rehearse student-facing routines that help students analyze a science article, visual, data display, or text before constructing an evidence-based explanation.</a:t>
-            </a:r>
-            <a:endParaRPr lang="en-US" sz="2500" dirty="0"/>
+              <a:t>Learn and rehearse student-facing routines that prepare students to analyze a science source before constructing and revising an evidence-based explanation.</a:t>
+            </a:r>
+            <a:endParaRPr lang="en-US" sz="2300" dirty="0"/>
           </a:p>
         </p:txBody>
       </p:sp>
@@ -1850,8 +1890,8 @@
         </p:nvSpPr>
         <p:spPr>
           <a:xfrm>
-            <a:off x="12547600" y="3035300"/>
-            <a:ext cx="2590800" cy="1358900"/>
+            <a:off x="12547600" y="2933700"/>
+            <a:ext cx="2590800" cy="1549400"/>
           </a:xfrm>
           <a:prstGeom prst="rect">
             <a:avLst/>
@@ -1865,12 +1905,12 @@
           <a:p>
             <a:pPr algn="ctr" indent="0" marL="0">
               <a:lnSpc>
-                <a:spcPts val="2400"/>
+                <a:spcPts val="2280"/>
               </a:lnSpc>
               <a:buNone/>
             </a:pPr>
             <a:r>
-              <a:rPr lang="en-US" altLang="en-US" sz="2000" dirty="0">
+              <a:rPr lang="en-US" altLang="en-US" sz="1900" dirty="0">
                 <a:solidFill>
                   <a:srgbClr val="3C4043"/>
                 </a:solidFill>
@@ -1878,9 +1918,9 @@
                 <a:ea typeface="Inter" pitchFamily="34" charset="-122"/>
                 <a:cs typeface="Inter" pitchFamily="34" charset="-120"/>
               </a:rPr>
-              <a:t>One ready-to-teach CUBS/CER routine, student directions, and a check for understanding.</a:t>
-            </a:r>
-            <a:endParaRPr lang="en-US" sz="2000" dirty="0"/>
+              <a:t>One calibrated, ready-to-teach CUBS/CER routine with clear student expectations, feedback, revision, and a check for understanding.</a:t>
+            </a:r>
+            <a:endParaRPr lang="en-US" sz="1900" dirty="0"/>
           </a:p>
         </p:txBody>
       </p:sp>
@@ -1917,8 +1957,8 @@
         </p:nvSpPr>
         <p:spPr>
           <a:xfrm>
-            <a:off x="1117600" y="6172200"/>
-            <a:ext cx="13919200" cy="787400"/>
+            <a:off x="1117600" y="6096000"/>
+            <a:ext cx="13919200" cy="952500"/>
           </a:xfrm>
           <a:prstGeom prst="rect">
             <a:avLst/>
@@ -1932,12 +1972,12 @@
           <a:p>
             <a:pPr algn="l" indent="0" marL="0">
               <a:lnSpc>
-                <a:spcPts val="2684"/>
+                <a:spcPts val="2520"/>
               </a:lnSpc>
               <a:buNone/>
             </a:pPr>
             <a:r>
-              <a:rPr lang="en-US" altLang="en-US" sz="2200" b="1" dirty="0">
+              <a:rPr lang="en-US" altLang="en-US" sz="2100" b="1" dirty="0">
                 <a:solidFill>
                   <a:srgbClr val="C41220"/>
                 </a:solidFill>
@@ -1948,7 +1988,7 @@
               <a:t>The shared model is Biology Benchmark #1.</a:t>
             </a:r>
             <a:r>
-              <a:rPr lang="en-US" altLang="en-US" sz="2200" dirty="0">
+              <a:rPr lang="en-US" altLang="en-US" sz="2100" dirty="0">
                 <a:solidFill>
                   <a:srgbClr val="3C4043"/>
                 </a:solidFill>
@@ -1956,9 +1996,9 @@
                 <a:ea typeface="Inter" pitchFamily="34" charset="-122"/>
                 <a:cs typeface="Inter" pitchFamily="34" charset="-120"/>
               </a:rPr>
-              <a:t> Each science team will adapt the strategy to an appropriate article, text, data display, model, investigation prompt, or constructed-response task.</a:t>
-            </a:r>
-            <a:endParaRPr lang="en-US" sz="2200" dirty="0"/>
+              <a:t> Teams will calibrate the writing benchmark, student-facing CUBS/CER routine, feedback prompt, and revision action, then adapt the strategy to an appropriate course task.</a:t>
+            </a:r>
+            <a:endParaRPr lang="en-US" sz="2100" dirty="0"/>
           </a:p>
         </p:txBody>
       </p:sp>
@@ -2156,7 +2196,7 @@
                 <a:ea typeface="Inter" pitchFamily="34" charset="-122"/>
                 <a:cs typeface="Inter" pitchFamily="34" charset="-120"/>
               </a:rPr>
-              <a:t>A Practical Outcome for Today</a:t>
+              <a:t>Calibrate the Benchmark-to-Revision Path</a:t>
             </a:r>
             <a:endParaRPr lang="en-US" sz="3000" dirty="0"/>
           </a:p>
@@ -2237,7 +2277,7 @@
                 <a:ea typeface="Inter" pitchFamily="34" charset="-122"/>
                 <a:cs typeface="Inter" pitchFamily="34" charset="-120"/>
               </a:rPr>
-              <a:t>Leave with a clear, student-facing way to move from reading/analyzing a source to constructing, color-coding, and revising a science Claim–Evidence–Reasoning response.</a:t>
+              <a:t>Use one shared writing benchmark to align the student path from source analysis to a complete evidence-based CER response, criterion-based feedback, and a revision students can act on.</a:t>
             </a:r>
             <a:endParaRPr lang="en-US" sz="2300" dirty="0"/>
           </a:p>
@@ -2515,7 +2555,7 @@
                 <a:ea typeface="Inter" pitchFamily="34" charset="-122"/>
                 <a:cs typeface="Inter" pitchFamily="34" charset="-120"/>
               </a:rPr>
-              <a:t>Practice on a source</a:t>
+              <a:t>Rehearse the source</a:t>
             </a:r>
             <a:endParaRPr lang="en-US" sz="2000" dirty="0"/>
           </a:p>
@@ -2603,7 +2643,7 @@
                 <a:ea typeface="Inter" pitchFamily="34" charset="-122"/>
                 <a:cs typeface="Inter" pitchFamily="34" charset="-120"/>
               </a:rPr>
-              <a:t>Model CER colors</a:t>
+              <a:t>Calibrate CER quality</a:t>
             </a:r>
             <a:endParaRPr lang="en-US" sz="2000" dirty="0"/>
           </a:p>
@@ -2691,7 +2731,7 @@
                 <a:ea typeface="Inter" pitchFamily="34" charset="-122"/>
                 <a:cs typeface="Inter" pitchFamily="34" charset="-120"/>
               </a:rPr>
-              <a:t>Adapt the routine</a:t>
+              <a:t>Plan feedback + revision</a:t>
             </a:r>
             <a:endParaRPr lang="en-US" sz="2000" dirty="0"/>
           </a:p>
@@ -2714,7 +2754,7 @@
                 <a:ea typeface="Inter" pitchFamily="34" charset="-122"/>
                 <a:cs typeface="Inter" pitchFamily="34" charset="-120"/>
               </a:rPr>
-              <a:t>Write student directions and a check for understanding.</a:t>
+              <a:t>Write student directions, a feedback prompt, and an action.</a:t>
             </a:r>
             <a:endParaRPr lang="en-US" sz="2000" dirty="0"/>
           </a:p>
@@ -2802,7 +2842,7 @@
                 <a:ea typeface="Inter" pitchFamily="34" charset="-122"/>
                 <a:cs typeface="Inter" pitchFamily="34" charset="-120"/>
               </a:rPr>
-              <a:t>Collect completed writing for Friday’s feedback and next-step work.</a:t>
+              <a:t>Collect completed writing for Friday’s feedback and mastery work.</a:t>
             </a:r>
             <a:endParaRPr lang="en-US" sz="2000" dirty="0"/>
           </a:p>
@@ -3025,7 +3065,7 @@
                 <a:ea typeface="Inter" pitchFamily="34" charset="-122"/>
                 <a:cs typeface="Inter" pitchFamily="34" charset="-120"/>
               </a:rPr>
-              <a:t>The Same Benchmark, Now With a Teachable Routine</a:t>
+              <a:t>Calibrate the Benchmark-to-Revision Cycle</a:t>
             </a:r>
             <a:endParaRPr lang="en-US" sz="3000" dirty="0"/>
           </a:p>
@@ -3103,7 +3143,7 @@
                 <a:ea typeface="Inter" pitchFamily="34" charset="-122"/>
                 <a:cs typeface="Inter" pitchFamily="34" charset="-120"/>
               </a:rPr>
-              <a:t>The strategy is not an add-on: it helps students do the same source analysis and evidence-based writing teachers rehearsed Monday and planned Tuesday.</a:t>
+              <a:t>CUBS/CER is the strategy focus within the larger work: calibrating the writing benchmark, expected student thinking, feedback, and revision before Friday’s evidence review.</a:t>
             </a:r>
             <a:endParaRPr lang="en-US" sz="2300" dirty="0"/>
           </a:p>
@@ -3497,7 +3537,7 @@
                 <a:ea typeface="Inter" pitchFamily="34" charset="-122"/>
                 <a:cs typeface="Inter" pitchFamily="34" charset="-120"/>
               </a:rPr>
-              <a:t>Teach CUBS + CER</a:t>
+              <a:t>Calibrate CUBS + CER</a:t>
             </a:r>
             <a:endParaRPr lang="en-US" sz="2000" dirty="0"/>
           </a:p>
@@ -3520,7 +3560,7 @@
                 <a:ea typeface="Inter" pitchFamily="34" charset="-122"/>
                 <a:cs typeface="Inter" pitchFamily="34" charset="-120"/>
               </a:rPr>
-              <a:t>Model and adapt the student routine for an authentic science source/task.</a:t>
+              <a:t>Use the routine to align expectations for feedback and revision.</a:t>
             </a:r>
             <a:endParaRPr lang="en-US" sz="2000" dirty="0"/>
           </a:p>
@@ -5792,7 +5832,7 @@
                 <a:ea typeface="Inter" pitchFamily="34" charset="-122"/>
                 <a:cs typeface="Inter" pitchFamily="34" charset="-120"/>
               </a:rPr>
-              <a:t>Teach the Routine—Do Not Complete the Thinking</a:t>
+              <a:t>Calibrate Feedback That Prompts Revision</a:t>
             </a:r>
             <a:endParaRPr lang="en-US" sz="3000" dirty="0"/>
           </a:p>
@@ -5870,7 +5910,7 @@
                 <a:ea typeface="Inter" pitchFamily="34" charset="-122"/>
                 <a:cs typeface="Inter" pitchFamily="34" charset="-120"/>
               </a:rPr>
-              <a:t>Use explicit modeling, student practice, and feedback that sends students back to the source and their own response. The routine should increase—not replace—student analysis.</a:t>
+              <a:t>Agree on one student action after feedback. Use explicit modeling, practice, and a prompt that sends students back to the source and their own response without completing the thinking.</a:t>
             </a:r>
             <a:endParaRPr lang="en-US" sz="2300" dirty="0"/>
           </a:p>
@@ -6194,7 +6234,7 @@
                 <a:ea typeface="Inter" pitchFamily="34" charset="-122"/>
                 <a:cs typeface="Inter" pitchFamily="34" charset="-120"/>
               </a:rPr>
-              <a:t>Students act on one criterion-based written feedback prompt.</a:t>
+              <a:t>Students act on one calibrated, criterion-based written feedback prompt.</a:t>
             </a:r>
             <a:endParaRPr lang="en-US" sz="2000" dirty="0"/>
           </a:p>
@@ -6567,7 +6607,7 @@
                 <a:ea typeface="Inter" pitchFamily="34" charset="-122"/>
                 <a:cs typeface="Inter" pitchFamily="34" charset="-120"/>
               </a:rPr>
-              <a:t>Protected Course-Alike Application</a:t>
+              <a:t>Protected Course-Alike Calibration + Application</a:t>
             </a:r>
             <a:endParaRPr lang="en-US" sz="3000" dirty="0"/>
           </a:p>
@@ -6835,7 +6875,7 @@
                 <a:ea typeface="Inter" pitchFamily="34" charset="-122"/>
                 <a:cs typeface="Inter" pitchFamily="34" charset="-120"/>
               </a:rPr>
-              <a:t>1. Choose the source/task.</a:t>
+              <a:t>1. Choose the writing benchmark/source/task.</a:t>
             </a:r>
             <a:r>
               <a:rPr lang="en-US" altLang="en-US" sz="2100" dirty="0">
@@ -6913,7 +6953,7 @@
                 <a:ea typeface="Inter" pitchFamily="34" charset="-122"/>
                 <a:cs typeface="Inter" pitchFamily="34" charset="-120"/>
               </a:rPr>
-              <a:t>2. Write the student directions.</a:t>
+              <a:t>2. Calibrate the student expectations.</a:t>
             </a:r>
             <a:r>
               <a:rPr lang="en-US" altLang="en-US" sz="2100" dirty="0">
@@ -6924,7 +6964,7 @@
                 <a:ea typeface="Inter" pitchFamily="34" charset="-122"/>
                 <a:cs typeface="Inter" pitchFamily="34" charset="-120"/>
               </a:rPr>
-              <a:t> Specify what students will CUBS, what they will identify or color-code in CER, and what they will do with the annotation.</a:t>
+              <a:t> Specify what students will CUBS, what they will identify or color-code in CER, and what the response must show to meet the mastery bar.</a:t>
             </a:r>
             <a:endParaRPr lang="en-US" sz="2100" dirty="0"/>
           </a:p>
@@ -6991,7 +7031,7 @@
                 <a:ea typeface="Inter" pitchFamily="34" charset="-122"/>
                 <a:cs typeface="Inter" pitchFamily="34" charset="-120"/>
               </a:rPr>
-              <a:t>3. Plan a check + feedback step.</a:t>
+              <a:t>3. Plan feedback + revision.</a:t>
             </a:r>
             <a:r>
               <a:rPr lang="en-US" altLang="en-US" sz="2100" dirty="0">
@@ -7002,7 +7042,7 @@
                 <a:ea typeface="Inter" pitchFamily="34" charset="-122"/>
                 <a:cs typeface="Inter" pitchFamily="34" charset="-120"/>
               </a:rPr>
-              <a:t> Name the prompt, partner talk, annotation check, or short response that will reveal student thinking and lead to a written-feedback/revision opportunity.</a:t>
+              <a:t> Name the prompt, partner talk, annotation check, or short response that reveals thinking, then write a criterion-based feedback prompt and the revision students will complete.</a:t>
             </a:r>
             <a:endParaRPr lang="en-US" sz="2100" dirty="0"/>
           </a:p>
@@ -7167,23 +7207,25 @@
         <p:spPr>
           <a:xfrm>
             <a:off x="736600" y="1689100"/>
-            <a:ext cx="13208000" cy="787400"/>
-          </a:xfrm>
-          <a:prstGeom prst="rect">
-            <a:avLst/>
-          </a:prstGeom>
-          <a:noFill/>
-          <a:ln/>
-        </p:spPr>
-        <p:txBody>
-          <a:bodyPr wrap="square" lIns="0" tIns="0" rIns="0" bIns="0" rtlCol="0" anchor="t"/>
-          <a:lstStyle/>
-          <a:p>
-            <a:pPr algn="l" indent="0" marL="0">
-              <a:buNone/>
-            </a:pPr>
-            <a:r>
-              <a:rPr lang="en-US" altLang="en-US" sz="4300" dirty="0">
+            <a:ext cx="13843000" cy="787400"/>
+          </a:xfrm>
+          <a:prstGeom prst="rect">
+            <a:avLst/>
+          </a:prstGeom>
+          <a:noFill/>
+          <a:ln/>
+        </p:spPr>
+        <p:txBody>
+          <a:bodyPr wrap="square" lIns="0" tIns="0" rIns="0" bIns="0" rtlCol="0" anchor="t">
+            <a:normAutofit/>
+          </a:bodyPr>
+          <a:lstStyle/>
+          <a:p>
+            <a:pPr algn="l" indent="0" marL="0">
+              <a:buNone/>
+            </a:pPr>
+            <a:r>
+              <a:rPr lang="en-US" altLang="en-US" sz="3900" dirty="0">
                 <a:solidFill>
                   <a:srgbClr val="202124"/>
                 </a:solidFill>
@@ -7191,9 +7233,9 @@
                 <a:ea typeface="Inter" pitchFamily="34" charset="-122"/>
                 <a:cs typeface="Inter" pitchFamily="34" charset="-120"/>
               </a:rPr>
-              <a:t>Use the routine. Collect completed writing. Return Friday.</a:t>
-            </a:r>
-            <a:endParaRPr lang="en-US" sz="4300" dirty="0"/>
+              <a:t>Implement the routine. Collect writing. Revisit feedback and revision Friday.</a:t>
+            </a:r>
+            <a:endParaRPr lang="en-US" sz="3900" dirty="0"/>
           </a:p>
         </p:txBody>
       </p:sp>
@@ -7421,7 +7463,7 @@
                 <a:ea typeface="Inter" pitchFamily="34" charset="-122"/>
                 <a:cs typeface="Inter" pitchFamily="34" charset="-120"/>
               </a:rPr>
-              <a:t>Bring a small de-identified set of completed student writing and notes on written feedback.</a:t>
+              <a:t>Bring a small de-identified set of completed writing and the feedback/revision evidence from the task.</a:t>
             </a:r>
             <a:endParaRPr lang="en-US" sz="2000" dirty="0"/>
           </a:p>

--- a/assets/plc/2026-10-28_Science_Department_PD_Strengthening_Science_Literacy.pptx
+++ b/assets/plc/2026-10-28_Science_Department_PD_Strengthening_Science_Literacy.pptx
@@ -1642,7 +1642,7 @@
         <p:spPr>
           <a:xfrm>
             <a:off x="736600" y="381000"/>
-            <a:ext cx="12700000" cy="279400"/>
+            <a:ext cx="13462000" cy="279400"/>
           </a:xfrm>
           <a:prstGeom prst="rect">
             <a:avLst/>
@@ -1765,7 +1765,7 @@
         <p:spPr>
           <a:xfrm>
             <a:off x="736600" y="3848100"/>
-            <a:ext cx="10922000" cy="1320800"/>
+            <a:ext cx="10922000" cy="1422400"/>
           </a:xfrm>
           <a:prstGeom prst="rect">
             <a:avLst/>
@@ -1779,12 +1779,12 @@
           <a:p>
             <a:pPr algn="l" indent="0" marL="0">
               <a:lnSpc>
-                <a:spcPts val="2760"/>
+                <a:spcPts val="2640"/>
               </a:lnSpc>
               <a:buNone/>
             </a:pPr>
             <a:r>
-              <a:rPr lang="en-US" altLang="en-US" sz="2300" b="1" dirty="0">
+              <a:rPr lang="en-US" altLang="en-US" sz="2200" b="1" dirty="0">
                 <a:solidFill>
                   <a:srgbClr val="C41220"/>
                 </a:solidFill>
@@ -1792,19 +1792,19 @@
                 <a:ea typeface="Inter" pitchFamily="34" charset="-122"/>
                 <a:cs typeface="Inter" pitchFamily="34" charset="-120"/>
               </a:rPr>
-              <a:t>Strategy Focus: Teaching Students to Analyze Science Texts With CUBS + CER.</a:t>
-            </a:r>
-            <a:endParaRPr lang="en-US" sz="2300" dirty="0"/>
+              <a:t>Strategy Focus: Teaching Students to Analyze Science Sources With CUBS + CER.</a:t>
+            </a:r>
+            <a:endParaRPr lang="en-US" sz="2200" dirty="0"/>
           </a:p>
           <a:p>
             <a:pPr algn="l" indent="0" marL="0">
               <a:lnSpc>
-                <a:spcPts val="2760"/>
+                <a:spcPts val="2640"/>
               </a:lnSpc>
               <a:buNone/>
             </a:pPr>
             <a:r>
-              <a:rPr lang="en-US" altLang="en-US" sz="2300" dirty="0">
+              <a:rPr lang="en-US" altLang="en-US" sz="2200" dirty="0">
                 <a:solidFill>
                   <a:srgbClr val="3C4043"/>
                 </a:solidFill>
@@ -1812,9 +1812,9 @@
                 <a:ea typeface="Inter" pitchFamily="34" charset="-122"/>
                 <a:cs typeface="Inter" pitchFamily="34" charset="-120"/>
               </a:rPr>
-              <a:t>Learn and rehearse student-facing routines that prepare students to analyze a science source before constructing and revising an evidence-based explanation.</a:t>
-            </a:r>
-            <a:endParaRPr lang="en-US" sz="2300" dirty="0"/>
+              <a:t>Use adaptable student-facing routines to help students notice, explain, and revise their thinking from a text, data display, diagram, model, investigation result, or other course source.</a:t>
+            </a:r>
+            <a:endParaRPr lang="en-US" sz="2200" dirty="0"/>
           </a:p>
         </p:txBody>
       </p:sp>
@@ -1827,7 +1827,7 @@
         <p:spPr>
           <a:xfrm>
             <a:off x="12242800" y="2057400"/>
-            <a:ext cx="3200400" cy="2984500"/>
+            <a:ext cx="3200400" cy="3073400"/>
           </a:xfrm>
           <a:prstGeom prst="rect">
             <a:avLst/>
@@ -1891,7 +1891,7 @@
         <p:spPr>
           <a:xfrm>
             <a:off x="12547600" y="2933700"/>
-            <a:ext cx="2590800" cy="1549400"/>
+            <a:ext cx="2590800" cy="1714500"/>
           </a:xfrm>
           <a:prstGeom prst="rect">
             <a:avLst/>
@@ -1918,7 +1918,7 @@
                 <a:ea typeface="Inter" pitchFamily="34" charset="-122"/>
                 <a:cs typeface="Inter" pitchFamily="34" charset="-120"/>
               </a:rPr>
-              <a:t>One calibrated, ready-to-teach CUBS/CER routine with clear student expectations, feedback, revision, and a check for understanding.</a:t>
+              <a:t>One course-ready CUBS/CER routine with clear student directions, a feedback and revision action, an evidence check, and a recorded next step.</a:t>
             </a:r>
             <a:endParaRPr lang="en-US" sz="1900" dirty="0"/>
           </a:p>
@@ -1932,8 +1932,8 @@
         </p:nvSpPr>
         <p:spPr>
           <a:xfrm>
-            <a:off x="736600" y="5842000"/>
-            <a:ext cx="14706600" cy="1422400"/>
+            <a:off x="736600" y="5994400"/>
+            <a:ext cx="14706600" cy="1295400"/>
           </a:xfrm>
           <a:prstGeom prst="rect">
             <a:avLst/>
@@ -1957,8 +1957,8 @@
         </p:nvSpPr>
         <p:spPr>
           <a:xfrm>
-            <a:off x="1117600" y="6096000"/>
-            <a:ext cx="13919200" cy="952500"/>
+            <a:off x="1117600" y="6248400"/>
+            <a:ext cx="13919200" cy="838200"/>
           </a:xfrm>
           <a:prstGeom prst="rect">
             <a:avLst/>
@@ -1972,12 +1972,12 @@
           <a:p>
             <a:pPr algn="l" indent="0" marL="0">
               <a:lnSpc>
-                <a:spcPts val="2520"/>
+                <a:spcPts val="2400"/>
               </a:lnSpc>
               <a:buNone/>
             </a:pPr>
             <a:r>
-              <a:rPr lang="en-US" altLang="en-US" sz="2100" b="1" dirty="0">
+              <a:rPr lang="en-US" altLang="en-US" sz="2000" b="1" dirty="0">
                 <a:solidFill>
                   <a:srgbClr val="C41220"/>
                 </a:solidFill>
@@ -1985,10 +1985,10 @@
                 <a:ea typeface="Inter" pitchFamily="34" charset="-122"/>
                 <a:cs typeface="Inter" pitchFamily="34" charset="-120"/>
               </a:rPr>
-              <a:t>The shared model is Biology Benchmark #1.</a:t>
-            </a:r>
-            <a:r>
-              <a:rPr lang="en-US" altLang="en-US" sz="2100" dirty="0">
+              <a:t>Bring an authentic course source/task and 1–2 de-identified writing samples.</a:t>
+            </a:r>
+            <a:r>
+              <a:rPr lang="en-US" altLang="en-US" sz="2000" dirty="0">
                 <a:solidFill>
                   <a:srgbClr val="3C4043"/>
                 </a:solidFill>
@@ -1996,9 +1996,9 @@
                 <a:ea typeface="Inter" pitchFamily="34" charset="-122"/>
                 <a:cs typeface="Inter" pitchFamily="34" charset="-120"/>
               </a:rPr>
-              <a:t> Teams will calibrate the writing benchmark, student-facing CUBS/CER routine, feedback prompt, and revision action, then adapt the strategy to an appropriate course task.</a:t>
-            </a:r>
-            <a:endParaRPr lang="en-US" sz="2100" dirty="0"/>
+              <a:t> The Biology benchmark is optional; each teacher will adapt the routine and use samples to calibrate student thinking, feedback, and revision.</a:t>
+            </a:r>
+            <a:endParaRPr lang="en-US" sz="2000" dirty="0"/>
           </a:p>
         </p:txBody>
       </p:sp>
@@ -2011,7 +2011,7 @@
         <p:spPr>
           <a:xfrm>
             <a:off x="736600" y="7975600"/>
-            <a:ext cx="12827000" cy="431800"/>
+            <a:ext cx="13208000" cy="431800"/>
           </a:xfrm>
           <a:prstGeom prst="rect">
             <a:avLst/>
@@ -2196,7 +2196,7 @@
                 <a:ea typeface="Inter" pitchFamily="34" charset="-122"/>
                 <a:cs typeface="Inter" pitchFamily="34" charset="-120"/>
               </a:rPr>
-              <a:t>Calibrate the Benchmark-to-Revision Path</a:t>
+              <a:t>Calibrate a Transferable Science Literacy Routine</a:t>
             </a:r>
             <a:endParaRPr lang="en-US" sz="3000" dirty="0"/>
           </a:p>
@@ -2277,7 +2277,7 @@
                 <a:ea typeface="Inter" pitchFamily="34" charset="-122"/>
                 <a:cs typeface="Inter" pitchFamily="34" charset="-120"/>
               </a:rPr>
-              <a:t>Use one shared writing benchmark to align the student path from source analysis to a complete evidence-based CER response, criterion-based feedback, and a revision students can act on.</a:t>
+              <a:t>Use an authentic course source, response task, and de-identified writing samples to align what students notice, explain, revise, and show as evidence of standards-aligned science learning.</a:t>
             </a:r>
             <a:endParaRPr lang="en-US" sz="2300" dirty="0"/>
           </a:p>
@@ -2467,7 +2467,7 @@
                 <a:ea typeface="Inter" pitchFamily="34" charset="-122"/>
                 <a:cs typeface="Inter" pitchFamily="34" charset="-120"/>
               </a:rPr>
-              <a:t>Model CUBS</a:t>
+              <a:t>Choose the source + task</a:t>
             </a:r>
             <a:endParaRPr lang="en-US" sz="2000" dirty="0"/>
           </a:p>
@@ -2490,7 +2490,7 @@
                 <a:ea typeface="Inter" pitchFamily="34" charset="-122"/>
                 <a:cs typeface="Inter" pitchFamily="34" charset="-120"/>
               </a:rPr>
-              <a:t>Make the source-analysis moves visible.</a:t>
+              <a:t>Use a text, graph, data set, diagram, model, lab result, or scenario.</a:t>
             </a:r>
             <a:endParaRPr lang="en-US" sz="2000" dirty="0"/>
           </a:p>
@@ -2555,7 +2555,7 @@
                 <a:ea typeface="Inter" pitchFamily="34" charset="-122"/>
                 <a:cs typeface="Inter" pitchFamily="34" charset="-120"/>
               </a:rPr>
-              <a:t>Rehearse the source</a:t>
+              <a:t>Make noticing visible</a:t>
             </a:r>
             <a:endParaRPr lang="en-US" sz="2000" dirty="0"/>
           </a:p>
@@ -2578,7 +2578,7 @@
                 <a:ea typeface="Inter" pitchFamily="34" charset="-122"/>
                 <a:cs typeface="Inter" pitchFamily="34" charset="-120"/>
               </a:rPr>
-              <a:t>Annotate a science text, visual, or data display.</a:t>
+              <a:t>Rehearse CUBS or another access routine before students write.</a:t>
             </a:r>
             <a:endParaRPr lang="en-US" sz="2000" dirty="0"/>
           </a:p>
@@ -2666,7 +2666,7 @@
                 <a:ea typeface="Inter" pitchFamily="34" charset="-122"/>
                 <a:cs typeface="Inter" pitchFamily="34" charset="-120"/>
               </a:rPr>
-              <a:t>See claim, evidence, reasoning, and transitions.</a:t>
+              <a:t>Clarify claim, evidence, reasoning, and links to the science idea.</a:t>
             </a:r>
             <a:endParaRPr lang="en-US" sz="2000" dirty="0"/>
           </a:p>
@@ -2754,7 +2754,7 @@
                 <a:ea typeface="Inter" pitchFamily="34" charset="-122"/>
                 <a:cs typeface="Inter" pitchFamily="34" charset="-120"/>
               </a:rPr>
-              <a:t>Write student directions, a feedback prompt, and an action.</a:t>
+              <a:t>Write a prompt and a specific action students will take.</a:t>
             </a:r>
             <a:endParaRPr lang="en-US" sz="2000" dirty="0"/>
           </a:p>
@@ -2819,7 +2819,7 @@
                 <a:ea typeface="Inter" pitchFamily="34" charset="-122"/>
                 <a:cs typeface="Inter" pitchFamily="34" charset="-120"/>
               </a:rPr>
-              <a:t>Use the evidence</a:t>
+              <a:t>Share, reflect + commit</a:t>
             </a:r>
             <a:endParaRPr lang="en-US" sz="2000" dirty="0"/>
           </a:p>
@@ -2842,7 +2842,7 @@
                 <a:ea typeface="Inter" pitchFamily="34" charset="-122"/>
                 <a:cs typeface="Inter" pitchFamily="34" charset="-120"/>
               </a:rPr>
-              <a:t>Collect completed writing for Friday’s feedback and mastery work.</a:t>
+              <a:t>Learn from colleague strategies, read samples, and record a feedback-informed next move.</a:t>
             </a:r>
             <a:endParaRPr lang="en-US" sz="2000" dirty="0"/>
           </a:p>
@@ -2915,7 +2915,7 @@
                 <a:ea typeface="Inter" pitchFamily="34" charset="-122"/>
                 <a:cs typeface="Inter" pitchFamily="34" charset="-120"/>
               </a:rPr>
-              <a:t> Use it to help students do the task; do not turn it into a separate graded assignment.</a:t>
+              <a:t> Adapt the source and product; keep students responsible for the science reasoning.</a:t>
             </a:r>
             <a:endParaRPr lang="en-US" sz="2100" dirty="0"/>
           </a:p>
@@ -3065,7 +3065,7 @@
                 <a:ea typeface="Inter" pitchFamily="34" charset="-122"/>
                 <a:cs typeface="Inter" pitchFamily="34" charset="-120"/>
               </a:rPr>
-              <a:t>Calibrate the Benchmark-to-Revision Cycle</a:t>
+              <a:t>One Evidence-to-Action Cycle, Multiple Science Contexts</a:t>
             </a:r>
             <a:endParaRPr lang="en-US" sz="3000" dirty="0"/>
           </a:p>
@@ -3143,7 +3143,7 @@
                 <a:ea typeface="Inter" pitchFamily="34" charset="-122"/>
                 <a:cs typeface="Inter" pitchFamily="34" charset="-120"/>
               </a:rPr>
-              <a:t>CUBS/CER is the strategy focus within the larger work: calibrating the writing benchmark, expected student thinking, feedback, and revision before Friday’s evidence review.</a:t>
+              <a:t>The Biology benchmark was a shared learning model. Today, every teacher applies the same source-analysis, explanation, feedback, and revision cycle to an authentic task in the course they teach.</a:t>
             </a:r>
             <a:endParaRPr lang="en-US" sz="2300" dirty="0"/>
           </a:p>
@@ -3233,7 +3233,7 @@
                 <a:ea typeface="Inter" pitchFamily="34" charset="-122"/>
                 <a:cs typeface="Inter" pitchFamily="34" charset="-120"/>
               </a:rPr>
-              <a:t>Experience the task</a:t>
+              <a:t>Experience a task</a:t>
             </a:r>
             <a:endParaRPr lang="en-US" sz="2000" dirty="0"/>
           </a:p>
@@ -3256,7 +3256,7 @@
                 <a:ea typeface="Inter" pitchFamily="34" charset="-122"/>
                 <a:cs typeface="Inter" pitchFamily="34" charset="-120"/>
               </a:rPr>
-              <a:t>Teachers completed and analyzed the benchmark as students.</a:t>
+              <a:t>Use a common benchmark model to see the learner demand.</a:t>
             </a:r>
             <a:endParaRPr lang="en-US" sz="2000" dirty="0"/>
           </a:p>
@@ -3408,7 +3408,7 @@
                 <a:ea typeface="Inter" pitchFamily="34" charset="-122"/>
                 <a:cs typeface="Inter" pitchFamily="34" charset="-120"/>
               </a:rPr>
-              <a:t>Teams planned access, facilitation, feedback, and revision.</a:t>
+              <a:t>Plan access, facilitation, feedback, and revision for your course.</a:t>
             </a:r>
             <a:endParaRPr lang="en-US" sz="2000" dirty="0"/>
           </a:p>
@@ -3537,7 +3537,7 @@
                 <a:ea typeface="Inter" pitchFamily="34" charset="-122"/>
                 <a:cs typeface="Inter" pitchFamily="34" charset="-120"/>
               </a:rPr>
-              <a:t>Calibrate CUBS + CER</a:t>
+              <a:t>Adapt CUBS + CER</a:t>
             </a:r>
             <a:endParaRPr lang="en-US" sz="2000" dirty="0"/>
           </a:p>
@@ -3560,7 +3560,7 @@
                 <a:ea typeface="Inter" pitchFamily="34" charset="-122"/>
                 <a:cs typeface="Inter" pitchFamily="34" charset="-120"/>
               </a:rPr>
-              <a:t>Use the routine to align expectations for feedback and revision.</a:t>
+              <a:t>Teach students how to analyze sources and explain evidence.</a:t>
             </a:r>
             <a:endParaRPr lang="en-US" sz="2000" dirty="0"/>
           </a:p>
@@ -3707,7 +3707,7 @@
                 <a:ea typeface="Inter" pitchFamily="34" charset="-122"/>
                 <a:cs typeface="Inter" pitchFamily="34" charset="-120"/>
               </a:rPr>
-              <a:t>Analyze completed student work, provide written feedback, and plan a precise mastery next step.</a:t>
+              <a:t>Use completed course-specific work to provide feedback and plan a precise mastery next step.</a:t>
             </a:r>
             <a:endParaRPr lang="en-US" sz="2000" dirty="0"/>
           </a:p>
@@ -3774,7 +3774,7 @@
                 <a:ea typeface="Inter" pitchFamily="34" charset="-122"/>
                 <a:cs typeface="Inter" pitchFamily="34" charset="-120"/>
               </a:rPr>
-              <a:t>Keep the work transferable:</a:t>
+              <a:t>Keep the process common and the science authentic:</a:t>
             </a:r>
             <a:r>
               <a:rPr lang="en-US" altLang="en-US" sz="2100" dirty="0">
@@ -3785,7 +3785,7 @@
                 <a:ea typeface="Inter" pitchFamily="34" charset="-122"/>
                 <a:cs typeface="Inter" pitchFamily="34" charset="-120"/>
               </a:rPr>
-              <a:t> all high-school science teachers adapt the routine to their own course task while holding the same expectations for evidence-based thinking.</a:t>
+              <a:t> the routine can support Biology, Chemistry, Physics, Environmental Science, and every other science course.</a:t>
             </a:r>
             <a:endParaRPr lang="en-US" sz="2100" dirty="0"/>
           </a:p>
@@ -3935,7 +3935,7 @@
                 <a:ea typeface="Inter" pitchFamily="34" charset="-122"/>
                 <a:cs typeface="Inter" pitchFamily="34" charset="-120"/>
               </a:rPr>
-              <a:t>Model CUBS: Analyze the Source Before Writing</a:t>
+              <a:t>Model CUBS: Analyze a Science Source Before Writing</a:t>
             </a:r>
             <a:endParaRPr lang="en-US" sz="3000" dirty="0"/>
           </a:p>
@@ -4038,7 +4038,7 @@
                 <a:ea typeface="Inter" pitchFamily="34" charset="-122"/>
                 <a:cs typeface="Inter" pitchFamily="34" charset="-120"/>
               </a:rPr>
-              <a:t>Think aloud: make the reading, visual-analysis, vocabulary, and question-asking moves visible before asking students to write.</a:t>
+              <a:t>Think aloud: make the reading, visual-analysis, vocabulary, and question-asking moves visible before students explain.</a:t>
             </a:r>
             <a:endParaRPr lang="en-US" sz="2000" dirty="0"/>
           </a:p>
@@ -4128,7 +4128,7 @@
                 <a:ea typeface="Inter" pitchFamily="34" charset="-122"/>
                 <a:cs typeface="Inter" pitchFamily="34" charset="-120"/>
               </a:rPr>
-              <a:t>Circle the main idea or the part of the source that names the central question, claim, or phenomenon.</a:t>
+              <a:t>Circle the central question, phenomenon, pattern, relationship, or claim the source helps students investigate.</a:t>
             </a:r>
             <a:endParaRPr lang="en-US" sz="2100" dirty="0"/>
           </a:p>
@@ -4218,7 +4218,7 @@
                 <a:ea typeface="Inter" pitchFamily="34" charset="-122"/>
                 <a:cs typeface="Inter" pitchFamily="34" charset="-120"/>
               </a:rPr>
-              <a:t>Underline supporting details, observations, data, or relationships students may use as evidence.</a:t>
+              <a:t>Underline observations, data, labels, details, or relationships students may use as evidence.</a:t>
             </a:r>
             <a:endParaRPr lang="en-US" sz="2100" dirty="0"/>
           </a:p>
@@ -4308,7 +4308,7 @@
                 <a:ea typeface="Inter" pitchFamily="34" charset="-122"/>
                 <a:cs typeface="Inter" pitchFamily="34" charset="-120"/>
               </a:rPr>
-              <a:t>Box unfamiliar or high-leverage words. Ask: what does this term mean here and why does it matter?</a:t>
+              <a:t>Box unfamiliar or high-leverage words, symbols, units, or labels that students must interpret accurately.</a:t>
             </a:r>
             <a:endParaRPr lang="en-US" sz="2100" dirty="0"/>
           </a:p>
@@ -4398,7 +4398,7 @@
                 <a:ea typeface="Inter" pitchFamily="34" charset="-122"/>
                 <a:cs typeface="Inter" pitchFamily="34" charset="-120"/>
               </a:rPr>
-              <a:t>Summarize the science idea or record the question the source helps answer.</a:t>
+              <a:t>Summarize what the source shows, the question it raises, or the explanation students will need to construct.</a:t>
             </a:r>
             <a:endParaRPr lang="en-US" sz="2100" dirty="0"/>
           </a:p>
@@ -4468,7 +4468,7 @@
                 <a:ea typeface="Inter" pitchFamily="34" charset="-122"/>
                 <a:cs typeface="Inter" pitchFamily="34" charset="-120"/>
               </a:rPr>
-              <a:t> “Read and annotate today’s source. Record any questions you still have on your paper.”</a:t>
+              <a:t> “Annotate today’s source. Record what you notice, what it may mean, and a question you still have.”</a:t>
             </a:r>
             <a:endParaRPr lang="en-US" sz="2000" dirty="0"/>
           </a:p>
@@ -4594,7 +4594,7 @@
         <p:spPr>
           <a:xfrm>
             <a:off x="508000" y="292100"/>
-            <a:ext cx="11811000" cy="482600"/>
+            <a:ext cx="11938000" cy="482600"/>
           </a:xfrm>
           <a:prstGeom prst="rect">
             <a:avLst/>
@@ -4618,7 +4618,7 @@
                 <a:ea typeface="Inter" pitchFamily="34" charset="-122"/>
                 <a:cs typeface="Inter" pitchFamily="34" charset="-120"/>
               </a:rPr>
-              <a:t>Practice CUBS Before Constructing the CER</a:t>
+              <a:t>Practice CUBS, Then Read a Student Writing Sample</a:t>
             </a:r>
             <a:endParaRPr lang="en-US" sz="3000" dirty="0"/>
           </a:p>
@@ -4696,7 +4696,7 @@
                 <a:ea typeface="Inter" pitchFamily="34" charset="-122"/>
                 <a:cs typeface="Inter" pitchFamily="34" charset="-120"/>
               </a:rPr>
-              <a:t>Use the food web and Question 5 from the benchmark as a shared visual/text example. The exact same routine can be used with a science article, data display, model, or investigation result.</a:t>
+              <a:t>Choose a course-relevant source and 1–2 de-identified writing samples. The Biology benchmark is optional; use the routine and samples from your own science classroom.</a:t>
             </a:r>
             <a:endParaRPr lang="en-US" sz="2300" dirty="0"/>
           </a:p>
@@ -4711,7 +4711,7 @@
         <p:spPr>
           <a:xfrm>
             <a:off x="508000" y="2413000"/>
-            <a:ext cx="6604000" cy="4953000"/>
+            <a:ext cx="6731000" cy="4953000"/>
           </a:xfrm>
           <a:prstGeom prst="rect">
             <a:avLst/>
@@ -4727,29 +4727,45 @@
           </a:ln>
         </p:spPr>
       </p:sp>
-      <p:pic>
-        <p:nvPicPr>
-          <p:cNvPr id="7" name="benchmark-practice" descr="preencoded.png">    </p:cNvPr>
-          <p:cNvPicPr>
-            <a:picLocks noChangeAspect="1"/>
-          </p:cNvPicPr>
-          <p:nvPr/>
-        </p:nvPicPr>
-        <p:blipFill>
-          <a:blip r:embed="rId1"/>
-          <a:srcRect l="-38072" r="-38072" t="0" b="0"/>
-          <a:stretch/>
-        </p:blipFill>
-        <p:spPr>
-          <a:xfrm>
-            <a:off x="698500" y="2603500"/>
-            <a:ext cx="6223000" cy="4572000"/>
-          </a:xfrm>
-          <a:prstGeom prst="rect">
-            <a:avLst/>
-          </a:prstGeom>
-        </p:spPr>
-      </p:pic>
+      <p:sp>
+        <p:nvSpPr>
+          <p:cNvPr id="7" name="source-title"/>
+          <p:cNvSpPr/>
+          <p:nvPr/>
+        </p:nvSpPr>
+        <p:spPr>
+          <a:xfrm>
+            <a:off x="889000" y="2781300"/>
+            <a:ext cx="5969000" cy="381000"/>
+          </a:xfrm>
+          <a:prstGeom prst="rect">
+            <a:avLst/>
+          </a:prstGeom>
+          <a:noFill/>
+          <a:ln/>
+        </p:spPr>
+        <p:txBody>
+          <a:bodyPr wrap="square" lIns="0" tIns="0" rIns="0" bIns="0" rtlCol="0" anchor="t"/>
+          <a:lstStyle/>
+          <a:p>
+            <a:pPr algn="l" indent="0" marL="0">
+              <a:buNone/>
+            </a:pPr>
+            <a:r>
+              <a:rPr lang="en-US" altLang="en-US" sz="2500" dirty="0">
+                <a:solidFill>
+                  <a:srgbClr val="3C4043"/>
+                </a:solidFill>
+                <a:latin typeface="Inter" pitchFamily="34" charset="0"/>
+                <a:ea typeface="Inter" pitchFamily="34" charset="-122"/>
+                <a:cs typeface="Inter" pitchFamily="34" charset="-120"/>
+              </a:rPr>
+              <a:t>SELECT A SOURCE + WRITING SAMPLE</a:t>
+            </a:r>
+            <a:endParaRPr lang="en-US" sz="2500" dirty="0"/>
+          </a:p>
+        </p:txBody>
+      </p:sp>
       <p:sp>
         <p:nvSpPr>
           <p:cNvPr id="8" name="calibration-shape-7"/>
@@ -4758,8 +4774,8 @@
         </p:nvSpPr>
         <p:spPr>
           <a:xfrm>
-            <a:off x="7493000" y="2413000"/>
-            <a:ext cx="8255000" cy="4953000"/>
+            <a:off x="889000" y="3479800"/>
+            <a:ext cx="2667000" cy="1270000"/>
           </a:xfrm>
           <a:prstGeom prst="rect">
             <a:avLst/>
@@ -4777,13 +4793,337 @@
       </p:sp>
       <p:sp>
         <p:nvSpPr>
-          <p:cNvPr id="9" name="protocol-title"/>
-          <p:cNvSpPr/>
-          <p:nvPr/>
-        </p:nvSpPr>
-        <p:spPr>
-          <a:xfrm>
-            <a:off x="7874000" y="2781300"/>
+          <p:cNvPr id="9" name="calibration-shape-8"/>
+          <p:cNvSpPr/>
+          <p:nvPr/>
+        </p:nvSpPr>
+        <p:spPr>
+          <a:xfrm>
+            <a:off x="4064000" y="3479800"/>
+            <a:ext cx="2667000" cy="1270000"/>
+          </a:xfrm>
+          <a:prstGeom prst="rect">
+            <a:avLst/>
+          </a:prstGeom>
+          <a:solidFill>
+            <a:srgbClr val="F3F4F6"/>
+          </a:solidFill>
+          <a:ln w="12700">
+            <a:solidFill>
+              <a:srgbClr val="D1D5DB"/>
+            </a:solidFill>
+            <a:prstDash val="solid"/>
+          </a:ln>
+        </p:spPr>
+      </p:sp>
+      <p:sp>
+        <p:nvSpPr>
+          <p:cNvPr id="10" name="calibration-shape-9"/>
+          <p:cNvSpPr/>
+          <p:nvPr/>
+        </p:nvSpPr>
+        <p:spPr>
+          <a:xfrm>
+            <a:off x="889000" y="5207000"/>
+            <a:ext cx="2667000" cy="1270000"/>
+          </a:xfrm>
+          <a:prstGeom prst="rect">
+            <a:avLst/>
+          </a:prstGeom>
+          <a:solidFill>
+            <a:srgbClr val="F3F4F6"/>
+          </a:solidFill>
+          <a:ln w="12700">
+            <a:solidFill>
+              <a:srgbClr val="D1D5DB"/>
+            </a:solidFill>
+            <a:prstDash val="solid"/>
+          </a:ln>
+        </p:spPr>
+      </p:sp>
+      <p:sp>
+        <p:nvSpPr>
+          <p:cNvPr id="11" name="calibration-shape-10"/>
+          <p:cNvSpPr/>
+          <p:nvPr/>
+        </p:nvSpPr>
+        <p:spPr>
+          <a:xfrm>
+            <a:off x="4064000" y="5207000"/>
+            <a:ext cx="2667000" cy="1270000"/>
+          </a:xfrm>
+          <a:prstGeom prst="rect">
+            <a:avLst/>
+          </a:prstGeom>
+          <a:solidFill>
+            <a:srgbClr val="F3F4F6"/>
+          </a:solidFill>
+          <a:ln w="12700">
+            <a:solidFill>
+              <a:srgbClr val="D1D5DB"/>
+            </a:solidFill>
+            <a:prstDash val="solid"/>
+          </a:ln>
+        </p:spPr>
+      </p:sp>
+      <p:sp>
+        <p:nvSpPr>
+          <p:cNvPr id="12" name="source1"/>
+          <p:cNvSpPr/>
+          <p:nvPr/>
+        </p:nvSpPr>
+        <p:spPr>
+          <a:xfrm>
+            <a:off x="1117600" y="3733800"/>
+            <a:ext cx="2209800" cy="762000"/>
+          </a:xfrm>
+          <a:prstGeom prst="rect">
+            <a:avLst/>
+          </a:prstGeom>
+          <a:noFill/>
+          <a:ln/>
+        </p:spPr>
+        <p:txBody>
+          <a:bodyPr wrap="square" lIns="0" tIns="0" rIns="0" bIns="0" rtlCol="0" anchor="ctr"/>
+          <a:lstStyle/>
+          <a:p>
+            <a:pPr algn="ctr" indent="0" marL="0">
+              <a:buNone/>
+            </a:pPr>
+            <a:r>
+              <a:rPr lang="en-US" altLang="en-US" sz="1900" b="1" dirty="0">
+                <a:solidFill>
+                  <a:srgbClr val="C41220"/>
+                </a:solidFill>
+                <a:latin typeface="Inter" pitchFamily="34" charset="0"/>
+                <a:ea typeface="Inter" pitchFamily="34" charset="-122"/>
+                <a:cs typeface="Inter" pitchFamily="34" charset="-120"/>
+              </a:rPr>
+              <a:t>ARTICLE OR TEXT SET</a:t>
+            </a:r>
+            <a:endParaRPr lang="en-US" sz="1900" dirty="0"/>
+          </a:p>
+          <a:p>
+            <a:pPr algn="ctr" indent="0" marL="0">
+              <a:buNone/>
+            </a:pPr>
+            <a:r>
+              <a:rPr lang="en-US" altLang="en-US" sz="1600" dirty="0">
+                <a:solidFill>
+                  <a:srgbClr val="3C4043"/>
+                </a:solidFill>
+                <a:latin typeface="Inter" pitchFamily="34" charset="0"/>
+                <a:ea typeface="Inter" pitchFamily="34" charset="-122"/>
+                <a:cs typeface="Inter" pitchFamily="34" charset="-120"/>
+              </a:rPr>
+              <a:t>explanation, scenario, procedure</a:t>
+            </a:r>
+            <a:endParaRPr lang="en-US" sz="1900" dirty="0"/>
+          </a:p>
+        </p:txBody>
+      </p:sp>
+      <p:sp>
+        <p:nvSpPr>
+          <p:cNvPr id="13" name="source2"/>
+          <p:cNvSpPr/>
+          <p:nvPr/>
+        </p:nvSpPr>
+        <p:spPr>
+          <a:xfrm>
+            <a:off x="4292600" y="3733800"/>
+            <a:ext cx="2209800" cy="762000"/>
+          </a:xfrm>
+          <a:prstGeom prst="rect">
+            <a:avLst/>
+          </a:prstGeom>
+          <a:noFill/>
+          <a:ln/>
+        </p:spPr>
+        <p:txBody>
+          <a:bodyPr wrap="square" lIns="0" tIns="0" rIns="0" bIns="0" rtlCol="0" anchor="ctr"/>
+          <a:lstStyle/>
+          <a:p>
+            <a:pPr algn="ctr" indent="0" marL="0">
+              <a:buNone/>
+            </a:pPr>
+            <a:r>
+              <a:rPr lang="en-US" altLang="en-US" sz="1900" b="1" dirty="0">
+                <a:solidFill>
+                  <a:srgbClr val="C41220"/>
+                </a:solidFill>
+                <a:latin typeface="Inter" pitchFamily="34" charset="0"/>
+                <a:ea typeface="Inter" pitchFamily="34" charset="-122"/>
+                <a:cs typeface="Inter" pitchFamily="34" charset="-120"/>
+              </a:rPr>
+              <a:t>DATA OR GRAPH</a:t>
+            </a:r>
+            <a:endParaRPr lang="en-US" sz="1900" dirty="0"/>
+          </a:p>
+          <a:p>
+            <a:pPr algn="ctr" indent="0" marL="0">
+              <a:buNone/>
+            </a:pPr>
+            <a:r>
+              <a:rPr lang="en-US" altLang="en-US" sz="1600" dirty="0">
+                <a:solidFill>
+                  <a:srgbClr val="3C4043"/>
+                </a:solidFill>
+                <a:latin typeface="Inter" pitchFamily="34" charset="0"/>
+                <a:ea typeface="Inter" pitchFamily="34" charset="-122"/>
+                <a:cs typeface="Inter" pitchFamily="34" charset="-120"/>
+              </a:rPr>
+              <a:t>table, graph, calculation, pattern</a:t>
+            </a:r>
+            <a:endParaRPr lang="en-US" sz="1900" dirty="0"/>
+          </a:p>
+        </p:txBody>
+      </p:sp>
+      <p:sp>
+        <p:nvSpPr>
+          <p:cNvPr id="14" name="source3"/>
+          <p:cNvSpPr/>
+          <p:nvPr/>
+        </p:nvSpPr>
+        <p:spPr>
+          <a:xfrm>
+            <a:off x="1117600" y="5461000"/>
+            <a:ext cx="2209800" cy="762000"/>
+          </a:xfrm>
+          <a:prstGeom prst="rect">
+            <a:avLst/>
+          </a:prstGeom>
+          <a:noFill/>
+          <a:ln/>
+        </p:spPr>
+        <p:txBody>
+          <a:bodyPr wrap="square" lIns="0" tIns="0" rIns="0" bIns="0" rtlCol="0" anchor="ctr"/>
+          <a:lstStyle/>
+          <a:p>
+            <a:pPr algn="ctr" indent="0" marL="0">
+              <a:buNone/>
+            </a:pPr>
+            <a:r>
+              <a:rPr lang="en-US" altLang="en-US" sz="1900" b="1" dirty="0">
+                <a:solidFill>
+                  <a:srgbClr val="C41220"/>
+                </a:solidFill>
+                <a:latin typeface="Inter" pitchFamily="34" charset="0"/>
+                <a:ea typeface="Inter" pitchFamily="34" charset="-122"/>
+                <a:cs typeface="Inter" pitchFamily="34" charset="-120"/>
+              </a:rPr>
+              <a:t>DIAGRAM OR MODEL</a:t>
+            </a:r>
+            <a:endParaRPr lang="en-US" sz="1900" dirty="0"/>
+          </a:p>
+          <a:p>
+            <a:pPr algn="ctr" indent="0" marL="0">
+              <a:buNone/>
+            </a:pPr>
+            <a:r>
+              <a:rPr lang="en-US" altLang="en-US" sz="1600" dirty="0">
+                <a:solidFill>
+                  <a:srgbClr val="3C4043"/>
+                </a:solidFill>
+                <a:latin typeface="Inter" pitchFamily="34" charset="0"/>
+                <a:ea typeface="Inter" pitchFamily="34" charset="-122"/>
+                <a:cs typeface="Inter" pitchFamily="34" charset="-120"/>
+              </a:rPr>
+              <a:t>system, process, particle model</a:t>
+            </a:r>
+            <a:endParaRPr lang="en-US" sz="1900" dirty="0"/>
+          </a:p>
+        </p:txBody>
+      </p:sp>
+      <p:sp>
+        <p:nvSpPr>
+          <p:cNvPr id="15" name="source4"/>
+          <p:cNvSpPr/>
+          <p:nvPr/>
+        </p:nvSpPr>
+        <p:spPr>
+          <a:xfrm>
+            <a:off x="4292600" y="5461000"/>
+            <a:ext cx="2209800" cy="762000"/>
+          </a:xfrm>
+          <a:prstGeom prst="rect">
+            <a:avLst/>
+          </a:prstGeom>
+          <a:noFill/>
+          <a:ln/>
+        </p:spPr>
+        <p:txBody>
+          <a:bodyPr wrap="square" lIns="0" tIns="0" rIns="0" bIns="0" rtlCol="0" anchor="ctr"/>
+          <a:lstStyle/>
+          <a:p>
+            <a:pPr algn="ctr" indent="0" marL="0">
+              <a:buNone/>
+            </a:pPr>
+            <a:r>
+              <a:rPr lang="en-US" altLang="en-US" sz="1900" b="1" dirty="0">
+                <a:solidFill>
+                  <a:srgbClr val="C41220"/>
+                </a:solidFill>
+                <a:latin typeface="Inter" pitchFamily="34" charset="0"/>
+                <a:ea typeface="Inter" pitchFamily="34" charset="-122"/>
+                <a:cs typeface="Inter" pitchFamily="34" charset="-120"/>
+              </a:rPr>
+              <a:t>INVESTIGATION RESULT</a:t>
+            </a:r>
+            <a:endParaRPr lang="en-US" sz="1900" dirty="0"/>
+          </a:p>
+          <a:p>
+            <a:pPr algn="ctr" indent="0" marL="0">
+              <a:buNone/>
+            </a:pPr>
+            <a:r>
+              <a:rPr lang="en-US" altLang="en-US" sz="1600" dirty="0">
+                <a:solidFill>
+                  <a:srgbClr val="3C4043"/>
+                </a:solidFill>
+                <a:latin typeface="Inter" pitchFamily="34" charset="0"/>
+                <a:ea typeface="Inter" pitchFamily="34" charset="-122"/>
+                <a:cs typeface="Inter" pitchFamily="34" charset="-120"/>
+              </a:rPr>
+              <a:t>observation, evidence, conclusion</a:t>
+            </a:r>
+            <a:endParaRPr lang="en-US" sz="1900" dirty="0"/>
+          </a:p>
+        </p:txBody>
+      </p:sp>
+      <p:sp>
+        <p:nvSpPr>
+          <p:cNvPr id="16" name="calibration-shape-15"/>
+          <p:cNvSpPr/>
+          <p:nvPr/>
+        </p:nvSpPr>
+        <p:spPr>
+          <a:xfrm>
+            <a:off x="7620000" y="2413000"/>
+            <a:ext cx="8128000" cy="4953000"/>
+          </a:xfrm>
+          <a:prstGeom prst="rect">
+            <a:avLst/>
+          </a:prstGeom>
+          <a:solidFill>
+            <a:srgbClr val="F3F4F6"/>
+          </a:solidFill>
+          <a:ln w="12700">
+            <a:solidFill>
+              <a:srgbClr val="D1D5DB"/>
+            </a:solidFill>
+            <a:prstDash val="solid"/>
+          </a:ln>
+        </p:spPr>
+      </p:sp>
+      <p:sp>
+        <p:nvSpPr>
+          <p:cNvPr id="17" name="protocol-title"/>
+          <p:cNvSpPr/>
+          <p:nvPr/>
+        </p:nvSpPr>
+        <p:spPr>
+          <a:xfrm>
+            <a:off x="8001000" y="2781300"/>
             <a:ext cx="7239000" cy="381000"/>
           </a:xfrm>
           <a:prstGeom prst="rect">
@@ -4808,7 +5148,7 @@
                 <a:ea typeface="Inter" pitchFamily="34" charset="-122"/>
                 <a:cs typeface="Inter" pitchFamily="34" charset="-120"/>
               </a:rPr>
-              <a:t>PAIR PRACTICE: WHAT WILL STUDENTS NEED TO NOTICE?</a:t>
+              <a:t>PAIR PRACTICE: WHAT MUST STUDENTS NOTICE?</a:t>
             </a:r>
             <a:endParaRPr lang="en-US" sz="2500" dirty="0"/>
           </a:p>
@@ -4816,13 +5156,13 @@
       </p:sp>
       <p:sp>
         <p:nvSpPr>
-          <p:cNvPr id="10" name="protocol"/>
-          <p:cNvSpPr/>
-          <p:nvPr/>
-        </p:nvSpPr>
-        <p:spPr>
-          <a:xfrm>
-            <a:off x="7874000" y="3467100"/>
+          <p:cNvPr id="18" name="protocol"/>
+          <p:cNvSpPr/>
+          <p:nvPr/>
+        </p:nvSpPr>
+        <p:spPr>
+          <a:xfrm>
+            <a:off x="8001000" y="3467100"/>
             <a:ext cx="7112000" cy="3175000"/>
           </a:xfrm>
           <a:prstGeom prst="rect">
@@ -4861,7 +5201,7 @@
                 <a:ea typeface="Inter" pitchFamily="34" charset="-122"/>
                 <a:cs typeface="Inter" pitchFamily="34" charset="-120"/>
               </a:rPr>
-              <a:t> the prediction question and central relationship.</a:t>
+              <a:t> the question, phenomenon, pattern, or relationship students must address.</a:t>
             </a:r>
             <a:endParaRPr lang="en-US" sz="2100" dirty="0"/>
           </a:p>
@@ -4892,7 +5232,7 @@
                 <a:ea typeface="Inter" pitchFamily="34" charset="-122"/>
                 <a:cs typeface="Inter" pitchFamily="34" charset="-120"/>
               </a:rPr>
-              <a:t> the graph and food-web details a student could use as evidence.</a:t>
+              <a:t> details, observations, data, or labels that can serve as evidence.</a:t>
             </a:r>
             <a:endParaRPr lang="en-US" sz="2100" dirty="0"/>
           </a:p>
@@ -4923,7 +5263,7 @@
                 <a:ea typeface="Inter" pitchFamily="34" charset="-122"/>
                 <a:cs typeface="Inter" pitchFamily="34" charset="-120"/>
               </a:rPr>
-              <a:t> terms that could prevent access to the task.</a:t>
+              <a:t> vocabulary, symbols, units, or representations that could limit access.</a:t>
             </a:r>
             <a:endParaRPr lang="en-US" sz="2100" dirty="0"/>
           </a:p>
@@ -4954,7 +5294,7 @@
                 <a:ea typeface="Inter" pitchFamily="34" charset="-122"/>
                 <a:cs typeface="Inter" pitchFamily="34" charset="-120"/>
               </a:rPr>
-              <a:t> the explanation a student will need to construct.</a:t>
+              <a:t> the science explanation, prediction, or conclusion students will need to construct.</a:t>
             </a:r>
             <a:endParaRPr lang="en-US" sz="2100" dirty="0"/>
           </a:p>
@@ -4962,7 +5302,7 @@
       </p:sp>
       <p:sp>
         <p:nvSpPr>
-          <p:cNvPr id="11" name="calibration-shape-10"/>
+          <p:cNvPr id="19" name="calibration-shape-18"/>
           <p:cNvSpPr/>
           <p:nvPr/>
         </p:nvSpPr>
@@ -4982,7 +5322,7 @@
       </p:sp>
       <p:sp>
         <p:nvSpPr>
-          <p:cNvPr id="12" name="transfer"/>
+          <p:cNvPr id="20" name="transfer"/>
           <p:cNvSpPr/>
           <p:nvPr/>
         </p:nvSpPr>
@@ -5024,7 +5364,7 @@
                 <a:ea typeface="Inter" pitchFamily="34" charset="-122"/>
                 <a:cs typeface="Inter" pitchFamily="34" charset="-120"/>
               </a:rPr>
-              <a:t> Which annotation decision will make a stronger student CER more likely? Which question will you ask before students write?</a:t>
+              <a:t> What will you model, what will students annotate, and what does the writing sample show students need next?</a:t>
             </a:r>
             <a:endParaRPr lang="en-US" sz="1800" dirty="0"/>
           </a:p>
@@ -5032,7 +5372,7 @@
       </p:sp>
       <p:sp>
         <p:nvSpPr>
-          <p:cNvPr id="13" name="page"/>
+          <p:cNvPr id="21" name="page"/>
           <p:cNvSpPr/>
           <p:nvPr/>
         </p:nvSpPr>
@@ -5071,7 +5411,7 @@
       </p:sp>
       <p:sp>
         <p:nvSpPr>
-          <p:cNvPr id="14" name="calibration-shape-13"/>
+          <p:cNvPr id="22" name="calibration-shape-21"/>
           <p:cNvSpPr/>
           <p:nvPr/>
         </p:nvSpPr>
@@ -5150,7 +5490,7 @@
         <p:spPr>
           <a:xfrm>
             <a:off x="508000" y="292100"/>
-            <a:ext cx="11430000" cy="482600"/>
+            <a:ext cx="11684000" cy="482600"/>
           </a:xfrm>
           <a:prstGeom prst="rect">
             <a:avLst/>
@@ -5174,7 +5514,7 @@
                 <a:ea typeface="Inter" pitchFamily="34" charset="-122"/>
                 <a:cs typeface="Inter" pitchFamily="34" charset="-120"/>
               </a:rPr>
-              <a:t>Model Color-Coded CER: See the Response Structure</a:t>
+              <a:t>Model Color-Coded CER: Make Explanations Visible</a:t>
             </a:r>
             <a:endParaRPr lang="en-US" sz="3000" dirty="0"/>
           </a:p>
@@ -5252,7 +5592,7 @@
                 <a:ea typeface="Inter" pitchFamily="34" charset="-122"/>
                 <a:cs typeface="Inter" pitchFamily="34" charset="-120"/>
               </a:rPr>
-              <a:t>Color coding is a visibility routine. It helps students identify what each sentence is doing and check whether the explanation includes all of the thinking the task requires.</a:t>
+              <a:t>Use a de-identified writing sample to color-code what is visible. The routine helps students identify what each sentence is doing and check whether an evidence-based explanation includes the thinking the task requires.</a:t>
             </a:r>
             <a:endParaRPr lang="en-US" sz="2300" dirty="0"/>
           </a:p>
@@ -5342,7 +5682,7 @@
                 <a:ea typeface="Inter" pitchFamily="34" charset="-122"/>
                 <a:cs typeface="Inter" pitchFamily="34" charset="-120"/>
               </a:rPr>
-              <a:t>The answer, prediction, conclusion, or explanation that responds to the question.</a:t>
+              <a:t>The answer, prediction, conclusion, or explanation that directly responds to the science question.</a:t>
             </a:r>
             <a:endParaRPr lang="en-US" sz="2100" dirty="0"/>
           </a:p>
@@ -5432,7 +5772,7 @@
                 <a:ea typeface="Inter" pitchFamily="34" charset="-122"/>
                 <a:cs typeface="Inter" pitchFamily="34" charset="-120"/>
               </a:rPr>
-              <a:t>Accurate, relevant details from a text, graph, data set, observation, model, or investigation.</a:t>
+              <a:t>Accurate, relevant details from a text, graph, data set, observation, diagram, model, or investigation.</a:t>
             </a:r>
             <a:endParaRPr lang="en-US" sz="2100" dirty="0"/>
           </a:p>
@@ -5522,7 +5862,7 @@
                 <a:ea typeface="Inter" pitchFamily="34" charset="-122"/>
                 <a:cs typeface="Inter" pitchFamily="34" charset="-120"/>
               </a:rPr>
-              <a:t>The scientific explanation of why the evidence supports the claim.</a:t>
+              <a:t>The scientific explanation of why the evidence supports the claim, using the relevant science idea.</a:t>
             </a:r>
             <a:endParaRPr lang="en-US" sz="2100" dirty="0"/>
           </a:p>
@@ -5910,7 +6250,7 @@
                 <a:ea typeface="Inter" pitchFamily="34" charset="-122"/>
                 <a:cs typeface="Inter" pitchFamily="34" charset="-120"/>
               </a:rPr>
-              <a:t>Agree on one student action after feedback. Use explicit modeling, practice, and a prompt that sends students back to the source and their own response without completing the thinking.</a:t>
+              <a:t>Use a writing sample to agree on one student action after feedback. Model the routine, then use a prompt that sends students back to the source and their own explanation without completing the thinking.</a:t>
             </a:r>
             <a:endParaRPr lang="en-US" sz="2300" dirty="0"/>
           </a:p>
@@ -6066,7 +6406,7 @@
                 <a:ea typeface="Inter" pitchFamily="34" charset="-122"/>
                 <a:cs typeface="Inter" pitchFamily="34" charset="-120"/>
               </a:rPr>
-              <a:t>Model how to use CUBS or identify a CER part.</a:t>
+              <a:t>Model how to interpret a source or identify a CER part.</a:t>
             </a:r>
             <a:endParaRPr lang="en-US" sz="2000" dirty="0"/>
           </a:p>
@@ -6122,7 +6462,7 @@
                 <a:ea typeface="Inter" pitchFamily="34" charset="-122"/>
                 <a:cs typeface="Inter" pitchFamily="34" charset="-120"/>
               </a:rPr>
-              <a:t>Ask students what the source shows and why it matters.</a:t>
+              <a:t>Ask what the source shows, means, or supports.</a:t>
             </a:r>
             <a:endParaRPr lang="en-US" sz="2000" dirty="0"/>
           </a:p>
@@ -6178,7 +6518,7 @@
                 <a:ea typeface="Inter" pitchFamily="34" charset="-122"/>
                 <a:cs typeface="Inter" pitchFamily="34" charset="-120"/>
               </a:rPr>
-              <a:t>Students construct the response and label claim, evidence, and reasoning.</a:t>
+              <a:t>Students construct and label an evidence-based explanation.</a:t>
             </a:r>
             <a:endParaRPr lang="en-US" sz="2000" dirty="0"/>
           </a:p>
@@ -6234,7 +6574,7 @@
                 <a:ea typeface="Inter" pitchFamily="34" charset="-122"/>
                 <a:cs typeface="Inter" pitchFamily="34" charset="-120"/>
               </a:rPr>
-              <a:t>Students act on one calibrated, criterion-based written feedback prompt.</a:t>
+              <a:t>Students act on one calibrated, criterion-based feedback prompt.</a:t>
             </a:r>
             <a:endParaRPr lang="en-US" sz="2000" dirty="0"/>
           </a:p>
@@ -6391,7 +6731,7 @@
         <p:spPr>
           <a:xfrm>
             <a:off x="990600" y="6070600"/>
-            <a:ext cx="6350000" cy="355600"/>
+            <a:ext cx="7112000" cy="355600"/>
           </a:xfrm>
           <a:prstGeom prst="rect">
             <a:avLst/>
@@ -6457,7 +6797,7 @@
                 <a:ea typeface="Inter" pitchFamily="34" charset="-122"/>
                 <a:cs typeface="Inter" pitchFamily="34" charset="-120"/>
               </a:rPr>
-              <a:t>“Underline the evidence you selected. Then add or revise a reasoning sentence that explains how this evidence supports your claim.”</a:t>
+              <a:t>“Underline the evidence you selected. Then add or revise a reasoning sentence that explains how this evidence supports your claim or conclusion.”</a:t>
             </a:r>
             <a:endParaRPr lang="en-US" sz="2100" dirty="0"/>
           </a:p>
@@ -6583,7 +6923,7 @@
         <p:spPr>
           <a:xfrm>
             <a:off x="508000" y="292100"/>
-            <a:ext cx="11430000" cy="482600"/>
+            <a:ext cx="11811000" cy="482600"/>
           </a:xfrm>
           <a:prstGeom prst="rect">
             <a:avLst/>
@@ -6607,7 +6947,7 @@
                 <a:ea typeface="Inter" pitchFamily="34" charset="-122"/>
                 <a:cs typeface="Inter" pitchFamily="34" charset="-120"/>
               </a:rPr>
-              <a:t>Protected Course-Alike Calibration + Application</a:t>
+              <a:t>Teacher Strategy Share + Course-Alike Reflection</a:t>
             </a:r>
             <a:endParaRPr lang="en-US" sz="3000" dirty="0"/>
           </a:p>
@@ -6808,7 +7148,7 @@
                 <a:ea typeface="Inter" pitchFamily="34" charset="-122"/>
                 <a:cs typeface="Inter" pitchFamily="34" charset="-120"/>
               </a:rPr>
-              <a:t>Draft your own student routine first. Then use colleagues to test clarity, rigor, access, and the thinking it requires.</a:t>
+              <a:t>Listen to 2–3 teacher strategy shares first. Then complete the reflection and use colleagues to test clarity, rigor, access, and next steps.</a:t>
             </a:r>
             <a:endParaRPr lang="en-US" sz="2000" dirty="0"/>
           </a:p>
@@ -6875,7 +7215,7 @@
                 <a:ea typeface="Inter" pitchFamily="34" charset="-122"/>
                 <a:cs typeface="Inter" pitchFamily="34" charset="-120"/>
               </a:rPr>
-              <a:t>1. Choose the writing benchmark/source/task.</a:t>
+              <a:t>1. Hear 2–3 teacher strategy shares.</a:t>
             </a:r>
             <a:r>
               <a:rPr lang="en-US" altLang="en-US" sz="2100" dirty="0">
@@ -6886,7 +7226,7 @@
                 <a:ea typeface="Inter" pitchFamily="34" charset="-122"/>
                 <a:cs typeface="Inter" pitchFamily="34" charset="-120"/>
               </a:rPr>
-              <a:t> Use an article, text set, data display, model, investigation prompt, or constructed-response task connected to your current standard.</a:t>
+              <a:t> Listen for a concrete CUBS/CER routine, student direction, access support, or feedback move you can adapt to your own source/task.</a:t>
             </a:r>
             <a:endParaRPr lang="en-US" sz="2100" dirty="0"/>
           </a:p>
@@ -6953,7 +7293,7 @@
                 <a:ea typeface="Inter" pitchFamily="34" charset="-122"/>
                 <a:cs typeface="Inter" pitchFamily="34" charset="-120"/>
               </a:rPr>
-              <a:t>2. Calibrate the student expectations.</a:t>
+              <a:t>2. Read samples against the student routine.</a:t>
             </a:r>
             <a:r>
               <a:rPr lang="en-US" altLang="en-US" sz="2100" dirty="0">
@@ -6964,7 +7304,7 @@
                 <a:ea typeface="Inter" pitchFamily="34" charset="-122"/>
                 <a:cs typeface="Inter" pitchFamily="34" charset="-120"/>
               </a:rPr>
-              <a:t> Specify what students will CUBS, what they will identify or color-code in CER, and what the response must show to meet the mastery bar.</a:t>
+              <a:t> Specify what students will CUBS, what is visible or missing in CER, and what the response must show to meet the mastery bar.</a:t>
             </a:r>
             <a:endParaRPr lang="en-US" sz="2100" dirty="0"/>
           </a:p>
@@ -7004,7 +7344,7 @@
         <p:spPr>
           <a:xfrm>
             <a:off x="5181600" y="5537200"/>
-            <a:ext cx="9842500" cy="1143000"/>
+            <a:ext cx="9842500" cy="1168400"/>
           </a:xfrm>
           <a:prstGeom prst="rect">
             <a:avLst/>
@@ -7031,7 +7371,7 @@
                 <a:ea typeface="Inter" pitchFamily="34" charset="-122"/>
                 <a:cs typeface="Inter" pitchFamily="34" charset="-120"/>
               </a:rPr>
-              <a:t>3. Plan feedback + revision.</a:t>
+              <a:t>3. Complete the reflection sheet during and after PD.</a:t>
             </a:r>
             <a:r>
               <a:rPr lang="en-US" altLang="en-US" sz="2100" dirty="0">
@@ -7042,7 +7382,7 @@
                 <a:ea typeface="Inter" pitchFamily="34" charset="-122"/>
                 <a:cs typeface="Inter" pitchFamily="34" charset="-120"/>
               </a:rPr>
-              <a:t> Name the prompt, partner talk, annotation check, or short response that reveals thinking, then write a criterion-based feedback prompt and the revision students will complete.</a:t>
+              <a:t> Record the LIT-aligned task, anticipated thinking, sample-based feedback prompt, colleague strategy, student revision action, and next evidence check.</a:t>
             </a:r>
             <a:endParaRPr lang="en-US" sz="2100" dirty="0"/>
           </a:p>
@@ -7233,7 +7573,7 @@
                 <a:ea typeface="Inter" pitchFamily="34" charset="-122"/>
                 <a:cs typeface="Inter" pitchFamily="34" charset="-120"/>
               </a:rPr>
-              <a:t>Implement the routine. Collect writing. Revisit feedback and revision Friday.</a:t>
+              <a:t>Adapt the routine. Capture the next step. Revisit student evidence Friday.</a:t>
             </a:r>
             <a:endParaRPr lang="en-US" sz="3900" dirty="0"/>
           </a:p>
@@ -7375,7 +7715,7 @@
                 <a:ea typeface="Inter" pitchFamily="34" charset="-122"/>
                 <a:cs typeface="Inter" pitchFamily="34" charset="-120"/>
               </a:rPr>
-              <a:t>USE</a:t>
+              <a:t>ADAPT</a:t>
             </a:r>
             <a:endParaRPr lang="en-US" sz="2000" dirty="0"/>
           </a:p>
@@ -7398,7 +7738,7 @@
                 <a:ea typeface="Inter" pitchFamily="34" charset="-122"/>
                 <a:cs typeface="Inter" pitchFamily="34" charset="-120"/>
               </a:rPr>
-              <a:t>Teach the CUBS/CER routine with the planned source and writing task.</a:t>
+              <a:t>Teach the CUBS/CER routine with an appropriate course source and response task.</a:t>
             </a:r>
             <a:endParaRPr lang="en-US" sz="2000" dirty="0"/>
           </a:p>
@@ -7440,7 +7780,7 @@
                 <a:ea typeface="Inter" pitchFamily="34" charset="-122"/>
                 <a:cs typeface="Inter" pitchFamily="34" charset="-120"/>
               </a:rPr>
-              <a:t>COLLECT</a:t>
+              <a:t>REFLECT + SHARE</a:t>
             </a:r>
             <a:endParaRPr lang="en-US" sz="2000" dirty="0"/>
           </a:p>
@@ -7463,7 +7803,7 @@
                 <a:ea typeface="Inter" pitchFamily="34" charset="-122"/>
                 <a:cs typeface="Inter" pitchFamily="34" charset="-120"/>
               </a:rPr>
-              <a:t>Bring a small de-identified set of completed writing and the feedback/revision evidence from the task.</a:t>
+              <a:t>Complete the sheet during and after PD: name a sample-based feedback move, one colleague strategy, and the evidence you will collect.</a:t>
             </a:r>
             <a:endParaRPr lang="en-US" sz="2000" dirty="0"/>
           </a:p>
@@ -7528,7 +7868,7 @@
                 <a:ea typeface="Inter" pitchFamily="34" charset="-122"/>
                 <a:cs typeface="Inter" pitchFamily="34" charset="-120"/>
               </a:rPr>
-              <a:t>Use the mastery bar to analyze writing, provide feedback, and plan the next standard-focused step.</a:t>
+              <a:t>Use completed writing and feedback evidence to plan a precise, standard-focused next step.</a:t>
             </a:r>
             <a:endParaRPr lang="en-US" sz="2000" dirty="0"/>
           </a:p>

--- a/assets/plc/2026-10-28_Science_Department_PD_Strengthening_Science_Literacy.pptx
+++ b/assets/plc/2026-10-28_Science_Department_PD_Strengthening_Science_Literacy.pptx
@@ -2842,7 +2842,7 @@
                 <a:ea typeface="Inter" pitchFamily="34" charset="-122"/>
                 <a:cs typeface="Inter" pitchFamily="34" charset="-120"/>
               </a:rPr>
-              <a:t>Learn from colleague strategies, read samples, and record a feedback-informed next move.</a:t>
+              <a:t>Share another strategy—or choose a CUBS/CER move to try—then record a next move.</a:t>
             </a:r>
             <a:endParaRPr lang="en-US" sz="2000" dirty="0"/>
           </a:p>
@@ -7148,7 +7148,7 @@
                 <a:ea typeface="Inter" pitchFamily="34" charset="-122"/>
                 <a:cs typeface="Inter" pitchFamily="34" charset="-120"/>
               </a:rPr>
-              <a:t>Listen to 2–3 teacher strategy shares first. Then complete the reflection and use colleagues to test clarity, rigor, access, and next steps.</a:t>
+              <a:t>Share a strategy you use—or choose one from today to try. Borrow one colleague idea.</a:t>
             </a:r>
             <a:endParaRPr lang="en-US" sz="2000" dirty="0"/>
           </a:p>
@@ -7202,12 +7202,12 @@
           <a:p>
             <a:pPr algn="l" indent="0" marL="0">
               <a:lnSpc>
-                <a:spcPts val="2520"/>
+                <a:spcPts val="2124"/>
               </a:lnSpc>
               <a:buNone/>
             </a:pPr>
             <a:r>
-              <a:rPr lang="en-US" altLang="en-US" sz="2100" b="1" dirty="0">
+              <a:rPr lang="en-US" altLang="en-US" sz="1800" b="1" dirty="0">
                 <a:solidFill>
                   <a:srgbClr val="C41220"/>
                 </a:solidFill>
@@ -7215,10 +7215,10 @@
                 <a:ea typeface="Inter" pitchFamily="34" charset="-122"/>
                 <a:cs typeface="Inter" pitchFamily="34" charset="-120"/>
               </a:rPr>
-              <a:t>1. Hear 2–3 teacher strategy shares.</a:t>
-            </a:r>
-            <a:r>
-              <a:rPr lang="en-US" altLang="en-US" sz="2100" dirty="0">
+              <a:t>1. Share or choose a strategy.</a:t>
+            </a:r>
+            <a:r>
+              <a:rPr lang="en-US" altLang="en-US" sz="1800" dirty="0">
                 <a:solidFill>
                   <a:srgbClr val="3C4043"/>
                 </a:solidFill>
@@ -7226,9 +7226,9 @@
                 <a:ea typeface="Inter" pitchFamily="34" charset="-122"/>
                 <a:cs typeface="Inter" pitchFamily="34" charset="-120"/>
               </a:rPr>
-              <a:t> Listen for a concrete CUBS/CER routine, student direction, access support, or feedback move you can adapt to your own source/task.</a:t>
-            </a:r>
-            <a:endParaRPr lang="en-US" sz="2100" dirty="0"/>
+              <a:t> Share another reading/article-analysis or writing strategy you already use: what works and what needs attention? If you do not use one yet, choose a CUBS/CER move from today to try in a next lesson.</a:t>
+            </a:r>
+            <a:endParaRPr lang="en-US" sz="1800" dirty="0"/>
           </a:p>
         </p:txBody>
       </p:sp>
@@ -7358,12 +7358,12 @@
           <a:p>
             <a:pPr algn="l" indent="0" marL="0">
               <a:lnSpc>
-                <a:spcPts val="2520"/>
+                <a:spcPts val="2124"/>
               </a:lnSpc>
               <a:buNone/>
             </a:pPr>
             <a:r>
-              <a:rPr lang="en-US" altLang="en-US" sz="2100" b="1" dirty="0">
+              <a:rPr lang="en-US" altLang="en-US" sz="1800" b="1" dirty="0">
                 <a:solidFill>
                   <a:srgbClr val="C41220"/>
                 </a:solidFill>
@@ -7374,7 +7374,7 @@
               <a:t>3. Complete the reflection sheet during and after PD.</a:t>
             </a:r>
             <a:r>
-              <a:rPr lang="en-US" altLang="en-US" sz="2100" dirty="0">
+              <a:rPr lang="en-US" altLang="en-US" sz="1800" dirty="0">
                 <a:solidFill>
                   <a:srgbClr val="3C4043"/>
                 </a:solidFill>
@@ -7382,9 +7382,9 @@
                 <a:ea typeface="Inter" pitchFamily="34" charset="-122"/>
                 <a:cs typeface="Inter" pitchFamily="34" charset="-120"/>
               </a:rPr>
-              <a:t> Record the LIT-aligned task, anticipated thinking, sample-based feedback prompt, colleague strategy, student revision action, and next evidence check.</a:t>
-            </a:r>
-            <a:endParaRPr lang="en-US" sz="2100" dirty="0"/>
+              <a:t> Record an existing strategy you will share or a CUBS/CER move you will try, what works or needs attention (if applicable), a colleague idea, student revision action, and next evidence check.</a:t>
+            </a:r>
+            <a:endParaRPr lang="en-US" sz="1800" dirty="0"/>
           </a:p>
         </p:txBody>
       </p:sp>
@@ -7767,7 +7767,7 @@
           <a:p>
             <a:pPr algn="l" indent="0" marL="0">
               <a:lnSpc>
-                <a:spcPts val="1680"/>
+                <a:spcPts val="1652"/>
               </a:lnSpc>
               <a:buNone/>
             </a:pPr>
@@ -7782,12 +7782,12 @@
               </a:rPr>
               <a:t>REFLECT + SHARE</a:t>
             </a:r>
-            <a:endParaRPr lang="en-US" sz="2000" dirty="0"/>
+            <a:endParaRPr lang="en-US" sz="1900" dirty="0"/>
           </a:p>
           <a:p>
             <a:pPr algn="l" indent="0" marL="0">
               <a:lnSpc>
-                <a:spcPts val="2400"/>
+                <a:spcPts val="2242"/>
               </a:lnSpc>
               <a:spcBef>
                 <a:spcPts val="900"/>
@@ -7795,7 +7795,7 @@
               <a:buNone/>
             </a:pPr>
             <a:r>
-              <a:rPr lang="en-US" altLang="en-US" sz="2000" b="1" dirty="0">
+              <a:rPr lang="en-US" altLang="en-US" sz="1900" b="1" dirty="0">
                 <a:solidFill>
                   <a:srgbClr val="3C4043"/>
                 </a:solidFill>
@@ -7803,9 +7803,9 @@
                 <a:ea typeface="Inter" pitchFamily="34" charset="-122"/>
                 <a:cs typeface="Inter" pitchFamily="34" charset="-120"/>
               </a:rPr>
-              <a:t>Complete the sheet during and after PD: name a sample-based feedback move, one colleague strategy, and the evidence you will collect.</a:t>
-            </a:r>
-            <a:endParaRPr lang="en-US" sz="2000" dirty="0"/>
+              <a:t>Share another strategy you use—or choose a CUBS/CER move to try—then record one colleague idea and the evidence you will collect.</a:t>
+            </a:r>
+            <a:endParaRPr lang="en-US" sz="1900" dirty="0"/>
           </a:p>
         </p:txBody>
       </p:sp>

--- a/assets/plc/2026-10-28_Science_Department_PD_Strengthening_Science_Literacy.pptx
+++ b/assets/plc/2026-10-28_Science_Department_PD_Strengthening_Science_Literacy.pptx
@@ -2819,7 +2819,7 @@
                 <a:ea typeface="Inter" pitchFamily="34" charset="-122"/>
                 <a:cs typeface="Inter" pitchFamily="34" charset="-120"/>
               </a:rPr>
-              <a:t>Share, reflect + commit</a:t>
+              <a:t>Plan, reflect + adjust</a:t>
             </a:r>
             <a:endParaRPr lang="en-US" sz="2000" dirty="0"/>
           </a:p>
@@ -2842,7 +2842,7 @@
                 <a:ea typeface="Inter" pitchFamily="34" charset="-122"/>
                 <a:cs typeface="Inter" pitchFamily="34" charset="-120"/>
               </a:rPr>
-              <a:t>Share another strategy—or choose a CUBS/CER move to try—then record a next move.</a:t>
+              <a:t>Record the priority need, feedback action, and next evidence check.</a:t>
             </a:r>
             <a:endParaRPr lang="en-US" sz="2000" dirty="0"/>
           </a:p>
@@ -6947,7 +6947,7 @@
                 <a:ea typeface="Inter" pitchFamily="34" charset="-122"/>
                 <a:cs typeface="Inter" pitchFamily="34" charset="-120"/>
               </a:rPr>
-              <a:t>Teacher Strategy Share + Course-Alike Reflection</a:t>
+              <a:t>Course-Alike Lesson Planning + Reflection</a:t>
             </a:r>
             <a:endParaRPr lang="en-US" sz="3000" dirty="0"/>
           </a:p>
@@ -7148,7 +7148,7 @@
                 <a:ea typeface="Inter" pitchFamily="34" charset="-122"/>
                 <a:cs typeface="Inter" pitchFamily="34" charset="-120"/>
               </a:rPr>
-              <a:t>Share a strategy you use—or choose one from today to try. Borrow one colleague idea.</a:t>
+              <a:t>Plan the student strategy, priority need, feedback, and next evidence check.</a:t>
             </a:r>
             <a:endParaRPr lang="en-US" sz="2000" dirty="0"/>
           </a:p>
@@ -7215,7 +7215,7 @@
                 <a:ea typeface="Inter" pitchFamily="34" charset="-122"/>
                 <a:cs typeface="Inter" pitchFamily="34" charset="-120"/>
               </a:rPr>
-              <a:t>1. Share or choose a strategy.</a:t>
+              <a:t>1. Name the data-based priority.</a:t>
             </a:r>
             <a:r>
               <a:rPr lang="en-US" altLang="en-US" sz="1800" dirty="0">
@@ -7226,7 +7226,7 @@
                 <a:ea typeface="Inter" pitchFamily="34" charset="-122"/>
                 <a:cs typeface="Inter" pitchFamily="34" charset="-120"/>
               </a:rPr>
-              <a:t> Share another reading/article-analysis or writing strategy you already use: what works and what needs attention? If you do not use one yet, choose a CUBS/CER move from today to try in a next lesson.</a:t>
+              <a:t> Use student work, assessment data, or observation to name where students struggle most: source analysis, claim, evidence, reasoning, vocabulary, clarity, or another need.</a:t>
             </a:r>
             <a:endParaRPr lang="en-US" sz="1800" dirty="0"/>
           </a:p>
@@ -7280,12 +7280,12 @@
           <a:p>
             <a:pPr algn="l" indent="0" marL="0">
               <a:lnSpc>
-                <a:spcPts val="2520"/>
+                <a:spcPts val="2242"/>
               </a:lnSpc>
               <a:buNone/>
             </a:pPr>
             <a:r>
-              <a:rPr lang="en-US" altLang="en-US" sz="2100" b="1" dirty="0">
+              <a:rPr lang="en-US" altLang="en-US" sz="1900" b="1" dirty="0">
                 <a:solidFill>
                   <a:srgbClr val="C41220"/>
                 </a:solidFill>
@@ -7293,10 +7293,10 @@
                 <a:ea typeface="Inter" pitchFamily="34" charset="-122"/>
                 <a:cs typeface="Inter" pitchFamily="34" charset="-120"/>
               </a:rPr>
-              <a:t>2. Read samples against the student routine.</a:t>
-            </a:r>
-            <a:r>
-              <a:rPr lang="en-US" altLang="en-US" sz="2100" dirty="0">
+              <a:t>2. Plan the student experience.</a:t>
+            </a:r>
+            <a:r>
+              <a:rPr lang="en-US" altLang="en-US" sz="1900" dirty="0">
                 <a:solidFill>
                   <a:srgbClr val="3C4043"/>
                 </a:solidFill>
@@ -7304,9 +7304,9 @@
                 <a:ea typeface="Inter" pitchFamily="34" charset="-122"/>
                 <a:cs typeface="Inter" pitchFamily="34" charset="-120"/>
               </a:rPr>
-              <a:t> Specify what students will CUBS, what is visible or missing in CER, and what the response must show to meet the mastery bar.</a:t>
-            </a:r>
-            <a:endParaRPr lang="en-US" sz="2100" dirty="0"/>
+              <a:t> Record the source/task, the strategy students will use to analyze it, what a complete CER response must show, and the feedback/revision action students will take.</a:t>
+            </a:r>
+            <a:endParaRPr lang="en-US" sz="1900" dirty="0"/>
           </a:p>
         </p:txBody>
       </p:sp>
@@ -7371,7 +7371,7 @@
                 <a:ea typeface="Inter" pitchFamily="34" charset="-122"/>
                 <a:cs typeface="Inter" pitchFamily="34" charset="-120"/>
               </a:rPr>
-              <a:t>3. Complete the reflection sheet during and after PD.</a:t>
+              <a:t>3. Complete the Lesson Planning &amp; Reflection Sheet.</a:t>
             </a:r>
             <a:r>
               <a:rPr lang="en-US" altLang="en-US" sz="1800" dirty="0">
@@ -7382,7 +7382,7 @@
                 <a:ea typeface="Inter" pitchFamily="34" charset="-122"/>
                 <a:cs typeface="Inter" pitchFamily="34" charset="-120"/>
               </a:rPr>
-              <a:t> Record an existing strategy you will share or a CUBS/CER move you will try, what works or needs attention (if applicable), a colleague idea, student revision action, and next evidence check.</a:t>
+              <a:t> During PD, plan the lesson and feedback. After the lesson, record what the evidence shows, what to keep or adjust, one colleague idea, and the evidence you will bring Friday.</a:t>
             </a:r>
             <a:endParaRPr lang="en-US" sz="1800" dirty="0"/>
           </a:p>
@@ -7780,7 +7780,7 @@
                 <a:ea typeface="Inter" pitchFamily="34" charset="-122"/>
                 <a:cs typeface="Inter" pitchFamily="34" charset="-120"/>
               </a:rPr>
-              <a:t>REFLECT + SHARE</a:t>
+              <a:t>PLAN + REFLECT</a:t>
             </a:r>
             <a:endParaRPr lang="en-US" sz="1900" dirty="0"/>
           </a:p>
@@ -7803,7 +7803,7 @@
                 <a:ea typeface="Inter" pitchFamily="34" charset="-122"/>
                 <a:cs typeface="Inter" pitchFamily="34" charset="-120"/>
               </a:rPr>
-              <a:t>Share another strategy you use—or choose a CUBS/CER move to try—then record one colleague idea and the evidence you will collect.</a:t>
+              <a:t>Use the Lesson Planning &amp; Reflection Sheet to record the student strategy, data-based need, feedback/revision action, colleague idea, and evidence you will collect.</a:t>
             </a:r>
             <a:endParaRPr lang="en-US" sz="1900" dirty="0"/>
           </a:p>

--- a/assets/plc/2026-10-28_Science_Department_PD_Strengthening_Science_Literacy.pptx
+++ b/assets/plc/2026-10-28_Science_Department_PD_Strengthening_Science_Literacy.pptx
@@ -1602,7 +1602,7 @@
         <p:spPr>
           <a:xfrm>
             <a:off x="0" y="0"/>
-            <a:ext cx="16256000" cy="1168400"/>
+            <a:ext cx="16256000" cy="1117600"/>
           </a:xfrm>
           <a:prstGeom prst="rect">
             <a:avLst/>
@@ -1621,7 +1621,7 @@
         </p:nvSpPr>
         <p:spPr>
           <a:xfrm>
-            <a:off x="0" y="1168400"/>
+            <a:off x="0" y="1117600"/>
             <a:ext cx="16256000" cy="101600"/>
           </a:xfrm>
           <a:prstGeom prst="rect">
@@ -1642,7 +1642,7 @@
         <p:spPr>
           <a:xfrm>
             <a:off x="736600" y="381000"/>
-            <a:ext cx="13462000" cy="279400"/>
+            <a:ext cx="13970000" cy="279400"/>
           </a:xfrm>
           <a:prstGeom prst="rect">
             <a:avLst/>
@@ -1680,8 +1680,8 @@
         </p:nvSpPr>
         <p:spPr>
           <a:xfrm>
-            <a:off x="736600" y="1739900"/>
-            <a:ext cx="10985500" cy="1778000"/>
+            <a:off x="736600" y="1676400"/>
+            <a:ext cx="10414000" cy="1955800"/>
           </a:xfrm>
           <a:prstGeom prst="rect">
             <a:avLst/>
@@ -1690,19 +1690,17 @@
           <a:ln/>
         </p:spPr>
         <p:txBody>
-          <a:bodyPr wrap="square" lIns="0" tIns="0" rIns="0" bIns="0" rtlCol="0" anchor="t">
-            <a:normAutofit/>
-          </a:bodyPr>
+          <a:bodyPr wrap="square" lIns="0" tIns="0" rIns="0" bIns="0" rtlCol="0" anchor="t"/>
           <a:lstStyle/>
           <a:p>
             <a:pPr algn="l" indent="0" marL="0">
               <a:lnSpc>
-                <a:spcPts val="4173"/>
+                <a:spcPts val="4028"/>
               </a:lnSpc>
               <a:buNone/>
             </a:pPr>
             <a:r>
-              <a:rPr lang="en-US" altLang="en-US" sz="3900" dirty="0">
+              <a:rPr lang="en-US" altLang="en-US" sz="3800" dirty="0">
                 <a:solidFill>
                   <a:srgbClr val="202124"/>
                 </a:solidFill>
@@ -1712,17 +1710,17 @@
               </a:rPr>
               <a:t>Strengthening Science Literacy:</a:t>
             </a:r>
-            <a:endParaRPr lang="en-US" sz="3900" dirty="0"/>
+            <a:endParaRPr lang="en-US" sz="3800" dirty="0"/>
           </a:p>
           <a:p>
             <a:pPr algn="l" indent="0" marL="0">
               <a:lnSpc>
-                <a:spcPts val="4173"/>
+                <a:spcPts val="4028"/>
               </a:lnSpc>
               <a:buNone/>
             </a:pPr>
             <a:r>
-              <a:rPr lang="en-US" altLang="en-US" sz="3900" dirty="0">
+              <a:rPr lang="en-US" altLang="en-US" sz="3800" dirty="0">
                 <a:solidFill>
                   <a:srgbClr val="202124"/>
                 </a:solidFill>
@@ -1732,17 +1730,17 @@
               </a:rPr>
               <a:t>Calibrating Writing Benchmarks,</a:t>
             </a:r>
-            <a:endParaRPr lang="en-US" sz="3900" dirty="0"/>
+            <a:endParaRPr lang="en-US" sz="3800" dirty="0"/>
           </a:p>
           <a:p>
             <a:pPr algn="l" indent="0" marL="0">
               <a:lnSpc>
-                <a:spcPts val="4173"/>
+                <a:spcPts val="4028"/>
               </a:lnSpc>
               <a:buNone/>
             </a:pPr>
             <a:r>
-              <a:rPr lang="en-US" altLang="en-US" sz="3900" dirty="0">
+              <a:rPr lang="en-US" altLang="en-US" sz="3800" dirty="0">
                 <a:solidFill>
                   <a:srgbClr val="202124"/>
                 </a:solidFill>
@@ -1752,7 +1750,7 @@
               </a:rPr>
               <a:t>Feedback, and Revision</a:t>
             </a:r>
-            <a:endParaRPr lang="en-US" sz="3900" dirty="0"/>
+            <a:endParaRPr lang="en-US" sz="3800" dirty="0"/>
           </a:p>
         </p:txBody>
       </p:sp>
@@ -1764,8 +1762,165 @@
         </p:nvSpPr>
         <p:spPr>
           <a:xfrm>
-            <a:off x="736600" y="3848100"/>
-            <a:ext cx="10922000" cy="1422400"/>
+            <a:off x="736600" y="4013200"/>
+            <a:ext cx="9906000" cy="1016000"/>
+          </a:xfrm>
+          <a:prstGeom prst="rect">
+            <a:avLst/>
+          </a:prstGeom>
+          <a:noFill/>
+          <a:ln/>
+        </p:spPr>
+        <p:txBody>
+          <a:bodyPr wrap="square" lIns="0" tIns="0" rIns="0" bIns="0" rtlCol="0" anchor="t"/>
+          <a:lstStyle/>
+          <a:p>
+            <a:pPr algn="l" indent="0" marL="0">
+              <a:lnSpc>
+                <a:spcPts val="2928"/>
+              </a:lnSpc>
+              <a:buNone/>
+            </a:pPr>
+            <a:r>
+              <a:rPr lang="en-US" altLang="en-US" sz="2400" dirty="0">
+                <a:solidFill>
+                  <a:srgbClr val="343A40"/>
+                </a:solidFill>
+                <a:latin typeface="Inter" pitchFamily="34" charset="0"/>
+                <a:ea typeface="Inter" pitchFamily="34" charset="-122"/>
+                <a:cs typeface="Inter" pitchFamily="34" charset="-120"/>
+              </a:rPr>
+              <a:t>A simple routine for helping students read a science source, write an explanation, and revise their thinking.</a:t>
+            </a:r>
+            <a:endParaRPr lang="en-US" sz="2400" dirty="0"/>
+          </a:p>
+        </p:txBody>
+      </p:sp>
+      <p:sp>
+        <p:nvSpPr>
+          <p:cNvPr id="7" name="cover-shape-6"/>
+          <p:cNvSpPr/>
+          <p:nvPr/>
+        </p:nvSpPr>
+        <p:spPr>
+          <a:xfrm>
+            <a:off x="11531600" y="1905000"/>
+            <a:ext cx="3911600" cy="3111500"/>
+          </a:xfrm>
+          <a:prstGeom prst="rect">
+            <a:avLst/>
+          </a:prstGeom>
+          <a:solidFill>
+            <a:srgbClr val="F5F6F8"/>
+          </a:solidFill>
+          <a:ln w="12700">
+            <a:solidFill>
+              <a:srgbClr val="D4D8DE"/>
+            </a:solidFill>
+            <a:prstDash val="solid"/>
+          </a:ln>
+        </p:spPr>
+      </p:sp>
+      <p:sp>
+        <p:nvSpPr>
+          <p:cNvPr id="8" name="today"/>
+          <p:cNvSpPr/>
+          <p:nvPr/>
+        </p:nvSpPr>
+        <p:spPr>
+          <a:xfrm>
+            <a:off x="11887200" y="2298700"/>
+            <a:ext cx="3200400" cy="2095500"/>
+          </a:xfrm>
+          <a:prstGeom prst="rect">
+            <a:avLst/>
+          </a:prstGeom>
+          <a:noFill/>
+          <a:ln/>
+        </p:spPr>
+        <p:txBody>
+          <a:bodyPr wrap="square" lIns="0" tIns="0" rIns="0" bIns="0" rtlCol="0" anchor="ctr"/>
+          <a:lstStyle/>
+          <a:p>
+            <a:pPr algn="ctr" indent="0" marL="0">
+              <a:lnSpc>
+                <a:spcPts val="2048"/>
+              </a:lnSpc>
+              <a:buNone/>
+            </a:pPr>
+            <a:r>
+              <a:rPr lang="en-US" altLang="en-US" sz="1600" b="1" dirty="0">
+                <a:solidFill>
+                  <a:srgbClr val="C41220"/>
+                </a:solidFill>
+                <a:latin typeface="Inter" pitchFamily="34" charset="0"/>
+                <a:ea typeface="Inter" pitchFamily="34" charset="-122"/>
+                <a:cs typeface="Inter" pitchFamily="34" charset="-120"/>
+              </a:rPr>
+              <a:t>TODAY'S GOAL</a:t>
+            </a:r>
+            <a:endParaRPr lang="en-US" sz="2300" dirty="0"/>
+          </a:p>
+          <a:p>
+            <a:pPr algn="ctr" indent="0" marL="0">
+              <a:lnSpc>
+                <a:spcPts val="2944"/>
+              </a:lnSpc>
+              <a:spcBef>
+                <a:spcPts val="1400"/>
+              </a:spcBef>
+              <a:buNone/>
+            </a:pPr>
+            <a:r>
+              <a:rPr lang="en-US" altLang="en-US" sz="2300" b="1" dirty="0">
+                <a:solidFill>
+                  <a:srgbClr val="343A40"/>
+                </a:solidFill>
+                <a:latin typeface="Inter" pitchFamily="34" charset="0"/>
+                <a:ea typeface="Inter" pitchFamily="34" charset="-122"/>
+                <a:cs typeface="Inter" pitchFamily="34" charset="-120"/>
+              </a:rPr>
+              <a:t>Leave with one simple strategy to use with your students.</a:t>
+            </a:r>
+            <a:endParaRPr lang="en-US" sz="2300" dirty="0"/>
+          </a:p>
+        </p:txBody>
+      </p:sp>
+      <p:sp>
+        <p:nvSpPr>
+          <p:cNvPr id="9" name="cover-shape-8"/>
+          <p:cNvSpPr/>
+          <p:nvPr/>
+        </p:nvSpPr>
+        <p:spPr>
+          <a:xfrm>
+            <a:off x="736600" y="5994400"/>
+            <a:ext cx="14706600" cy="1219200"/>
+          </a:xfrm>
+          <a:prstGeom prst="rect">
+            <a:avLst/>
+          </a:prstGeom>
+          <a:solidFill>
+            <a:srgbClr val="F9FAFB"/>
+          </a:solidFill>
+          <a:ln w="12700">
+            <a:solidFill>
+              <a:srgbClr val="D4D8DE"/>
+            </a:solidFill>
+            <a:prstDash val="solid"/>
+          </a:ln>
+        </p:spPr>
+      </p:sp>
+      <p:sp>
+        <p:nvSpPr>
+          <p:cNvPr id="10" name="bring"/>
+          <p:cNvSpPr/>
+          <p:nvPr/>
+        </p:nvSpPr>
+        <p:spPr>
+          <a:xfrm>
+            <a:off x="1117600" y="6273800"/>
+            <a:ext cx="13919200" cy="673100"/>
           </a:xfrm>
           <a:prstGeom prst="rect">
             <a:avLst/>
@@ -1792,83 +1947,49 @@
                 <a:ea typeface="Inter" pitchFamily="34" charset="-122"/>
                 <a:cs typeface="Inter" pitchFamily="34" charset="-120"/>
               </a:rPr>
-              <a:t>Strategy Focus: Teaching Students to Analyze Science Sources With CUBS + CER.</a:t>
+              <a:t>Bring:</a:t>
+            </a:r>
+            <a:r>
+              <a:rPr lang="en-US" altLang="en-US" sz="2200" dirty="0">
+                <a:solidFill>
+                  <a:srgbClr val="343A40"/>
+                </a:solidFill>
+                <a:latin typeface="Inter" pitchFamily="34" charset="0"/>
+                <a:ea typeface="Inter" pitchFamily="34" charset="-122"/>
+                <a:cs typeface="Inter" pitchFamily="34" charset="-120"/>
+              </a:rPr>
+              <a:t> one course source or task and one de-identified student writing sample. Use a source that students will read, view, or analyze in an upcoming lesson.</a:t>
             </a:r>
             <a:endParaRPr lang="en-US" sz="2200" dirty="0"/>
           </a:p>
+        </p:txBody>
+      </p:sp>
+      <p:sp>
+        <p:nvSpPr>
+          <p:cNvPr id="11" name="footer"/>
+          <p:cNvSpPr/>
+          <p:nvPr/>
+        </p:nvSpPr>
+        <p:spPr>
+          <a:xfrm>
+            <a:off x="736600" y="7937500"/>
+            <a:ext cx="13208000" cy="406400"/>
+          </a:xfrm>
+          <a:prstGeom prst="rect">
+            <a:avLst/>
+          </a:prstGeom>
+          <a:noFill/>
+          <a:ln/>
+        </p:spPr>
+        <p:txBody>
+          <a:bodyPr wrap="square" lIns="0" tIns="0" rIns="0" bIns="0" rtlCol="0" anchor="t"/>
+          <a:lstStyle/>
           <a:p>
             <a:pPr algn="l" indent="0" marL="0">
-              <a:lnSpc>
-                <a:spcPts val="2640"/>
-              </a:lnSpc>
-              <a:buNone/>
-            </a:pPr>
-            <a:r>
-              <a:rPr lang="en-US" altLang="en-US" sz="2200" dirty="0">
-                <a:solidFill>
-                  <a:srgbClr val="3C4043"/>
-                </a:solidFill>
-                <a:latin typeface="Inter" pitchFamily="34" charset="0"/>
-                <a:ea typeface="Inter" pitchFamily="34" charset="-122"/>
-                <a:cs typeface="Inter" pitchFamily="34" charset="-120"/>
-              </a:rPr>
-              <a:t>Use adaptable student-facing routines to help students notice, explain, and revise their thinking from a text, data display, diagram, model, investigation result, or other course source.</a:t>
-            </a:r>
-            <a:endParaRPr lang="en-US" sz="2200" dirty="0"/>
-          </a:p>
-        </p:txBody>
-      </p:sp>
-      <p:sp>
-        <p:nvSpPr>
-          <p:cNvPr id="7" name="cover-shape-6"/>
-          <p:cNvSpPr/>
-          <p:nvPr/>
-        </p:nvSpPr>
-        <p:spPr>
-          <a:xfrm>
-            <a:off x="12242800" y="2057400"/>
-            <a:ext cx="3200400" cy="3073400"/>
-          </a:xfrm>
-          <a:prstGeom prst="rect">
-            <a:avLst/>
-          </a:prstGeom>
-          <a:solidFill>
-            <a:srgbClr val="FCE8EA"/>
-          </a:solidFill>
-          <a:ln w="25400">
-            <a:solidFill>
-              <a:srgbClr val="C41220"/>
-            </a:solidFill>
-            <a:prstDash val="solid"/>
-          </a:ln>
-        </p:spPr>
-      </p:sp>
-      <p:sp>
-        <p:nvSpPr>
-          <p:cNvPr id="8" name="focus-label"/>
-          <p:cNvSpPr/>
-          <p:nvPr/>
-        </p:nvSpPr>
-        <p:spPr>
-          <a:xfrm>
-            <a:off x="12573000" y="2438400"/>
-            <a:ext cx="2540000" cy="254000"/>
-          </a:xfrm>
-          <a:prstGeom prst="rect">
-            <a:avLst/>
-          </a:prstGeom>
-          <a:noFill/>
-          <a:ln/>
-        </p:spPr>
-        <p:txBody>
-          <a:bodyPr wrap="square" lIns="0" tIns="0" rIns="0" bIns="0" rtlCol="0" anchor="t"/>
-          <a:lstStyle/>
-          <a:p>
-            <a:pPr algn="ctr" indent="0" marL="0">
-              <a:buNone/>
-            </a:pPr>
-            <a:r>
-              <a:rPr lang="en-US" altLang="en-US" sz="1400" dirty="0">
+              <a:buNone/>
+            </a:pPr>
+            <a:r>
+              <a:rPr lang="en-US" altLang="en-US" sz="2000" b="1" dirty="0">
                 <a:solidFill>
                   <a:srgbClr val="C41220"/>
                 </a:solidFill>
@@ -1876,127 +1997,18 @@
                 <a:ea typeface="Inter" pitchFamily="34" charset="-122"/>
                 <a:cs typeface="Inter" pitchFamily="34" charset="-120"/>
               </a:rPr>
-              <a:t>WORKING SESSION OUTCOME</a:t>
-            </a:r>
-            <a:endParaRPr lang="en-US" sz="1400" dirty="0"/>
-          </a:p>
-        </p:txBody>
-      </p:sp>
-      <p:sp>
-        <p:nvSpPr>
-          <p:cNvPr id="9" name="focus-copy"/>
-          <p:cNvSpPr/>
-          <p:nvPr/>
-        </p:nvSpPr>
-        <p:spPr>
-          <a:xfrm>
-            <a:off x="12547600" y="2933700"/>
-            <a:ext cx="2590800" cy="1714500"/>
-          </a:xfrm>
-          <a:prstGeom prst="rect">
-            <a:avLst/>
-          </a:prstGeom>
-          <a:noFill/>
-          <a:ln/>
-        </p:spPr>
-        <p:txBody>
-          <a:bodyPr wrap="square" lIns="0" tIns="0" rIns="0" bIns="0" rtlCol="0" anchor="ctr"/>
-          <a:lstStyle/>
-          <a:p>
-            <a:pPr algn="ctr" indent="0" marL="0">
-              <a:lnSpc>
-                <a:spcPts val="2280"/>
-              </a:lnSpc>
-              <a:buNone/>
-            </a:pPr>
-            <a:r>
-              <a:rPr lang="en-US" altLang="en-US" sz="1900" dirty="0">
-                <a:solidFill>
-                  <a:srgbClr val="3C4043"/>
-                </a:solidFill>
-                <a:latin typeface="Inter" pitchFamily="34" charset="0"/>
-                <a:ea typeface="Inter" pitchFamily="34" charset="-122"/>
-                <a:cs typeface="Inter" pitchFamily="34" charset="-120"/>
-              </a:rPr>
-              <a:t>One course-ready CUBS/CER routine with clear student directions, a feedback and revision action, an evidence check, and a recorded next step.</a:t>
-            </a:r>
-            <a:endParaRPr lang="en-US" sz="1900" dirty="0"/>
-          </a:p>
-        </p:txBody>
-      </p:sp>
-      <p:sp>
-        <p:nvSpPr>
-          <p:cNvPr id="10" name="cover-shape-9"/>
-          <p:cNvSpPr/>
-          <p:nvPr/>
-        </p:nvSpPr>
-        <p:spPr>
-          <a:xfrm>
-            <a:off x="736600" y="5994400"/>
-            <a:ext cx="14706600" cy="1295400"/>
-          </a:xfrm>
-          <a:prstGeom prst="rect">
-            <a:avLst/>
-          </a:prstGeom>
-          <a:solidFill>
-            <a:srgbClr val="F3F4F6"/>
-          </a:solidFill>
-          <a:ln w="12700">
-            <a:solidFill>
-              <a:srgbClr val="D1D5DB"/>
-            </a:solidFill>
-            <a:prstDash val="solid"/>
-          </a:ln>
-        </p:spPr>
-      </p:sp>
-      <p:sp>
-        <p:nvSpPr>
-          <p:cNvPr id="11" name="anchor"/>
-          <p:cNvSpPr/>
-          <p:nvPr/>
-        </p:nvSpPr>
-        <p:spPr>
-          <a:xfrm>
-            <a:off x="1117600" y="6248400"/>
-            <a:ext cx="13919200" cy="838200"/>
-          </a:xfrm>
-          <a:prstGeom prst="rect">
-            <a:avLst/>
-          </a:prstGeom>
-          <a:noFill/>
-          <a:ln/>
-        </p:spPr>
-        <p:txBody>
-          <a:bodyPr wrap="square" lIns="0" tIns="0" rIns="0" bIns="0" rtlCol="0" anchor="t"/>
-          <a:lstStyle/>
-          <a:p>
-            <a:pPr algn="l" indent="0" marL="0">
-              <a:lnSpc>
-                <a:spcPts val="2400"/>
-              </a:lnSpc>
-              <a:buNone/>
-            </a:pPr>
-            <a:r>
-              <a:rPr lang="en-US" altLang="en-US" sz="2000" b="1" dirty="0">
-                <a:solidFill>
-                  <a:srgbClr val="C41220"/>
-                </a:solidFill>
-                <a:latin typeface="Inter" pitchFamily="34" charset="0"/>
-                <a:ea typeface="Inter" pitchFamily="34" charset="-122"/>
-                <a:cs typeface="Inter" pitchFamily="34" charset="-120"/>
-              </a:rPr>
-              <a:t>Bring an authentic course source/task and 1–2 de-identified writing samples.</a:t>
+              <a:t>Lesson Internalization Tool:</a:t>
             </a:r>
             <a:r>
               <a:rPr lang="en-US" altLang="en-US" sz="2000" dirty="0">
                 <a:solidFill>
-                  <a:srgbClr val="3C4043"/>
-                </a:solidFill>
-                <a:latin typeface="Inter" pitchFamily="34" charset="0"/>
-                <a:ea typeface="Inter" pitchFamily="34" charset="-122"/>
-                <a:cs typeface="Inter" pitchFamily="34" charset="-120"/>
-              </a:rPr>
-              <a:t> The Biology benchmark is optional; each teacher will adapt the routine and use samples to calibrate student thinking, feedback, and revision.</a:t>
+                  <a:srgbClr val="343A40"/>
+                </a:solidFill>
+                <a:latin typeface="Inter" pitchFamily="34" charset="0"/>
+                <a:ea typeface="Inter" pitchFamily="34" charset="-122"/>
+                <a:cs typeface="Inter" pitchFamily="34" charset="-120"/>
+              </a:rPr>
+              <a:t> anticipate student thinking, plan support, and adjust from evidence.</a:t>
             </a:r>
             <a:endParaRPr lang="en-US" sz="2000" dirty="0"/>
           </a:p>
@@ -2004,57 +2016,7 @@
       </p:sp>
       <p:sp>
         <p:nvSpPr>
-          <p:cNvPr id="12" name="footer"/>
-          <p:cNvSpPr/>
-          <p:nvPr/>
-        </p:nvSpPr>
-        <p:spPr>
-          <a:xfrm>
-            <a:off x="736600" y="7975600"/>
-            <a:ext cx="13208000" cy="431800"/>
-          </a:xfrm>
-          <a:prstGeom prst="rect">
-            <a:avLst/>
-          </a:prstGeom>
-          <a:noFill/>
-          <a:ln/>
-        </p:spPr>
-        <p:txBody>
-          <a:bodyPr wrap="square" lIns="0" tIns="0" rIns="0" bIns="0" rtlCol="0" anchor="t"/>
-          <a:lstStyle/>
-          <a:p>
-            <a:pPr algn="l" indent="0" marL="0">
-              <a:buNone/>
-            </a:pPr>
-            <a:r>
-              <a:rPr lang="en-US" altLang="en-US" sz="2100" b="1" dirty="0">
-                <a:solidFill>
-                  <a:srgbClr val="C41220"/>
-                </a:solidFill>
-                <a:latin typeface="Inter" pitchFamily="34" charset="0"/>
-                <a:ea typeface="Inter" pitchFamily="34" charset="-122"/>
-                <a:cs typeface="Inter" pitchFamily="34" charset="-120"/>
-              </a:rPr>
-              <a:t>Lesson Internalization Tool:</a:t>
-            </a:r>
-            <a:r>
-              <a:rPr lang="en-US" altLang="en-US" sz="2100" dirty="0">
-                <a:solidFill>
-                  <a:srgbClr val="3C4043"/>
-                </a:solidFill>
-                <a:latin typeface="Inter" pitchFamily="34" charset="0"/>
-                <a:ea typeface="Inter" pitchFamily="34" charset="-122"/>
-                <a:cs typeface="Inter" pitchFamily="34" charset="-120"/>
-              </a:rPr>
-              <a:t> Every Day Questions 1, 3, and 4; Team Deep Dive Steps 2–4.</a:t>
-            </a:r>
-            <a:endParaRPr lang="en-US" sz="2100" dirty="0"/>
-          </a:p>
-        </p:txBody>
-      </p:sp>
-      <p:sp>
-        <p:nvSpPr>
-          <p:cNvPr id="13" name="page"/>
+          <p:cNvPr id="12" name="page"/>
           <p:cNvSpPr/>
           <p:nvPr/>
         </p:nvSpPr>
@@ -2079,7 +2041,7 @@
             <a:r>
               <a:rPr lang="en-US" altLang="en-US" sz="1300" dirty="0">
                 <a:solidFill>
-                  <a:srgbClr val="6B7280"/>
+                  <a:srgbClr val="667085"/>
                 </a:solidFill>
                 <a:latin typeface="Inter" pitchFamily="34" charset="0"/>
                 <a:ea typeface="Inter" pitchFamily="34" charset="-122"/>
@@ -2093,7 +2055,7 @@
       </p:sp>
       <p:sp>
         <p:nvSpPr>
-          <p:cNvPr id="14" name="cover-shape-13"/>
+          <p:cNvPr id="13" name="cover-shape-12"/>
           <p:cNvSpPr/>
           <p:nvPr/>
         </p:nvSpPr>
@@ -2196,7 +2158,7 @@
                 <a:ea typeface="Inter" pitchFamily="34" charset="-122"/>
                 <a:cs typeface="Inter" pitchFamily="34" charset="-120"/>
               </a:rPr>
-              <a:t>Calibrate a Transferable Science Literacy Routine</a:t>
+              <a:t>The Simple Routine for Today</a:t>
             </a:r>
             <a:endParaRPr lang="en-US" sz="3000" dirty="0"/>
           </a:p>
@@ -2249,8 +2211,8 @@
         </p:nvSpPr>
         <p:spPr>
           <a:xfrm>
-            <a:off x="508000" y="1397000"/>
-            <a:ext cx="14605000" cy="698500"/>
+            <a:off x="508000" y="1460500"/>
+            <a:ext cx="14732000" cy="533400"/>
           </a:xfrm>
           <a:prstGeom prst="rect">
             <a:avLst/>
@@ -2263,23 +2225,20 @@
           <a:lstStyle/>
           <a:p>
             <a:pPr algn="l" indent="0" marL="0">
-              <a:lnSpc>
-                <a:spcPts val="2760"/>
-              </a:lnSpc>
-              <a:buNone/>
-            </a:pPr>
-            <a:r>
-              <a:rPr lang="en-US" altLang="en-US" sz="2300" dirty="0">
-                <a:solidFill>
-                  <a:srgbClr val="3C4043"/>
-                </a:solidFill>
-                <a:latin typeface="Inter" pitchFamily="34" charset="0"/>
-                <a:ea typeface="Inter" pitchFamily="34" charset="-122"/>
-                <a:cs typeface="Inter" pitchFamily="34" charset="-120"/>
-              </a:rPr>
-              <a:t>Use an authentic course source, response task, and de-identified writing samples to align what students notice, explain, revise, and show as evidence of standards-aligned science learning.</a:t>
-            </a:r>
-            <a:endParaRPr lang="en-US" sz="2300" dirty="0"/>
+              <a:buNone/>
+            </a:pPr>
+            <a:r>
+              <a:rPr lang="en-US" altLang="en-US" sz="2400" dirty="0">
+                <a:solidFill>
+                  <a:srgbClr val="343A40"/>
+                </a:solidFill>
+                <a:latin typeface="Inter" pitchFamily="34" charset="0"/>
+                <a:ea typeface="Inter" pitchFamily="34" charset="-122"/>
+                <a:cs typeface="Inter" pitchFamily="34" charset="-120"/>
+              </a:rPr>
+              <a:t>Students first make sense of a source. Then they use that thinking to write and improve an explanation.</a:t>
+            </a:r>
+            <a:endParaRPr lang="en-US" sz="2400" dirty="0"/>
           </a:p>
         </p:txBody>
       </p:sp>
@@ -2291,18 +2250,18 @@
         </p:nvSpPr>
         <p:spPr>
           <a:xfrm>
-            <a:off x="508000" y="2857500"/>
-            <a:ext cx="2794000" cy="3149600"/>
-          </a:xfrm>
-          <a:prstGeom prst="rect">
-            <a:avLst/>
-          </a:prstGeom>
-          <a:solidFill>
-            <a:srgbClr val="F3F4F6"/>
+            <a:off x="698500" y="2794000"/>
+            <a:ext cx="3302000" cy="3175000"/>
+          </a:xfrm>
+          <a:prstGeom prst="rect">
+            <a:avLst/>
+          </a:prstGeom>
+          <a:solidFill>
+            <a:srgbClr val="F5F6F8"/>
           </a:solidFill>
           <a:ln w="12700">
             <a:solidFill>
-              <a:srgbClr val="D1D5DB"/>
+              <a:srgbClr val="D4D8DE"/>
             </a:solidFill>
             <a:prstDash val="solid"/>
           </a:ln>
@@ -2316,18 +2275,18 @@
         </p:nvSpPr>
         <p:spPr>
           <a:xfrm>
-            <a:off x="3556000" y="2857500"/>
-            <a:ext cx="2794000" cy="3149600"/>
-          </a:xfrm>
-          <a:prstGeom prst="rect">
-            <a:avLst/>
-          </a:prstGeom>
-          <a:solidFill>
-            <a:srgbClr val="F3F4F6"/>
+            <a:off x="4508500" y="2794000"/>
+            <a:ext cx="3302000" cy="3175000"/>
+          </a:xfrm>
+          <a:prstGeom prst="rect">
+            <a:avLst/>
+          </a:prstGeom>
+          <a:solidFill>
+            <a:srgbClr val="F5F6F8"/>
           </a:solidFill>
           <a:ln w="12700">
             <a:solidFill>
-              <a:srgbClr val="D1D5DB"/>
+              <a:srgbClr val="D4D8DE"/>
             </a:solidFill>
             <a:prstDash val="solid"/>
           </a:ln>
@@ -2341,18 +2300,18 @@
         </p:nvSpPr>
         <p:spPr>
           <a:xfrm>
-            <a:off x="6604000" y="2857500"/>
-            <a:ext cx="2794000" cy="3149600"/>
-          </a:xfrm>
-          <a:prstGeom prst="rect">
-            <a:avLst/>
-          </a:prstGeom>
-          <a:solidFill>
-            <a:srgbClr val="F3F4F6"/>
+            <a:off x="8318500" y="2794000"/>
+            <a:ext cx="3302000" cy="3175000"/>
+          </a:xfrm>
+          <a:prstGeom prst="rect">
+            <a:avLst/>
+          </a:prstGeom>
+          <a:solidFill>
+            <a:srgbClr val="F5F6F8"/>
           </a:solidFill>
           <a:ln w="12700">
             <a:solidFill>
-              <a:srgbClr val="D1D5DB"/>
+              <a:srgbClr val="D4D8DE"/>
             </a:solidFill>
             <a:prstDash val="solid"/>
           </a:ln>
@@ -2366,33 +2325,8 @@
         </p:nvSpPr>
         <p:spPr>
           <a:xfrm>
-            <a:off x="9652000" y="2857500"/>
-            <a:ext cx="2794000" cy="3149600"/>
-          </a:xfrm>
-          <a:prstGeom prst="rect">
-            <a:avLst/>
-          </a:prstGeom>
-          <a:solidFill>
-            <a:srgbClr val="F3F4F6"/>
-          </a:solidFill>
-          <a:ln w="12700">
-            <a:solidFill>
-              <a:srgbClr val="D1D5DB"/>
-            </a:solidFill>
-            <a:prstDash val="solid"/>
-          </a:ln>
-        </p:spPr>
-      </p:sp>
-      <p:sp>
-        <p:nvSpPr>
-          <p:cNvPr id="10" name="outcome-shape-9"/>
-          <p:cNvSpPr/>
-          <p:nvPr/>
-        </p:nvSpPr>
-        <p:spPr>
-          <a:xfrm>
-            <a:off x="12700000" y="2857500"/>
-            <a:ext cx="3048000" cy="3149600"/>
+            <a:off x="12128500" y="2794000"/>
+            <a:ext cx="3429000" cy="3175000"/>
           </a:xfrm>
           <a:prstGeom prst="rect">
             <a:avLst/>
@@ -2410,14 +2344,14 @@
       </p:sp>
       <p:sp>
         <p:nvSpPr>
-          <p:cNvPr id="11" name="c1"/>
-          <p:cNvSpPr/>
-          <p:nvPr/>
-        </p:nvSpPr>
-        <p:spPr>
-          <a:xfrm>
-            <a:off x="812800" y="3200400"/>
-            <a:ext cx="2184400" cy="2184400"/>
+          <p:cNvPr id="10" name="step1"/>
+          <p:cNvSpPr/>
+          <p:nvPr/>
+        </p:nvSpPr>
+        <p:spPr>
+          <a:xfrm>
+            <a:off x="1054100" y="3276600"/>
+            <a:ext cx="2590800" cy="2032000"/>
           </a:xfrm>
           <a:prstGeom prst="rect">
             <a:avLst/>
@@ -2429,14 +2363,14 @@
           <a:bodyPr wrap="square" lIns="0" tIns="0" rIns="0" bIns="0" rtlCol="0" anchor="t"/>
           <a:lstStyle/>
           <a:p>
-            <a:pPr algn="l" indent="0" marL="0">
+            <a:pPr algn="ctr" indent="0" marL="0">
               <a:lnSpc>
-                <a:spcPts val="1800"/>
+                <a:spcPts val="1952"/>
               </a:lnSpc>
               <a:buNone/>
             </a:pPr>
             <a:r>
-              <a:rPr lang="en-US" altLang="en-US" sz="1500" b="1" dirty="0">
+              <a:rPr lang="en-US" altLang="en-US" sz="1600" b="1" dirty="0">
                 <a:solidFill>
                   <a:srgbClr val="C41220"/>
                 </a:solidFill>
@@ -2444,14 +2378,37 @@
                 <a:ea typeface="Inter" pitchFamily="34" charset="-122"/>
                 <a:cs typeface="Inter" pitchFamily="34" charset="-120"/>
               </a:rPr>
-              <a:t>01</a:t>
-            </a:r>
-            <a:endParaRPr lang="en-US" sz="2000" dirty="0"/>
-          </a:p>
-          <a:p>
-            <a:pPr algn="l" indent="0" marL="0">
+              <a:t>1</a:t>
+            </a:r>
+            <a:endParaRPr lang="en-US" sz="2300" dirty="0"/>
+          </a:p>
+          <a:p>
+            <a:pPr algn="ctr" indent="0" marL="0">
               <a:lnSpc>
-                <a:spcPts val="2400"/>
+                <a:spcPts val="2806"/>
+              </a:lnSpc>
+              <a:spcBef>
+                <a:spcPts val="1000"/>
+              </a:spcBef>
+              <a:buNone/>
+            </a:pPr>
+            <a:r>
+              <a:rPr lang="en-US" altLang="en-US" sz="2300" b="1" dirty="0">
+                <a:solidFill>
+                  <a:srgbClr val="343A40"/>
+                </a:solidFill>
+                <a:latin typeface="Inter" pitchFamily="34" charset="0"/>
+                <a:ea typeface="Inter" pitchFamily="34" charset="-122"/>
+                <a:cs typeface="Inter" pitchFamily="34" charset="-120"/>
+              </a:rPr>
+              <a:t>Read the source</a:t>
+            </a:r>
+            <a:endParaRPr lang="en-US" sz="2300" dirty="0"/>
+          </a:p>
+          <a:p>
+            <a:pPr algn="ctr" indent="0" marL="0">
+              <a:lnSpc>
+                <a:spcPts val="2806"/>
               </a:lnSpc>
               <a:spcBef>
                 <a:spcPts val="1200"/>
@@ -2459,22 +2416,64 @@
               <a:buNone/>
             </a:pPr>
             <a:r>
-              <a:rPr lang="en-US" altLang="en-US" sz="2000" b="1" dirty="0">
-                <a:solidFill>
-                  <a:srgbClr val="3C4043"/>
-                </a:solidFill>
-                <a:latin typeface="Inter" pitchFamily="34" charset="0"/>
-                <a:ea typeface="Inter" pitchFamily="34" charset="-122"/>
-                <a:cs typeface="Inter" pitchFamily="34" charset="-120"/>
-              </a:rPr>
-              <a:t>Choose the source + task</a:t>
-            </a:r>
-            <a:endParaRPr lang="en-US" sz="2000" dirty="0"/>
-          </a:p>
-          <a:p>
-            <a:pPr algn="l" indent="0" marL="0">
+              <a:rPr lang="en-US" altLang="en-US" sz="2300" dirty="0">
+                <a:solidFill>
+                  <a:srgbClr val="343A40"/>
+                </a:solidFill>
+                <a:latin typeface="Inter" pitchFamily="34" charset="0"/>
+                <a:ea typeface="Inter" pitchFamily="34" charset="-122"/>
+                <a:cs typeface="Inter" pitchFamily="34" charset="-120"/>
+              </a:rPr>
+              <a:t>Students notice the important information.</a:t>
+            </a:r>
+            <a:endParaRPr lang="en-US" sz="2300" dirty="0"/>
+          </a:p>
+        </p:txBody>
+      </p:sp>
+      <p:sp>
+        <p:nvSpPr>
+          <p:cNvPr id="11" name="step2"/>
+          <p:cNvSpPr/>
+          <p:nvPr/>
+        </p:nvSpPr>
+        <p:spPr>
+          <a:xfrm>
+            <a:off x="4864100" y="3276600"/>
+            <a:ext cx="2590800" cy="2032000"/>
+          </a:xfrm>
+          <a:prstGeom prst="rect">
+            <a:avLst/>
+          </a:prstGeom>
+          <a:noFill/>
+          <a:ln/>
+        </p:spPr>
+        <p:txBody>
+          <a:bodyPr wrap="square" lIns="0" tIns="0" rIns="0" bIns="0" rtlCol="0" anchor="t"/>
+          <a:lstStyle/>
+          <a:p>
+            <a:pPr algn="ctr" indent="0" marL="0">
               <a:lnSpc>
-                <a:spcPts val="2400"/>
+                <a:spcPts val="1952"/>
+              </a:lnSpc>
+              <a:buNone/>
+            </a:pPr>
+            <a:r>
+              <a:rPr lang="en-US" altLang="en-US" sz="1600" b="1" dirty="0">
+                <a:solidFill>
+                  <a:srgbClr val="C41220"/>
+                </a:solidFill>
+                <a:latin typeface="Inter" pitchFamily="34" charset="0"/>
+                <a:ea typeface="Inter" pitchFamily="34" charset="-122"/>
+                <a:cs typeface="Inter" pitchFamily="34" charset="-120"/>
+              </a:rPr>
+              <a:t>2</a:t>
+            </a:r>
+            <a:endParaRPr lang="en-US" sz="2300" dirty="0"/>
+          </a:p>
+          <a:p>
+            <a:pPr algn="ctr" indent="0" marL="0">
+              <a:lnSpc>
+                <a:spcPts val="2806"/>
               </a:lnSpc>
               <a:spcBef>
                 <a:spcPts val="1000"/>
@@ -2482,64 +2481,22 @@
               <a:buNone/>
             </a:pPr>
             <a:r>
-              <a:rPr lang="en-US" altLang="en-US" sz="2000" dirty="0">
-                <a:solidFill>
-                  <a:srgbClr val="3C4043"/>
-                </a:solidFill>
-                <a:latin typeface="Inter" pitchFamily="34" charset="0"/>
-                <a:ea typeface="Inter" pitchFamily="34" charset="-122"/>
-                <a:cs typeface="Inter" pitchFamily="34" charset="-120"/>
-              </a:rPr>
-              <a:t>Use a text, graph, data set, diagram, model, lab result, or scenario.</a:t>
-            </a:r>
-            <a:endParaRPr lang="en-US" sz="2000" dirty="0"/>
-          </a:p>
-        </p:txBody>
-      </p:sp>
-      <p:sp>
-        <p:nvSpPr>
-          <p:cNvPr id="12" name="c2"/>
-          <p:cNvSpPr/>
-          <p:nvPr/>
-        </p:nvSpPr>
-        <p:spPr>
-          <a:xfrm>
-            <a:off x="3860800" y="3200400"/>
-            <a:ext cx="2184400" cy="2184400"/>
-          </a:xfrm>
-          <a:prstGeom prst="rect">
-            <a:avLst/>
-          </a:prstGeom>
-          <a:noFill/>
-          <a:ln/>
-        </p:spPr>
-        <p:txBody>
-          <a:bodyPr wrap="square" lIns="0" tIns="0" rIns="0" bIns="0" rtlCol="0" anchor="t"/>
-          <a:lstStyle/>
-          <a:p>
-            <a:pPr algn="l" indent="0" marL="0">
+              <a:rPr lang="en-US" altLang="en-US" sz="2300" b="1" dirty="0">
+                <a:solidFill>
+                  <a:srgbClr val="343A40"/>
+                </a:solidFill>
+                <a:latin typeface="Inter" pitchFamily="34" charset="0"/>
+                <a:ea typeface="Inter" pitchFamily="34" charset="-122"/>
+                <a:cs typeface="Inter" pitchFamily="34" charset="-120"/>
+              </a:rPr>
+              <a:t>Write a CER</a:t>
+            </a:r>
+            <a:endParaRPr lang="en-US" sz="2300" dirty="0"/>
+          </a:p>
+          <a:p>
+            <a:pPr algn="ctr" indent="0" marL="0">
               <a:lnSpc>
-                <a:spcPts val="1800"/>
-              </a:lnSpc>
-              <a:buNone/>
-            </a:pPr>
-            <a:r>
-              <a:rPr lang="en-US" altLang="en-US" sz="1500" b="1" dirty="0">
-                <a:solidFill>
-                  <a:srgbClr val="C41220"/>
-                </a:solidFill>
-                <a:latin typeface="Inter" pitchFamily="34" charset="0"/>
-                <a:ea typeface="Inter" pitchFamily="34" charset="-122"/>
-                <a:cs typeface="Inter" pitchFamily="34" charset="-120"/>
-              </a:rPr>
-              <a:t>02</a:t>
-            </a:r>
-            <a:endParaRPr lang="en-US" sz="2000" dirty="0"/>
-          </a:p>
-          <a:p>
-            <a:pPr algn="l" indent="0" marL="0">
-              <a:lnSpc>
-                <a:spcPts val="2400"/>
+                <a:spcPts val="2806"/>
               </a:lnSpc>
               <a:spcBef>
                 <a:spcPts val="1200"/>
@@ -2547,22 +2504,64 @@
               <a:buNone/>
             </a:pPr>
             <a:r>
-              <a:rPr lang="en-US" altLang="en-US" sz="2000" b="1" dirty="0">
-                <a:solidFill>
-                  <a:srgbClr val="3C4043"/>
-                </a:solidFill>
-                <a:latin typeface="Inter" pitchFamily="34" charset="0"/>
-                <a:ea typeface="Inter" pitchFamily="34" charset="-122"/>
-                <a:cs typeface="Inter" pitchFamily="34" charset="-120"/>
-              </a:rPr>
-              <a:t>Make noticing visible</a:t>
-            </a:r>
-            <a:endParaRPr lang="en-US" sz="2000" dirty="0"/>
-          </a:p>
-          <a:p>
-            <a:pPr algn="l" indent="0" marL="0">
+              <a:rPr lang="en-US" altLang="en-US" sz="2300" dirty="0">
+                <a:solidFill>
+                  <a:srgbClr val="343A40"/>
+                </a:solidFill>
+                <a:latin typeface="Inter" pitchFamily="34" charset="0"/>
+                <a:ea typeface="Inter" pitchFamily="34" charset="-122"/>
+                <a:cs typeface="Inter" pitchFamily="34" charset="-120"/>
+              </a:rPr>
+              <a:t>Students explain what the source shows.</a:t>
+            </a:r>
+            <a:endParaRPr lang="en-US" sz="2300" dirty="0"/>
+          </a:p>
+        </p:txBody>
+      </p:sp>
+      <p:sp>
+        <p:nvSpPr>
+          <p:cNvPr id="12" name="step3"/>
+          <p:cNvSpPr/>
+          <p:nvPr/>
+        </p:nvSpPr>
+        <p:spPr>
+          <a:xfrm>
+            <a:off x="8674100" y="3276600"/>
+            <a:ext cx="2590800" cy="2032000"/>
+          </a:xfrm>
+          <a:prstGeom prst="rect">
+            <a:avLst/>
+          </a:prstGeom>
+          <a:noFill/>
+          <a:ln/>
+        </p:spPr>
+        <p:txBody>
+          <a:bodyPr wrap="square" lIns="0" tIns="0" rIns="0" bIns="0" rtlCol="0" anchor="t"/>
+          <a:lstStyle/>
+          <a:p>
+            <a:pPr algn="ctr" indent="0" marL="0">
               <a:lnSpc>
-                <a:spcPts val="2400"/>
+                <a:spcPts val="1952"/>
+              </a:lnSpc>
+              <a:buNone/>
+            </a:pPr>
+            <a:r>
+              <a:rPr lang="en-US" altLang="en-US" sz="1600" b="1" dirty="0">
+                <a:solidFill>
+                  <a:srgbClr val="C41220"/>
+                </a:solidFill>
+                <a:latin typeface="Inter" pitchFamily="34" charset="0"/>
+                <a:ea typeface="Inter" pitchFamily="34" charset="-122"/>
+                <a:cs typeface="Inter" pitchFamily="34" charset="-120"/>
+              </a:rPr>
+              <a:t>3</a:t>
+            </a:r>
+            <a:endParaRPr lang="en-US" sz="2300" dirty="0"/>
+          </a:p>
+          <a:p>
+            <a:pPr algn="ctr" indent="0" marL="0">
+              <a:lnSpc>
+                <a:spcPts val="2806"/>
               </a:lnSpc>
               <a:spcBef>
                 <a:spcPts val="1000"/>
@@ -2570,64 +2569,22 @@
               <a:buNone/>
             </a:pPr>
             <a:r>
-              <a:rPr lang="en-US" altLang="en-US" sz="2000" dirty="0">
-                <a:solidFill>
-                  <a:srgbClr val="3C4043"/>
-                </a:solidFill>
-                <a:latin typeface="Inter" pitchFamily="34" charset="0"/>
-                <a:ea typeface="Inter" pitchFamily="34" charset="-122"/>
-                <a:cs typeface="Inter" pitchFamily="34" charset="-120"/>
-              </a:rPr>
-              <a:t>Rehearse CUBS or another access routine before students write.</a:t>
-            </a:r>
-            <a:endParaRPr lang="en-US" sz="2000" dirty="0"/>
-          </a:p>
-        </p:txBody>
-      </p:sp>
-      <p:sp>
-        <p:nvSpPr>
-          <p:cNvPr id="13" name="c3"/>
-          <p:cNvSpPr/>
-          <p:nvPr/>
-        </p:nvSpPr>
-        <p:spPr>
-          <a:xfrm>
-            <a:off x="6908800" y="3200400"/>
-            <a:ext cx="2184400" cy="2184400"/>
-          </a:xfrm>
-          <a:prstGeom prst="rect">
-            <a:avLst/>
-          </a:prstGeom>
-          <a:noFill/>
-          <a:ln/>
-        </p:spPr>
-        <p:txBody>
-          <a:bodyPr wrap="square" lIns="0" tIns="0" rIns="0" bIns="0" rtlCol="0" anchor="t"/>
-          <a:lstStyle/>
-          <a:p>
-            <a:pPr algn="l" indent="0" marL="0">
+              <a:rPr lang="en-US" altLang="en-US" sz="2300" b="1" dirty="0">
+                <a:solidFill>
+                  <a:srgbClr val="343A40"/>
+                </a:solidFill>
+                <a:latin typeface="Inter" pitchFamily="34" charset="0"/>
+                <a:ea typeface="Inter" pitchFamily="34" charset="-122"/>
+                <a:cs typeface="Inter" pitchFamily="34" charset="-120"/>
+              </a:rPr>
+              <a:t>Use feedback</a:t>
+            </a:r>
+            <a:endParaRPr lang="en-US" sz="2300" dirty="0"/>
+          </a:p>
+          <a:p>
+            <a:pPr algn="ctr" indent="0" marL="0">
               <a:lnSpc>
-                <a:spcPts val="1800"/>
-              </a:lnSpc>
-              <a:buNone/>
-            </a:pPr>
-            <a:r>
-              <a:rPr lang="en-US" altLang="en-US" sz="1500" b="1" dirty="0">
-                <a:solidFill>
-                  <a:srgbClr val="C41220"/>
-                </a:solidFill>
-                <a:latin typeface="Inter" pitchFamily="34" charset="0"/>
-                <a:ea typeface="Inter" pitchFamily="34" charset="-122"/>
-                <a:cs typeface="Inter" pitchFamily="34" charset="-120"/>
-              </a:rPr>
-              <a:t>03</a:t>
-            </a:r>
-            <a:endParaRPr lang="en-US" sz="2000" dirty="0"/>
-          </a:p>
-          <a:p>
-            <a:pPr algn="l" indent="0" marL="0">
-              <a:lnSpc>
-                <a:spcPts val="2400"/>
+                <a:spcPts val="2806"/>
               </a:lnSpc>
               <a:spcBef>
                 <a:spcPts val="1200"/>
@@ -2635,22 +2592,64 @@
               <a:buNone/>
             </a:pPr>
             <a:r>
-              <a:rPr lang="en-US" altLang="en-US" sz="2000" b="1" dirty="0">
-                <a:solidFill>
-                  <a:srgbClr val="3C4043"/>
-                </a:solidFill>
-                <a:latin typeface="Inter" pitchFamily="34" charset="0"/>
-                <a:ea typeface="Inter" pitchFamily="34" charset="-122"/>
-                <a:cs typeface="Inter" pitchFamily="34" charset="-120"/>
-              </a:rPr>
-              <a:t>Calibrate CER quality</a:t>
-            </a:r>
-            <a:endParaRPr lang="en-US" sz="2000" dirty="0"/>
-          </a:p>
-          <a:p>
-            <a:pPr algn="l" indent="0" marL="0">
+              <a:rPr lang="en-US" altLang="en-US" sz="2300" dirty="0">
+                <a:solidFill>
+                  <a:srgbClr val="343A40"/>
+                </a:solidFill>
+                <a:latin typeface="Inter" pitchFamily="34" charset="0"/>
+                <a:ea typeface="Inter" pitchFamily="34" charset="-122"/>
+                <a:cs typeface="Inter" pitchFamily="34" charset="-120"/>
+              </a:rPr>
+              <a:t>Students find one part to improve.</a:t>
+            </a:r>
+            <a:endParaRPr lang="en-US" sz="2300" dirty="0"/>
+          </a:p>
+        </p:txBody>
+      </p:sp>
+      <p:sp>
+        <p:nvSpPr>
+          <p:cNvPr id="13" name="step4"/>
+          <p:cNvSpPr/>
+          <p:nvPr/>
+        </p:nvSpPr>
+        <p:spPr>
+          <a:xfrm>
+            <a:off x="12484100" y="3276600"/>
+            <a:ext cx="2717800" cy="2032000"/>
+          </a:xfrm>
+          <a:prstGeom prst="rect">
+            <a:avLst/>
+          </a:prstGeom>
+          <a:noFill/>
+          <a:ln/>
+        </p:spPr>
+        <p:txBody>
+          <a:bodyPr wrap="square" lIns="0" tIns="0" rIns="0" bIns="0" rtlCol="0" anchor="t"/>
+          <a:lstStyle/>
+          <a:p>
+            <a:pPr algn="ctr" indent="0" marL="0">
               <a:lnSpc>
-                <a:spcPts val="2400"/>
+                <a:spcPts val="1952"/>
+              </a:lnSpc>
+              <a:buNone/>
+            </a:pPr>
+            <a:r>
+              <a:rPr lang="en-US" altLang="en-US" sz="1600" b="1" dirty="0">
+                <a:solidFill>
+                  <a:srgbClr val="C41220"/>
+                </a:solidFill>
+                <a:latin typeface="Inter" pitchFamily="34" charset="0"/>
+                <a:ea typeface="Inter" pitchFamily="34" charset="-122"/>
+                <a:cs typeface="Inter" pitchFamily="34" charset="-120"/>
+              </a:rPr>
+              <a:t>4</a:t>
+            </a:r>
+            <a:endParaRPr lang="en-US" sz="2300" dirty="0"/>
+          </a:p>
+          <a:p>
+            <a:pPr algn="ctr" indent="0" marL="0">
+              <a:lnSpc>
+                <a:spcPts val="2806"/>
               </a:lnSpc>
               <a:spcBef>
                 <a:spcPts val="1000"/>
@@ -2658,64 +2657,22 @@
               <a:buNone/>
             </a:pPr>
             <a:r>
-              <a:rPr lang="en-US" altLang="en-US" sz="2000" dirty="0">
-                <a:solidFill>
-                  <a:srgbClr val="3C4043"/>
-                </a:solidFill>
-                <a:latin typeface="Inter" pitchFamily="34" charset="0"/>
-                <a:ea typeface="Inter" pitchFamily="34" charset="-122"/>
-                <a:cs typeface="Inter" pitchFamily="34" charset="-120"/>
-              </a:rPr>
-              <a:t>Clarify claim, evidence, reasoning, and links to the science idea.</a:t>
-            </a:r>
-            <a:endParaRPr lang="en-US" sz="2000" dirty="0"/>
-          </a:p>
-        </p:txBody>
-      </p:sp>
-      <p:sp>
-        <p:nvSpPr>
-          <p:cNvPr id="14" name="c4"/>
-          <p:cNvSpPr/>
-          <p:nvPr/>
-        </p:nvSpPr>
-        <p:spPr>
-          <a:xfrm>
-            <a:off x="9956800" y="3200400"/>
-            <a:ext cx="2184400" cy="2184400"/>
-          </a:xfrm>
-          <a:prstGeom prst="rect">
-            <a:avLst/>
-          </a:prstGeom>
-          <a:noFill/>
-          <a:ln/>
-        </p:spPr>
-        <p:txBody>
-          <a:bodyPr wrap="square" lIns="0" tIns="0" rIns="0" bIns="0" rtlCol="0" anchor="t"/>
-          <a:lstStyle/>
-          <a:p>
-            <a:pPr algn="l" indent="0" marL="0">
+              <a:rPr lang="en-US" altLang="en-US" sz="2300" b="1" dirty="0">
+                <a:solidFill>
+                  <a:srgbClr val="343A40"/>
+                </a:solidFill>
+                <a:latin typeface="Inter" pitchFamily="34" charset="0"/>
+                <a:ea typeface="Inter" pitchFamily="34" charset="-122"/>
+                <a:cs typeface="Inter" pitchFamily="34" charset="-120"/>
+              </a:rPr>
+              <a:t>Revise</a:t>
+            </a:r>
+            <a:endParaRPr lang="en-US" sz="2300" dirty="0"/>
+          </a:p>
+          <a:p>
+            <a:pPr algn="ctr" indent="0" marL="0">
               <a:lnSpc>
-                <a:spcPts val="1800"/>
-              </a:lnSpc>
-              <a:buNone/>
-            </a:pPr>
-            <a:r>
-              <a:rPr lang="en-US" altLang="en-US" sz="1500" b="1" dirty="0">
-                <a:solidFill>
-                  <a:srgbClr val="C41220"/>
-                </a:solidFill>
-                <a:latin typeface="Inter" pitchFamily="34" charset="0"/>
-                <a:ea typeface="Inter" pitchFamily="34" charset="-122"/>
-                <a:cs typeface="Inter" pitchFamily="34" charset="-120"/>
-              </a:rPr>
-              <a:t>04</a:t>
-            </a:r>
-            <a:endParaRPr lang="en-US" sz="2000" dirty="0"/>
-          </a:p>
-          <a:p>
-            <a:pPr algn="l" indent="0" marL="0">
-              <a:lnSpc>
-                <a:spcPts val="2400"/>
+                <a:spcPts val="2806"/>
               </a:lnSpc>
               <a:spcBef>
                 <a:spcPts val="1200"/>
@@ -2723,53 +2680,50 @@
               <a:buNone/>
             </a:pPr>
             <a:r>
-              <a:rPr lang="en-US" altLang="en-US" sz="2000" b="1" dirty="0">
-                <a:solidFill>
-                  <a:srgbClr val="3C4043"/>
-                </a:solidFill>
-                <a:latin typeface="Inter" pitchFamily="34" charset="0"/>
-                <a:ea typeface="Inter" pitchFamily="34" charset="-122"/>
-                <a:cs typeface="Inter" pitchFamily="34" charset="-120"/>
-              </a:rPr>
-              <a:t>Plan feedback + revision</a:t>
-            </a:r>
-            <a:endParaRPr lang="en-US" sz="2000" dirty="0"/>
-          </a:p>
-          <a:p>
-            <a:pPr algn="l" indent="0" marL="0">
-              <a:lnSpc>
-                <a:spcPts val="2400"/>
-              </a:lnSpc>
-              <a:spcBef>
-                <a:spcPts val="1000"/>
-              </a:spcBef>
-              <a:buNone/>
-            </a:pPr>
-            <a:r>
-              <a:rPr lang="en-US" altLang="en-US" sz="2000" dirty="0">
-                <a:solidFill>
-                  <a:srgbClr val="3C4043"/>
-                </a:solidFill>
-                <a:latin typeface="Inter" pitchFamily="34" charset="0"/>
-                <a:ea typeface="Inter" pitchFamily="34" charset="-122"/>
-                <a:cs typeface="Inter" pitchFamily="34" charset="-120"/>
-              </a:rPr>
-              <a:t>Write a prompt and a specific action students will take.</a:t>
-            </a:r>
-            <a:endParaRPr lang="en-US" sz="2000" dirty="0"/>
-          </a:p>
-        </p:txBody>
-      </p:sp>
-      <p:sp>
-        <p:nvSpPr>
-          <p:cNvPr id="15" name="c5"/>
-          <p:cNvSpPr/>
-          <p:nvPr/>
-        </p:nvSpPr>
-        <p:spPr>
-          <a:xfrm>
-            <a:off x="13004800" y="3200400"/>
-            <a:ext cx="2438400" cy="2184400"/>
+              <a:rPr lang="en-US" altLang="en-US" sz="2300" dirty="0">
+                <a:solidFill>
+                  <a:srgbClr val="343A40"/>
+                </a:solidFill>
+                <a:latin typeface="Inter" pitchFamily="34" charset="0"/>
+                <a:ea typeface="Inter" pitchFamily="34" charset="-122"/>
+                <a:cs typeface="Inter" pitchFamily="34" charset="-120"/>
+              </a:rPr>
+              <a:t>Students add, change, or strengthen their explanation.</a:t>
+            </a:r>
+            <a:endParaRPr lang="en-US" sz="2300" dirty="0"/>
+          </a:p>
+        </p:txBody>
+      </p:sp>
+      <p:sp>
+        <p:nvSpPr>
+          <p:cNvPr id="14" name="outcome-shape-13"/>
+          <p:cNvSpPr/>
+          <p:nvPr/>
+        </p:nvSpPr>
+        <p:spPr>
+          <a:xfrm>
+            <a:off x="508000" y="6959600"/>
+            <a:ext cx="15240000" cy="787400"/>
+          </a:xfrm>
+          <a:prstGeom prst="rect">
+            <a:avLst/>
+          </a:prstGeom>
+          <a:solidFill>
+            <a:srgbClr val="202124"/>
+          </a:solidFill>
+          <a:ln/>
+        </p:spPr>
+      </p:sp>
+      <p:sp>
+        <p:nvSpPr>
+          <p:cNvPr id="15" name="note"/>
+          <p:cNvSpPr/>
+          <p:nvPr/>
+        </p:nvSpPr>
+        <p:spPr>
+          <a:xfrm>
+            <a:off x="889000" y="7188200"/>
+            <a:ext cx="14478000" cy="355600"/>
           </a:xfrm>
           <a:prstGeom prst="rect">
             <a:avLst/>
@@ -2781,118 +2735,7 @@
           <a:bodyPr wrap="square" lIns="0" tIns="0" rIns="0" bIns="0" rtlCol="0" anchor="t"/>
           <a:lstStyle/>
           <a:p>
-            <a:pPr algn="l" indent="0" marL="0">
-              <a:lnSpc>
-                <a:spcPts val="1800"/>
-              </a:lnSpc>
-              <a:buNone/>
-            </a:pPr>
-            <a:r>
-              <a:rPr lang="en-US" altLang="en-US" sz="1500" b="1" dirty="0">
-                <a:solidFill>
-                  <a:srgbClr val="C41220"/>
-                </a:solidFill>
-                <a:latin typeface="Inter" pitchFamily="34" charset="0"/>
-                <a:ea typeface="Inter" pitchFamily="34" charset="-122"/>
-                <a:cs typeface="Inter" pitchFamily="34" charset="-120"/>
-              </a:rPr>
-              <a:t>05</a:t>
-            </a:r>
-            <a:endParaRPr lang="en-US" sz="2000" dirty="0"/>
-          </a:p>
-          <a:p>
-            <a:pPr algn="l" indent="0" marL="0">
-              <a:lnSpc>
-                <a:spcPts val="2400"/>
-              </a:lnSpc>
-              <a:spcBef>
-                <a:spcPts val="1200"/>
-              </a:spcBef>
-              <a:buNone/>
-            </a:pPr>
-            <a:r>
-              <a:rPr lang="en-US" altLang="en-US" sz="2000" b="1" dirty="0">
-                <a:solidFill>
-                  <a:srgbClr val="3C4043"/>
-                </a:solidFill>
-                <a:latin typeface="Inter" pitchFamily="34" charset="0"/>
-                <a:ea typeface="Inter" pitchFamily="34" charset="-122"/>
-                <a:cs typeface="Inter" pitchFamily="34" charset="-120"/>
-              </a:rPr>
-              <a:t>Plan, reflect + adjust</a:t>
-            </a:r>
-            <a:endParaRPr lang="en-US" sz="2000" dirty="0"/>
-          </a:p>
-          <a:p>
-            <a:pPr algn="l" indent="0" marL="0">
-              <a:lnSpc>
-                <a:spcPts val="2400"/>
-              </a:lnSpc>
-              <a:spcBef>
-                <a:spcPts val="1000"/>
-              </a:spcBef>
-              <a:buNone/>
-            </a:pPr>
-            <a:r>
-              <a:rPr lang="en-US" altLang="en-US" sz="2000" dirty="0">
-                <a:solidFill>
-                  <a:srgbClr val="3C4043"/>
-                </a:solidFill>
-                <a:latin typeface="Inter" pitchFamily="34" charset="0"/>
-                <a:ea typeface="Inter" pitchFamily="34" charset="-122"/>
-                <a:cs typeface="Inter" pitchFamily="34" charset="-120"/>
-              </a:rPr>
-              <a:t>Record the priority need, feedback action, and next evidence check.</a:t>
-            </a:r>
-            <a:endParaRPr lang="en-US" sz="2000" dirty="0"/>
-          </a:p>
-        </p:txBody>
-      </p:sp>
-      <p:sp>
-        <p:nvSpPr>
-          <p:cNvPr id="16" name="outcome-shape-15"/>
-          <p:cNvSpPr/>
-          <p:nvPr/>
-        </p:nvSpPr>
-        <p:spPr>
-          <a:xfrm>
-            <a:off x="508000" y="6921500"/>
-            <a:ext cx="15240000" cy="939800"/>
-          </a:xfrm>
-          <a:prstGeom prst="rect">
-            <a:avLst/>
-          </a:prstGeom>
-          <a:solidFill>
-            <a:srgbClr val="202124"/>
-          </a:solidFill>
-          <a:ln/>
-        </p:spPr>
-      </p:sp>
-      <p:sp>
-        <p:nvSpPr>
-          <p:cNvPr id="17" name="note"/>
-          <p:cNvSpPr/>
-          <p:nvPr/>
-        </p:nvSpPr>
-        <p:spPr>
-          <a:xfrm>
-            <a:off x="838200" y="7150100"/>
-            <a:ext cx="14541500" cy="457200"/>
-          </a:xfrm>
-          <a:prstGeom prst="rect">
-            <a:avLst/>
-          </a:prstGeom>
-          <a:noFill/>
-          <a:ln/>
-        </p:spPr>
-        <p:txBody>
-          <a:bodyPr wrap="square" lIns="0" tIns="0" rIns="0" bIns="0" rtlCol="0" anchor="t"/>
-          <a:lstStyle/>
-          <a:p>
             <a:pPr algn="ctr" indent="0" marL="0">
-              <a:lnSpc>
-                <a:spcPts val="2478"/>
-              </a:lnSpc>
               <a:buNone/>
             </a:pPr>
             <a:r>
@@ -2904,7 +2747,7 @@
                 <a:ea typeface="Inter" pitchFamily="34" charset="-122"/>
                 <a:cs typeface="Inter" pitchFamily="34" charset="-120"/>
               </a:rPr>
-              <a:t>This is a student-thinking routine.</a:t>
+              <a:t>Important:</a:t>
             </a:r>
             <a:r>
               <a:rPr lang="en-US" altLang="en-US" sz="2100" dirty="0">
@@ -2915,7 +2758,7 @@
                 <a:ea typeface="Inter" pitchFamily="34" charset="-122"/>
                 <a:cs typeface="Inter" pitchFamily="34" charset="-120"/>
               </a:rPr>
-              <a:t> Adapt the source and product; keep students responsible for the science reasoning.</a:t>
+              <a:t> The routine supports student thinking. It does not give students the answer.</a:t>
             </a:r>
             <a:endParaRPr lang="en-US" sz="2100" dirty="0"/>
           </a:p>
@@ -2923,7 +2766,7 @@
       </p:sp>
       <p:sp>
         <p:nvSpPr>
-          <p:cNvPr id="18" name="page"/>
+          <p:cNvPr id="16" name="page"/>
           <p:cNvSpPr/>
           <p:nvPr/>
         </p:nvSpPr>
@@ -2948,7 +2791,7 @@
             <a:r>
               <a:rPr lang="en-US" altLang="en-US" sz="1300" dirty="0">
                 <a:solidFill>
-                  <a:srgbClr val="3C4043"/>
+                  <a:srgbClr val="343A40"/>
                 </a:solidFill>
                 <a:latin typeface="Inter" pitchFamily="34" charset="0"/>
                 <a:ea typeface="Inter" pitchFamily="34" charset="-122"/>
@@ -2962,7 +2805,7 @@
       </p:sp>
       <p:sp>
         <p:nvSpPr>
-          <p:cNvPr id="19" name="outcome-shape-18"/>
+          <p:cNvPr id="17" name="outcome-shape-16"/>
           <p:cNvSpPr/>
           <p:nvPr/>
         </p:nvSpPr>
@@ -3065,7 +2908,7 @@
                 <a:ea typeface="Inter" pitchFamily="34" charset="-122"/>
                 <a:cs typeface="Inter" pitchFamily="34" charset="-120"/>
               </a:rPr>
-              <a:t>One Evidence-to-Action Cycle, Multiple Science Contexts</a:t>
+              <a:t>How This Connects to This Week's PLCs</a:t>
             </a:r>
             <a:endParaRPr lang="en-US" sz="3000" dirty="0"/>
           </a:p>
@@ -3118,8 +2961,8 @@
         </p:nvSpPr>
         <p:spPr>
           <a:xfrm>
-            <a:off x="508000" y="1397000"/>
-            <a:ext cx="14732000" cy="609600"/>
+            <a:off x="508000" y="1460500"/>
+            <a:ext cx="14732000" cy="533400"/>
           </a:xfrm>
           <a:prstGeom prst="rect">
             <a:avLst/>
@@ -3135,17 +2978,17 @@
               <a:buNone/>
             </a:pPr>
             <a:r>
-              <a:rPr lang="en-US" altLang="en-US" sz="2300" dirty="0">
-                <a:solidFill>
-                  <a:srgbClr val="3C4043"/>
-                </a:solidFill>
-                <a:latin typeface="Inter" pitchFamily="34" charset="0"/>
-                <a:ea typeface="Inter" pitchFamily="34" charset="-122"/>
-                <a:cs typeface="Inter" pitchFamily="34" charset="-120"/>
-              </a:rPr>
-              <a:t>The Biology benchmark was a shared learning model. Today, every teacher applies the same source-analysis, explanation, feedback, and revision cycle to an authentic task in the course they teach.</a:t>
-            </a:r>
-            <a:endParaRPr lang="en-US" sz="2300" dirty="0"/>
+              <a:rPr lang="en-US" altLang="en-US" sz="2400" dirty="0">
+                <a:solidFill>
+                  <a:srgbClr val="343A40"/>
+                </a:solidFill>
+                <a:latin typeface="Inter" pitchFamily="34" charset="0"/>
+                <a:ea typeface="Inter" pitchFamily="34" charset="-122"/>
+                <a:cs typeface="Inter" pitchFamily="34" charset="-120"/>
+              </a:rPr>
+              <a:t>The same simple question guides the week: What are students doing, and what will help them meet the standard?</a:t>
+            </a:r>
+            <a:endParaRPr lang="en-US" sz="2400" dirty="0"/>
           </a:p>
         </p:txBody>
       </p:sp>
@@ -3157,18 +3000,18 @@
         </p:nvSpPr>
         <p:spPr>
           <a:xfrm>
-            <a:off x="508000" y="2794000"/>
-            <a:ext cx="2794000" cy="3048000"/>
-          </a:xfrm>
-          <a:prstGeom prst="rect">
-            <a:avLst/>
-          </a:prstGeom>
-          <a:solidFill>
-            <a:srgbClr val="F3F4F6"/>
+            <a:off x="508000" y="2984500"/>
+            <a:ext cx="3175000" cy="2921000"/>
+          </a:xfrm>
+          <a:prstGeom prst="rect">
+            <a:avLst/>
+          </a:prstGeom>
+          <a:solidFill>
+            <a:srgbClr val="F5F6F8"/>
           </a:solidFill>
           <a:ln w="12700">
             <a:solidFill>
-              <a:srgbClr val="D1D5DB"/>
+              <a:srgbClr val="D4D8DE"/>
             </a:solidFill>
             <a:prstDash val="solid"/>
           </a:ln>
@@ -3176,151 +3019,24 @@
       </p:sp>
       <p:sp>
         <p:nvSpPr>
-          <p:cNvPr id="7" name="monday"/>
-          <p:cNvSpPr/>
-          <p:nvPr/>
-        </p:nvSpPr>
-        <p:spPr>
-          <a:xfrm>
-            <a:off x="800100" y="3175000"/>
-            <a:ext cx="2209800" cy="2082800"/>
-          </a:xfrm>
-          <a:prstGeom prst="rect">
-            <a:avLst/>
-          </a:prstGeom>
-          <a:noFill/>
-          <a:ln/>
-        </p:spPr>
-        <p:txBody>
-          <a:bodyPr wrap="square" lIns="0" tIns="0" rIns="0" bIns="0" rtlCol="0" anchor="t"/>
-          <a:lstStyle/>
-          <a:p>
-            <a:pPr algn="l" indent="0" marL="0">
-              <a:lnSpc>
-                <a:spcPts val="1800"/>
-              </a:lnSpc>
-              <a:buNone/>
-            </a:pPr>
-            <a:r>
-              <a:rPr lang="en-US" altLang="en-US" sz="1500" b="1" dirty="0">
-                <a:solidFill>
-                  <a:srgbClr val="C41220"/>
-                </a:solidFill>
-                <a:latin typeface="Inter" pitchFamily="34" charset="0"/>
-                <a:ea typeface="Inter" pitchFamily="34" charset="-122"/>
-                <a:cs typeface="Inter" pitchFamily="34" charset="-120"/>
-              </a:rPr>
-              <a:t>MONDAY</a:t>
-            </a:r>
-            <a:endParaRPr lang="en-US" sz="2000" dirty="0"/>
-          </a:p>
-          <a:p>
-            <a:pPr algn="l" indent="0" marL="0">
-              <a:lnSpc>
-                <a:spcPts val="2880"/>
-              </a:lnSpc>
-              <a:spcBef>
-                <a:spcPts val="1200"/>
-              </a:spcBef>
-              <a:buNone/>
-            </a:pPr>
-            <a:r>
-              <a:rPr lang="en-US" altLang="en-US" sz="2400" b="1" dirty="0">
-                <a:solidFill>
-                  <a:srgbClr val="3C4043"/>
-                </a:solidFill>
-                <a:latin typeface="Inter" pitchFamily="34" charset="0"/>
-                <a:ea typeface="Inter" pitchFamily="34" charset="-122"/>
-                <a:cs typeface="Inter" pitchFamily="34" charset="-120"/>
-              </a:rPr>
-              <a:t>Experience a task</a:t>
-            </a:r>
-            <a:endParaRPr lang="en-US" sz="2000" dirty="0"/>
-          </a:p>
-          <a:p>
-            <a:pPr algn="l" indent="0" marL="0">
-              <a:lnSpc>
-                <a:spcPts val="2400"/>
-              </a:lnSpc>
-              <a:spcBef>
-                <a:spcPts val="1000"/>
-              </a:spcBef>
-              <a:buNone/>
-            </a:pPr>
-            <a:r>
-              <a:rPr lang="en-US" altLang="en-US" sz="2000" dirty="0">
-                <a:solidFill>
-                  <a:srgbClr val="3C4043"/>
-                </a:solidFill>
-                <a:latin typeface="Inter" pitchFamily="34" charset="0"/>
-                <a:ea typeface="Inter" pitchFamily="34" charset="-122"/>
-                <a:cs typeface="Inter" pitchFamily="34" charset="-120"/>
-              </a:rPr>
-              <a:t>Use a common benchmark model to see the learner demand.</a:t>
-            </a:r>
-            <a:endParaRPr lang="en-US" sz="2000" dirty="0"/>
-          </a:p>
-        </p:txBody>
-      </p:sp>
-      <p:sp>
-        <p:nvSpPr>
-          <p:cNvPr id="8" name="arrow1"/>
-          <p:cNvSpPr/>
-          <p:nvPr/>
-        </p:nvSpPr>
-        <p:spPr>
-          <a:xfrm>
-            <a:off x="3378200" y="4051300"/>
-            <a:ext cx="584200" cy="533400"/>
-          </a:xfrm>
-          <a:prstGeom prst="rect">
-            <a:avLst/>
-          </a:prstGeom>
-          <a:noFill/>
-          <a:ln/>
-        </p:spPr>
-        <p:txBody>
-          <a:bodyPr wrap="square" lIns="0" tIns="0" rIns="0" bIns="0" rtlCol="0" anchor="t"/>
-          <a:lstStyle/>
-          <a:p>
-            <a:pPr algn="ctr" indent="0" marL="0">
-              <a:buNone/>
-            </a:pPr>
-            <a:r>
-              <a:rPr lang="en-US" altLang="en-US" sz="3400" dirty="0">
-                <a:solidFill>
-                  <a:srgbClr val="C41220"/>
-                </a:solidFill>
-                <a:latin typeface="Inter" pitchFamily="34" charset="0"/>
-                <a:ea typeface="Inter" pitchFamily="34" charset="-122"/>
-                <a:cs typeface="Inter" pitchFamily="34" charset="-120"/>
-              </a:rPr>
-              <a:t>→</a:t>
-            </a:r>
-            <a:endParaRPr lang="en-US" sz="3400" dirty="0"/>
-          </a:p>
-        </p:txBody>
-      </p:sp>
-      <p:sp>
-        <p:nvSpPr>
-          <p:cNvPr id="9" name="cycle-shape-8"/>
-          <p:cNvSpPr/>
-          <p:nvPr/>
-        </p:nvSpPr>
-        <p:spPr>
-          <a:xfrm>
-            <a:off x="4064000" y="2794000"/>
-            <a:ext cx="2794000" cy="3048000"/>
-          </a:xfrm>
-          <a:prstGeom prst="rect">
-            <a:avLst/>
-          </a:prstGeom>
-          <a:solidFill>
-            <a:srgbClr val="F3F4F6"/>
+          <p:cNvPr id="7" name="cycle-shape-6"/>
+          <p:cNvSpPr/>
+          <p:nvPr/>
+        </p:nvSpPr>
+        <p:spPr>
+          <a:xfrm>
+            <a:off x="4381500" y="2984500"/>
+            <a:ext cx="3175000" cy="2921000"/>
+          </a:xfrm>
+          <a:prstGeom prst="rect">
+            <a:avLst/>
+          </a:prstGeom>
+          <a:solidFill>
+            <a:srgbClr val="F5F6F8"/>
           </a:solidFill>
           <a:ln w="12700">
             <a:solidFill>
-              <a:srgbClr val="D1D5DB"/>
+              <a:srgbClr val="D4D8DE"/>
             </a:solidFill>
             <a:prstDash val="solid"/>
           </a:ln>
@@ -3328,141 +3044,14 @@
       </p:sp>
       <p:sp>
         <p:nvSpPr>
-          <p:cNvPr id="10" name="tuesday"/>
-          <p:cNvSpPr/>
-          <p:nvPr/>
-        </p:nvSpPr>
-        <p:spPr>
-          <a:xfrm>
-            <a:off x="4356100" y="3175000"/>
-            <a:ext cx="2209800" cy="2082800"/>
-          </a:xfrm>
-          <a:prstGeom prst="rect">
-            <a:avLst/>
-          </a:prstGeom>
-          <a:noFill/>
-          <a:ln/>
-        </p:spPr>
-        <p:txBody>
-          <a:bodyPr wrap="square" lIns="0" tIns="0" rIns="0" bIns="0" rtlCol="0" anchor="t"/>
-          <a:lstStyle/>
-          <a:p>
-            <a:pPr algn="l" indent="0" marL="0">
-              <a:lnSpc>
-                <a:spcPts val="1800"/>
-              </a:lnSpc>
-              <a:buNone/>
-            </a:pPr>
-            <a:r>
-              <a:rPr lang="en-US" altLang="en-US" sz="1500" b="1" dirty="0">
-                <a:solidFill>
-                  <a:srgbClr val="C41220"/>
-                </a:solidFill>
-                <a:latin typeface="Inter" pitchFamily="34" charset="0"/>
-                <a:ea typeface="Inter" pitchFamily="34" charset="-122"/>
-                <a:cs typeface="Inter" pitchFamily="34" charset="-120"/>
-              </a:rPr>
-              <a:t>TUESDAY</a:t>
-            </a:r>
-            <a:endParaRPr lang="en-US" sz="2000" dirty="0"/>
-          </a:p>
-          <a:p>
-            <a:pPr algn="l" indent="0" marL="0">
-              <a:lnSpc>
-                <a:spcPts val="2880"/>
-              </a:lnSpc>
-              <a:spcBef>
-                <a:spcPts val="1200"/>
-              </a:spcBef>
-              <a:buNone/>
-            </a:pPr>
-            <a:r>
-              <a:rPr lang="en-US" altLang="en-US" sz="2400" b="1" dirty="0">
-                <a:solidFill>
-                  <a:srgbClr val="3C4043"/>
-                </a:solidFill>
-                <a:latin typeface="Inter" pitchFamily="34" charset="0"/>
-                <a:ea typeface="Inter" pitchFamily="34" charset="-122"/>
-                <a:cs typeface="Inter" pitchFamily="34" charset="-120"/>
-              </a:rPr>
-              <a:t>Plan for learning</a:t>
-            </a:r>
-            <a:endParaRPr lang="en-US" sz="2000" dirty="0"/>
-          </a:p>
-          <a:p>
-            <a:pPr algn="l" indent="0" marL="0">
-              <a:lnSpc>
-                <a:spcPts val="2400"/>
-              </a:lnSpc>
-              <a:spcBef>
-                <a:spcPts val="1000"/>
-              </a:spcBef>
-              <a:buNone/>
-            </a:pPr>
-            <a:r>
-              <a:rPr lang="en-US" altLang="en-US" sz="2000" dirty="0">
-                <a:solidFill>
-                  <a:srgbClr val="3C4043"/>
-                </a:solidFill>
-                <a:latin typeface="Inter" pitchFamily="34" charset="0"/>
-                <a:ea typeface="Inter" pitchFamily="34" charset="-122"/>
-                <a:cs typeface="Inter" pitchFamily="34" charset="-120"/>
-              </a:rPr>
-              <a:t>Plan access, facilitation, feedback, and revision for your course.</a:t>
-            </a:r>
-            <a:endParaRPr lang="en-US" sz="2000" dirty="0"/>
-          </a:p>
-        </p:txBody>
-      </p:sp>
-      <p:sp>
-        <p:nvSpPr>
-          <p:cNvPr id="11" name="arrow2"/>
-          <p:cNvSpPr/>
-          <p:nvPr/>
-        </p:nvSpPr>
-        <p:spPr>
-          <a:xfrm>
-            <a:off x="6934200" y="4051300"/>
-            <a:ext cx="584200" cy="533400"/>
-          </a:xfrm>
-          <a:prstGeom prst="rect">
-            <a:avLst/>
-          </a:prstGeom>
-          <a:noFill/>
-          <a:ln/>
-        </p:spPr>
-        <p:txBody>
-          <a:bodyPr wrap="square" lIns="0" tIns="0" rIns="0" bIns="0" rtlCol="0" anchor="t"/>
-          <a:lstStyle/>
-          <a:p>
-            <a:pPr algn="ctr" indent="0" marL="0">
-              <a:buNone/>
-            </a:pPr>
-            <a:r>
-              <a:rPr lang="en-US" altLang="en-US" sz="3400" dirty="0">
-                <a:solidFill>
-                  <a:srgbClr val="C41220"/>
-                </a:solidFill>
-                <a:latin typeface="Inter" pitchFamily="34" charset="0"/>
-                <a:ea typeface="Inter" pitchFamily="34" charset="-122"/>
-                <a:cs typeface="Inter" pitchFamily="34" charset="-120"/>
-              </a:rPr>
-              <a:t>→</a:t>
-            </a:r>
-            <a:endParaRPr lang="en-US" sz="3400" dirty="0"/>
-          </a:p>
-        </p:txBody>
-      </p:sp>
-      <p:sp>
-        <p:nvSpPr>
-          <p:cNvPr id="12" name="cycle-shape-11"/>
-          <p:cNvSpPr/>
-          <p:nvPr/>
-        </p:nvSpPr>
-        <p:spPr>
-          <a:xfrm>
-            <a:off x="7620000" y="2794000"/>
-            <a:ext cx="2794000" cy="3048000"/>
+          <p:cNvPr id="8" name="cycle-shape-7"/>
+          <p:cNvSpPr/>
+          <p:nvPr/>
+        </p:nvSpPr>
+        <p:spPr>
+          <a:xfrm>
+            <a:off x="8255000" y="2984500"/>
+            <a:ext cx="3175000" cy="2921000"/>
           </a:xfrm>
           <a:prstGeom prst="rect">
             <a:avLst/>
@@ -3480,14 +3069,34 @@
       </p:sp>
       <p:sp>
         <p:nvSpPr>
-          <p:cNvPr id="13" name="wednesday"/>
-          <p:cNvSpPr/>
-          <p:nvPr/>
-        </p:nvSpPr>
-        <p:spPr>
-          <a:xfrm>
-            <a:off x="7912100" y="3175000"/>
-            <a:ext cx="2209800" cy="2082800"/>
+          <p:cNvPr id="9" name="cycle-shape-8"/>
+          <p:cNvSpPr/>
+          <p:nvPr/>
+        </p:nvSpPr>
+        <p:spPr>
+          <a:xfrm>
+            <a:off x="12128500" y="2984500"/>
+            <a:ext cx="3619500" cy="2921000"/>
+          </a:xfrm>
+          <a:prstGeom prst="rect">
+            <a:avLst/>
+          </a:prstGeom>
+          <a:solidFill>
+            <a:srgbClr val="202124"/>
+          </a:solidFill>
+          <a:ln/>
+        </p:spPr>
+      </p:sp>
+      <p:sp>
+        <p:nvSpPr>
+          <p:cNvPr id="10" name="monday"/>
+          <p:cNvSpPr/>
+          <p:nvPr/>
+        </p:nvSpPr>
+        <p:spPr>
+          <a:xfrm>
+            <a:off x="863600" y="3429000"/>
+            <a:ext cx="2463800" cy="1841500"/>
           </a:xfrm>
           <a:prstGeom prst="rect">
             <a:avLst/>
@@ -3499,14 +3108,14 @@
           <a:bodyPr wrap="square" lIns="0" tIns="0" rIns="0" bIns="0" rtlCol="0" anchor="t"/>
           <a:lstStyle/>
           <a:p>
-            <a:pPr algn="l" indent="0" marL="0">
+            <a:pPr algn="ctr" indent="0" marL="0">
               <a:lnSpc>
-                <a:spcPts val="1800"/>
+                <a:spcPts val="1920"/>
               </a:lnSpc>
               <a:buNone/>
             </a:pPr>
             <a:r>
-              <a:rPr lang="en-US" altLang="en-US" sz="1500" b="1" dirty="0">
+              <a:rPr lang="en-US" altLang="en-US" sz="1600" b="1" dirty="0">
                 <a:solidFill>
                   <a:srgbClr val="C41220"/>
                 </a:solidFill>
@@ -3514,14 +3123,14 @@
                 <a:ea typeface="Inter" pitchFamily="34" charset="-122"/>
                 <a:cs typeface="Inter" pitchFamily="34" charset="-120"/>
               </a:rPr>
-              <a:t>WEDNESDAY PD</a:t>
-            </a:r>
-            <a:endParaRPr lang="en-US" sz="2000" dirty="0"/>
-          </a:p>
-          <a:p>
-            <a:pPr algn="l" indent="0" marL="0">
+              <a:t>MONDAY</a:t>
+            </a:r>
+            <a:endParaRPr lang="en-US" sz="2300" dirty="0"/>
+          </a:p>
+          <a:p>
+            <a:pPr algn="ctr" indent="0" marL="0">
               <a:lnSpc>
-                <a:spcPts val="2880"/>
+                <a:spcPts val="2760"/>
               </a:lnSpc>
               <a:spcBef>
                 <a:spcPts val="1200"/>
@@ -3529,22 +3138,22 @@
               <a:buNone/>
             </a:pPr>
             <a:r>
-              <a:rPr lang="en-US" altLang="en-US" sz="2400" b="1" dirty="0">
-                <a:solidFill>
-                  <a:srgbClr val="3C4043"/>
-                </a:solidFill>
-                <a:latin typeface="Inter" pitchFamily="34" charset="0"/>
-                <a:ea typeface="Inter" pitchFamily="34" charset="-122"/>
-                <a:cs typeface="Inter" pitchFamily="34" charset="-120"/>
-              </a:rPr>
-              <a:t>Adapt CUBS + CER</a:t>
-            </a:r>
-            <a:endParaRPr lang="en-US" sz="2000" dirty="0"/>
-          </a:p>
-          <a:p>
-            <a:pPr algn="l" indent="0" marL="0">
+              <a:rPr lang="en-US" altLang="en-US" sz="2300" b="1" dirty="0">
+                <a:solidFill>
+                  <a:srgbClr val="343A40"/>
+                </a:solidFill>
+                <a:latin typeface="Inter" pitchFamily="34" charset="0"/>
+                <a:ea typeface="Inter" pitchFamily="34" charset="-122"/>
+                <a:cs typeface="Inter" pitchFamily="34" charset="-120"/>
+              </a:rPr>
+              <a:t>Teachers did the task.</a:t>
+            </a:r>
+            <a:endParaRPr lang="en-US" sz="2300" dirty="0"/>
+          </a:p>
+          <a:p>
+            <a:pPr algn="ctr" indent="0" marL="0">
               <a:lnSpc>
-                <a:spcPts val="2400"/>
+                <a:spcPts val="2760"/>
               </a:lnSpc>
               <a:spcBef>
                 <a:spcPts val="1000"/>
@@ -3552,30 +3161,30 @@
               <a:buNone/>
             </a:pPr>
             <a:r>
-              <a:rPr lang="en-US" altLang="en-US" sz="2000" dirty="0">
-                <a:solidFill>
-                  <a:srgbClr val="3C4043"/>
-                </a:solidFill>
-                <a:latin typeface="Inter" pitchFamily="34" charset="0"/>
-                <a:ea typeface="Inter" pitchFamily="34" charset="-122"/>
-                <a:cs typeface="Inter" pitchFamily="34" charset="-120"/>
-              </a:rPr>
-              <a:t>Teach students how to analyze sources and explain evidence.</a:t>
-            </a:r>
-            <a:endParaRPr lang="en-US" sz="2000" dirty="0"/>
-          </a:p>
-        </p:txBody>
-      </p:sp>
-      <p:sp>
-        <p:nvSpPr>
-          <p:cNvPr id="14" name="arrow3"/>
-          <p:cNvSpPr/>
-          <p:nvPr/>
-        </p:nvSpPr>
-        <p:spPr>
-          <a:xfrm>
-            <a:off x="10490200" y="4051300"/>
-            <a:ext cx="584200" cy="533400"/>
+              <a:rPr lang="en-US" altLang="en-US" sz="2300" dirty="0">
+                <a:solidFill>
+                  <a:srgbClr val="343A40"/>
+                </a:solidFill>
+                <a:latin typeface="Inter" pitchFamily="34" charset="0"/>
+                <a:ea typeface="Inter" pitchFamily="34" charset="-122"/>
+                <a:cs typeface="Inter" pitchFamily="34" charset="-120"/>
+              </a:rPr>
+              <a:t>What might students find hard?</a:t>
+            </a:r>
+            <a:endParaRPr lang="en-US" sz="2300" dirty="0"/>
+          </a:p>
+        </p:txBody>
+      </p:sp>
+      <p:sp>
+        <p:nvSpPr>
+          <p:cNvPr id="11" name="tuesday"/>
+          <p:cNvSpPr/>
+          <p:nvPr/>
+        </p:nvSpPr>
+        <p:spPr>
+          <a:xfrm>
+            <a:off x="4737100" y="3429000"/>
+            <a:ext cx="2463800" cy="1841500"/>
           </a:xfrm>
           <a:prstGeom prst="rect">
             <a:avLst/>
@@ -3588,10 +3197,13 @@
           <a:lstStyle/>
           <a:p>
             <a:pPr algn="ctr" indent="0" marL="0">
-              <a:buNone/>
-            </a:pPr>
-            <a:r>
-              <a:rPr lang="en-US" altLang="en-US" sz="3400" dirty="0">
+              <a:lnSpc>
+                <a:spcPts val="1920"/>
+              </a:lnSpc>
+              <a:buNone/>
+            </a:pPr>
+            <a:r>
+              <a:rPr lang="en-US" altLang="en-US" sz="1600" b="1" dirty="0">
                 <a:solidFill>
                   <a:srgbClr val="C41220"/>
                 </a:solidFill>
@@ -3599,76 +3211,14 @@
                 <a:ea typeface="Inter" pitchFamily="34" charset="-122"/>
                 <a:cs typeface="Inter" pitchFamily="34" charset="-120"/>
               </a:rPr>
-              <a:t>→</a:t>
-            </a:r>
-            <a:endParaRPr lang="en-US" sz="3400" dirty="0"/>
-          </a:p>
-        </p:txBody>
-      </p:sp>
-      <p:sp>
-        <p:nvSpPr>
-          <p:cNvPr id="15" name="cycle-shape-14"/>
-          <p:cNvSpPr/>
-          <p:nvPr/>
-        </p:nvSpPr>
-        <p:spPr>
-          <a:xfrm>
-            <a:off x="11176000" y="2794000"/>
-            <a:ext cx="4572000" cy="3048000"/>
-          </a:xfrm>
-          <a:prstGeom prst="rect">
-            <a:avLst/>
-          </a:prstGeom>
-          <a:solidFill>
-            <a:srgbClr val="202124"/>
-          </a:solidFill>
-          <a:ln/>
-        </p:spPr>
-      </p:sp>
-      <p:sp>
-        <p:nvSpPr>
-          <p:cNvPr id="16" name="friday"/>
-          <p:cNvSpPr/>
-          <p:nvPr/>
-        </p:nvSpPr>
-        <p:spPr>
-          <a:xfrm>
-            <a:off x="11531600" y="3175000"/>
-            <a:ext cx="3860800" cy="2082800"/>
-          </a:xfrm>
-          <a:prstGeom prst="rect">
-            <a:avLst/>
-          </a:prstGeom>
-          <a:noFill/>
-          <a:ln/>
-        </p:spPr>
-        <p:txBody>
-          <a:bodyPr wrap="square" lIns="0" tIns="0" rIns="0" bIns="0" rtlCol="0" anchor="t"/>
-          <a:lstStyle/>
-          <a:p>
-            <a:pPr algn="l" indent="0" marL="0">
+              <a:t>TUESDAY</a:t>
+            </a:r>
+            <a:endParaRPr lang="en-US" sz="2300" dirty="0"/>
+          </a:p>
+          <a:p>
+            <a:pPr algn="ctr" indent="0" marL="0">
               <a:lnSpc>
-                <a:spcPts val="1800"/>
-              </a:lnSpc>
-              <a:buNone/>
-            </a:pPr>
-            <a:r>
-              <a:rPr lang="en-US" altLang="en-US" sz="1500" b="1" dirty="0">
-                <a:solidFill>
-                  <a:srgbClr val="F6B4BA"/>
-                </a:solidFill>
-                <a:latin typeface="Inter" pitchFamily="34" charset="0"/>
-                <a:ea typeface="Inter" pitchFamily="34" charset="-122"/>
-                <a:cs typeface="Inter" pitchFamily="34" charset="-120"/>
-              </a:rPr>
-              <a:t>FRIDAY</a:t>
-            </a:r>
-            <a:endParaRPr lang="en-US" sz="2000" dirty="0"/>
-          </a:p>
-          <a:p>
-            <a:pPr algn="l" indent="0" marL="0">
-              <a:lnSpc>
-                <a:spcPts val="2880"/>
+                <a:spcPts val="2760"/>
               </a:lnSpc>
               <a:spcBef>
                 <a:spcPts val="1200"/>
@@ -3676,22 +3226,22 @@
               <a:buNone/>
             </a:pPr>
             <a:r>
-              <a:rPr lang="en-US" altLang="en-US" sz="2400" b="1" dirty="0">
-                <a:solidFill>
-                  <a:srgbClr val="FFFFFF"/>
-                </a:solidFill>
-                <a:latin typeface="Inter" pitchFamily="34" charset="0"/>
-                <a:ea typeface="Inter" pitchFamily="34" charset="-122"/>
-                <a:cs typeface="Inter" pitchFamily="34" charset="-120"/>
-              </a:rPr>
-              <a:t>Read writing + respond</a:t>
-            </a:r>
-            <a:endParaRPr lang="en-US" sz="2000" dirty="0"/>
-          </a:p>
-          <a:p>
-            <a:pPr algn="l" indent="0" marL="0">
+              <a:rPr lang="en-US" altLang="en-US" sz="2300" b="1" dirty="0">
+                <a:solidFill>
+                  <a:srgbClr val="343A40"/>
+                </a:solidFill>
+                <a:latin typeface="Inter" pitchFamily="34" charset="0"/>
+                <a:ea typeface="Inter" pitchFamily="34" charset="-122"/>
+                <a:cs typeface="Inter" pitchFamily="34" charset="-120"/>
+              </a:rPr>
+              <a:t>Teachers planned support.</a:t>
+            </a:r>
+            <a:endParaRPr lang="en-US" sz="2300" dirty="0"/>
+          </a:p>
+          <a:p>
+            <a:pPr algn="ctr" indent="0" marL="0">
               <a:lnSpc>
-                <a:spcPts val="2400"/>
+                <a:spcPts val="2760"/>
               </a:lnSpc>
               <a:spcBef>
                 <a:spcPts val="1000"/>
@@ -3699,7 +3249,160 @@
               <a:buNone/>
             </a:pPr>
             <a:r>
-              <a:rPr lang="en-US" altLang="en-US" sz="2000" dirty="0">
+              <a:rPr lang="en-US" altLang="en-US" sz="2300" dirty="0">
+                <a:solidFill>
+                  <a:srgbClr val="343A40"/>
+                </a:solidFill>
+                <a:latin typeface="Inter" pitchFamily="34" charset="0"/>
+                <a:ea typeface="Inter" pitchFamily="34" charset="-122"/>
+                <a:cs typeface="Inter" pitchFamily="34" charset="-120"/>
+              </a:rPr>
+              <a:t>What will students do, say, and write?</a:t>
+            </a:r>
+            <a:endParaRPr lang="en-US" sz="2300" dirty="0"/>
+          </a:p>
+        </p:txBody>
+      </p:sp>
+      <p:sp>
+        <p:nvSpPr>
+          <p:cNvPr id="12" name="wednesday"/>
+          <p:cNvSpPr/>
+          <p:nvPr/>
+        </p:nvSpPr>
+        <p:spPr>
+          <a:xfrm>
+            <a:off x="8610600" y="3429000"/>
+            <a:ext cx="2463800" cy="1841500"/>
+          </a:xfrm>
+          <a:prstGeom prst="rect">
+            <a:avLst/>
+          </a:prstGeom>
+          <a:noFill/>
+          <a:ln/>
+        </p:spPr>
+        <p:txBody>
+          <a:bodyPr wrap="square" lIns="0" tIns="0" rIns="0" bIns="0" rtlCol="0" anchor="t"/>
+          <a:lstStyle/>
+          <a:p>
+            <a:pPr algn="ctr" indent="0" marL="0">
+              <a:lnSpc>
+                <a:spcPts val="1920"/>
+              </a:lnSpc>
+              <a:buNone/>
+            </a:pPr>
+            <a:r>
+              <a:rPr lang="en-US" altLang="en-US" sz="1600" b="1" dirty="0">
+                <a:solidFill>
+                  <a:srgbClr val="C41220"/>
+                </a:solidFill>
+                <a:latin typeface="Inter" pitchFamily="34" charset="0"/>
+                <a:ea typeface="Inter" pitchFamily="34" charset="-122"/>
+                <a:cs typeface="Inter" pitchFamily="34" charset="-120"/>
+              </a:rPr>
+              <a:t>WEDNESDAY</a:t>
+            </a:r>
+            <a:endParaRPr lang="en-US" sz="2300" dirty="0"/>
+          </a:p>
+          <a:p>
+            <a:pPr algn="ctr" indent="0" marL="0">
+              <a:lnSpc>
+                <a:spcPts val="2760"/>
+              </a:lnSpc>
+              <a:spcBef>
+                <a:spcPts val="1200"/>
+              </a:spcBef>
+              <a:buNone/>
+            </a:pPr>
+            <a:r>
+              <a:rPr lang="en-US" altLang="en-US" sz="2300" b="1" dirty="0">
+                <a:solidFill>
+                  <a:srgbClr val="343A40"/>
+                </a:solidFill>
+                <a:latin typeface="Inter" pitchFamily="34" charset="0"/>
+                <a:ea typeface="Inter" pitchFamily="34" charset="-122"/>
+                <a:cs typeface="Inter" pitchFamily="34" charset="-120"/>
+              </a:rPr>
+              <a:t>Practice the routine.</a:t>
+            </a:r>
+            <a:endParaRPr lang="en-US" sz="2300" dirty="0"/>
+          </a:p>
+          <a:p>
+            <a:pPr algn="ctr" indent="0" marL="0">
+              <a:lnSpc>
+                <a:spcPts val="2760"/>
+              </a:lnSpc>
+              <a:spcBef>
+                <a:spcPts val="1000"/>
+              </a:spcBef>
+              <a:buNone/>
+            </a:pPr>
+            <a:r>
+              <a:rPr lang="en-US" altLang="en-US" sz="2300" dirty="0">
+                <a:solidFill>
+                  <a:srgbClr val="343A40"/>
+                </a:solidFill>
+                <a:latin typeface="Inter" pitchFamily="34" charset="0"/>
+                <a:ea typeface="Inter" pitchFamily="34" charset="-122"/>
+                <a:cs typeface="Inter" pitchFamily="34" charset="-120"/>
+              </a:rPr>
+              <a:t>How will CUBS and CER help students?</a:t>
+            </a:r>
+            <a:endParaRPr lang="en-US" sz="2300" dirty="0"/>
+          </a:p>
+        </p:txBody>
+      </p:sp>
+      <p:sp>
+        <p:nvSpPr>
+          <p:cNvPr id="13" name="friday"/>
+          <p:cNvSpPr/>
+          <p:nvPr/>
+        </p:nvSpPr>
+        <p:spPr>
+          <a:xfrm>
+            <a:off x="12484100" y="3429000"/>
+            <a:ext cx="2908300" cy="1841500"/>
+          </a:xfrm>
+          <a:prstGeom prst="rect">
+            <a:avLst/>
+          </a:prstGeom>
+          <a:noFill/>
+          <a:ln/>
+        </p:spPr>
+        <p:txBody>
+          <a:bodyPr wrap="square" lIns="0" tIns="0" rIns="0" bIns="0" rtlCol="0" anchor="t"/>
+          <a:lstStyle/>
+          <a:p>
+            <a:pPr algn="ctr" indent="0" marL="0">
+              <a:lnSpc>
+                <a:spcPts val="1920"/>
+              </a:lnSpc>
+              <a:buNone/>
+            </a:pPr>
+            <a:r>
+              <a:rPr lang="en-US" altLang="en-US" sz="1600" b="1" dirty="0">
+                <a:solidFill>
+                  <a:srgbClr val="F6B4BA"/>
+                </a:solidFill>
+                <a:latin typeface="Inter" pitchFamily="34" charset="0"/>
+                <a:ea typeface="Inter" pitchFamily="34" charset="-122"/>
+                <a:cs typeface="Inter" pitchFamily="34" charset="-120"/>
+              </a:rPr>
+              <a:t>FRIDAY</a:t>
+            </a:r>
+            <a:endParaRPr lang="en-US" sz="2300" dirty="0"/>
+          </a:p>
+          <a:p>
+            <a:pPr algn="ctr" indent="0" marL="0">
+              <a:lnSpc>
+                <a:spcPts val="2760"/>
+              </a:lnSpc>
+              <a:spcBef>
+                <a:spcPts val="1200"/>
+              </a:spcBef>
+              <a:buNone/>
+            </a:pPr>
+            <a:r>
+              <a:rPr lang="en-US" altLang="en-US" sz="2300" b="1" dirty="0">
                 <a:solidFill>
                   <a:srgbClr val="FFFFFF"/>
                 </a:solidFill>
@@ -3707,32 +3410,55 @@
                 <a:ea typeface="Inter" pitchFamily="34" charset="-122"/>
                 <a:cs typeface="Inter" pitchFamily="34" charset="-120"/>
               </a:rPr>
-              <a:t>Use completed course-specific work to provide feedback and plan a precise mastery next step.</a:t>
-            </a:r>
-            <a:endParaRPr lang="en-US" sz="2000" dirty="0"/>
-          </a:p>
-        </p:txBody>
-      </p:sp>
-      <p:sp>
-        <p:nvSpPr>
-          <p:cNvPr id="17" name="cycle-shape-16"/>
-          <p:cNvSpPr/>
-          <p:nvPr/>
-        </p:nvSpPr>
-        <p:spPr>
-          <a:xfrm>
-            <a:off x="508000" y="6794500"/>
-            <a:ext cx="15240000" cy="1054100"/>
-          </a:xfrm>
-          <a:prstGeom prst="rect">
-            <a:avLst/>
-          </a:prstGeom>
-          <a:solidFill>
-            <a:srgbClr val="F8F9FA"/>
+              <a:t>Read student work.</a:t>
+            </a:r>
+            <a:endParaRPr lang="en-US" sz="2300" dirty="0"/>
+          </a:p>
+          <a:p>
+            <a:pPr algn="ctr" indent="0" marL="0">
+              <a:lnSpc>
+                <a:spcPts val="2760"/>
+              </a:lnSpc>
+              <a:spcBef>
+                <a:spcPts val="1000"/>
+              </a:spcBef>
+              <a:buNone/>
+            </a:pPr>
+            <a:r>
+              <a:rPr lang="en-US" altLang="en-US" sz="2300" dirty="0">
+                <a:solidFill>
+                  <a:srgbClr val="FFFFFF"/>
+                </a:solidFill>
+                <a:latin typeface="Inter" pitchFamily="34" charset="0"/>
+                <a:ea typeface="Inter" pitchFamily="34" charset="-122"/>
+                <a:cs typeface="Inter" pitchFamily="34" charset="-120"/>
+              </a:rPr>
+              <a:t>What should students revise or learn next?</a:t>
+            </a:r>
+            <a:endParaRPr lang="en-US" sz="2300" dirty="0"/>
+          </a:p>
+        </p:txBody>
+      </p:sp>
+      <p:sp>
+        <p:nvSpPr>
+          <p:cNvPr id="14" name="cycle-shape-13"/>
+          <p:cNvSpPr/>
+          <p:nvPr/>
+        </p:nvSpPr>
+        <p:spPr>
+          <a:xfrm>
+            <a:off x="508000" y="6858000"/>
+            <a:ext cx="15240000" cy="787400"/>
+          </a:xfrm>
+          <a:prstGeom prst="rect">
+            <a:avLst/>
+          </a:prstGeom>
+          <a:solidFill>
+            <a:srgbClr val="F9FAFB"/>
           </a:solidFill>
           <a:ln w="12700">
             <a:solidFill>
-              <a:srgbClr val="D1D5DB"/>
+              <a:srgbClr val="D4D8DE"/>
             </a:solidFill>
             <a:prstDash val="solid"/>
           </a:ln>
@@ -3740,14 +3466,14 @@
       </p:sp>
       <p:sp>
         <p:nvSpPr>
-          <p:cNvPr id="18" name="anchor"/>
-          <p:cNvSpPr/>
-          <p:nvPr/>
-        </p:nvSpPr>
-        <p:spPr>
-          <a:xfrm>
-            <a:off x="838200" y="7035800"/>
-            <a:ext cx="14351000" cy="546100"/>
+          <p:cNvPr id="15" name="anchor"/>
+          <p:cNvSpPr/>
+          <p:nvPr/>
+        </p:nvSpPr>
+        <p:spPr>
+          <a:xfrm>
+            <a:off x="889000" y="7073900"/>
+            <a:ext cx="14478000" cy="381000"/>
           </a:xfrm>
           <a:prstGeom prst="rect">
             <a:avLst/>
@@ -3759,41 +3485,27 @@
           <a:bodyPr wrap="square" lIns="0" tIns="0" rIns="0" bIns="0" rtlCol="0" anchor="t"/>
           <a:lstStyle/>
           <a:p>
-            <a:pPr algn="l" indent="0" marL="0">
-              <a:lnSpc>
-                <a:spcPts val="2520"/>
-              </a:lnSpc>
-              <a:buNone/>
-            </a:pPr>
-            <a:r>
-              <a:rPr lang="en-US" altLang="en-US" sz="2100" b="1" dirty="0">
-                <a:solidFill>
-                  <a:srgbClr val="3C4043"/>
-                </a:solidFill>
-                <a:latin typeface="Inter" pitchFamily="34" charset="0"/>
-                <a:ea typeface="Inter" pitchFamily="34" charset="-122"/>
-                <a:cs typeface="Inter" pitchFamily="34" charset="-120"/>
-              </a:rPr>
-              <a:t>Keep the process common and the science authentic:</a:t>
-            </a:r>
-            <a:r>
-              <a:rPr lang="en-US" altLang="en-US" sz="2100" dirty="0">
-                <a:solidFill>
-                  <a:srgbClr val="3C4043"/>
-                </a:solidFill>
-                <a:latin typeface="Inter" pitchFamily="34" charset="0"/>
-                <a:ea typeface="Inter" pitchFamily="34" charset="-122"/>
-                <a:cs typeface="Inter" pitchFamily="34" charset="-120"/>
-              </a:rPr>
-              <a:t> the routine can support Biology, Chemistry, Physics, Environmental Science, and every other science course.</a:t>
-            </a:r>
-            <a:endParaRPr lang="en-US" sz="2100" dirty="0"/>
-          </a:p>
-        </p:txBody>
-      </p:sp>
-      <p:sp>
-        <p:nvSpPr>
-          <p:cNvPr id="19" name="page"/>
+            <a:pPr algn="ctr" indent="0" marL="0">
+              <a:buNone/>
+            </a:pPr>
+            <a:r>
+              <a:rPr lang="en-US" altLang="en-US" sz="2200" b="1" dirty="0">
+                <a:solidFill>
+                  <a:srgbClr val="343A40"/>
+                </a:solidFill>
+                <a:latin typeface="Inter" pitchFamily="34" charset="0"/>
+                <a:ea typeface="Inter" pitchFamily="34" charset="-122"/>
+                <a:cs typeface="Inter" pitchFamily="34" charset="-120"/>
+              </a:rPr>
+              <a:t>Use the same routine in every science course. Change the source—not the student-thinking goal.</a:t>
+            </a:r>
+            <a:endParaRPr lang="en-US" sz="2200" dirty="0"/>
+          </a:p>
+        </p:txBody>
+      </p:sp>
+      <p:sp>
+        <p:nvSpPr>
+          <p:cNvPr id="16" name="page"/>
           <p:cNvSpPr/>
           <p:nvPr/>
         </p:nvSpPr>
@@ -3818,7 +3530,7 @@
             <a:r>
               <a:rPr lang="en-US" altLang="en-US" sz="1300" dirty="0">
                 <a:solidFill>
-                  <a:srgbClr val="3C4043"/>
+                  <a:srgbClr val="343A40"/>
                 </a:solidFill>
                 <a:latin typeface="Inter" pitchFamily="34" charset="0"/>
                 <a:ea typeface="Inter" pitchFamily="34" charset="-122"/>
@@ -3832,7 +3544,7 @@
       </p:sp>
       <p:sp>
         <p:nvSpPr>
-          <p:cNvPr id="20" name="cycle-shape-19"/>
+          <p:cNvPr id="17" name="cycle-shape-16"/>
           <p:cNvSpPr/>
           <p:nvPr/>
         </p:nvSpPr>
@@ -3935,7 +3647,7 @@
                 <a:ea typeface="Inter" pitchFamily="34" charset="-122"/>
                 <a:cs typeface="Inter" pitchFamily="34" charset="-120"/>
               </a:rPr>
-              <a:t>Model CUBS: Analyze a Science Source Before Writing</a:t>
+              <a:t>CUBS: A Simple Way to Read a Science Source</a:t>
             </a:r>
             <a:endParaRPr lang="en-US" sz="3000" dirty="0"/>
           </a:p>
@@ -3982,14 +3694,128 @@
       </p:sp>
       <p:sp>
         <p:nvSpPr>
-          <p:cNvPr id="5" name="criteria-shape-4"/>
-          <p:cNvSpPr/>
-          <p:nvPr/>
-        </p:nvSpPr>
-        <p:spPr>
-          <a:xfrm>
-            <a:off x="508000" y="1397000"/>
-            <a:ext cx="15240000" cy="736600"/>
+          <p:cNvPr id="5" name="intro"/>
+          <p:cNvSpPr/>
+          <p:nvPr/>
+        </p:nvSpPr>
+        <p:spPr>
+          <a:xfrm>
+            <a:off x="508000" y="1460500"/>
+            <a:ext cx="14732000" cy="533400"/>
+          </a:xfrm>
+          <a:prstGeom prst="rect">
+            <a:avLst/>
+          </a:prstGeom>
+          <a:noFill/>
+          <a:ln/>
+        </p:spPr>
+        <p:txBody>
+          <a:bodyPr wrap="square" lIns="0" tIns="0" rIns="0" bIns="0" rtlCol="0" anchor="t"/>
+          <a:lstStyle/>
+          <a:p>
+            <a:pPr algn="l" indent="0" marL="0">
+              <a:buNone/>
+            </a:pPr>
+            <a:r>
+              <a:rPr lang="en-US" altLang="en-US" sz="2400" dirty="0">
+                <a:solidFill>
+                  <a:srgbClr val="343A40"/>
+                </a:solidFill>
+                <a:latin typeface="Inter" pitchFamily="34" charset="0"/>
+                <a:ea typeface="Inter" pitchFamily="34" charset="-122"/>
+                <a:cs typeface="Inter" pitchFamily="34" charset="-120"/>
+              </a:rPr>
+              <a:t>Use CUBS before students write. It helps them slow down and find the information they will need.</a:t>
+            </a:r>
+            <a:endParaRPr lang="en-US" sz="2400" dirty="0"/>
+          </a:p>
+        </p:txBody>
+      </p:sp>
+      <p:sp>
+        <p:nvSpPr>
+          <p:cNvPr id="6" name="criteria-shape-5"/>
+          <p:cNvSpPr/>
+          <p:nvPr/>
+        </p:nvSpPr>
+        <p:spPr>
+          <a:xfrm>
+            <a:off x="571500" y="2857500"/>
+            <a:ext cx="3492500" cy="3429000"/>
+          </a:xfrm>
+          <a:prstGeom prst="rect">
+            <a:avLst/>
+          </a:prstGeom>
+          <a:solidFill>
+            <a:srgbClr val="F5F6F8"/>
+          </a:solidFill>
+          <a:ln w="12700">
+            <a:solidFill>
+              <a:srgbClr val="D4D8DE"/>
+            </a:solidFill>
+            <a:prstDash val="solid"/>
+          </a:ln>
+        </p:spPr>
+      </p:sp>
+      <p:sp>
+        <p:nvSpPr>
+          <p:cNvPr id="7" name="criteria-shape-6"/>
+          <p:cNvSpPr/>
+          <p:nvPr/>
+        </p:nvSpPr>
+        <p:spPr>
+          <a:xfrm>
+            <a:off x="4445000" y="2857500"/>
+            <a:ext cx="3492500" cy="3429000"/>
+          </a:xfrm>
+          <a:prstGeom prst="rect">
+            <a:avLst/>
+          </a:prstGeom>
+          <a:solidFill>
+            <a:srgbClr val="F5F6F8"/>
+          </a:solidFill>
+          <a:ln w="12700">
+            <a:solidFill>
+              <a:srgbClr val="D4D8DE"/>
+            </a:solidFill>
+            <a:prstDash val="solid"/>
+          </a:ln>
+        </p:spPr>
+      </p:sp>
+      <p:sp>
+        <p:nvSpPr>
+          <p:cNvPr id="8" name="criteria-shape-7"/>
+          <p:cNvSpPr/>
+          <p:nvPr/>
+        </p:nvSpPr>
+        <p:spPr>
+          <a:xfrm>
+            <a:off x="8318500" y="2857500"/>
+            <a:ext cx="3492500" cy="3429000"/>
+          </a:xfrm>
+          <a:prstGeom prst="rect">
+            <a:avLst/>
+          </a:prstGeom>
+          <a:solidFill>
+            <a:srgbClr val="F5F6F8"/>
+          </a:solidFill>
+          <a:ln w="12700">
+            <a:solidFill>
+              <a:srgbClr val="D4D8DE"/>
+            </a:solidFill>
+            <a:prstDash val="solid"/>
+          </a:ln>
+        </p:spPr>
+      </p:sp>
+      <p:sp>
+        <p:nvSpPr>
+          <p:cNvPr id="9" name="criteria-shape-8"/>
+          <p:cNvSpPr/>
+          <p:nvPr/>
+        </p:nvSpPr>
+        <p:spPr>
+          <a:xfrm>
+            <a:off x="12192000" y="2857500"/>
+            <a:ext cx="3492500" cy="3429000"/>
           </a:xfrm>
           <a:prstGeom prst="rect">
             <a:avLst/>
@@ -3997,7 +3823,7 @@
           <a:solidFill>
             <a:srgbClr val="FCE8EA"/>
           </a:solidFill>
-          <a:ln w="12700">
+          <a:ln w="25400">
             <a:solidFill>
               <a:srgbClr val="C41220"/>
             </a:solidFill>
@@ -4007,14 +3833,14 @@
       </p:sp>
       <p:sp>
         <p:nvSpPr>
-          <p:cNvPr id="6" name="prompt"/>
-          <p:cNvSpPr/>
-          <p:nvPr/>
-        </p:nvSpPr>
-        <p:spPr>
-          <a:xfrm>
-            <a:off x="825500" y="1600200"/>
-            <a:ext cx="14605000" cy="342900"/>
+          <p:cNvPr id="10" name="circle"/>
+          <p:cNvSpPr/>
+          <p:nvPr/>
+        </p:nvSpPr>
+        <p:spPr>
+          <a:xfrm>
+            <a:off x="952500" y="3365500"/>
+            <a:ext cx="2730500" cy="2159000"/>
           </a:xfrm>
           <a:prstGeom prst="rect">
             <a:avLst/>
@@ -4027,238 +3853,82 @@
           <a:lstStyle/>
           <a:p>
             <a:pPr algn="ctr" indent="0" marL="0">
-              <a:buNone/>
-            </a:pPr>
-            <a:r>
-              <a:rPr lang="en-US" altLang="en-US" sz="2000" b="1" dirty="0">
-                <a:solidFill>
-                  <a:srgbClr val="3C4043"/>
-                </a:solidFill>
-                <a:latin typeface="Inter" pitchFamily="34" charset="0"/>
-                <a:ea typeface="Inter" pitchFamily="34" charset="-122"/>
-                <a:cs typeface="Inter" pitchFamily="34" charset="-120"/>
-              </a:rPr>
-              <a:t>Think aloud: make the reading, visual-analysis, vocabulary, and question-asking moves visible before students explain.</a:t>
-            </a:r>
-            <a:endParaRPr lang="en-US" sz="2000" dirty="0"/>
-          </a:p>
-        </p:txBody>
-      </p:sp>
-      <p:sp>
-        <p:nvSpPr>
-          <p:cNvPr id="7" name="criteria-shape-6"/>
-          <p:cNvSpPr/>
-          <p:nvPr/>
-        </p:nvSpPr>
-        <p:spPr>
-          <a:xfrm>
-            <a:off x="508000" y="2794000"/>
-            <a:ext cx="3556000" cy="3810000"/>
-          </a:xfrm>
-          <a:prstGeom prst="rect">
-            <a:avLst/>
-          </a:prstGeom>
-          <a:solidFill>
-            <a:srgbClr val="EAF5EC"/>
-          </a:solidFill>
-          <a:ln w="25400">
-            <a:solidFill>
-              <a:srgbClr val="238636"/>
-            </a:solidFill>
-            <a:prstDash val="solid"/>
-          </a:ln>
-        </p:spPr>
-      </p:sp>
-      <p:sp>
-        <p:nvSpPr>
-          <p:cNvPr id="8" name="card1"/>
-          <p:cNvSpPr/>
-          <p:nvPr/>
-        </p:nvSpPr>
-        <p:spPr>
-          <a:xfrm>
-            <a:off x="825500" y="3149600"/>
-            <a:ext cx="2921000" cy="2794000"/>
-          </a:xfrm>
-          <a:prstGeom prst="rect">
-            <a:avLst/>
-          </a:prstGeom>
-          <a:noFill/>
-          <a:ln/>
-        </p:spPr>
-        <p:txBody>
-          <a:bodyPr wrap="square" lIns="0" tIns="0" rIns="0" bIns="0" rtlCol="0" anchor="t"/>
-          <a:lstStyle/>
-          <a:p>
-            <a:pPr algn="l" indent="0" marL="0">
               <a:lnSpc>
-                <a:spcPts val="2562"/>
+                <a:spcPts val="3172"/>
               </a:lnSpc>
               <a:buNone/>
             </a:pPr>
             <a:r>
-              <a:rPr lang="en-US" altLang="en-US" sz="2100" b="1" dirty="0">
-                <a:solidFill>
-                  <a:srgbClr val="238636"/>
-                </a:solidFill>
-                <a:latin typeface="Inter" pitchFamily="34" charset="0"/>
-                <a:ea typeface="Inter" pitchFamily="34" charset="-122"/>
-                <a:cs typeface="Inter" pitchFamily="34" charset="-120"/>
-              </a:rPr>
-              <a:t>C — CIRCLE</a:t>
-            </a:r>
-            <a:endParaRPr lang="en-US" sz="2100" dirty="0"/>
-          </a:p>
-          <a:p>
-            <a:pPr algn="l" indent="0" marL="0">
+              <a:rPr lang="en-US" altLang="en-US" sz="2600" b="1" dirty="0">
+                <a:solidFill>
+                  <a:srgbClr val="C41220"/>
+                </a:solidFill>
+                <a:latin typeface="Inter" pitchFamily="34" charset="0"/>
+                <a:ea typeface="Inter" pitchFamily="34" charset="-122"/>
+                <a:cs typeface="Inter" pitchFamily="34" charset="-120"/>
+              </a:rPr>
+              <a:t>C</a:t>
+            </a:r>
+            <a:endParaRPr lang="en-US" sz="2400" dirty="0"/>
+          </a:p>
+          <a:p>
+            <a:pPr algn="ctr" indent="0" marL="0">
               <a:lnSpc>
-                <a:spcPts val="2562"/>
+                <a:spcPts val="2928"/>
               </a:lnSpc>
               <a:spcBef>
-                <a:spcPts val="1500"/>
+                <a:spcPts val="1000"/>
               </a:spcBef>
               <a:buNone/>
             </a:pPr>
             <a:r>
-              <a:rPr lang="en-US" altLang="en-US" sz="2100" dirty="0">
-                <a:solidFill>
-                  <a:srgbClr val="3C4043"/>
-                </a:solidFill>
-                <a:latin typeface="Inter" pitchFamily="34" charset="0"/>
-                <a:ea typeface="Inter" pitchFamily="34" charset="-122"/>
-                <a:cs typeface="Inter" pitchFamily="34" charset="-120"/>
-              </a:rPr>
-              <a:t>Circle the central question, phenomenon, pattern, relationship, or claim the source helps students investigate.</a:t>
-            </a:r>
-            <a:endParaRPr lang="en-US" sz="2100" dirty="0"/>
-          </a:p>
-        </p:txBody>
-      </p:sp>
-      <p:sp>
-        <p:nvSpPr>
-          <p:cNvPr id="9" name="criteria-shape-8"/>
-          <p:cNvSpPr/>
-          <p:nvPr/>
-        </p:nvSpPr>
-        <p:spPr>
-          <a:xfrm>
-            <a:off x="4445000" y="2794000"/>
-            <a:ext cx="3556000" cy="3810000"/>
-          </a:xfrm>
-          <a:prstGeom prst="rect">
-            <a:avLst/>
-          </a:prstGeom>
-          <a:solidFill>
-            <a:srgbClr val="EAF2FC"/>
-          </a:solidFill>
-          <a:ln w="25400">
-            <a:solidFill>
-              <a:srgbClr val="1D4ED8"/>
-            </a:solidFill>
-            <a:prstDash val="solid"/>
-          </a:ln>
-        </p:spPr>
-      </p:sp>
-      <p:sp>
-        <p:nvSpPr>
-          <p:cNvPr id="10" name="card2"/>
-          <p:cNvSpPr/>
-          <p:nvPr/>
-        </p:nvSpPr>
-        <p:spPr>
-          <a:xfrm>
-            <a:off x="4762500" y="3149600"/>
-            <a:ext cx="2921000" cy="2794000"/>
-          </a:xfrm>
-          <a:prstGeom prst="rect">
-            <a:avLst/>
-          </a:prstGeom>
-          <a:noFill/>
-          <a:ln/>
-        </p:spPr>
-        <p:txBody>
-          <a:bodyPr wrap="square" lIns="0" tIns="0" rIns="0" bIns="0" rtlCol="0" anchor="t"/>
-          <a:lstStyle/>
-          <a:p>
-            <a:pPr algn="l" indent="0" marL="0">
+              <a:rPr lang="en-US" altLang="en-US" sz="2400" b="1" dirty="0">
+                <a:solidFill>
+                  <a:srgbClr val="343A40"/>
+                </a:solidFill>
+                <a:latin typeface="Inter" pitchFamily="34" charset="0"/>
+                <a:ea typeface="Inter" pitchFamily="34" charset="-122"/>
+                <a:cs typeface="Inter" pitchFamily="34" charset="-120"/>
+              </a:rPr>
+              <a:t>Circle</a:t>
+            </a:r>
+            <a:endParaRPr lang="en-US" sz="2400" dirty="0"/>
+          </a:p>
+          <a:p>
+            <a:pPr algn="ctr" indent="0" marL="0">
               <a:lnSpc>
-                <a:spcPts val="2562"/>
-              </a:lnSpc>
-              <a:buNone/>
-            </a:pPr>
-            <a:r>
-              <a:rPr lang="en-US" altLang="en-US" sz="2100" b="1" dirty="0">
-                <a:solidFill>
-                  <a:srgbClr val="1D4ED8"/>
-                </a:solidFill>
-                <a:latin typeface="Inter" pitchFamily="34" charset="0"/>
-                <a:ea typeface="Inter" pitchFamily="34" charset="-122"/>
-                <a:cs typeface="Inter" pitchFamily="34" charset="-120"/>
-              </a:rPr>
-              <a:t>U — UNDERLINE</a:t>
-            </a:r>
-            <a:endParaRPr lang="en-US" sz="2100" dirty="0"/>
-          </a:p>
-          <a:p>
-            <a:pPr algn="l" indent="0" marL="0">
-              <a:lnSpc>
-                <a:spcPts val="2562"/>
+                <a:spcPts val="2928"/>
               </a:lnSpc>
               <a:spcBef>
-                <a:spcPts val="1500"/>
+                <a:spcPts val="1100"/>
               </a:spcBef>
               <a:buNone/>
             </a:pPr>
             <a:r>
-              <a:rPr lang="en-US" altLang="en-US" sz="2100" dirty="0">
-                <a:solidFill>
-                  <a:srgbClr val="3C4043"/>
-                </a:solidFill>
-                <a:latin typeface="Inter" pitchFamily="34" charset="0"/>
-                <a:ea typeface="Inter" pitchFamily="34" charset="-122"/>
-                <a:cs typeface="Inter" pitchFamily="34" charset="-120"/>
-              </a:rPr>
-              <a:t>Underline observations, data, labels, details, or relationships students may use as evidence.</a:t>
-            </a:r>
-            <a:endParaRPr lang="en-US" sz="2100" dirty="0"/>
-          </a:p>
-        </p:txBody>
-      </p:sp>
-      <p:sp>
-        <p:nvSpPr>
-          <p:cNvPr id="11" name="criteria-shape-10"/>
-          <p:cNvSpPr/>
-          <p:nvPr/>
-        </p:nvSpPr>
-        <p:spPr>
-          <a:xfrm>
-            <a:off x="8382000" y="2794000"/>
-            <a:ext cx="3556000" cy="3810000"/>
-          </a:xfrm>
-          <a:prstGeom prst="rect">
-            <a:avLst/>
-          </a:prstGeom>
-          <a:solidFill>
-            <a:srgbClr val="FFF1E7"/>
-          </a:solidFill>
-          <a:ln w="25400">
-            <a:solidFill>
-              <a:srgbClr val="C56B00"/>
-            </a:solidFill>
-            <a:prstDash val="solid"/>
-          </a:ln>
-        </p:spPr>
-      </p:sp>
-      <p:sp>
-        <p:nvSpPr>
-          <p:cNvPr id="12" name="card3"/>
-          <p:cNvSpPr/>
-          <p:nvPr/>
-        </p:nvSpPr>
-        <p:spPr>
-          <a:xfrm>
-            <a:off x="8699500" y="3149600"/>
-            <a:ext cx="2921000" cy="2794000"/>
+              <a:rPr lang="en-US" altLang="en-US" sz="2400" dirty="0">
+                <a:solidFill>
+                  <a:srgbClr val="343A40"/>
+                </a:solidFill>
+                <a:latin typeface="Inter" pitchFamily="34" charset="0"/>
+                <a:ea typeface="Inter" pitchFamily="34" charset="-122"/>
+                <a:cs typeface="Inter" pitchFamily="34" charset="-120"/>
+              </a:rPr>
+              <a:t>Circle the question students need to answer.</a:t>
+            </a:r>
+            <a:endParaRPr lang="en-US" sz="2400" dirty="0"/>
+          </a:p>
+        </p:txBody>
+      </p:sp>
+      <p:sp>
+        <p:nvSpPr>
+          <p:cNvPr id="11" name="underline"/>
+          <p:cNvSpPr/>
+          <p:nvPr/>
+        </p:nvSpPr>
+        <p:spPr>
+          <a:xfrm>
+            <a:off x="4826000" y="3365500"/>
+            <a:ext cx="2730500" cy="2159000"/>
           </a:xfrm>
           <a:prstGeom prst="rect">
             <a:avLst/>
@@ -4270,135 +3940,314 @@
           <a:bodyPr wrap="square" lIns="0" tIns="0" rIns="0" bIns="0" rtlCol="0" anchor="t"/>
           <a:lstStyle/>
           <a:p>
-            <a:pPr algn="l" indent="0" marL="0">
+            <a:pPr algn="ctr" indent="0" marL="0">
               <a:lnSpc>
-                <a:spcPts val="2562"/>
+                <a:spcPts val="3172"/>
               </a:lnSpc>
               <a:buNone/>
             </a:pPr>
             <a:r>
-              <a:rPr lang="en-US" altLang="en-US" sz="2100" b="1" dirty="0">
-                <a:solidFill>
-                  <a:srgbClr val="C56B00"/>
-                </a:solidFill>
-                <a:latin typeface="Inter" pitchFamily="34" charset="0"/>
-                <a:ea typeface="Inter" pitchFamily="34" charset="-122"/>
-                <a:cs typeface="Inter" pitchFamily="34" charset="-120"/>
-              </a:rPr>
-              <a:t>B — BOX</a:t>
-            </a:r>
-            <a:endParaRPr lang="en-US" sz="2100" dirty="0"/>
-          </a:p>
-          <a:p>
-            <a:pPr algn="l" indent="0" marL="0">
+              <a:rPr lang="en-US" altLang="en-US" sz="2600" b="1" dirty="0">
+                <a:solidFill>
+                  <a:srgbClr val="C41220"/>
+                </a:solidFill>
+                <a:latin typeface="Inter" pitchFamily="34" charset="0"/>
+                <a:ea typeface="Inter" pitchFamily="34" charset="-122"/>
+                <a:cs typeface="Inter" pitchFamily="34" charset="-120"/>
+              </a:rPr>
+              <a:t>U</a:t>
+            </a:r>
+            <a:endParaRPr lang="en-US" sz="2400" dirty="0"/>
+          </a:p>
+          <a:p>
+            <a:pPr algn="ctr" indent="0" marL="0">
               <a:lnSpc>
-                <a:spcPts val="2562"/>
+                <a:spcPts val="2928"/>
               </a:lnSpc>
               <a:spcBef>
-                <a:spcPts val="1500"/>
+                <a:spcPts val="1000"/>
               </a:spcBef>
               <a:buNone/>
             </a:pPr>
             <a:r>
-              <a:rPr lang="en-US" altLang="en-US" sz="2100" dirty="0">
-                <a:solidFill>
-                  <a:srgbClr val="3C4043"/>
-                </a:solidFill>
-                <a:latin typeface="Inter" pitchFamily="34" charset="0"/>
-                <a:ea typeface="Inter" pitchFamily="34" charset="-122"/>
-                <a:cs typeface="Inter" pitchFamily="34" charset="-120"/>
-              </a:rPr>
-              <a:t>Box unfamiliar or high-leverage words, symbols, units, or labels that students must interpret accurately.</a:t>
-            </a:r>
-            <a:endParaRPr lang="en-US" sz="2100" dirty="0"/>
-          </a:p>
-        </p:txBody>
-      </p:sp>
-      <p:sp>
-        <p:nvSpPr>
-          <p:cNvPr id="13" name="criteria-shape-12"/>
-          <p:cNvSpPr/>
-          <p:nvPr/>
-        </p:nvSpPr>
-        <p:spPr>
-          <a:xfrm>
-            <a:off x="12319000" y="2794000"/>
-            <a:ext cx="3429000" cy="3810000"/>
-          </a:xfrm>
-          <a:prstGeom prst="rect">
-            <a:avLst/>
-          </a:prstGeom>
-          <a:solidFill>
-            <a:srgbClr val="F3ECFB"/>
-          </a:solidFill>
-          <a:ln w="25400">
-            <a:solidFill>
-              <a:srgbClr val="7C3AED"/>
-            </a:solidFill>
-            <a:prstDash val="solid"/>
-          </a:ln>
-        </p:spPr>
-      </p:sp>
-      <p:sp>
-        <p:nvSpPr>
-          <p:cNvPr id="14" name="card4"/>
-          <p:cNvSpPr/>
-          <p:nvPr/>
-        </p:nvSpPr>
-        <p:spPr>
-          <a:xfrm>
-            <a:off x="12636500" y="3149600"/>
-            <a:ext cx="2794000" cy="2794000"/>
-          </a:xfrm>
-          <a:prstGeom prst="rect">
-            <a:avLst/>
-          </a:prstGeom>
-          <a:noFill/>
-          <a:ln/>
-        </p:spPr>
-        <p:txBody>
-          <a:bodyPr wrap="square" lIns="0" tIns="0" rIns="0" bIns="0" rtlCol="0" anchor="t"/>
-          <a:lstStyle/>
-          <a:p>
-            <a:pPr algn="l" indent="0" marL="0">
+              <a:rPr lang="en-US" altLang="en-US" sz="2400" b="1" dirty="0">
+                <a:solidFill>
+                  <a:srgbClr val="343A40"/>
+                </a:solidFill>
+                <a:latin typeface="Inter" pitchFamily="34" charset="0"/>
+                <a:ea typeface="Inter" pitchFamily="34" charset="-122"/>
+                <a:cs typeface="Inter" pitchFamily="34" charset="-120"/>
+              </a:rPr>
+              <a:t>Underline</a:t>
+            </a:r>
+            <a:endParaRPr lang="en-US" sz="2400" dirty="0"/>
+          </a:p>
+          <a:p>
+            <a:pPr algn="ctr" indent="0" marL="0">
               <a:lnSpc>
-                <a:spcPts val="2562"/>
-              </a:lnSpc>
-              <a:buNone/>
-            </a:pPr>
-            <a:r>
-              <a:rPr lang="en-US" altLang="en-US" sz="2100" b="1" dirty="0">
-                <a:solidFill>
-                  <a:srgbClr val="7C3AED"/>
-                </a:solidFill>
-                <a:latin typeface="Inter" pitchFamily="34" charset="0"/>
-                <a:ea typeface="Inter" pitchFamily="34" charset="-122"/>
-                <a:cs typeface="Inter" pitchFamily="34" charset="-120"/>
-              </a:rPr>
-              <a:t>S — SUMMARIZE</a:t>
-            </a:r>
-            <a:endParaRPr lang="en-US" sz="2100" dirty="0"/>
-          </a:p>
-          <a:p>
-            <a:pPr algn="l" indent="0" marL="0">
-              <a:lnSpc>
-                <a:spcPts val="2562"/>
+                <a:spcPts val="2928"/>
               </a:lnSpc>
               <a:spcBef>
-                <a:spcPts val="1500"/>
+                <a:spcPts val="1100"/>
               </a:spcBef>
               <a:buNone/>
             </a:pPr>
             <a:r>
+              <a:rPr lang="en-US" altLang="en-US" sz="2400" dirty="0">
+                <a:solidFill>
+                  <a:srgbClr val="343A40"/>
+                </a:solidFill>
+                <a:latin typeface="Inter" pitchFamily="34" charset="0"/>
+                <a:ea typeface="Inter" pitchFamily="34" charset="-122"/>
+                <a:cs typeface="Inter" pitchFamily="34" charset="-120"/>
+              </a:rPr>
+              <a:t>Underline details, data, or observations.</a:t>
+            </a:r>
+            <a:endParaRPr lang="en-US" sz="2400" dirty="0"/>
+          </a:p>
+        </p:txBody>
+      </p:sp>
+      <p:sp>
+        <p:nvSpPr>
+          <p:cNvPr id="12" name="box"/>
+          <p:cNvSpPr/>
+          <p:nvPr/>
+        </p:nvSpPr>
+        <p:spPr>
+          <a:xfrm>
+            <a:off x="8699500" y="3365500"/>
+            <a:ext cx="2730500" cy="2159000"/>
+          </a:xfrm>
+          <a:prstGeom prst="rect">
+            <a:avLst/>
+          </a:prstGeom>
+          <a:noFill/>
+          <a:ln/>
+        </p:spPr>
+        <p:txBody>
+          <a:bodyPr wrap="square" lIns="0" tIns="0" rIns="0" bIns="0" rtlCol="0" anchor="t"/>
+          <a:lstStyle/>
+          <a:p>
+            <a:pPr algn="ctr" indent="0" marL="0">
+              <a:lnSpc>
+                <a:spcPts val="3172"/>
+              </a:lnSpc>
+              <a:buNone/>
+            </a:pPr>
+            <a:r>
+              <a:rPr lang="en-US" altLang="en-US" sz="2600" b="1" dirty="0">
+                <a:solidFill>
+                  <a:srgbClr val="C41220"/>
+                </a:solidFill>
+                <a:latin typeface="Inter" pitchFamily="34" charset="0"/>
+                <a:ea typeface="Inter" pitchFamily="34" charset="-122"/>
+                <a:cs typeface="Inter" pitchFamily="34" charset="-120"/>
+              </a:rPr>
+              <a:t>B</a:t>
+            </a:r>
+            <a:endParaRPr lang="en-US" sz="2400" dirty="0"/>
+          </a:p>
+          <a:p>
+            <a:pPr algn="ctr" indent="0" marL="0">
+              <a:lnSpc>
+                <a:spcPts val="2928"/>
+              </a:lnSpc>
+              <a:spcBef>
+                <a:spcPts val="1000"/>
+              </a:spcBef>
+              <a:buNone/>
+            </a:pPr>
+            <a:r>
+              <a:rPr lang="en-US" altLang="en-US" sz="2400" b="1" dirty="0">
+                <a:solidFill>
+                  <a:srgbClr val="343A40"/>
+                </a:solidFill>
+                <a:latin typeface="Inter" pitchFamily="34" charset="0"/>
+                <a:ea typeface="Inter" pitchFamily="34" charset="-122"/>
+                <a:cs typeface="Inter" pitchFamily="34" charset="-120"/>
+              </a:rPr>
+              <a:t>Box</a:t>
+            </a:r>
+            <a:endParaRPr lang="en-US" sz="2400" dirty="0"/>
+          </a:p>
+          <a:p>
+            <a:pPr algn="ctr" indent="0" marL="0">
+              <a:lnSpc>
+                <a:spcPts val="2928"/>
+              </a:lnSpc>
+              <a:spcBef>
+                <a:spcPts val="1100"/>
+              </a:spcBef>
+              <a:buNone/>
+            </a:pPr>
+            <a:r>
+              <a:rPr lang="en-US" altLang="en-US" sz="2400" dirty="0">
+                <a:solidFill>
+                  <a:srgbClr val="343A40"/>
+                </a:solidFill>
+                <a:latin typeface="Inter" pitchFamily="34" charset="0"/>
+                <a:ea typeface="Inter" pitchFamily="34" charset="-122"/>
+                <a:cs typeface="Inter" pitchFamily="34" charset="-120"/>
+              </a:rPr>
+              <a:t>Box words, units, or labels that need attention.</a:t>
+            </a:r>
+            <a:endParaRPr lang="en-US" sz="2400" dirty="0"/>
+          </a:p>
+        </p:txBody>
+      </p:sp>
+      <p:sp>
+        <p:nvSpPr>
+          <p:cNvPr id="13" name="summarize"/>
+          <p:cNvSpPr/>
+          <p:nvPr/>
+        </p:nvSpPr>
+        <p:spPr>
+          <a:xfrm>
+            <a:off x="12573000" y="3365500"/>
+            <a:ext cx="2730500" cy="2159000"/>
+          </a:xfrm>
+          <a:prstGeom prst="rect">
+            <a:avLst/>
+          </a:prstGeom>
+          <a:noFill/>
+          <a:ln/>
+        </p:spPr>
+        <p:txBody>
+          <a:bodyPr wrap="square" lIns="0" tIns="0" rIns="0" bIns="0" rtlCol="0" anchor="t"/>
+          <a:lstStyle/>
+          <a:p>
+            <a:pPr algn="ctr" indent="0" marL="0">
+              <a:lnSpc>
+                <a:spcPts val="3172"/>
+              </a:lnSpc>
+              <a:buNone/>
+            </a:pPr>
+            <a:r>
+              <a:rPr lang="en-US" altLang="en-US" sz="2600" b="1" dirty="0">
+                <a:solidFill>
+                  <a:srgbClr val="C41220"/>
+                </a:solidFill>
+                <a:latin typeface="Inter" pitchFamily="34" charset="0"/>
+                <a:ea typeface="Inter" pitchFamily="34" charset="-122"/>
+                <a:cs typeface="Inter" pitchFamily="34" charset="-120"/>
+              </a:rPr>
+              <a:t>S</a:t>
+            </a:r>
+            <a:endParaRPr lang="en-US" sz="2400" dirty="0"/>
+          </a:p>
+          <a:p>
+            <a:pPr algn="ctr" indent="0" marL="0">
+              <a:lnSpc>
+                <a:spcPts val="2928"/>
+              </a:lnSpc>
+              <a:spcBef>
+                <a:spcPts val="1000"/>
+              </a:spcBef>
+              <a:buNone/>
+            </a:pPr>
+            <a:r>
+              <a:rPr lang="en-US" altLang="en-US" sz="2400" b="1" dirty="0">
+                <a:solidFill>
+                  <a:srgbClr val="343A40"/>
+                </a:solidFill>
+                <a:latin typeface="Inter" pitchFamily="34" charset="0"/>
+                <a:ea typeface="Inter" pitchFamily="34" charset="-122"/>
+                <a:cs typeface="Inter" pitchFamily="34" charset="-120"/>
+              </a:rPr>
+              <a:t>Summarize</a:t>
+            </a:r>
+            <a:endParaRPr lang="en-US" sz="2400" dirty="0"/>
+          </a:p>
+          <a:p>
+            <a:pPr algn="ctr" indent="0" marL="0">
+              <a:lnSpc>
+                <a:spcPts val="2928"/>
+              </a:lnSpc>
+              <a:spcBef>
+                <a:spcPts val="1100"/>
+              </a:spcBef>
+              <a:buNone/>
+            </a:pPr>
+            <a:r>
+              <a:rPr lang="en-US" altLang="en-US" sz="2400" dirty="0">
+                <a:solidFill>
+                  <a:srgbClr val="343A40"/>
+                </a:solidFill>
+                <a:latin typeface="Inter" pitchFamily="34" charset="0"/>
+                <a:ea typeface="Inter" pitchFamily="34" charset="-122"/>
+                <a:cs typeface="Inter" pitchFamily="34" charset="-120"/>
+              </a:rPr>
+              <a:t>Say what the source shows in your own words.</a:t>
+            </a:r>
+            <a:endParaRPr lang="en-US" sz="2400" dirty="0"/>
+          </a:p>
+        </p:txBody>
+      </p:sp>
+      <p:sp>
+        <p:nvSpPr>
+          <p:cNvPr id="14" name="criteria-shape-13"/>
+          <p:cNvSpPr/>
+          <p:nvPr/>
+        </p:nvSpPr>
+        <p:spPr>
+          <a:xfrm>
+            <a:off x="508000" y="6959600"/>
+            <a:ext cx="15240000" cy="787400"/>
+          </a:xfrm>
+          <a:prstGeom prst="rect">
+            <a:avLst/>
+          </a:prstGeom>
+          <a:solidFill>
+            <a:srgbClr val="202124"/>
+          </a:solidFill>
+          <a:ln/>
+        </p:spPr>
+      </p:sp>
+      <p:sp>
+        <p:nvSpPr>
+          <p:cNvPr id="15" name="note"/>
+          <p:cNvSpPr/>
+          <p:nvPr/>
+        </p:nvSpPr>
+        <p:spPr>
+          <a:xfrm>
+            <a:off x="889000" y="7188200"/>
+            <a:ext cx="14478000" cy="355600"/>
+          </a:xfrm>
+          <a:prstGeom prst="rect">
+            <a:avLst/>
+          </a:prstGeom>
+          <a:noFill/>
+          <a:ln/>
+        </p:spPr>
+        <p:txBody>
+          <a:bodyPr wrap="square" lIns="0" tIns="0" rIns="0" bIns="0" rtlCol="0" anchor="t"/>
+          <a:lstStyle/>
+          <a:p>
+            <a:pPr algn="ctr" indent="0" marL="0">
+              <a:buNone/>
+            </a:pPr>
+            <a:r>
+              <a:rPr lang="en-US" altLang="en-US" sz="2100" b="1" dirty="0">
+                <a:solidFill>
+                  <a:srgbClr val="F6B4BA"/>
+                </a:solidFill>
+                <a:latin typeface="Inter" pitchFamily="34" charset="0"/>
+                <a:ea typeface="Inter" pitchFamily="34" charset="-122"/>
+                <a:cs typeface="Inter" pitchFamily="34" charset="-120"/>
+              </a:rPr>
+              <a:t>Student direction:</a:t>
+            </a:r>
+            <a:r>
               <a:rPr lang="en-US" altLang="en-US" sz="2100" dirty="0">
                 <a:solidFill>
-                  <a:srgbClr val="3C4043"/>
-                </a:solidFill>
-                <a:latin typeface="Inter" pitchFamily="34" charset="0"/>
-                <a:ea typeface="Inter" pitchFamily="34" charset="-122"/>
-                <a:cs typeface="Inter" pitchFamily="34" charset="-120"/>
-              </a:rPr>
-              <a:t>Summarize what the source shows, the question it raises, or the explanation students will need to construct.</a:t>
+                  <a:srgbClr val="FFFFFF"/>
+                </a:solidFill>
+                <a:latin typeface="Inter" pitchFamily="34" charset="0"/>
+                <a:ea typeface="Inter" pitchFamily="34" charset="-122"/>
+                <a:cs typeface="Inter" pitchFamily="34" charset="-120"/>
+              </a:rPr>
+              <a:t> “Use CUBS on the source. Then use your notes to help you write.”</a:t>
             </a:r>
             <a:endParaRPr lang="en-US" sz="2100" dirty="0"/>
           </a:p>
@@ -4406,77 +4255,7 @@
       </p:sp>
       <p:sp>
         <p:nvSpPr>
-          <p:cNvPr id="15" name="criteria-shape-14"/>
-          <p:cNvSpPr/>
-          <p:nvPr/>
-        </p:nvSpPr>
-        <p:spPr>
-          <a:xfrm>
-            <a:off x="508000" y="7239000"/>
-            <a:ext cx="15240000" cy="673100"/>
-          </a:xfrm>
-          <a:prstGeom prst="rect">
-            <a:avLst/>
-          </a:prstGeom>
-          <a:solidFill>
-            <a:srgbClr val="202124"/>
-          </a:solidFill>
-          <a:ln/>
-        </p:spPr>
-      </p:sp>
-      <p:sp>
-        <p:nvSpPr>
-          <p:cNvPr id="16" name="note"/>
-          <p:cNvSpPr/>
-          <p:nvPr/>
-        </p:nvSpPr>
-        <p:spPr>
-          <a:xfrm>
-            <a:off x="838200" y="7416800"/>
-            <a:ext cx="14478000" cy="330200"/>
-          </a:xfrm>
-          <a:prstGeom prst="rect">
-            <a:avLst/>
-          </a:prstGeom>
-          <a:noFill/>
-          <a:ln/>
-        </p:spPr>
-        <p:txBody>
-          <a:bodyPr wrap="square" lIns="0" tIns="0" rIns="0" bIns="0" rtlCol="0" anchor="t"/>
-          <a:lstStyle/>
-          <a:p>
-            <a:pPr algn="ctr" indent="0" marL="0">
-              <a:buNone/>
-            </a:pPr>
-            <a:r>
-              <a:rPr lang="en-US" altLang="en-US" sz="2000" b="1" dirty="0">
-                <a:solidFill>
-                  <a:srgbClr val="F6B4BA"/>
-                </a:solidFill>
-                <a:latin typeface="Inter" pitchFamily="34" charset="0"/>
-                <a:ea typeface="Inter" pitchFamily="34" charset="-122"/>
-                <a:cs typeface="Inter" pitchFamily="34" charset="-120"/>
-              </a:rPr>
-              <a:t>Student directions:</a:t>
-            </a:r>
-            <a:r>
-              <a:rPr lang="en-US" altLang="en-US" sz="2000" dirty="0">
-                <a:solidFill>
-                  <a:srgbClr val="FFFFFF"/>
-                </a:solidFill>
-                <a:latin typeface="Inter" pitchFamily="34" charset="0"/>
-                <a:ea typeface="Inter" pitchFamily="34" charset="-122"/>
-                <a:cs typeface="Inter" pitchFamily="34" charset="-120"/>
-              </a:rPr>
-              <a:t> “Annotate today’s source. Record what you notice, what it may mean, and a question you still have.”</a:t>
-            </a:r>
-            <a:endParaRPr lang="en-US" sz="2000" dirty="0"/>
-          </a:p>
-        </p:txBody>
-      </p:sp>
-      <p:sp>
-        <p:nvSpPr>
-          <p:cNvPr id="17" name="page"/>
+          <p:cNvPr id="16" name="page"/>
           <p:cNvSpPr/>
           <p:nvPr/>
         </p:nvSpPr>
@@ -4501,7 +4280,7 @@
             <a:r>
               <a:rPr lang="en-US" altLang="en-US" sz="1300" dirty="0">
                 <a:solidFill>
-                  <a:srgbClr val="3C4043"/>
+                  <a:srgbClr val="343A40"/>
                 </a:solidFill>
                 <a:latin typeface="Inter" pitchFamily="34" charset="0"/>
                 <a:ea typeface="Inter" pitchFamily="34" charset="-122"/>
@@ -4515,7 +4294,7 @@
       </p:sp>
       <p:sp>
         <p:nvSpPr>
-          <p:cNvPr id="18" name="criteria-shape-17"/>
+          <p:cNvPr id="17" name="criteria-shape-16"/>
           <p:cNvSpPr/>
           <p:nvPr/>
         </p:nvSpPr>
@@ -4618,7 +4397,7 @@
                 <a:ea typeface="Inter" pitchFamily="34" charset="-122"/>
                 <a:cs typeface="Inter" pitchFamily="34" charset="-120"/>
               </a:rPr>
-              <a:t>Practice CUBS, Then Read a Student Writing Sample</a:t>
+              <a:t>Try CUBS With a Source From Your Course</a:t>
             </a:r>
             <a:endParaRPr lang="en-US" sz="3000" dirty="0"/>
           </a:p>
@@ -4671,8 +4450,8 @@
         </p:nvSpPr>
         <p:spPr>
           <a:xfrm>
-            <a:off x="508000" y="1397000"/>
-            <a:ext cx="14732000" cy="635000"/>
+            <a:off x="508000" y="1460500"/>
+            <a:ext cx="14732000" cy="533400"/>
           </a:xfrm>
           <a:prstGeom prst="rect">
             <a:avLst/>
@@ -4688,17 +4467,17 @@
               <a:buNone/>
             </a:pPr>
             <a:r>
-              <a:rPr lang="en-US" altLang="en-US" sz="2300" dirty="0">
-                <a:solidFill>
-                  <a:srgbClr val="3C4043"/>
-                </a:solidFill>
-                <a:latin typeface="Inter" pitchFamily="34" charset="0"/>
-                <a:ea typeface="Inter" pitchFamily="34" charset="-122"/>
-                <a:cs typeface="Inter" pitchFamily="34" charset="-120"/>
-              </a:rPr>
-              <a:t>Choose a course-relevant source and 1–2 de-identified writing samples. The Biology benchmark is optional; use the routine and samples from your own science classroom.</a:t>
-            </a:r>
-            <a:endParaRPr lang="en-US" sz="2300" dirty="0"/>
+              <a:rPr lang="en-US" altLang="en-US" sz="2400" dirty="0">
+                <a:solidFill>
+                  <a:srgbClr val="343A40"/>
+                </a:solidFill>
+                <a:latin typeface="Inter" pitchFamily="34" charset="0"/>
+                <a:ea typeface="Inter" pitchFamily="34" charset="-122"/>
+                <a:cs typeface="Inter" pitchFamily="34" charset="-120"/>
+              </a:rPr>
+              <a:t>Choose a text, graph, data set, diagram, model, or investigation result that students will use in an upcoming lesson.</a:t>
+            </a:r>
+            <a:endParaRPr lang="en-US" sz="2400" dirty="0"/>
           </a:p>
         </p:txBody>
       </p:sp>
@@ -4710,18 +4489,18 @@
         </p:nvSpPr>
         <p:spPr>
           <a:xfrm>
-            <a:off x="508000" y="2413000"/>
-            <a:ext cx="6731000" cy="4953000"/>
-          </a:xfrm>
-          <a:prstGeom prst="rect">
-            <a:avLst/>
-          </a:prstGeom>
-          <a:solidFill>
-            <a:srgbClr val="F8F9FA"/>
+            <a:off x="698500" y="2921000"/>
+            <a:ext cx="4445000" cy="3683000"/>
+          </a:xfrm>
+          <a:prstGeom prst="rect">
+            <a:avLst/>
+          </a:prstGeom>
+          <a:solidFill>
+            <a:srgbClr val="F5F6F8"/>
           </a:solidFill>
           <a:ln w="12700">
             <a:solidFill>
-              <a:srgbClr val="D1D5DB"/>
+              <a:srgbClr val="D4D8DE"/>
             </a:solidFill>
             <a:prstDash val="solid"/>
           </a:ln>
@@ -4729,63 +4508,24 @@
       </p:sp>
       <p:sp>
         <p:nvSpPr>
-          <p:cNvPr id="7" name="source-title"/>
-          <p:cNvSpPr/>
-          <p:nvPr/>
-        </p:nvSpPr>
-        <p:spPr>
-          <a:xfrm>
-            <a:off x="889000" y="2781300"/>
-            <a:ext cx="5969000" cy="381000"/>
-          </a:xfrm>
-          <a:prstGeom prst="rect">
-            <a:avLst/>
-          </a:prstGeom>
-          <a:noFill/>
-          <a:ln/>
-        </p:spPr>
-        <p:txBody>
-          <a:bodyPr wrap="square" lIns="0" tIns="0" rIns="0" bIns="0" rtlCol="0" anchor="t"/>
-          <a:lstStyle/>
-          <a:p>
-            <a:pPr algn="l" indent="0" marL="0">
-              <a:buNone/>
-            </a:pPr>
-            <a:r>
-              <a:rPr lang="en-US" altLang="en-US" sz="2500" dirty="0">
-                <a:solidFill>
-                  <a:srgbClr val="3C4043"/>
-                </a:solidFill>
-                <a:latin typeface="Inter" pitchFamily="34" charset="0"/>
-                <a:ea typeface="Inter" pitchFamily="34" charset="-122"/>
-                <a:cs typeface="Inter" pitchFamily="34" charset="-120"/>
-              </a:rPr>
-              <a:t>SELECT A SOURCE + WRITING SAMPLE</a:t>
-            </a:r>
-            <a:endParaRPr lang="en-US" sz="2500" dirty="0"/>
-          </a:p>
-        </p:txBody>
-      </p:sp>
-      <p:sp>
-        <p:nvSpPr>
-          <p:cNvPr id="8" name="calibration-shape-7"/>
-          <p:cNvSpPr/>
-          <p:nvPr/>
-        </p:nvSpPr>
-        <p:spPr>
-          <a:xfrm>
-            <a:off x="889000" y="3479800"/>
-            <a:ext cx="2667000" cy="1270000"/>
-          </a:xfrm>
-          <a:prstGeom prst="rect">
-            <a:avLst/>
-          </a:prstGeom>
-          <a:solidFill>
-            <a:srgbClr val="F3F4F6"/>
+          <p:cNvPr id="7" name="calibration-shape-6"/>
+          <p:cNvSpPr/>
+          <p:nvPr/>
+        </p:nvSpPr>
+        <p:spPr>
+          <a:xfrm>
+            <a:off x="5905500" y="2921000"/>
+            <a:ext cx="4445000" cy="3683000"/>
+          </a:xfrm>
+          <a:prstGeom prst="rect">
+            <a:avLst/>
+          </a:prstGeom>
+          <a:solidFill>
+            <a:srgbClr val="F5F6F8"/>
           </a:solidFill>
           <a:ln w="12700">
             <a:solidFill>
-              <a:srgbClr val="D1D5DB"/>
+              <a:srgbClr val="D4D8DE"/>
             </a:solidFill>
             <a:prstDash val="solid"/>
           </a:ln>
@@ -4793,24 +4533,24 @@
       </p:sp>
       <p:sp>
         <p:nvSpPr>
-          <p:cNvPr id="9" name="calibration-shape-8"/>
-          <p:cNvSpPr/>
-          <p:nvPr/>
-        </p:nvSpPr>
-        <p:spPr>
-          <a:xfrm>
-            <a:off x="4064000" y="3479800"/>
-            <a:ext cx="2667000" cy="1270000"/>
-          </a:xfrm>
-          <a:prstGeom prst="rect">
-            <a:avLst/>
-          </a:prstGeom>
-          <a:solidFill>
-            <a:srgbClr val="F3F4F6"/>
-          </a:solidFill>
-          <a:ln w="12700">
+          <p:cNvPr id="8" name="calibration-shape-7"/>
+          <p:cNvSpPr/>
+          <p:nvPr/>
+        </p:nvSpPr>
+        <p:spPr>
+          <a:xfrm>
+            <a:off x="11112500" y="2921000"/>
+            <a:ext cx="4445000" cy="3683000"/>
+          </a:xfrm>
+          <a:prstGeom prst="rect">
+            <a:avLst/>
+          </a:prstGeom>
+          <a:solidFill>
+            <a:srgbClr val="FCE8EA"/>
+          </a:solidFill>
+          <a:ln w="25400">
             <a:solidFill>
-              <a:srgbClr val="D1D5DB"/>
+              <a:srgbClr val="C41220"/>
             </a:solidFill>
             <a:prstDash val="solid"/>
           </a:ln>
@@ -4818,64 +4558,14 @@
       </p:sp>
       <p:sp>
         <p:nvSpPr>
-          <p:cNvPr id="10" name="calibration-shape-9"/>
-          <p:cNvSpPr/>
-          <p:nvPr/>
-        </p:nvSpPr>
-        <p:spPr>
-          <a:xfrm>
-            <a:off x="889000" y="5207000"/>
-            <a:ext cx="2667000" cy="1270000"/>
-          </a:xfrm>
-          <a:prstGeom prst="rect">
-            <a:avLst/>
-          </a:prstGeom>
-          <a:solidFill>
-            <a:srgbClr val="F3F4F6"/>
-          </a:solidFill>
-          <a:ln w="12700">
-            <a:solidFill>
-              <a:srgbClr val="D1D5DB"/>
-            </a:solidFill>
-            <a:prstDash val="solid"/>
-          </a:ln>
-        </p:spPr>
-      </p:sp>
-      <p:sp>
-        <p:nvSpPr>
-          <p:cNvPr id="11" name="calibration-shape-10"/>
-          <p:cNvSpPr/>
-          <p:nvPr/>
-        </p:nvSpPr>
-        <p:spPr>
-          <a:xfrm>
-            <a:off x="4064000" y="5207000"/>
-            <a:ext cx="2667000" cy="1270000"/>
-          </a:xfrm>
-          <a:prstGeom prst="rect">
-            <a:avLst/>
-          </a:prstGeom>
-          <a:solidFill>
-            <a:srgbClr val="F3F4F6"/>
-          </a:solidFill>
-          <a:ln w="12700">
-            <a:solidFill>
-              <a:srgbClr val="D1D5DB"/>
-            </a:solidFill>
-            <a:prstDash val="solid"/>
-          </a:ln>
-        </p:spPr>
-      </p:sp>
-      <p:sp>
-        <p:nvSpPr>
-          <p:cNvPr id="12" name="source1"/>
-          <p:cNvSpPr/>
-          <p:nvPr/>
-        </p:nvSpPr>
-        <p:spPr>
-          <a:xfrm>
-            <a:off x="1117600" y="3733800"/>
-            <a:ext cx="2209800" cy="762000"/>
+          <p:cNvPr id="9" name="one"/>
+          <p:cNvSpPr/>
+          <p:nvPr/>
+        </p:nvSpPr>
+        <p:spPr>
+          <a:xfrm>
+            <a:off x="1066800" y="3492500"/>
+            <a:ext cx="3708400" cy="2222500"/>
           </a:xfrm>
           <a:prstGeom prst="rect">
             <a:avLst/>
@@ -4884,14 +4574,17 @@
           <a:ln/>
         </p:spPr>
         <p:txBody>
-          <a:bodyPr wrap="square" lIns="0" tIns="0" rIns="0" bIns="0" rtlCol="0" anchor="ctr"/>
+          <a:bodyPr wrap="square" lIns="0" tIns="0" rIns="0" bIns="0" rtlCol="0" anchor="t"/>
           <a:lstStyle/>
           <a:p>
             <a:pPr algn="ctr" indent="0" marL="0">
-              <a:buNone/>
-            </a:pPr>
-            <a:r>
-              <a:rPr lang="en-US" altLang="en-US" sz="1900" b="1" dirty="0">
+              <a:lnSpc>
+                <a:spcPts val="2250"/>
+              </a:lnSpc>
+              <a:buNone/>
+            </a:pPr>
+            <a:r>
+              <a:rPr lang="en-US" altLang="en-US" sz="1800" b="1" dirty="0">
                 <a:solidFill>
                   <a:srgbClr val="C41220"/>
                 </a:solidFill>
@@ -4899,39 +4592,45 @@
                 <a:ea typeface="Inter" pitchFamily="34" charset="-122"/>
                 <a:cs typeface="Inter" pitchFamily="34" charset="-120"/>
               </a:rPr>
-              <a:t>ARTICLE OR TEXT SET</a:t>
-            </a:r>
-            <a:endParaRPr lang="en-US" sz="1900" dirty="0"/>
+              <a:t>1. PICK A SOURCE</a:t>
+            </a:r>
+            <a:endParaRPr lang="en-US" sz="2500" dirty="0"/>
           </a:p>
           <a:p>
             <a:pPr algn="ctr" indent="0" marL="0">
-              <a:buNone/>
-            </a:pPr>
-            <a:r>
-              <a:rPr lang="en-US" altLang="en-US" sz="1600" dirty="0">
-                <a:solidFill>
-                  <a:srgbClr val="3C4043"/>
-                </a:solidFill>
-                <a:latin typeface="Inter" pitchFamily="34" charset="0"/>
-                <a:ea typeface="Inter" pitchFamily="34" charset="-122"/>
-                <a:cs typeface="Inter" pitchFamily="34" charset="-120"/>
-              </a:rPr>
-              <a:t>explanation, scenario, procedure</a:t>
-            </a:r>
-            <a:endParaRPr lang="en-US" sz="1900" dirty="0"/>
-          </a:p>
-        </p:txBody>
-      </p:sp>
-      <p:sp>
-        <p:nvSpPr>
-          <p:cNvPr id="13" name="source2"/>
-          <p:cNvSpPr/>
-          <p:nvPr/>
-        </p:nvSpPr>
-        <p:spPr>
-          <a:xfrm>
-            <a:off x="4292600" y="3733800"/>
-            <a:ext cx="2209800" cy="762000"/>
+              <a:lnSpc>
+                <a:spcPts val="3125"/>
+              </a:lnSpc>
+              <a:spcBef>
+                <a:spcPts val="1800"/>
+              </a:spcBef>
+              <a:buNone/>
+            </a:pPr>
+            <a:r>
+              <a:rPr lang="en-US" altLang="en-US" sz="2500" dirty="0">
+                <a:solidFill>
+                  <a:srgbClr val="343A40"/>
+                </a:solidFill>
+                <a:latin typeface="Inter" pitchFamily="34" charset="0"/>
+                <a:ea typeface="Inter" pitchFamily="34" charset="-122"/>
+                <a:cs typeface="Inter" pitchFamily="34" charset="-120"/>
+              </a:rPr>
+              <a:t>What will students read, view, or analyze?</a:t>
+            </a:r>
+            <a:endParaRPr lang="en-US" sz="2500" dirty="0"/>
+          </a:p>
+        </p:txBody>
+      </p:sp>
+      <p:sp>
+        <p:nvSpPr>
+          <p:cNvPr id="10" name="two"/>
+          <p:cNvSpPr/>
+          <p:nvPr/>
+        </p:nvSpPr>
+        <p:spPr>
+          <a:xfrm>
+            <a:off x="6273800" y="3492500"/>
+            <a:ext cx="3708400" cy="2222500"/>
           </a:xfrm>
           <a:prstGeom prst="rect">
             <a:avLst/>
@@ -4940,14 +4639,17 @@
           <a:ln/>
         </p:spPr>
         <p:txBody>
-          <a:bodyPr wrap="square" lIns="0" tIns="0" rIns="0" bIns="0" rtlCol="0" anchor="ctr"/>
+          <a:bodyPr wrap="square" lIns="0" tIns="0" rIns="0" bIns="0" rtlCol="0" anchor="t"/>
           <a:lstStyle/>
           <a:p>
             <a:pPr algn="ctr" indent="0" marL="0">
-              <a:buNone/>
-            </a:pPr>
-            <a:r>
-              <a:rPr lang="en-US" altLang="en-US" sz="1900" b="1" dirty="0">
+              <a:lnSpc>
+                <a:spcPts val="2250"/>
+              </a:lnSpc>
+              <a:buNone/>
+            </a:pPr>
+            <a:r>
+              <a:rPr lang="en-US" altLang="en-US" sz="1800" b="1" dirty="0">
                 <a:solidFill>
                   <a:srgbClr val="C41220"/>
                 </a:solidFill>
@@ -4955,39 +4657,45 @@
                 <a:ea typeface="Inter" pitchFamily="34" charset="-122"/>
                 <a:cs typeface="Inter" pitchFamily="34" charset="-120"/>
               </a:rPr>
-              <a:t>DATA OR GRAPH</a:t>
-            </a:r>
-            <a:endParaRPr lang="en-US" sz="1900" dirty="0"/>
+              <a:t>2. DO CUBS</a:t>
+            </a:r>
+            <a:endParaRPr lang="en-US" sz="2500" dirty="0"/>
           </a:p>
           <a:p>
             <a:pPr algn="ctr" indent="0" marL="0">
-              <a:buNone/>
-            </a:pPr>
-            <a:r>
-              <a:rPr lang="en-US" altLang="en-US" sz="1600" dirty="0">
-                <a:solidFill>
-                  <a:srgbClr val="3C4043"/>
-                </a:solidFill>
-                <a:latin typeface="Inter" pitchFamily="34" charset="0"/>
-                <a:ea typeface="Inter" pitchFamily="34" charset="-122"/>
-                <a:cs typeface="Inter" pitchFamily="34" charset="-120"/>
-              </a:rPr>
-              <a:t>table, graph, calculation, pattern</a:t>
-            </a:r>
-            <a:endParaRPr lang="en-US" sz="1900" dirty="0"/>
-          </a:p>
-        </p:txBody>
-      </p:sp>
-      <p:sp>
-        <p:nvSpPr>
-          <p:cNvPr id="14" name="source3"/>
-          <p:cNvSpPr/>
-          <p:nvPr/>
-        </p:nvSpPr>
-        <p:spPr>
-          <a:xfrm>
-            <a:off x="1117600" y="5461000"/>
-            <a:ext cx="2209800" cy="762000"/>
+              <a:lnSpc>
+                <a:spcPts val="3125"/>
+              </a:lnSpc>
+              <a:spcBef>
+                <a:spcPts val="1800"/>
+              </a:spcBef>
+              <a:buNone/>
+            </a:pPr>
+            <a:r>
+              <a:rPr lang="en-US" altLang="en-US" sz="2500" dirty="0">
+                <a:solidFill>
+                  <a:srgbClr val="343A40"/>
+                </a:solidFill>
+                <a:latin typeface="Inter" pitchFamily="34" charset="0"/>
+                <a:ea typeface="Inter" pitchFamily="34" charset="-122"/>
+                <a:cs typeface="Inter" pitchFamily="34" charset="-120"/>
+              </a:rPr>
+              <a:t>What should students circle, underline, box, and summarize?</a:t>
+            </a:r>
+            <a:endParaRPr lang="en-US" sz="2500" dirty="0"/>
+          </a:p>
+        </p:txBody>
+      </p:sp>
+      <p:sp>
+        <p:nvSpPr>
+          <p:cNvPr id="11" name="three"/>
+          <p:cNvSpPr/>
+          <p:nvPr/>
+        </p:nvSpPr>
+        <p:spPr>
+          <a:xfrm>
+            <a:off x="11480800" y="3492500"/>
+            <a:ext cx="3708400" cy="2222500"/>
           </a:xfrm>
           <a:prstGeom prst="rect">
             <a:avLst/>
@@ -4996,14 +4704,17 @@
           <a:ln/>
         </p:spPr>
         <p:txBody>
-          <a:bodyPr wrap="square" lIns="0" tIns="0" rIns="0" bIns="0" rtlCol="0" anchor="ctr"/>
+          <a:bodyPr wrap="square" lIns="0" tIns="0" rIns="0" bIns="0" rtlCol="0" anchor="t"/>
           <a:lstStyle/>
           <a:p>
             <a:pPr algn="ctr" indent="0" marL="0">
-              <a:buNone/>
-            </a:pPr>
-            <a:r>
-              <a:rPr lang="en-US" altLang="en-US" sz="1900" b="1" dirty="0">
+              <a:lnSpc>
+                <a:spcPts val="2250"/>
+              </a:lnSpc>
+              <a:buNone/>
+            </a:pPr>
+            <a:r>
+              <a:rPr lang="en-US" altLang="en-US" sz="1800" b="1" dirty="0">
                 <a:solidFill>
                   <a:srgbClr val="C41220"/>
                 </a:solidFill>
@@ -5011,39 +4722,65 @@
                 <a:ea typeface="Inter" pitchFamily="34" charset="-122"/>
                 <a:cs typeface="Inter" pitchFamily="34" charset="-120"/>
               </a:rPr>
-              <a:t>DIAGRAM OR MODEL</a:t>
-            </a:r>
-            <a:endParaRPr lang="en-US" sz="1900" dirty="0"/>
+              <a:t>3. TALK WITH A PARTNER</a:t>
+            </a:r>
+            <a:endParaRPr lang="en-US" sz="2500" dirty="0"/>
           </a:p>
           <a:p>
             <a:pPr algn="ctr" indent="0" marL="0">
-              <a:buNone/>
-            </a:pPr>
-            <a:r>
-              <a:rPr lang="en-US" altLang="en-US" sz="1600" dirty="0">
-                <a:solidFill>
-                  <a:srgbClr val="3C4043"/>
-                </a:solidFill>
-                <a:latin typeface="Inter" pitchFamily="34" charset="0"/>
-                <a:ea typeface="Inter" pitchFamily="34" charset="-122"/>
-                <a:cs typeface="Inter" pitchFamily="34" charset="-120"/>
-              </a:rPr>
-              <a:t>system, process, particle model</a:t>
-            </a:r>
-            <a:endParaRPr lang="en-US" sz="1900" dirty="0"/>
-          </a:p>
-        </p:txBody>
-      </p:sp>
-      <p:sp>
-        <p:nvSpPr>
-          <p:cNvPr id="15" name="source4"/>
-          <p:cNvSpPr/>
-          <p:nvPr/>
-        </p:nvSpPr>
-        <p:spPr>
-          <a:xfrm>
-            <a:off x="4292600" y="5461000"/>
-            <a:ext cx="2209800" cy="762000"/>
+              <a:lnSpc>
+                <a:spcPts val="3125"/>
+              </a:lnSpc>
+              <a:spcBef>
+                <a:spcPts val="1800"/>
+              </a:spcBef>
+              <a:buNone/>
+            </a:pPr>
+            <a:r>
+              <a:rPr lang="en-US" altLang="en-US" sz="2500" dirty="0">
+                <a:solidFill>
+                  <a:srgbClr val="343A40"/>
+                </a:solidFill>
+                <a:latin typeface="Inter" pitchFamily="34" charset="0"/>
+                <a:ea typeface="Inter" pitchFamily="34" charset="-122"/>
+                <a:cs typeface="Inter" pitchFamily="34" charset="-120"/>
+              </a:rPr>
+              <a:t>What will students need to notice before they can write?</a:t>
+            </a:r>
+            <a:endParaRPr lang="en-US" sz="2500" dirty="0"/>
+          </a:p>
+        </p:txBody>
+      </p:sp>
+      <p:sp>
+        <p:nvSpPr>
+          <p:cNvPr id="12" name="calibration-shape-11"/>
+          <p:cNvSpPr/>
+          <p:nvPr/>
+        </p:nvSpPr>
+        <p:spPr>
+          <a:xfrm>
+            <a:off x="698500" y="7239000"/>
+            <a:ext cx="14859000" cy="698500"/>
+          </a:xfrm>
+          <a:prstGeom prst="rect">
+            <a:avLst/>
+          </a:prstGeom>
+          <a:solidFill>
+            <a:srgbClr val="202124"/>
+          </a:solidFill>
+          <a:ln/>
+        </p:spPr>
+      </p:sp>
+      <p:sp>
+        <p:nvSpPr>
+          <p:cNvPr id="13" name="debrief"/>
+          <p:cNvSpPr/>
+          <p:nvPr/>
+        </p:nvSpPr>
+        <p:spPr>
+          <a:xfrm>
+            <a:off x="1079500" y="7429500"/>
+            <a:ext cx="14097000" cy="330200"/>
           </a:xfrm>
           <a:prstGeom prst="rect">
             <a:avLst/>
@@ -5052,327 +4789,30 @@
           <a:ln/>
         </p:spPr>
         <p:txBody>
-          <a:bodyPr wrap="square" lIns="0" tIns="0" rIns="0" bIns="0" rtlCol="0" anchor="ctr"/>
+          <a:bodyPr wrap="square" lIns="0" tIns="0" rIns="0" bIns="0" rtlCol="0" anchor="t"/>
           <a:lstStyle/>
           <a:p>
             <a:pPr algn="ctr" indent="0" marL="0">
               <a:buNone/>
             </a:pPr>
             <a:r>
-              <a:rPr lang="en-US" altLang="en-US" sz="1900" b="1" dirty="0">
-                <a:solidFill>
-                  <a:srgbClr val="C41220"/>
-                </a:solidFill>
-                <a:latin typeface="Inter" pitchFamily="34" charset="0"/>
-                <a:ea typeface="Inter" pitchFamily="34" charset="-122"/>
-                <a:cs typeface="Inter" pitchFamily="34" charset="-120"/>
-              </a:rPr>
-              <a:t>INVESTIGATION RESULT</a:t>
-            </a:r>
-            <a:endParaRPr lang="en-US" sz="1900" dirty="0"/>
-          </a:p>
-          <a:p>
-            <a:pPr algn="ctr" indent="0" marL="0">
-              <a:buNone/>
-            </a:pPr>
-            <a:r>
-              <a:rPr lang="en-US" altLang="en-US" sz="1600" dirty="0">
-                <a:solidFill>
-                  <a:srgbClr val="3C4043"/>
-                </a:solidFill>
-                <a:latin typeface="Inter" pitchFamily="34" charset="0"/>
-                <a:ea typeface="Inter" pitchFamily="34" charset="-122"/>
-                <a:cs typeface="Inter" pitchFamily="34" charset="-120"/>
-              </a:rPr>
-              <a:t>observation, evidence, conclusion</a:t>
-            </a:r>
-            <a:endParaRPr lang="en-US" sz="1900" dirty="0"/>
-          </a:p>
-        </p:txBody>
-      </p:sp>
-      <p:sp>
-        <p:nvSpPr>
-          <p:cNvPr id="16" name="calibration-shape-15"/>
-          <p:cNvSpPr/>
-          <p:nvPr/>
-        </p:nvSpPr>
-        <p:spPr>
-          <a:xfrm>
-            <a:off x="7620000" y="2413000"/>
-            <a:ext cx="8128000" cy="4953000"/>
-          </a:xfrm>
-          <a:prstGeom prst="rect">
-            <a:avLst/>
-          </a:prstGeom>
-          <a:solidFill>
-            <a:srgbClr val="F3F4F6"/>
-          </a:solidFill>
-          <a:ln w="12700">
-            <a:solidFill>
-              <a:srgbClr val="D1D5DB"/>
-            </a:solidFill>
-            <a:prstDash val="solid"/>
-          </a:ln>
-        </p:spPr>
-      </p:sp>
-      <p:sp>
-        <p:nvSpPr>
-          <p:cNvPr id="17" name="protocol-title"/>
-          <p:cNvSpPr/>
-          <p:nvPr/>
-        </p:nvSpPr>
-        <p:spPr>
-          <a:xfrm>
-            <a:off x="8001000" y="2781300"/>
-            <a:ext cx="7239000" cy="381000"/>
-          </a:xfrm>
-          <a:prstGeom prst="rect">
-            <a:avLst/>
-          </a:prstGeom>
-          <a:noFill/>
-          <a:ln/>
-        </p:spPr>
-        <p:txBody>
-          <a:bodyPr wrap="square" lIns="0" tIns="0" rIns="0" bIns="0" rtlCol="0" anchor="t"/>
-          <a:lstStyle/>
-          <a:p>
-            <a:pPr algn="l" indent="0" marL="0">
-              <a:buNone/>
-            </a:pPr>
-            <a:r>
-              <a:rPr lang="en-US" altLang="en-US" sz="2500" dirty="0">
-                <a:solidFill>
-                  <a:srgbClr val="3C4043"/>
-                </a:solidFill>
-                <a:latin typeface="Inter" pitchFamily="34" charset="0"/>
-                <a:ea typeface="Inter" pitchFamily="34" charset="-122"/>
-                <a:cs typeface="Inter" pitchFamily="34" charset="-120"/>
-              </a:rPr>
-              <a:t>PAIR PRACTICE: WHAT MUST STUDENTS NOTICE?</a:t>
-            </a:r>
-            <a:endParaRPr lang="en-US" sz="2500" dirty="0"/>
-          </a:p>
-        </p:txBody>
-      </p:sp>
-      <p:sp>
-        <p:nvSpPr>
-          <p:cNvPr id="18" name="protocol"/>
-          <p:cNvSpPr/>
-          <p:nvPr/>
-        </p:nvSpPr>
-        <p:spPr>
-          <a:xfrm>
-            <a:off x="8001000" y="3467100"/>
-            <a:ext cx="7112000" cy="3175000"/>
-          </a:xfrm>
-          <a:prstGeom prst="rect">
-            <a:avLst/>
-          </a:prstGeom>
-          <a:noFill/>
-          <a:ln/>
-        </p:spPr>
-        <p:txBody>
-          <a:bodyPr wrap="square" lIns="0" tIns="0" rIns="0" bIns="0" rtlCol="0" anchor="t"/>
-          <a:lstStyle/>
-          <a:p>
-            <a:pPr algn="l" indent="0" marL="0">
-              <a:lnSpc>
-                <a:spcPts val="2583"/>
-              </a:lnSpc>
-              <a:buNone/>
-            </a:pPr>
-            <a:r>
-              <a:rPr lang="en-US" altLang="en-US" sz="2100" b="1" dirty="0">
-                <a:solidFill>
-                  <a:srgbClr val="238636"/>
-                </a:solidFill>
-                <a:latin typeface="Inter" pitchFamily="34" charset="0"/>
-                <a:ea typeface="Inter" pitchFamily="34" charset="-122"/>
-                <a:cs typeface="Inter" pitchFamily="34" charset="-120"/>
-              </a:rPr>
-              <a:t>1. Circle</a:t>
-            </a:r>
-            <a:r>
               <a:rPr lang="en-US" altLang="en-US" sz="2100" dirty="0">
                 <a:solidFill>
-                  <a:srgbClr val="3C4043"/>
-                </a:solidFill>
-                <a:latin typeface="Inter" pitchFamily="34" charset="0"/>
-                <a:ea typeface="Inter" pitchFamily="34" charset="-122"/>
-                <a:cs typeface="Inter" pitchFamily="34" charset="-120"/>
-              </a:rPr>
-              <a:t> the question, phenomenon, pattern, or relationship students must address.</a:t>
+                  <a:srgbClr val="FFFFFF"/>
+                </a:solidFill>
+                <a:latin typeface="Inter" pitchFamily="34" charset="0"/>
+                <a:ea typeface="Inter" pitchFamily="34" charset="-122"/>
+                <a:cs typeface="Inter" pitchFamily="34" charset="-120"/>
+              </a:rPr>
+              <a:t>Keep it simple: model the first step, then let students do the thinking.</a:t>
             </a:r>
             <a:endParaRPr lang="en-US" sz="2100" dirty="0"/>
           </a:p>
-          <a:p>
-            <a:pPr algn="l" indent="0" marL="0">
-              <a:lnSpc>
-                <a:spcPts val="2583"/>
-              </a:lnSpc>
-              <a:buNone/>
-            </a:pPr>
-            <a:r>
-              <a:rPr lang="en-US" altLang="en-US" sz="2100" b="1" dirty="0">
-                <a:solidFill>
-                  <a:srgbClr val="1D4ED8"/>
-                </a:solidFill>
-                <a:latin typeface="Inter" pitchFamily="34" charset="0"/>
-                <a:ea typeface="Inter" pitchFamily="34" charset="-122"/>
-                <a:cs typeface="Inter" pitchFamily="34" charset="-120"/>
-              </a:rPr>
-              <a:t>2. Underline</a:t>
-            </a:r>
-            <a:r>
-              <a:rPr lang="en-US" altLang="en-US" sz="2100" dirty="0">
-                <a:solidFill>
-                  <a:srgbClr val="3C4043"/>
-                </a:solidFill>
-                <a:latin typeface="Inter" pitchFamily="34" charset="0"/>
-                <a:ea typeface="Inter" pitchFamily="34" charset="-122"/>
-                <a:cs typeface="Inter" pitchFamily="34" charset="-120"/>
-              </a:rPr>
-              <a:t> details, observations, data, or labels that can serve as evidence.</a:t>
-            </a:r>
-            <a:endParaRPr lang="en-US" sz="2100" dirty="0"/>
-          </a:p>
-          <a:p>
-            <a:pPr algn="l" indent="0" marL="0">
-              <a:lnSpc>
-                <a:spcPts val="2583"/>
-              </a:lnSpc>
-              <a:buNone/>
-            </a:pPr>
-            <a:r>
-              <a:rPr lang="en-US" altLang="en-US" sz="2100" b="1" dirty="0">
-                <a:solidFill>
-                  <a:srgbClr val="C56B00"/>
-                </a:solidFill>
-                <a:latin typeface="Inter" pitchFamily="34" charset="0"/>
-                <a:ea typeface="Inter" pitchFamily="34" charset="-122"/>
-                <a:cs typeface="Inter" pitchFamily="34" charset="-120"/>
-              </a:rPr>
-              <a:t>3. Box</a:t>
-            </a:r>
-            <a:r>
-              <a:rPr lang="en-US" altLang="en-US" sz="2100" dirty="0">
-                <a:solidFill>
-                  <a:srgbClr val="3C4043"/>
-                </a:solidFill>
-                <a:latin typeface="Inter" pitchFamily="34" charset="0"/>
-                <a:ea typeface="Inter" pitchFamily="34" charset="-122"/>
-                <a:cs typeface="Inter" pitchFamily="34" charset="-120"/>
-              </a:rPr>
-              <a:t> vocabulary, symbols, units, or representations that could limit access.</a:t>
-            </a:r>
-            <a:endParaRPr lang="en-US" sz="2100" dirty="0"/>
-          </a:p>
-          <a:p>
-            <a:pPr algn="l" indent="0" marL="0">
-              <a:lnSpc>
-                <a:spcPts val="2583"/>
-              </a:lnSpc>
-              <a:buNone/>
-            </a:pPr>
-            <a:r>
-              <a:rPr lang="en-US" altLang="en-US" sz="2100" b="1" dirty="0">
-                <a:solidFill>
-                  <a:srgbClr val="7C3AED"/>
-                </a:solidFill>
-                <a:latin typeface="Inter" pitchFamily="34" charset="0"/>
-                <a:ea typeface="Inter" pitchFamily="34" charset="-122"/>
-                <a:cs typeface="Inter" pitchFamily="34" charset="-120"/>
-              </a:rPr>
-              <a:t>4. Summarize</a:t>
-            </a:r>
-            <a:r>
-              <a:rPr lang="en-US" altLang="en-US" sz="2100" dirty="0">
-                <a:solidFill>
-                  <a:srgbClr val="3C4043"/>
-                </a:solidFill>
-                <a:latin typeface="Inter" pitchFamily="34" charset="0"/>
-                <a:ea typeface="Inter" pitchFamily="34" charset="-122"/>
-                <a:cs typeface="Inter" pitchFamily="34" charset="-120"/>
-              </a:rPr>
-              <a:t> the science explanation, prediction, or conclusion students will need to construct.</a:t>
-            </a:r>
-            <a:endParaRPr lang="en-US" sz="2100" dirty="0"/>
-          </a:p>
-        </p:txBody>
-      </p:sp>
-      <p:sp>
-        <p:nvSpPr>
-          <p:cNvPr id="19" name="calibration-shape-18"/>
-          <p:cNvSpPr/>
-          <p:nvPr/>
-        </p:nvSpPr>
-        <p:spPr>
-          <a:xfrm>
-            <a:off x="508000" y="7747000"/>
-            <a:ext cx="15240000" cy="546100"/>
-          </a:xfrm>
-          <a:prstGeom prst="rect">
-            <a:avLst/>
-          </a:prstGeom>
-          <a:solidFill>
-            <a:srgbClr val="202124"/>
-          </a:solidFill>
-          <a:ln/>
-        </p:spPr>
-      </p:sp>
-      <p:sp>
-        <p:nvSpPr>
-          <p:cNvPr id="20" name="transfer"/>
-          <p:cNvSpPr/>
-          <p:nvPr/>
-        </p:nvSpPr>
-        <p:spPr>
-          <a:xfrm>
-            <a:off x="825500" y="7874000"/>
-            <a:ext cx="14351000" cy="279400"/>
-          </a:xfrm>
-          <a:prstGeom prst="rect">
-            <a:avLst/>
-          </a:prstGeom>
-          <a:noFill/>
-          <a:ln/>
-        </p:spPr>
-        <p:txBody>
-          <a:bodyPr wrap="square" lIns="0" tIns="0" rIns="0" bIns="0" rtlCol="0" anchor="t"/>
-          <a:lstStyle/>
-          <a:p>
-            <a:pPr algn="ctr" indent="0" marL="0">
-              <a:buNone/>
-            </a:pPr>
-            <a:r>
-              <a:rPr lang="en-US" altLang="en-US" sz="1800" b="1" dirty="0">
-                <a:solidFill>
-                  <a:srgbClr val="F6B4BA"/>
-                </a:solidFill>
-                <a:latin typeface="Inter" pitchFamily="34" charset="0"/>
-                <a:ea typeface="Inter" pitchFamily="34" charset="-122"/>
-                <a:cs typeface="Inter" pitchFamily="34" charset="-120"/>
-              </a:rPr>
-              <a:t>Debrief:</a:t>
-            </a:r>
-            <a:r>
-              <a:rPr lang="en-US" altLang="en-US" sz="1800" dirty="0">
-                <a:solidFill>
-                  <a:srgbClr val="FFFFFF"/>
-                </a:solidFill>
-                <a:latin typeface="Inter" pitchFamily="34" charset="0"/>
-                <a:ea typeface="Inter" pitchFamily="34" charset="-122"/>
-                <a:cs typeface="Inter" pitchFamily="34" charset="-120"/>
-              </a:rPr>
-              <a:t> What will you model, what will students annotate, and what does the writing sample show students need next?</a:t>
-            </a:r>
-            <a:endParaRPr lang="en-US" sz="1800" dirty="0"/>
-          </a:p>
-        </p:txBody>
-      </p:sp>
-      <p:sp>
-        <p:nvSpPr>
-          <p:cNvPr id="21" name="page"/>
+        </p:txBody>
+      </p:sp>
+      <p:sp>
+        <p:nvSpPr>
+          <p:cNvPr id="14" name="page"/>
           <p:cNvSpPr/>
           <p:nvPr/>
         </p:nvSpPr>
@@ -5397,7 +4837,7 @@
             <a:r>
               <a:rPr lang="en-US" altLang="en-US" sz="1300" dirty="0">
                 <a:solidFill>
-                  <a:srgbClr val="3C4043"/>
+                  <a:srgbClr val="343A40"/>
                 </a:solidFill>
                 <a:latin typeface="Inter" pitchFamily="34" charset="0"/>
                 <a:ea typeface="Inter" pitchFamily="34" charset="-122"/>
@@ -5411,7 +4851,7 @@
       </p:sp>
       <p:sp>
         <p:nvSpPr>
-          <p:cNvPr id="22" name="calibration-shape-21"/>
+          <p:cNvPr id="15" name="calibration-shape-14"/>
           <p:cNvSpPr/>
           <p:nvPr/>
         </p:nvSpPr>
@@ -5514,7 +4954,7 @@
                 <a:ea typeface="Inter" pitchFamily="34" charset="-122"/>
                 <a:cs typeface="Inter" pitchFamily="34" charset="-120"/>
               </a:rPr>
-              <a:t>Model Color-Coded CER: Make Explanations Visible</a:t>
+              <a:t>CER Color Key: Help Students See Their Thinking</a:t>
             </a:r>
             <a:endParaRPr lang="en-US" sz="3000" dirty="0"/>
           </a:p>
@@ -5567,8 +5007,8 @@
         </p:nvSpPr>
         <p:spPr>
           <a:xfrm>
-            <a:off x="508000" y="1397000"/>
-            <a:ext cx="14732000" cy="635000"/>
+            <a:off x="508000" y="1460500"/>
+            <a:ext cx="14732000" cy="533400"/>
           </a:xfrm>
           <a:prstGeom prst="rect">
             <a:avLst/>
@@ -5584,17 +5024,17 @@
               <a:buNone/>
             </a:pPr>
             <a:r>
-              <a:rPr lang="en-US" altLang="en-US" sz="2300" dirty="0">
-                <a:solidFill>
-                  <a:srgbClr val="3C4043"/>
-                </a:solidFill>
-                <a:latin typeface="Inter" pitchFamily="34" charset="0"/>
-                <a:ea typeface="Inter" pitchFamily="34" charset="-122"/>
-                <a:cs typeface="Inter" pitchFamily="34" charset="-120"/>
-              </a:rPr>
-              <a:t>Use a de-identified writing sample to color-code what is visible. The routine helps students identify what each sentence is doing and check whether an evidence-based explanation includes the thinking the task requires.</a:t>
-            </a:r>
-            <a:endParaRPr lang="en-US" sz="2300" dirty="0"/>
+              <a:rPr lang="en-US" altLang="en-US" sz="2400" dirty="0">
+                <a:solidFill>
+                  <a:srgbClr val="343A40"/>
+                </a:solidFill>
+                <a:latin typeface="Inter" pitchFamily="34" charset="0"/>
+                <a:ea typeface="Inter" pitchFamily="34" charset="-122"/>
+                <a:cs typeface="Inter" pitchFamily="34" charset="-120"/>
+              </a:rPr>
+              <a:t>After students write, have them color-code what is already in their response. Do not color-code what is missing.</a:t>
+            </a:r>
+            <a:endParaRPr lang="en-US" sz="2400" dirty="0"/>
           </a:p>
         </p:txBody>
       </p:sp>
@@ -5606,18 +5046,18 @@
         </p:nvSpPr>
         <p:spPr>
           <a:xfrm>
-            <a:off x="508000" y="2730500"/>
-            <a:ext cx="3530600" cy="3962400"/>
-          </a:xfrm>
-          <a:prstGeom prst="rect">
-            <a:avLst/>
-          </a:prstGeom>
-          <a:solidFill>
-            <a:srgbClr val="EAF5EC"/>
-          </a:solidFill>
-          <a:ln w="25400">
+            <a:off x="698500" y="2921000"/>
+            <a:ext cx="4508500" cy="3492500"/>
+          </a:xfrm>
+          <a:prstGeom prst="rect">
+            <a:avLst/>
+          </a:prstGeom>
+          <a:solidFill>
+            <a:srgbClr val="FCEAF2"/>
+          </a:solidFill>
+          <a:ln w="38100">
             <a:solidFill>
-              <a:srgbClr val="238636"/>
+              <a:srgbClr val="D84A8B"/>
             </a:solidFill>
             <a:prstDash val="solid"/>
           </a:ln>
@@ -5625,14 +5065,64 @@
       </p:sp>
       <p:sp>
         <p:nvSpPr>
-          <p:cNvPr id="7" name="claim"/>
-          <p:cNvSpPr/>
-          <p:nvPr/>
-        </p:nvSpPr>
-        <p:spPr>
-          <a:xfrm>
-            <a:off x="838200" y="3111500"/>
-            <a:ext cx="2921000" cy="2857500"/>
+          <p:cNvPr id="7" name="literacy-shape-6"/>
+          <p:cNvSpPr/>
+          <p:nvPr/>
+        </p:nvSpPr>
+        <p:spPr>
+          <a:xfrm>
+            <a:off x="5867400" y="2921000"/>
+            <a:ext cx="4508500" cy="3492500"/>
+          </a:xfrm>
+          <a:prstGeom prst="rect">
+            <a:avLst/>
+          </a:prstGeom>
+          <a:solidFill>
+            <a:srgbClr val="E9F7EC"/>
+          </a:solidFill>
+          <a:ln w="38100">
+            <a:solidFill>
+              <a:srgbClr val="208B3A"/>
+            </a:solidFill>
+            <a:prstDash val="solid"/>
+          </a:ln>
+        </p:spPr>
+      </p:sp>
+      <p:sp>
+        <p:nvSpPr>
+          <p:cNvPr id="8" name="literacy-shape-7"/>
+          <p:cNvSpPr/>
+          <p:nvPr/>
+        </p:nvSpPr>
+        <p:spPr>
+          <a:xfrm>
+            <a:off x="11049000" y="2921000"/>
+            <a:ext cx="4508500" cy="3492500"/>
+          </a:xfrm>
+          <a:prstGeom prst="rect">
+            <a:avLst/>
+          </a:prstGeom>
+          <a:solidFill>
+            <a:srgbClr val="EAF1FF"/>
+          </a:solidFill>
+          <a:ln w="38100">
+            <a:solidFill>
+              <a:srgbClr val="2563EB"/>
+            </a:solidFill>
+            <a:prstDash val="solid"/>
+          </a:ln>
+        </p:spPr>
+      </p:sp>
+      <p:sp>
+        <p:nvSpPr>
+          <p:cNvPr id="9" name="claim"/>
+          <p:cNvSpPr/>
+          <p:nvPr/>
+        </p:nvSpPr>
+        <p:spPr>
+          <a:xfrm>
+            <a:off x="1079500" y="3403600"/>
+            <a:ext cx="3746500" cy="2286000"/>
           </a:xfrm>
           <a:prstGeom prst="rect">
             <a:avLst/>
@@ -5644,29 +5134,52 @@
           <a:bodyPr wrap="square" lIns="0" tIns="0" rIns="0" bIns="0" rtlCol="0" anchor="t"/>
           <a:lstStyle/>
           <a:p>
-            <a:pPr algn="l" indent="0" marL="0">
+            <a:pPr algn="ctr" indent="0" marL="0">
               <a:lnSpc>
-                <a:spcPts val="3000"/>
+                <a:spcPts val="3416"/>
               </a:lnSpc>
               <a:buNone/>
             </a:pPr>
             <a:r>
-              <a:rPr lang="en-US" altLang="en-US" sz="2400" b="1" dirty="0">
-                <a:solidFill>
-                  <a:srgbClr val="238636"/>
-                </a:solidFill>
-                <a:latin typeface="Inter" pitchFamily="34" charset="0"/>
-                <a:ea typeface="Inter" pitchFamily="34" charset="-122"/>
-                <a:cs typeface="Inter" pitchFamily="34" charset="-120"/>
-              </a:rPr>
-              <a:t>CLAIM</a:t>
-            </a:r>
-            <a:endParaRPr lang="en-US" sz="2100" dirty="0"/>
-          </a:p>
-          <a:p>
-            <a:pPr algn="l" indent="0" marL="0">
+              <a:rPr lang="en-US" altLang="en-US" sz="2800" b="1" dirty="0">
+                <a:solidFill>
+                  <a:srgbClr val="D84A8B"/>
+                </a:solidFill>
+                <a:latin typeface="Inter" pitchFamily="34" charset="0"/>
+                <a:ea typeface="Inter" pitchFamily="34" charset="-122"/>
+                <a:cs typeface="Inter" pitchFamily="34" charset="-120"/>
+              </a:rPr>
+              <a:t>CLAIM = PINK</a:t>
+            </a:r>
+            <a:endParaRPr lang="en-US" sz="2500" dirty="0"/>
+          </a:p>
+          <a:p>
+            <a:pPr algn="ctr" indent="0" marL="0">
               <a:lnSpc>
-                <a:spcPts val="2625"/>
+                <a:spcPts val="3050"/>
+              </a:lnSpc>
+              <a:spcBef>
+                <a:spcPts val="1800"/>
+              </a:spcBef>
+              <a:buNone/>
+            </a:pPr>
+            <a:r>
+              <a:rPr lang="en-US" altLang="en-US" sz="2500" b="1" dirty="0">
+                <a:solidFill>
+                  <a:srgbClr val="343A40"/>
+                </a:solidFill>
+                <a:latin typeface="Inter" pitchFamily="34" charset="0"/>
+                <a:ea typeface="Inter" pitchFamily="34" charset="-122"/>
+                <a:cs typeface="Inter" pitchFamily="34" charset="-120"/>
+              </a:rPr>
+              <a:t>My answer is…</a:t>
+            </a:r>
+            <a:endParaRPr lang="en-US" sz="2500" dirty="0"/>
+          </a:p>
+          <a:p>
+            <a:pPr algn="ctr" indent="0" marL="0">
+              <a:lnSpc>
+                <a:spcPts val="3050"/>
               </a:lnSpc>
               <a:spcBef>
                 <a:spcPts val="1200"/>
@@ -5674,55 +5187,30 @@
               <a:buNone/>
             </a:pPr>
             <a:r>
-              <a:rPr lang="en-US" altLang="en-US" sz="2100" dirty="0">
-                <a:solidFill>
-                  <a:srgbClr val="3C4043"/>
-                </a:solidFill>
-                <a:latin typeface="Inter" pitchFamily="34" charset="0"/>
-                <a:ea typeface="Inter" pitchFamily="34" charset="-122"/>
-                <a:cs typeface="Inter" pitchFamily="34" charset="-120"/>
-              </a:rPr>
-              <a:t>The answer, prediction, conclusion, or explanation that directly responds to the science question.</a:t>
-            </a:r>
-            <a:endParaRPr lang="en-US" sz="2100" dirty="0"/>
-          </a:p>
-        </p:txBody>
-      </p:sp>
-      <p:sp>
-        <p:nvSpPr>
-          <p:cNvPr id="8" name="literacy-shape-7"/>
-          <p:cNvSpPr/>
-          <p:nvPr/>
-        </p:nvSpPr>
-        <p:spPr>
-          <a:xfrm>
-            <a:off x="4292600" y="2730500"/>
-            <a:ext cx="3530600" cy="3962400"/>
-          </a:xfrm>
-          <a:prstGeom prst="rect">
-            <a:avLst/>
-          </a:prstGeom>
-          <a:solidFill>
-            <a:srgbClr val="EAF2FC"/>
-          </a:solidFill>
-          <a:ln w="25400">
-            <a:solidFill>
-              <a:srgbClr val="1D4ED8"/>
-            </a:solidFill>
-            <a:prstDash val="solid"/>
-          </a:ln>
-        </p:spPr>
-      </p:sp>
-      <p:sp>
-        <p:nvSpPr>
-          <p:cNvPr id="9" name="evidence"/>
-          <p:cNvSpPr/>
-          <p:nvPr/>
-        </p:nvSpPr>
-        <p:spPr>
-          <a:xfrm>
-            <a:off x="4622800" y="3111500"/>
-            <a:ext cx="2921000" cy="2857500"/>
+              <a:rPr lang="en-US" altLang="en-US" sz="2500" dirty="0">
+                <a:solidFill>
+                  <a:srgbClr val="343A40"/>
+                </a:solidFill>
+                <a:latin typeface="Inter" pitchFamily="34" charset="0"/>
+                <a:ea typeface="Inter" pitchFamily="34" charset="-122"/>
+                <a:cs typeface="Inter" pitchFamily="34" charset="-120"/>
+              </a:rPr>
+              <a:t>The answer, conclusion, or prediction.</a:t>
+            </a:r>
+            <a:endParaRPr lang="en-US" sz="2500" dirty="0"/>
+          </a:p>
+        </p:txBody>
+      </p:sp>
+      <p:sp>
+        <p:nvSpPr>
+          <p:cNvPr id="10" name="evidence"/>
+          <p:cNvSpPr/>
+          <p:nvPr/>
+        </p:nvSpPr>
+        <p:spPr>
+          <a:xfrm>
+            <a:off x="6248400" y="3403600"/>
+            <a:ext cx="3746500" cy="2286000"/>
           </a:xfrm>
           <a:prstGeom prst="rect">
             <a:avLst/>
@@ -5734,29 +5222,52 @@
           <a:bodyPr wrap="square" lIns="0" tIns="0" rIns="0" bIns="0" rtlCol="0" anchor="t"/>
           <a:lstStyle/>
           <a:p>
-            <a:pPr algn="l" indent="0" marL="0">
+            <a:pPr algn="ctr" indent="0" marL="0">
               <a:lnSpc>
-                <a:spcPts val="3000"/>
+                <a:spcPts val="3416"/>
               </a:lnSpc>
               <a:buNone/>
             </a:pPr>
             <a:r>
-              <a:rPr lang="en-US" altLang="en-US" sz="2400" b="1" dirty="0">
-                <a:solidFill>
-                  <a:srgbClr val="1D4ED8"/>
-                </a:solidFill>
-                <a:latin typeface="Inter" pitchFamily="34" charset="0"/>
-                <a:ea typeface="Inter" pitchFamily="34" charset="-122"/>
-                <a:cs typeface="Inter" pitchFamily="34" charset="-120"/>
-              </a:rPr>
-              <a:t>EVIDENCE</a:t>
-            </a:r>
-            <a:endParaRPr lang="en-US" sz="2100" dirty="0"/>
-          </a:p>
-          <a:p>
-            <a:pPr algn="l" indent="0" marL="0">
+              <a:rPr lang="en-US" altLang="en-US" sz="2800" b="1" dirty="0">
+                <a:solidFill>
+                  <a:srgbClr val="208B3A"/>
+                </a:solidFill>
+                <a:latin typeface="Inter" pitchFamily="34" charset="0"/>
+                <a:ea typeface="Inter" pitchFamily="34" charset="-122"/>
+                <a:cs typeface="Inter" pitchFamily="34" charset="-120"/>
+              </a:rPr>
+              <a:t>EVIDENCE = GREEN</a:t>
+            </a:r>
+            <a:endParaRPr lang="en-US" sz="2500" dirty="0"/>
+          </a:p>
+          <a:p>
+            <a:pPr algn="ctr" indent="0" marL="0">
               <a:lnSpc>
-                <a:spcPts val="2625"/>
+                <a:spcPts val="3050"/>
+              </a:lnSpc>
+              <a:spcBef>
+                <a:spcPts val="1800"/>
+              </a:spcBef>
+              <a:buNone/>
+            </a:pPr>
+            <a:r>
+              <a:rPr lang="en-US" altLang="en-US" sz="2500" b="1" dirty="0">
+                <a:solidFill>
+                  <a:srgbClr val="343A40"/>
+                </a:solidFill>
+                <a:latin typeface="Inter" pitchFamily="34" charset="0"/>
+                <a:ea typeface="Inter" pitchFamily="34" charset="-122"/>
+                <a:cs typeface="Inter" pitchFamily="34" charset="-120"/>
+              </a:rPr>
+              <a:t>The source shows…</a:t>
+            </a:r>
+            <a:endParaRPr lang="en-US" sz="2500" dirty="0"/>
+          </a:p>
+          <a:p>
+            <a:pPr algn="ctr" indent="0" marL="0">
+              <a:lnSpc>
+                <a:spcPts val="3050"/>
               </a:lnSpc>
               <a:spcBef>
                 <a:spcPts val="1200"/>
@@ -5764,44 +5275,19 @@
               <a:buNone/>
             </a:pPr>
             <a:r>
-              <a:rPr lang="en-US" altLang="en-US" sz="2100" dirty="0">
-                <a:solidFill>
-                  <a:srgbClr val="3C4043"/>
-                </a:solidFill>
-                <a:latin typeface="Inter" pitchFamily="34" charset="0"/>
-                <a:ea typeface="Inter" pitchFamily="34" charset="-122"/>
-                <a:cs typeface="Inter" pitchFamily="34" charset="-120"/>
-              </a:rPr>
-              <a:t>Accurate, relevant details from a text, graph, data set, observation, diagram, model, or investigation.</a:t>
-            </a:r>
-            <a:endParaRPr lang="en-US" sz="2100" dirty="0"/>
-          </a:p>
-        </p:txBody>
-      </p:sp>
-      <p:sp>
-        <p:nvSpPr>
-          <p:cNvPr id="10" name="literacy-shape-9"/>
-          <p:cNvSpPr/>
-          <p:nvPr/>
-        </p:nvSpPr>
-        <p:spPr>
-          <a:xfrm>
-            <a:off x="8077200" y="2730500"/>
-            <a:ext cx="3530600" cy="3962400"/>
-          </a:xfrm>
-          <a:prstGeom prst="rect">
-            <a:avLst/>
-          </a:prstGeom>
-          <a:solidFill>
-            <a:srgbClr val="FFF1E7"/>
-          </a:solidFill>
-          <a:ln w="25400">
-            <a:solidFill>
-              <a:srgbClr val="C56B00"/>
-            </a:solidFill>
-            <a:prstDash val="solid"/>
-          </a:ln>
-        </p:spPr>
+              <a:rPr lang="en-US" altLang="en-US" sz="2500" dirty="0">
+                <a:solidFill>
+                  <a:srgbClr val="343A40"/>
+                </a:solidFill>
+                <a:latin typeface="Inter" pitchFamily="34" charset="0"/>
+                <a:ea typeface="Inter" pitchFamily="34" charset="-122"/>
+                <a:cs typeface="Inter" pitchFamily="34" charset="-120"/>
+              </a:rPr>
+              <a:t>Facts, data, observations, or details.</a:t>
+            </a:r>
+            <a:endParaRPr lang="en-US" sz="2500" dirty="0"/>
+          </a:p>
+        </p:txBody>
       </p:sp>
       <p:sp>
         <p:nvSpPr>
@@ -5811,8 +5297,8 @@
         </p:nvSpPr>
         <p:spPr>
           <a:xfrm>
-            <a:off x="8407400" y="3111500"/>
-            <a:ext cx="2921000" cy="2857500"/>
+            <a:off x="11430000" y="3403600"/>
+            <a:ext cx="3746500" cy="2286000"/>
           </a:xfrm>
           <a:prstGeom prst="rect">
             <a:avLst/>
@@ -5824,29 +5310,52 @@
           <a:bodyPr wrap="square" lIns="0" tIns="0" rIns="0" bIns="0" rtlCol="0" anchor="t"/>
           <a:lstStyle/>
           <a:p>
-            <a:pPr algn="l" indent="0" marL="0">
+            <a:pPr algn="ctr" indent="0" marL="0">
               <a:lnSpc>
-                <a:spcPts val="3000"/>
+                <a:spcPts val="3416"/>
               </a:lnSpc>
               <a:buNone/>
             </a:pPr>
             <a:r>
-              <a:rPr lang="en-US" altLang="en-US" sz="2400" b="1" dirty="0">
-                <a:solidFill>
-                  <a:srgbClr val="C56B00"/>
-                </a:solidFill>
-                <a:latin typeface="Inter" pitchFamily="34" charset="0"/>
-                <a:ea typeface="Inter" pitchFamily="34" charset="-122"/>
-                <a:cs typeface="Inter" pitchFamily="34" charset="-120"/>
-              </a:rPr>
-              <a:t>REASONING</a:t>
-            </a:r>
-            <a:endParaRPr lang="en-US" sz="2100" dirty="0"/>
-          </a:p>
-          <a:p>
-            <a:pPr algn="l" indent="0" marL="0">
+              <a:rPr lang="en-US" altLang="en-US" sz="2800" b="1" dirty="0">
+                <a:solidFill>
+                  <a:srgbClr val="2563EB"/>
+                </a:solidFill>
+                <a:latin typeface="Inter" pitchFamily="34" charset="0"/>
+                <a:ea typeface="Inter" pitchFamily="34" charset="-122"/>
+                <a:cs typeface="Inter" pitchFamily="34" charset="-120"/>
+              </a:rPr>
+              <a:t>REASONING = BLUE</a:t>
+            </a:r>
+            <a:endParaRPr lang="en-US" sz="2500" dirty="0"/>
+          </a:p>
+          <a:p>
+            <a:pPr algn="ctr" indent="0" marL="0">
               <a:lnSpc>
-                <a:spcPts val="2625"/>
+                <a:spcPts val="3050"/>
+              </a:lnSpc>
+              <a:spcBef>
+                <a:spcPts val="1800"/>
+              </a:spcBef>
+              <a:buNone/>
+            </a:pPr>
+            <a:r>
+              <a:rPr lang="en-US" altLang="en-US" sz="2500" b="1" dirty="0">
+                <a:solidFill>
+                  <a:srgbClr val="343A40"/>
+                </a:solidFill>
+                <a:latin typeface="Inter" pitchFamily="34" charset="0"/>
+                <a:ea typeface="Inter" pitchFamily="34" charset="-122"/>
+                <a:cs typeface="Inter" pitchFamily="34" charset="-120"/>
+              </a:rPr>
+              <a:t>This matters because…</a:t>
+            </a:r>
+            <a:endParaRPr lang="en-US" sz="2500" dirty="0"/>
+          </a:p>
+          <a:p>
+            <a:pPr algn="ctr" indent="0" marL="0">
+              <a:lnSpc>
+                <a:spcPts val="3050"/>
               </a:lnSpc>
               <a:spcBef>
                 <a:spcPts val="1200"/>
@@ -5854,15 +5363,85 @@
               <a:buNone/>
             </a:pPr>
             <a:r>
+              <a:rPr lang="en-US" altLang="en-US" sz="2500" dirty="0">
+                <a:solidFill>
+                  <a:srgbClr val="343A40"/>
+                </a:solidFill>
+                <a:latin typeface="Inter" pitchFamily="34" charset="0"/>
+                <a:ea typeface="Inter" pitchFamily="34" charset="-122"/>
+                <a:cs typeface="Inter" pitchFamily="34" charset="-120"/>
+              </a:rPr>
+              <a:t>Why the evidence supports the claim.</a:t>
+            </a:r>
+            <a:endParaRPr lang="en-US" sz="2500" dirty="0"/>
+          </a:p>
+        </p:txBody>
+      </p:sp>
+      <p:sp>
+        <p:nvSpPr>
+          <p:cNvPr id="12" name="literacy-shape-11"/>
+          <p:cNvSpPr/>
+          <p:nvPr/>
+        </p:nvSpPr>
+        <p:spPr>
+          <a:xfrm>
+            <a:off x="698500" y="7048500"/>
+            <a:ext cx="14859000" cy="787400"/>
+          </a:xfrm>
+          <a:prstGeom prst="rect">
+            <a:avLst/>
+          </a:prstGeom>
+          <a:solidFill>
+            <a:srgbClr val="202124"/>
+          </a:solidFill>
+          <a:ln/>
+        </p:spPr>
+      </p:sp>
+      <p:sp>
+        <p:nvSpPr>
+          <p:cNvPr id="13" name="check"/>
+          <p:cNvSpPr/>
+          <p:nvPr/>
+        </p:nvSpPr>
+        <p:spPr>
+          <a:xfrm>
+            <a:off x="1079500" y="7264400"/>
+            <a:ext cx="14097000" cy="355600"/>
+          </a:xfrm>
+          <a:prstGeom prst="rect">
+            <a:avLst/>
+          </a:prstGeom>
+          <a:noFill/>
+          <a:ln/>
+        </p:spPr>
+        <p:txBody>
+          <a:bodyPr wrap="square" lIns="0" tIns="0" rIns="0" bIns="0" rtlCol="0" anchor="t"/>
+          <a:lstStyle/>
+          <a:p>
+            <a:pPr algn="ctr" indent="0" marL="0">
+              <a:buNone/>
+            </a:pPr>
+            <a:r>
+              <a:rPr lang="en-US" altLang="en-US" sz="2100" b="1" dirty="0">
+                <a:solidFill>
+                  <a:srgbClr val="F6B4BA"/>
+                </a:solidFill>
+                <a:latin typeface="Inter" pitchFamily="34" charset="0"/>
+                <a:ea typeface="Inter" pitchFamily="34" charset="-122"/>
+                <a:cs typeface="Inter" pitchFamily="34" charset="-120"/>
+              </a:rPr>
+              <a:t>Student check:</a:t>
+            </a:r>
+            <a:r>
               <a:rPr lang="en-US" altLang="en-US" sz="2100" dirty="0">
                 <a:solidFill>
-                  <a:srgbClr val="3C4043"/>
-                </a:solidFill>
-                <a:latin typeface="Inter" pitchFamily="34" charset="0"/>
-                <a:ea typeface="Inter" pitchFamily="34" charset="-122"/>
-                <a:cs typeface="Inter" pitchFamily="34" charset="-120"/>
-              </a:rPr>
-              <a:t>The scientific explanation of why the evidence supports the claim, using the relevant science idea.</a:t>
+                  <a:srgbClr val="FFFFFF"/>
+                </a:solidFill>
+                <a:latin typeface="Inter" pitchFamily="34" charset="0"/>
+                <a:ea typeface="Inter" pitchFamily="34" charset="-122"/>
+                <a:cs typeface="Inter" pitchFamily="34" charset="-120"/>
+              </a:rPr>
+              <a:t> “What color is missing or needs to be stronger?”</a:t>
             </a:r>
             <a:endParaRPr lang="en-US" sz="2100" dirty="0"/>
           </a:p>
@@ -5870,167 +5449,7 @@
       </p:sp>
       <p:sp>
         <p:nvSpPr>
-          <p:cNvPr id="12" name="literacy-shape-11"/>
-          <p:cNvSpPr/>
-          <p:nvPr/>
-        </p:nvSpPr>
-        <p:spPr>
-          <a:xfrm>
-            <a:off x="11861800" y="2730500"/>
-            <a:ext cx="3886200" cy="3962400"/>
-          </a:xfrm>
-          <a:prstGeom prst="rect">
-            <a:avLst/>
-          </a:prstGeom>
-          <a:solidFill>
-            <a:srgbClr val="F3ECFB"/>
-          </a:solidFill>
-          <a:ln w="25400">
-            <a:solidFill>
-              <a:srgbClr val="7C3AED"/>
-            </a:solidFill>
-            <a:prstDash val="solid"/>
-          </a:ln>
-        </p:spPr>
-      </p:sp>
-      <p:sp>
-        <p:nvSpPr>
-          <p:cNvPr id="13" name="links"/>
-          <p:cNvSpPr/>
-          <p:nvPr/>
-        </p:nvSpPr>
-        <p:spPr>
-          <a:xfrm>
-            <a:off x="12192000" y="3111500"/>
-            <a:ext cx="3276600" cy="2857500"/>
-          </a:xfrm>
-          <a:prstGeom prst="rect">
-            <a:avLst/>
-          </a:prstGeom>
-          <a:noFill/>
-          <a:ln/>
-        </p:spPr>
-        <p:txBody>
-          <a:bodyPr wrap="square" lIns="0" tIns="0" rIns="0" bIns="0" rtlCol="0" anchor="t"/>
-          <a:lstStyle/>
-          <a:p>
-            <a:pPr algn="l" indent="0" marL="0">
-              <a:lnSpc>
-                <a:spcPts val="3000"/>
-              </a:lnSpc>
-              <a:buNone/>
-            </a:pPr>
-            <a:r>
-              <a:rPr lang="en-US" altLang="en-US" sz="2400" b="1" dirty="0">
-                <a:solidFill>
-                  <a:srgbClr val="7C3AED"/>
-                </a:solidFill>
-                <a:latin typeface="Inter" pitchFamily="34" charset="0"/>
-                <a:ea typeface="Inter" pitchFamily="34" charset="-122"/>
-                <a:cs typeface="Inter" pitchFamily="34" charset="-120"/>
-              </a:rPr>
-              <a:t>LINKS + TRANSITIONS</a:t>
-            </a:r>
-            <a:endParaRPr lang="en-US" sz="2100" dirty="0"/>
-          </a:p>
-          <a:p>
-            <a:pPr algn="l" indent="0" marL="0">
-              <a:lnSpc>
-                <a:spcPts val="2625"/>
-              </a:lnSpc>
-              <a:spcBef>
-                <a:spcPts val="1200"/>
-              </a:spcBef>
-              <a:buNone/>
-            </a:pPr>
-            <a:r>
-              <a:rPr lang="en-US" altLang="en-US" sz="2100" dirty="0">
-                <a:solidFill>
-                  <a:srgbClr val="3C4043"/>
-                </a:solidFill>
-                <a:latin typeface="Inter" pitchFamily="34" charset="0"/>
-                <a:ea typeface="Inter" pitchFamily="34" charset="-122"/>
-                <a:cs typeface="Inter" pitchFamily="34" charset="-120"/>
-              </a:rPr>
-              <a:t>Words and sentences that make the logic clear: therefore, because, this shows, as a result.</a:t>
-            </a:r>
-            <a:endParaRPr lang="en-US" sz="2100" dirty="0"/>
-          </a:p>
-        </p:txBody>
-      </p:sp>
-      <p:sp>
-        <p:nvSpPr>
-          <p:cNvPr id="14" name="literacy-shape-13"/>
-          <p:cNvSpPr/>
-          <p:nvPr/>
-        </p:nvSpPr>
-        <p:spPr>
-          <a:xfrm>
-            <a:off x="508000" y="7239000"/>
-            <a:ext cx="15240000" cy="673100"/>
-          </a:xfrm>
-          <a:prstGeom prst="rect">
-            <a:avLst/>
-          </a:prstGeom>
-          <a:solidFill>
-            <a:srgbClr val="202124"/>
-          </a:solidFill>
-          <a:ln/>
-        </p:spPr>
-      </p:sp>
-      <p:sp>
-        <p:nvSpPr>
-          <p:cNvPr id="15" name="note"/>
-          <p:cNvSpPr/>
-          <p:nvPr/>
-        </p:nvSpPr>
-        <p:spPr>
-          <a:xfrm>
-            <a:off x="838200" y="7416800"/>
-            <a:ext cx="14478000" cy="330200"/>
-          </a:xfrm>
-          <a:prstGeom prst="rect">
-            <a:avLst/>
-          </a:prstGeom>
-          <a:noFill/>
-          <a:ln/>
-        </p:spPr>
-        <p:txBody>
-          <a:bodyPr wrap="square" lIns="0" tIns="0" rIns="0" bIns="0" rtlCol="0" anchor="t"/>
-          <a:lstStyle/>
-          <a:p>
-            <a:pPr algn="ctr" indent="0" marL="0">
-              <a:buNone/>
-            </a:pPr>
-            <a:r>
-              <a:rPr lang="en-US" altLang="en-US" sz="2000" b="1" dirty="0">
-                <a:solidFill>
-                  <a:srgbClr val="F6B4BA"/>
-                </a:solidFill>
-                <a:latin typeface="Inter" pitchFamily="34" charset="0"/>
-                <a:ea typeface="Inter" pitchFamily="34" charset="-122"/>
-                <a:cs typeface="Inter" pitchFamily="34" charset="-120"/>
-              </a:rPr>
-              <a:t>Student check:</a:t>
-            </a:r>
-            <a:r>
-              <a:rPr lang="en-US" altLang="en-US" sz="2000" dirty="0">
-                <a:solidFill>
-                  <a:srgbClr val="FFFFFF"/>
-                </a:solidFill>
-                <a:latin typeface="Inter" pitchFamily="34" charset="0"/>
-                <a:ea typeface="Inter" pitchFamily="34" charset="-122"/>
-                <a:cs typeface="Inter" pitchFamily="34" charset="-120"/>
-              </a:rPr>
-              <a:t> “Highlight or label each part. Which part is missing, weak, or not yet connected to the science idea?”</a:t>
-            </a:r>
-            <a:endParaRPr lang="en-US" sz="2000" dirty="0"/>
-          </a:p>
-        </p:txBody>
-      </p:sp>
-      <p:sp>
-        <p:nvSpPr>
-          <p:cNvPr id="16" name="page"/>
+          <p:cNvPr id="14" name="page"/>
           <p:cNvSpPr/>
           <p:nvPr/>
         </p:nvSpPr>
@@ -6055,7 +5474,7 @@
             <a:r>
               <a:rPr lang="en-US" altLang="en-US" sz="1300" dirty="0">
                 <a:solidFill>
-                  <a:srgbClr val="3C4043"/>
+                  <a:srgbClr val="343A40"/>
                 </a:solidFill>
                 <a:latin typeface="Inter" pitchFamily="34" charset="0"/>
                 <a:ea typeface="Inter" pitchFamily="34" charset="-122"/>
@@ -6069,7 +5488,7 @@
       </p:sp>
       <p:sp>
         <p:nvSpPr>
-          <p:cNvPr id="17" name="literacy-shape-16"/>
+          <p:cNvPr id="15" name="literacy-shape-14"/>
           <p:cNvSpPr/>
           <p:nvPr/>
         </p:nvSpPr>
@@ -6172,7 +5591,7 @@
                 <a:ea typeface="Inter" pitchFamily="34" charset="-122"/>
                 <a:cs typeface="Inter" pitchFamily="34" charset="-120"/>
               </a:rPr>
-              <a:t>Calibrate Feedback That Prompts Revision</a:t>
+              <a:t>Feedback Should Tell Students What to Do Next</a:t>
             </a:r>
             <a:endParaRPr lang="en-US" sz="3000" dirty="0"/>
           </a:p>
@@ -6225,8 +5644,8 @@
         </p:nvSpPr>
         <p:spPr>
           <a:xfrm>
-            <a:off x="508000" y="1397000"/>
-            <a:ext cx="14732000" cy="635000"/>
+            <a:off x="508000" y="1460500"/>
+            <a:ext cx="14732000" cy="533400"/>
           </a:xfrm>
           <a:prstGeom prst="rect">
             <a:avLst/>
@@ -6242,17 +5661,17 @@
               <a:buNone/>
             </a:pPr>
             <a:r>
-              <a:rPr lang="en-US" altLang="en-US" sz="2300" dirty="0">
-                <a:solidFill>
-                  <a:srgbClr val="3C4043"/>
-                </a:solidFill>
-                <a:latin typeface="Inter" pitchFamily="34" charset="0"/>
-                <a:ea typeface="Inter" pitchFamily="34" charset="-122"/>
-                <a:cs typeface="Inter" pitchFamily="34" charset="-120"/>
-              </a:rPr>
-              <a:t>Use a writing sample to agree on one student action after feedback. Model the routine, then use a prompt that sends students back to the source and their own explanation without completing the thinking.</a:t>
-            </a:r>
-            <a:endParaRPr lang="en-US" sz="2300" dirty="0"/>
+              <a:rPr lang="en-US" altLang="en-US" sz="2400" dirty="0">
+                <a:solidFill>
+                  <a:srgbClr val="343A40"/>
+                </a:solidFill>
+                <a:latin typeface="Inter" pitchFamily="34" charset="0"/>
+                <a:ea typeface="Inter" pitchFamily="34" charset="-122"/>
+                <a:cs typeface="Inter" pitchFamily="34" charset="-120"/>
+              </a:rPr>
+              <a:t>Choose one part of the response to improve. Then give students a clear action—not the answer.</a:t>
+            </a:r>
+            <a:endParaRPr lang="en-US" sz="2400" dirty="0"/>
           </a:p>
         </p:txBody>
       </p:sp>
@@ -6264,18 +5683,18 @@
         </p:nvSpPr>
         <p:spPr>
           <a:xfrm>
-            <a:off x="635000" y="2984500"/>
-            <a:ext cx="3048000" cy="1905000"/>
-          </a:xfrm>
-          <a:prstGeom prst="rect">
-            <a:avLst/>
-          </a:prstGeom>
-          <a:solidFill>
-            <a:srgbClr val="F3F4F6"/>
+            <a:off x="952500" y="2921000"/>
+            <a:ext cx="4318000" cy="3048000"/>
+          </a:xfrm>
+          <a:prstGeom prst="rect">
+            <a:avLst/>
+          </a:prstGeom>
+          <a:solidFill>
+            <a:srgbClr val="F5F6F8"/>
           </a:solidFill>
           <a:ln w="12700">
             <a:solidFill>
-              <a:srgbClr val="D1D5DB"/>
+              <a:srgbClr val="D4D8DE"/>
             </a:solidFill>
             <a:prstDash val="solid"/>
           </a:ln>
@@ -6289,18 +5708,18 @@
         </p:nvSpPr>
         <p:spPr>
           <a:xfrm>
-            <a:off x="4635500" y="2984500"/>
-            <a:ext cx="3048000" cy="1905000"/>
-          </a:xfrm>
-          <a:prstGeom prst="rect">
-            <a:avLst/>
-          </a:prstGeom>
-          <a:solidFill>
-            <a:srgbClr val="F3F4F6"/>
+            <a:off x="5969000" y="2921000"/>
+            <a:ext cx="4318000" cy="3048000"/>
+          </a:xfrm>
+          <a:prstGeom prst="rect">
+            <a:avLst/>
+          </a:prstGeom>
+          <a:solidFill>
+            <a:srgbClr val="F5F6F8"/>
           </a:solidFill>
           <a:ln w="12700">
             <a:solidFill>
-              <a:srgbClr val="D1D5DB"/>
+              <a:srgbClr val="D4D8DE"/>
             </a:solidFill>
             <a:prstDash val="solid"/>
           </a:ln>
@@ -6314,33 +5733,8 @@
         </p:nvSpPr>
         <p:spPr>
           <a:xfrm>
-            <a:off x="8636000" y="2984500"/>
-            <a:ext cx="3048000" cy="1905000"/>
-          </a:xfrm>
-          <a:prstGeom prst="rect">
-            <a:avLst/>
-          </a:prstGeom>
-          <a:solidFill>
-            <a:srgbClr val="F3F4F6"/>
-          </a:solidFill>
-          <a:ln w="12700">
-            <a:solidFill>
-              <a:srgbClr val="D1D5DB"/>
-            </a:solidFill>
-            <a:prstDash val="solid"/>
-          </a:ln>
-        </p:spPr>
-      </p:sp>
-      <p:sp>
-        <p:nvSpPr>
-          <p:cNvPr id="9" name="feedback-shape-8"/>
-          <p:cNvSpPr/>
-          <p:nvPr/>
-        </p:nvSpPr>
-        <p:spPr>
-          <a:xfrm>
-            <a:off x="12636500" y="2984500"/>
-            <a:ext cx="2984500" cy="1905000"/>
+            <a:off x="10985500" y="2921000"/>
+            <a:ext cx="4318000" cy="3048000"/>
           </a:xfrm>
           <a:prstGeom prst="rect">
             <a:avLst/>
@@ -6358,14 +5752,14 @@
       </p:sp>
       <p:sp>
         <p:nvSpPr>
-          <p:cNvPr id="10" name="s1"/>
-          <p:cNvSpPr/>
-          <p:nvPr/>
-        </p:nvSpPr>
-        <p:spPr>
-          <a:xfrm>
-            <a:off x="914400" y="3340100"/>
-            <a:ext cx="2489200" cy="1219200"/>
+          <p:cNvPr id="9" name="notice"/>
+          <p:cNvSpPr/>
+          <p:nvPr/>
+        </p:nvSpPr>
+        <p:spPr>
+          <a:xfrm>
+            <a:off x="1308100" y="3429000"/>
+            <a:ext cx="3606800" cy="1841500"/>
           </a:xfrm>
           <a:prstGeom prst="rect">
             <a:avLst/>
@@ -6374,14 +5768,17 @@
           <a:ln/>
         </p:spPr>
         <p:txBody>
-          <a:bodyPr wrap="square" lIns="0" tIns="0" rIns="0" bIns="0" rtlCol="0" anchor="ctr"/>
+          <a:bodyPr wrap="square" lIns="0" tIns="0" rIns="0" bIns="0" rtlCol="0" anchor="t"/>
           <a:lstStyle/>
           <a:p>
             <a:pPr algn="ctr" indent="0" marL="0">
-              <a:buNone/>
-            </a:pPr>
-            <a:r>
-              <a:rPr lang="en-US" altLang="en-US" sz="2000" b="1" dirty="0">
+              <a:lnSpc>
+                <a:spcPts val="2232"/>
+              </a:lnSpc>
+              <a:buNone/>
+            </a:pPr>
+            <a:r>
+              <a:rPr lang="en-US" altLang="en-US" sz="1800" b="1" dirty="0">
                 <a:solidFill>
                   <a:srgbClr val="C41220"/>
                 </a:solidFill>
@@ -6389,39 +5786,45 @@
                 <a:ea typeface="Inter" pitchFamily="34" charset="-122"/>
                 <a:cs typeface="Inter" pitchFamily="34" charset="-120"/>
               </a:rPr>
-              <a:t>1. THINK ALOUD</a:t>
-            </a:r>
-            <a:endParaRPr lang="en-US" sz="2000" dirty="0"/>
+              <a:t>1. NOTICE</a:t>
+            </a:r>
+            <a:endParaRPr lang="en-US" sz="2500" dirty="0"/>
           </a:p>
           <a:p>
             <a:pPr algn="ctr" indent="0" marL="0">
-              <a:buNone/>
-            </a:pPr>
-            <a:r>
-              <a:rPr lang="en-US" altLang="en-US" sz="2000" dirty="0">
-                <a:solidFill>
-                  <a:srgbClr val="3C4043"/>
-                </a:solidFill>
-                <a:latin typeface="Inter" pitchFamily="34" charset="0"/>
-                <a:ea typeface="Inter" pitchFamily="34" charset="-122"/>
-                <a:cs typeface="Inter" pitchFamily="34" charset="-120"/>
-              </a:rPr>
-              <a:t>Model how to interpret a source or identify a CER part.</a:t>
-            </a:r>
-            <a:endParaRPr lang="en-US" sz="2000" dirty="0"/>
-          </a:p>
-        </p:txBody>
-      </p:sp>
-      <p:sp>
-        <p:nvSpPr>
-          <p:cNvPr id="11" name="s2"/>
-          <p:cNvSpPr/>
-          <p:nvPr/>
-        </p:nvSpPr>
-        <p:spPr>
-          <a:xfrm>
-            <a:off x="4914900" y="3340100"/>
-            <a:ext cx="2489200" cy="1219200"/>
+              <a:lnSpc>
+                <a:spcPts val="3100"/>
+              </a:lnSpc>
+              <a:spcBef>
+                <a:spcPts val="1600"/>
+              </a:spcBef>
+              <a:buNone/>
+            </a:pPr>
+            <a:r>
+              <a:rPr lang="en-US" altLang="en-US" sz="2500" dirty="0">
+                <a:solidFill>
+                  <a:srgbClr val="343A40"/>
+                </a:solidFill>
+                <a:latin typeface="Inter" pitchFamily="34" charset="0"/>
+                <a:ea typeface="Inter" pitchFamily="34" charset="-122"/>
+                <a:cs typeface="Inter" pitchFamily="34" charset="-120"/>
+              </a:rPr>
+              <a:t>What is missing or weak: claim, evidence, or reasoning?</a:t>
+            </a:r>
+            <a:endParaRPr lang="en-US" sz="2500" dirty="0"/>
+          </a:p>
+        </p:txBody>
+      </p:sp>
+      <p:sp>
+        <p:nvSpPr>
+          <p:cNvPr id="10" name="prompt"/>
+          <p:cNvSpPr/>
+          <p:nvPr/>
+        </p:nvSpPr>
+        <p:spPr>
+          <a:xfrm>
+            <a:off x="6324600" y="3429000"/>
+            <a:ext cx="3606800" cy="1841500"/>
           </a:xfrm>
           <a:prstGeom prst="rect">
             <a:avLst/>
@@ -6430,14 +5833,17 @@
           <a:ln/>
         </p:spPr>
         <p:txBody>
-          <a:bodyPr wrap="square" lIns="0" tIns="0" rIns="0" bIns="0" rtlCol="0" anchor="ctr"/>
+          <a:bodyPr wrap="square" lIns="0" tIns="0" rIns="0" bIns="0" rtlCol="0" anchor="t"/>
           <a:lstStyle/>
           <a:p>
             <a:pPr algn="ctr" indent="0" marL="0">
-              <a:buNone/>
-            </a:pPr>
-            <a:r>
-              <a:rPr lang="en-US" altLang="en-US" sz="2000" b="1" dirty="0">
+              <a:lnSpc>
+                <a:spcPts val="2232"/>
+              </a:lnSpc>
+              <a:buNone/>
+            </a:pPr>
+            <a:r>
+              <a:rPr lang="en-US" altLang="en-US" sz="1800" b="1" dirty="0">
                 <a:solidFill>
                   <a:srgbClr val="C41220"/>
                 </a:solidFill>
@@ -6447,37 +5853,43 @@
               </a:rPr>
               <a:t>2. PROMPT</a:t>
             </a:r>
-            <a:endParaRPr lang="en-US" sz="2000" dirty="0"/>
+            <a:endParaRPr lang="en-US" sz="2500" dirty="0"/>
           </a:p>
           <a:p>
             <a:pPr algn="ctr" indent="0" marL="0">
-              <a:buNone/>
-            </a:pPr>
-            <a:r>
-              <a:rPr lang="en-US" altLang="en-US" sz="2000" dirty="0">
-                <a:solidFill>
-                  <a:srgbClr val="3C4043"/>
-                </a:solidFill>
-                <a:latin typeface="Inter" pitchFamily="34" charset="0"/>
-                <a:ea typeface="Inter" pitchFamily="34" charset="-122"/>
-                <a:cs typeface="Inter" pitchFamily="34" charset="-120"/>
-              </a:rPr>
-              <a:t>Ask what the source shows, means, or supports.</a:t>
-            </a:r>
-            <a:endParaRPr lang="en-US" sz="2000" dirty="0"/>
-          </a:p>
-        </p:txBody>
-      </p:sp>
-      <p:sp>
-        <p:nvSpPr>
-          <p:cNvPr id="12" name="s3"/>
-          <p:cNvSpPr/>
-          <p:nvPr/>
-        </p:nvSpPr>
-        <p:spPr>
-          <a:xfrm>
-            <a:off x="8915400" y="3340100"/>
-            <a:ext cx="2489200" cy="1219200"/>
+              <a:lnSpc>
+                <a:spcPts val="3100"/>
+              </a:lnSpc>
+              <a:spcBef>
+                <a:spcPts val="1600"/>
+              </a:spcBef>
+              <a:buNone/>
+            </a:pPr>
+            <a:r>
+              <a:rPr lang="en-US" altLang="en-US" sz="2500" dirty="0">
+                <a:solidFill>
+                  <a:srgbClr val="343A40"/>
+                </a:solidFill>
+                <a:latin typeface="Inter" pitchFamily="34" charset="0"/>
+                <a:ea typeface="Inter" pitchFamily="34" charset="-122"/>
+                <a:cs typeface="Inter" pitchFamily="34" charset="-120"/>
+              </a:rPr>
+              <a:t>Ask a question that sends students back to the source.</a:t>
+            </a:r>
+            <a:endParaRPr lang="en-US" sz="2500" dirty="0"/>
+          </a:p>
+        </p:txBody>
+      </p:sp>
+      <p:sp>
+        <p:nvSpPr>
+          <p:cNvPr id="11" name="revise"/>
+          <p:cNvSpPr/>
+          <p:nvPr/>
+        </p:nvSpPr>
+        <p:spPr>
+          <a:xfrm>
+            <a:off x="11341100" y="3429000"/>
+            <a:ext cx="3606800" cy="1841500"/>
           </a:xfrm>
           <a:prstGeom prst="rect">
             <a:avLst/>
@@ -6486,14 +5898,17 @@
           <a:ln/>
         </p:spPr>
         <p:txBody>
-          <a:bodyPr wrap="square" lIns="0" tIns="0" rIns="0" bIns="0" rtlCol="0" anchor="ctr"/>
+          <a:bodyPr wrap="square" lIns="0" tIns="0" rIns="0" bIns="0" rtlCol="0" anchor="t"/>
           <a:lstStyle/>
           <a:p>
             <a:pPr algn="ctr" indent="0" marL="0">
-              <a:buNone/>
-            </a:pPr>
-            <a:r>
-              <a:rPr lang="en-US" altLang="en-US" sz="2000" b="1" dirty="0">
+              <a:lnSpc>
+                <a:spcPts val="2232"/>
+              </a:lnSpc>
+              <a:buNone/>
+            </a:pPr>
+            <a:r>
+              <a:rPr lang="en-US" altLang="en-US" sz="1800" b="1" dirty="0">
                 <a:solidFill>
                   <a:srgbClr val="C41220"/>
                 </a:solidFill>
@@ -6501,222 +5916,55 @@
                 <a:ea typeface="Inter" pitchFamily="34" charset="-122"/>
                 <a:cs typeface="Inter" pitchFamily="34" charset="-120"/>
               </a:rPr>
-              <a:t>3. WRITE + CODE</a:t>
-            </a:r>
-            <a:endParaRPr lang="en-US" sz="2000" dirty="0"/>
+              <a:t>3. REVISE</a:t>
+            </a:r>
+            <a:endParaRPr lang="en-US" sz="2500" dirty="0"/>
           </a:p>
           <a:p>
             <a:pPr algn="ctr" indent="0" marL="0">
-              <a:buNone/>
-            </a:pPr>
-            <a:r>
-              <a:rPr lang="en-US" altLang="en-US" sz="2000" dirty="0">
-                <a:solidFill>
-                  <a:srgbClr val="3C4043"/>
-                </a:solidFill>
-                <a:latin typeface="Inter" pitchFamily="34" charset="0"/>
-                <a:ea typeface="Inter" pitchFamily="34" charset="-122"/>
-                <a:cs typeface="Inter" pitchFamily="34" charset="-120"/>
-              </a:rPr>
-              <a:t>Students construct and label an evidence-based explanation.</a:t>
-            </a:r>
-            <a:endParaRPr lang="en-US" sz="2000" dirty="0"/>
-          </a:p>
-        </p:txBody>
-      </p:sp>
-      <p:sp>
-        <p:nvSpPr>
-          <p:cNvPr id="13" name="s4"/>
-          <p:cNvSpPr/>
-          <p:nvPr/>
-        </p:nvSpPr>
-        <p:spPr>
-          <a:xfrm>
-            <a:off x="12915900" y="3340100"/>
-            <a:ext cx="2425700" cy="1219200"/>
-          </a:xfrm>
-          <a:prstGeom prst="rect">
-            <a:avLst/>
-          </a:prstGeom>
-          <a:noFill/>
-          <a:ln/>
-        </p:spPr>
-        <p:txBody>
-          <a:bodyPr wrap="square" lIns="0" tIns="0" rIns="0" bIns="0" rtlCol="0" anchor="ctr"/>
-          <a:lstStyle/>
-          <a:p>
-            <a:pPr algn="ctr" indent="0" marL="0">
-              <a:buNone/>
-            </a:pPr>
-            <a:r>
-              <a:rPr lang="en-US" altLang="en-US" sz="2000" b="1" dirty="0">
-                <a:solidFill>
-                  <a:srgbClr val="C41220"/>
-                </a:solidFill>
-                <a:latin typeface="Inter" pitchFamily="34" charset="0"/>
-                <a:ea typeface="Inter" pitchFamily="34" charset="-122"/>
-                <a:cs typeface="Inter" pitchFamily="34" charset="-120"/>
-              </a:rPr>
-              <a:t>4. REVISE</a:t>
-            </a:r>
-            <a:endParaRPr lang="en-US" sz="2000" dirty="0"/>
-          </a:p>
-          <a:p>
-            <a:pPr algn="ctr" indent="0" marL="0">
-              <a:buNone/>
-            </a:pPr>
-            <a:r>
-              <a:rPr lang="en-US" altLang="en-US" sz="2000" dirty="0">
-                <a:solidFill>
-                  <a:srgbClr val="3C4043"/>
-                </a:solidFill>
-                <a:latin typeface="Inter" pitchFamily="34" charset="0"/>
-                <a:ea typeface="Inter" pitchFamily="34" charset="-122"/>
-                <a:cs typeface="Inter" pitchFamily="34" charset="-120"/>
-              </a:rPr>
-              <a:t>Students act on one calibrated, criterion-based feedback prompt.</a:t>
-            </a:r>
-            <a:endParaRPr lang="en-US" sz="2000" dirty="0"/>
-          </a:p>
-        </p:txBody>
-      </p:sp>
-      <p:sp>
-        <p:nvSpPr>
-          <p:cNvPr id="14" name="a1"/>
-          <p:cNvSpPr/>
-          <p:nvPr/>
-        </p:nvSpPr>
-        <p:spPr>
-          <a:xfrm>
-            <a:off x="3683000" y="3632200"/>
-            <a:ext cx="952500" cy="444500"/>
-          </a:xfrm>
-          <a:prstGeom prst="rect">
-            <a:avLst/>
-          </a:prstGeom>
-          <a:noFill/>
-          <a:ln/>
-        </p:spPr>
-        <p:txBody>
-          <a:bodyPr wrap="square" lIns="0" tIns="0" rIns="0" bIns="0" rtlCol="0" anchor="t"/>
-          <a:lstStyle/>
-          <a:p>
-            <a:pPr algn="ctr" indent="0" marL="0">
-              <a:buNone/>
-            </a:pPr>
-            <a:r>
-              <a:rPr lang="en-US" altLang="en-US" sz="3200" dirty="0">
-                <a:solidFill>
-                  <a:srgbClr val="C41220"/>
-                </a:solidFill>
-                <a:latin typeface="Inter" pitchFamily="34" charset="0"/>
-                <a:ea typeface="Inter" pitchFamily="34" charset="-122"/>
-                <a:cs typeface="Inter" pitchFamily="34" charset="-120"/>
-              </a:rPr>
-              <a:t>→</a:t>
-            </a:r>
-            <a:endParaRPr lang="en-US" sz="3200" dirty="0"/>
-          </a:p>
-        </p:txBody>
-      </p:sp>
-      <p:sp>
-        <p:nvSpPr>
-          <p:cNvPr id="15" name="a2"/>
-          <p:cNvSpPr/>
-          <p:nvPr/>
-        </p:nvSpPr>
-        <p:spPr>
-          <a:xfrm>
-            <a:off x="7683500" y="3632200"/>
-            <a:ext cx="952500" cy="444500"/>
-          </a:xfrm>
-          <a:prstGeom prst="rect">
-            <a:avLst/>
-          </a:prstGeom>
-          <a:noFill/>
-          <a:ln/>
-        </p:spPr>
-        <p:txBody>
-          <a:bodyPr wrap="square" lIns="0" tIns="0" rIns="0" bIns="0" rtlCol="0" anchor="t"/>
-          <a:lstStyle/>
-          <a:p>
-            <a:pPr algn="ctr" indent="0" marL="0">
-              <a:buNone/>
-            </a:pPr>
-            <a:r>
-              <a:rPr lang="en-US" altLang="en-US" sz="3200" dirty="0">
-                <a:solidFill>
-                  <a:srgbClr val="C41220"/>
-                </a:solidFill>
-                <a:latin typeface="Inter" pitchFamily="34" charset="0"/>
-                <a:ea typeface="Inter" pitchFamily="34" charset="-122"/>
-                <a:cs typeface="Inter" pitchFamily="34" charset="-120"/>
-              </a:rPr>
-              <a:t>→</a:t>
-            </a:r>
-            <a:endParaRPr lang="en-US" sz="3200" dirty="0"/>
-          </a:p>
-        </p:txBody>
-      </p:sp>
-      <p:sp>
-        <p:nvSpPr>
-          <p:cNvPr id="16" name="a3"/>
-          <p:cNvSpPr/>
-          <p:nvPr/>
-        </p:nvSpPr>
-        <p:spPr>
-          <a:xfrm>
-            <a:off x="11684000" y="3632200"/>
-            <a:ext cx="952500" cy="444500"/>
-          </a:xfrm>
-          <a:prstGeom prst="rect">
-            <a:avLst/>
-          </a:prstGeom>
-          <a:noFill/>
-          <a:ln/>
-        </p:spPr>
-        <p:txBody>
-          <a:bodyPr wrap="square" lIns="0" tIns="0" rIns="0" bIns="0" rtlCol="0" anchor="t"/>
-          <a:lstStyle/>
-          <a:p>
-            <a:pPr algn="ctr" indent="0" marL="0">
-              <a:buNone/>
-            </a:pPr>
-            <a:r>
-              <a:rPr lang="en-US" altLang="en-US" sz="3200" dirty="0">
-                <a:solidFill>
-                  <a:srgbClr val="C41220"/>
-                </a:solidFill>
-                <a:latin typeface="Inter" pitchFamily="34" charset="0"/>
-                <a:ea typeface="Inter" pitchFamily="34" charset="-122"/>
-                <a:cs typeface="Inter" pitchFamily="34" charset="-120"/>
-              </a:rPr>
-              <a:t>→</a:t>
-            </a:r>
-            <a:endParaRPr lang="en-US" sz="3200" dirty="0"/>
-          </a:p>
-        </p:txBody>
-      </p:sp>
-      <p:sp>
-        <p:nvSpPr>
-          <p:cNvPr id="17" name="feedback-shape-16"/>
-          <p:cNvSpPr/>
-          <p:nvPr/>
-        </p:nvSpPr>
-        <p:spPr>
-          <a:xfrm>
-            <a:off x="635000" y="5778500"/>
-            <a:ext cx="14986000" cy="1752600"/>
-          </a:xfrm>
-          <a:prstGeom prst="rect">
-            <a:avLst/>
-          </a:prstGeom>
-          <a:solidFill>
-            <a:srgbClr val="F8F9FA"/>
+              <a:lnSpc>
+                <a:spcPts val="3100"/>
+              </a:lnSpc>
+              <a:spcBef>
+                <a:spcPts val="1600"/>
+              </a:spcBef>
+              <a:buNone/>
+            </a:pPr>
+            <a:r>
+              <a:rPr lang="en-US" altLang="en-US" sz="2500" dirty="0">
+                <a:solidFill>
+                  <a:srgbClr val="343A40"/>
+                </a:solidFill>
+                <a:latin typeface="Inter" pitchFamily="34" charset="0"/>
+                <a:ea typeface="Inter" pitchFamily="34" charset="-122"/>
+                <a:cs typeface="Inter" pitchFamily="34" charset="-120"/>
+              </a:rPr>
+              <a:t>Students add or improve one part of their own response.</a:t>
+            </a:r>
+            <a:endParaRPr lang="en-US" sz="2500" dirty="0"/>
+          </a:p>
+        </p:txBody>
+      </p:sp>
+      <p:sp>
+        <p:nvSpPr>
+          <p:cNvPr id="12" name="feedback-shape-11"/>
+          <p:cNvSpPr/>
+          <p:nvPr/>
+        </p:nvSpPr>
+        <p:spPr>
+          <a:xfrm>
+            <a:off x="952500" y="6858000"/>
+            <a:ext cx="14351000" cy="952500"/>
+          </a:xfrm>
+          <a:prstGeom prst="rect">
+            <a:avLst/>
+          </a:prstGeom>
+          <a:solidFill>
+            <a:srgbClr val="F9FAFB"/>
           </a:solidFill>
           <a:ln w="12700">
             <a:solidFill>
-              <a:srgbClr val="D1D5DB"/>
+              <a:srgbClr val="D4D8DE"/>
             </a:solidFill>
             <a:prstDash val="solid"/>
           </a:ln>
@@ -6724,14 +5972,14 @@
       </p:sp>
       <p:sp>
         <p:nvSpPr>
-          <p:cNvPr id="18" name="prompt-title"/>
-          <p:cNvSpPr/>
-          <p:nvPr/>
-        </p:nvSpPr>
-        <p:spPr>
-          <a:xfrm>
-            <a:off x="990600" y="6070600"/>
-            <a:ext cx="7112000" cy="355600"/>
+          <p:cNvPr id="13" name="example"/>
+          <p:cNvSpPr/>
+          <p:nvPr/>
+        </p:nvSpPr>
+        <p:spPr>
+          <a:xfrm>
+            <a:off x="1333500" y="7086600"/>
+            <a:ext cx="13589000" cy="508000"/>
           </a:xfrm>
           <a:prstGeom prst="rect">
             <a:avLst/>
@@ -6743,19 +5991,33 @@
           <a:bodyPr wrap="square" lIns="0" tIns="0" rIns="0" bIns="0" rtlCol="0" anchor="t"/>
           <a:lstStyle/>
           <a:p>
-            <a:pPr algn="l" indent="0" marL="0">
-              <a:buNone/>
-            </a:pPr>
+            <a:pPr algn="ctr" indent="0" marL="0">
+              <a:lnSpc>
+                <a:spcPts val="2640"/>
+              </a:lnSpc>
+              <a:buNone/>
+            </a:pPr>
+            <a:r>
+              <a:rPr lang="en-US" altLang="en-US" sz="2200" b="1" dirty="0">
+                <a:solidFill>
+                  <a:srgbClr val="343A40"/>
+                </a:solidFill>
+                <a:latin typeface="Inter" pitchFamily="34" charset="0"/>
+                <a:ea typeface="Inter" pitchFamily="34" charset="-122"/>
+                <a:cs typeface="Inter" pitchFamily="34" charset="-120"/>
+              </a:rPr>
+              <a:t>Example prompt:</a:t>
+            </a:r>
             <a:r>
               <a:rPr lang="en-US" altLang="en-US" sz="2200" dirty="0">
                 <a:solidFill>
-                  <a:srgbClr val="3C4043"/>
-                </a:solidFill>
-                <a:latin typeface="Inter" pitchFamily="34" charset="0"/>
-                <a:ea typeface="Inter" pitchFamily="34" charset="-122"/>
-                <a:cs typeface="Inter" pitchFamily="34" charset="-120"/>
-              </a:rPr>
-              <a:t>PROMPT THAT PRESERVES THE THINKING</a:t>
+                  <a:srgbClr val="343A40"/>
+                </a:solidFill>
+                <a:latin typeface="Inter" pitchFamily="34" charset="0"/>
+                <a:ea typeface="Inter" pitchFamily="34" charset="-122"/>
+                <a:cs typeface="Inter" pitchFamily="34" charset="-120"/>
+              </a:rPr>
+              <a:t> “Find your green evidence. Add a blue sentence that explains why it supports your claim.”</a:t>
             </a:r>
             <a:endParaRPr lang="en-US" sz="2200" dirty="0"/>
           </a:p>
@@ -6763,49 +6025,7 @@
       </p:sp>
       <p:sp>
         <p:nvSpPr>
-          <p:cNvPr id="19" name="prompt-copy"/>
-          <p:cNvSpPr/>
-          <p:nvPr/>
-        </p:nvSpPr>
-        <p:spPr>
-          <a:xfrm>
-            <a:off x="990600" y="6629400"/>
-            <a:ext cx="13716000" cy="533400"/>
-          </a:xfrm>
-          <a:prstGeom prst="rect">
-            <a:avLst/>
-          </a:prstGeom>
-          <a:noFill/>
-          <a:ln/>
-        </p:spPr>
-        <p:txBody>
-          <a:bodyPr wrap="square" lIns="0" tIns="0" rIns="0" bIns="0" rtlCol="0" anchor="t"/>
-          <a:lstStyle/>
-          <a:p>
-            <a:pPr algn="l" indent="0" marL="0">
-              <a:lnSpc>
-                <a:spcPts val="2520"/>
-              </a:lnSpc>
-              <a:buNone/>
-            </a:pPr>
-            <a:r>
-              <a:rPr lang="en-US" altLang="en-US" sz="2100" dirty="0">
-                <a:solidFill>
-                  <a:srgbClr val="3C4043"/>
-                </a:solidFill>
-                <a:latin typeface="Inter" pitchFamily="34" charset="0"/>
-                <a:ea typeface="Inter" pitchFamily="34" charset="-122"/>
-                <a:cs typeface="Inter" pitchFamily="34" charset="-120"/>
-              </a:rPr>
-              <a:t>“Underline the evidence you selected. Then add or revise a reasoning sentence that explains how this evidence supports your claim or conclusion.”</a:t>
-            </a:r>
-            <a:endParaRPr lang="en-US" sz="2100" dirty="0"/>
-          </a:p>
-        </p:txBody>
-      </p:sp>
-      <p:sp>
-        <p:nvSpPr>
-          <p:cNvPr id="20" name="page"/>
+          <p:cNvPr id="14" name="page"/>
           <p:cNvSpPr/>
           <p:nvPr/>
         </p:nvSpPr>
@@ -6830,7 +6050,7 @@
             <a:r>
               <a:rPr lang="en-US" altLang="en-US" sz="1300" dirty="0">
                 <a:solidFill>
-                  <a:srgbClr val="3C4043"/>
+                  <a:srgbClr val="343A40"/>
                 </a:solidFill>
                 <a:latin typeface="Inter" pitchFamily="34" charset="0"/>
                 <a:ea typeface="Inter" pitchFamily="34" charset="-122"/>
@@ -6844,7 +6064,7 @@
       </p:sp>
       <p:sp>
         <p:nvSpPr>
-          <p:cNvPr id="21" name="feedback-shape-20"/>
+          <p:cNvPr id="15" name="feedback-shape-14"/>
           <p:cNvSpPr/>
           <p:nvPr/>
         </p:nvSpPr>
@@ -6947,7 +6167,7 @@
                 <a:ea typeface="Inter" pitchFamily="34" charset="-122"/>
                 <a:cs typeface="Inter" pitchFamily="34" charset="-120"/>
               </a:rPr>
-              <a:t>Course-Alike Lesson Planning + Reflection</a:t>
+              <a:t>Planning Time: Make This Work in Your Course</a:t>
             </a:r>
             <a:endParaRPr lang="en-US" sz="3000" dirty="0"/>
           </a:p>
@@ -6994,14 +6214,14 @@
       </p:sp>
       <p:sp>
         <p:nvSpPr>
-          <p:cNvPr id="5" name="timer-panel"/>
-          <p:cNvSpPr/>
-          <p:nvPr/>
-        </p:nvSpPr>
-        <p:spPr>
-          <a:xfrm>
-            <a:off x="508000" y="1574800"/>
-            <a:ext cx="3810000" cy="5613400"/>
+          <p:cNvPr id="5" name="worktime-shape-4"/>
+          <p:cNvSpPr/>
+          <p:nvPr/>
+        </p:nvSpPr>
+        <p:spPr>
+          <a:xfrm>
+            <a:off x="698500" y="1587500"/>
+            <a:ext cx="3302000" cy="5588000"/>
           </a:xfrm>
           <a:prstGeom prst="rect">
             <a:avLst/>
@@ -7014,14 +6234,14 @@
       </p:sp>
       <p:sp>
         <p:nvSpPr>
-          <p:cNvPr id="6" name="timer-label"/>
-          <p:cNvSpPr/>
-          <p:nvPr/>
-        </p:nvSpPr>
-        <p:spPr>
-          <a:xfrm>
-            <a:off x="863600" y="2247900"/>
-            <a:ext cx="3098800" cy="355600"/>
+          <p:cNvPr id="6" name="time"/>
+          <p:cNvSpPr/>
+          <p:nvPr/>
+        </p:nvSpPr>
+        <p:spPr>
+          <a:xfrm>
+            <a:off x="1079500" y="2413000"/>
+            <a:ext cx="2540000" cy="2413000"/>
           </a:xfrm>
           <a:prstGeom prst="rect">
             <a:avLst/>
@@ -7030,53 +6250,73 @@
           <a:ln/>
         </p:spPr>
         <p:txBody>
+          <a:bodyPr wrap="square" lIns="0" tIns="0" rIns="0" bIns="0" rtlCol="0" anchor="ctr"/>
+          <a:lstStyle/>
+          <a:p>
+            <a:pPr algn="ctr" indent="0" marL="0">
+              <a:buNone/>
+            </a:pPr>
+            <a:r>
+              <a:rPr lang="en-US" altLang="en-US" sz="6600" dirty="0">
+                <a:solidFill>
+                  <a:srgbClr val="FFFFFF"/>
+                </a:solidFill>
+                <a:latin typeface="Inter" pitchFamily="34" charset="0"/>
+                <a:ea typeface="Inter" pitchFamily="34" charset="-122"/>
+                <a:cs typeface="Inter" pitchFamily="34" charset="-120"/>
+              </a:rPr>
+              <a:t>13</a:t>
+            </a:r>
+            <a:endParaRPr lang="en-US" sz="6600" dirty="0"/>
+          </a:p>
+          <a:p>
+            <a:pPr algn="ctr" indent="0" marL="0">
+              <a:buNone/>
+            </a:pPr>
+            <a:r>
+              <a:rPr lang="en-US" altLang="en-US" sz="2800" dirty="0">
+                <a:solidFill>
+                  <a:srgbClr val="FFFFFF"/>
+                </a:solidFill>
+                <a:latin typeface="Inter" pitchFamily="34" charset="0"/>
+                <a:ea typeface="Inter" pitchFamily="34" charset="-122"/>
+                <a:cs typeface="Inter" pitchFamily="34" charset="-120"/>
+              </a:rPr>
+              <a:t>minutes</a:t>
+            </a:r>
+            <a:endParaRPr lang="en-US" sz="6600" dirty="0"/>
+          </a:p>
+        </p:txBody>
+      </p:sp>
+      <p:sp>
+        <p:nvSpPr>
+          <p:cNvPr id="7" name="direction"/>
+          <p:cNvSpPr/>
+          <p:nvPr/>
+        </p:nvSpPr>
+        <p:spPr>
+          <a:xfrm>
+            <a:off x="1041400" y="5461000"/>
+            <a:ext cx="2616200" cy="952500"/>
+          </a:xfrm>
+          <a:prstGeom prst="rect">
+            <a:avLst/>
+          </a:prstGeom>
+          <a:noFill/>
+          <a:ln/>
+        </p:spPr>
+        <p:txBody>
           <a:bodyPr wrap="square" lIns="0" tIns="0" rIns="0" bIns="0" rtlCol="0" anchor="t"/>
           <a:lstStyle/>
           <a:p>
             <a:pPr algn="ctr" indent="0" marL="0">
-              <a:buNone/>
-            </a:pPr>
-            <a:r>
-              <a:rPr lang="en-US" altLang="en-US" sz="1800" dirty="0">
-                <a:solidFill>
-                  <a:srgbClr val="FDECEC"/>
-                </a:solidFill>
-                <a:latin typeface="Inter" pitchFamily="34" charset="0"/>
-                <a:ea typeface="Inter" pitchFamily="34" charset="-122"/>
-                <a:cs typeface="Inter" pitchFamily="34" charset="-120"/>
-              </a:rPr>
-              <a:t>PROTECTED INDIVIDUAL-FIRST WORK</a:t>
-            </a:r>
-            <a:endParaRPr lang="en-US" sz="1800" dirty="0"/>
-          </a:p>
-        </p:txBody>
-      </p:sp>
-      <p:sp>
-        <p:nvSpPr>
-          <p:cNvPr id="7" name="timer"/>
-          <p:cNvSpPr/>
-          <p:nvPr/>
-        </p:nvSpPr>
-        <p:spPr>
-          <a:xfrm>
-            <a:off x="889000" y="2921000"/>
-            <a:ext cx="3048000" cy="1524000"/>
-          </a:xfrm>
-          <a:prstGeom prst="rect">
-            <a:avLst/>
-          </a:prstGeom>
-          <a:noFill/>
-          <a:ln/>
-        </p:spPr>
-        <p:txBody>
-          <a:bodyPr wrap="square" lIns="0" tIns="0" rIns="0" bIns="0" rtlCol="0" anchor="ctr"/>
-          <a:lstStyle/>
-          <a:p>
-            <a:pPr algn="ctr" indent="0" marL="0">
-              <a:buNone/>
-            </a:pPr>
-            <a:r>
-              <a:rPr lang="en-US" altLang="en-US" sz="7400" dirty="0">
+              <a:lnSpc>
+                <a:spcPts val="2596"/>
+              </a:lnSpc>
+              <a:buNone/>
+            </a:pPr>
+            <a:r>
+              <a:rPr lang="en-US" altLang="en-US" sz="2200" dirty="0">
                 <a:solidFill>
                   <a:srgbClr val="FFFFFF"/>
                 </a:solidFill>
@@ -7084,9 +6324,9 @@
                 <a:ea typeface="Inter" pitchFamily="34" charset="-122"/>
                 <a:cs typeface="Inter" pitchFamily="34" charset="-120"/>
               </a:rPr>
-              <a:t>13 min</a:t>
-            </a:r>
-            <a:endParaRPr lang="en-US" sz="7400" dirty="0"/>
+              <a:t>Use the Lesson Planning Sheet as you work.</a:t>
+            </a:r>
+            <a:endParaRPr lang="en-US" sz="2200" dirty="0"/>
           </a:p>
         </p:txBody>
       </p:sp>
@@ -7098,15 +6338,18 @@
         </p:nvSpPr>
         <p:spPr>
           <a:xfrm>
-            <a:off x="1041400" y="4978400"/>
-            <a:ext cx="2743200" cy="9144"/>
-          </a:xfrm>
-          <a:prstGeom prst="line">
-            <a:avLst/>
-          </a:prstGeom>
-          <a:ln w="25400">
+            <a:off x="4699000" y="1587500"/>
+            <a:ext cx="10541000" cy="1498600"/>
+          </a:xfrm>
+          <a:prstGeom prst="rect">
+            <a:avLst/>
+          </a:prstGeom>
+          <a:solidFill>
+            <a:srgbClr val="F5F6F8"/>
+          </a:solidFill>
+          <a:ln w="12700">
             <a:solidFill>
-              <a:srgbClr val="F6B4BA"/>
+              <a:srgbClr val="D4D8DE"/>
             </a:solidFill>
             <a:prstDash val="solid"/>
           </a:ln>
@@ -7114,66 +6357,24 @@
       </p:sp>
       <p:sp>
         <p:nvSpPr>
-          <p:cNvPr id="9" name="timer-sub"/>
-          <p:cNvSpPr/>
-          <p:nvPr/>
-        </p:nvSpPr>
-        <p:spPr>
-          <a:xfrm>
-            <a:off x="850900" y="5384800"/>
-            <a:ext cx="3149600" cy="939800"/>
-          </a:xfrm>
-          <a:prstGeom prst="rect">
-            <a:avLst/>
-          </a:prstGeom>
-          <a:noFill/>
-          <a:ln/>
-        </p:spPr>
-        <p:txBody>
-          <a:bodyPr wrap="square" lIns="0" tIns="0" rIns="0" bIns="0" rtlCol="0" anchor="t"/>
-          <a:lstStyle/>
-          <a:p>
-            <a:pPr algn="ctr" indent="0" marL="0">
-              <a:lnSpc>
-                <a:spcPts val="2440"/>
-              </a:lnSpc>
-              <a:buNone/>
-            </a:pPr>
-            <a:r>
-              <a:rPr lang="en-US" altLang="en-US" sz="2000" dirty="0">
-                <a:solidFill>
-                  <a:srgbClr val="FFFFFF"/>
-                </a:solidFill>
-                <a:latin typeface="Inter" pitchFamily="34" charset="0"/>
-                <a:ea typeface="Inter" pitchFamily="34" charset="-122"/>
-                <a:cs typeface="Inter" pitchFamily="34" charset="-120"/>
-              </a:rPr>
-              <a:t>Plan the student strategy, priority need, feedback, and next evidence check.</a:t>
-            </a:r>
-            <a:endParaRPr lang="en-US" sz="2000" dirty="0"/>
-          </a:p>
-        </p:txBody>
-      </p:sp>
-      <p:sp>
-        <p:nvSpPr>
-          <p:cNvPr id="10" name="worktime-shape-9"/>
-          <p:cNvSpPr/>
-          <p:nvPr/>
-        </p:nvSpPr>
-        <p:spPr>
-          <a:xfrm>
-            <a:off x="4826000" y="1574800"/>
-            <a:ext cx="10922000" cy="1498600"/>
-          </a:xfrm>
-          <a:prstGeom prst="rect">
-            <a:avLst/>
-          </a:prstGeom>
-          <a:solidFill>
-            <a:srgbClr val="F3F4F6"/>
+          <p:cNvPr id="9" name="worktime-shape-8"/>
+          <p:cNvSpPr/>
+          <p:nvPr/>
+        </p:nvSpPr>
+        <p:spPr>
+          <a:xfrm>
+            <a:off x="4699000" y="3568700"/>
+            <a:ext cx="10541000" cy="1498600"/>
+          </a:xfrm>
+          <a:prstGeom prst="rect">
+            <a:avLst/>
+          </a:prstGeom>
+          <a:solidFill>
+            <a:srgbClr val="F5F6F8"/>
           </a:solidFill>
           <a:ln w="12700">
             <a:solidFill>
-              <a:srgbClr val="D1D5DB"/>
+              <a:srgbClr val="D4D8DE"/>
             </a:solidFill>
             <a:prstDash val="solid"/>
           </a:ln>
@@ -7181,145 +6382,14 @@
       </p:sp>
       <p:sp>
         <p:nvSpPr>
-          <p:cNvPr id="11" name="do1"/>
-          <p:cNvSpPr/>
-          <p:nvPr/>
-        </p:nvSpPr>
-        <p:spPr>
-          <a:xfrm>
-            <a:off x="5181600" y="1854200"/>
-            <a:ext cx="9842500" cy="787400"/>
-          </a:xfrm>
-          <a:prstGeom prst="rect">
-            <a:avLst/>
-          </a:prstGeom>
-          <a:noFill/>
-          <a:ln/>
-        </p:spPr>
-        <p:txBody>
-          <a:bodyPr wrap="square" lIns="0" tIns="0" rIns="0" bIns="0" rtlCol="0" anchor="t"/>
-          <a:lstStyle/>
-          <a:p>
-            <a:pPr algn="l" indent="0" marL="0">
-              <a:lnSpc>
-                <a:spcPts val="2124"/>
-              </a:lnSpc>
-              <a:buNone/>
-            </a:pPr>
-            <a:r>
-              <a:rPr lang="en-US" altLang="en-US" sz="1800" b="1" dirty="0">
-                <a:solidFill>
-                  <a:srgbClr val="C41220"/>
-                </a:solidFill>
-                <a:latin typeface="Inter" pitchFamily="34" charset="0"/>
-                <a:ea typeface="Inter" pitchFamily="34" charset="-122"/>
-                <a:cs typeface="Inter" pitchFamily="34" charset="-120"/>
-              </a:rPr>
-              <a:t>1. Name the data-based priority.</a:t>
-            </a:r>
-            <a:r>
-              <a:rPr lang="en-US" altLang="en-US" sz="1800" dirty="0">
-                <a:solidFill>
-                  <a:srgbClr val="3C4043"/>
-                </a:solidFill>
-                <a:latin typeface="Inter" pitchFamily="34" charset="0"/>
-                <a:ea typeface="Inter" pitchFamily="34" charset="-122"/>
-                <a:cs typeface="Inter" pitchFamily="34" charset="-120"/>
-              </a:rPr>
-              <a:t> Use student work, assessment data, or observation to name where students struggle most: source analysis, claim, evidence, reasoning, vocabulary, clarity, or another need.</a:t>
-            </a:r>
-            <a:endParaRPr lang="en-US" sz="1800" dirty="0"/>
-          </a:p>
-        </p:txBody>
-      </p:sp>
-      <p:sp>
-        <p:nvSpPr>
-          <p:cNvPr id="12" name="worktime-shape-11"/>
-          <p:cNvSpPr/>
-          <p:nvPr/>
-        </p:nvSpPr>
-        <p:spPr>
-          <a:xfrm>
-            <a:off x="4826000" y="3403600"/>
-            <a:ext cx="10922000" cy="1498600"/>
-          </a:xfrm>
-          <a:prstGeom prst="rect">
-            <a:avLst/>
-          </a:prstGeom>
-          <a:solidFill>
-            <a:srgbClr val="F3F4F6"/>
-          </a:solidFill>
-          <a:ln w="12700">
-            <a:solidFill>
-              <a:srgbClr val="D1D5DB"/>
-            </a:solidFill>
-            <a:prstDash val="solid"/>
-          </a:ln>
-        </p:spPr>
-      </p:sp>
-      <p:sp>
-        <p:nvSpPr>
-          <p:cNvPr id="13" name="do2"/>
-          <p:cNvSpPr/>
-          <p:nvPr/>
-        </p:nvSpPr>
-        <p:spPr>
-          <a:xfrm>
-            <a:off x="5181600" y="3683000"/>
-            <a:ext cx="9842500" cy="787400"/>
-          </a:xfrm>
-          <a:prstGeom prst="rect">
-            <a:avLst/>
-          </a:prstGeom>
-          <a:noFill/>
-          <a:ln/>
-        </p:spPr>
-        <p:txBody>
-          <a:bodyPr wrap="square" lIns="0" tIns="0" rIns="0" bIns="0" rtlCol="0" anchor="t"/>
-          <a:lstStyle/>
-          <a:p>
-            <a:pPr algn="l" indent="0" marL="0">
-              <a:lnSpc>
-                <a:spcPts val="2242"/>
-              </a:lnSpc>
-              <a:buNone/>
-            </a:pPr>
-            <a:r>
-              <a:rPr lang="en-US" altLang="en-US" sz="1900" b="1" dirty="0">
-                <a:solidFill>
-                  <a:srgbClr val="C41220"/>
-                </a:solidFill>
-                <a:latin typeface="Inter" pitchFamily="34" charset="0"/>
-                <a:ea typeface="Inter" pitchFamily="34" charset="-122"/>
-                <a:cs typeface="Inter" pitchFamily="34" charset="-120"/>
-              </a:rPr>
-              <a:t>2. Plan the student experience.</a:t>
-            </a:r>
-            <a:r>
-              <a:rPr lang="en-US" altLang="en-US" sz="1900" dirty="0">
-                <a:solidFill>
-                  <a:srgbClr val="3C4043"/>
-                </a:solidFill>
-                <a:latin typeface="Inter" pitchFamily="34" charset="0"/>
-                <a:ea typeface="Inter" pitchFamily="34" charset="-122"/>
-                <a:cs typeface="Inter" pitchFamily="34" charset="-120"/>
-              </a:rPr>
-              <a:t> Record the source/task, the strategy students will use to analyze it, what a complete CER response must show, and the feedback/revision action students will take.</a:t>
-            </a:r>
-            <a:endParaRPr lang="en-US" sz="1900" dirty="0"/>
-          </a:p>
-        </p:txBody>
-      </p:sp>
-      <p:sp>
-        <p:nvSpPr>
-          <p:cNvPr id="14" name="worktime-shape-13"/>
-          <p:cNvSpPr/>
-          <p:nvPr/>
-        </p:nvSpPr>
-        <p:spPr>
-          <a:xfrm>
-            <a:off x="4826000" y="5232400"/>
-            <a:ext cx="10922000" cy="1955800"/>
+          <p:cNvPr id="10" name="worktime-shape-9"/>
+          <p:cNvSpPr/>
+          <p:nvPr/>
+        </p:nvSpPr>
+        <p:spPr>
+          <a:xfrm>
+            <a:off x="4699000" y="5549900"/>
+            <a:ext cx="10541000" cy="1625600"/>
           </a:xfrm>
           <a:prstGeom prst="rect">
             <a:avLst/>
@@ -7337,14 +6407,14 @@
       </p:sp>
       <p:sp>
         <p:nvSpPr>
-          <p:cNvPr id="15" name="do3"/>
-          <p:cNvSpPr/>
-          <p:nvPr/>
-        </p:nvSpPr>
-        <p:spPr>
-          <a:xfrm>
-            <a:off x="5181600" y="5537200"/>
-            <a:ext cx="9842500" cy="1168400"/>
+          <p:cNvPr id="11" name="q1"/>
+          <p:cNvSpPr/>
+          <p:nvPr/>
+        </p:nvSpPr>
+        <p:spPr>
+          <a:xfrm>
+            <a:off x="5143500" y="1943100"/>
+            <a:ext cx="9334500" cy="787400"/>
           </a:xfrm>
           <a:prstGeom prst="rect">
             <a:avLst/>
@@ -7358,12 +6428,12 @@
           <a:p>
             <a:pPr algn="l" indent="0" marL="0">
               <a:lnSpc>
-                <a:spcPts val="2124"/>
+                <a:spcPts val="2880"/>
               </a:lnSpc>
               <a:buNone/>
             </a:pPr>
             <a:r>
-              <a:rPr lang="en-US" altLang="en-US" sz="1800" b="1" dirty="0">
+              <a:rPr lang="en-US" altLang="en-US" sz="2400" b="1" dirty="0">
                 <a:solidFill>
                   <a:srgbClr val="C41220"/>
                 </a:solidFill>
@@ -7371,26 +6441,132 @@
                 <a:ea typeface="Inter" pitchFamily="34" charset="-122"/>
                 <a:cs typeface="Inter" pitchFamily="34" charset="-120"/>
               </a:rPr>
-              <a:t>3. Complete the Lesson Planning &amp; Reflection Sheet.</a:t>
-            </a:r>
-            <a:r>
-              <a:rPr lang="en-US" altLang="en-US" sz="1800" dirty="0">
-                <a:solidFill>
-                  <a:srgbClr val="3C4043"/>
-                </a:solidFill>
-                <a:latin typeface="Inter" pitchFamily="34" charset="0"/>
-                <a:ea typeface="Inter" pitchFamily="34" charset="-122"/>
-                <a:cs typeface="Inter" pitchFamily="34" charset="-120"/>
-              </a:rPr>
-              <a:t> During PD, plan the lesson and feedback. After the lesson, record what the evidence shows, what to keep or adjust, one colleague idea, and the evidence you will bring Friday.</a:t>
-            </a:r>
-            <a:endParaRPr lang="en-US" sz="1800" dirty="0"/>
-          </a:p>
-        </p:txBody>
-      </p:sp>
-      <p:sp>
-        <p:nvSpPr>
-          <p:cNvPr id="16" name="page"/>
+              <a:t>1. What source will students analyze?</a:t>
+            </a:r>
+            <a:r>
+              <a:rPr lang="en-US" altLang="en-US" sz="2400" dirty="0">
+                <a:solidFill>
+                  <a:srgbClr val="343A40"/>
+                </a:solidFill>
+                <a:latin typeface="Inter" pitchFamily="34" charset="0"/>
+                <a:ea typeface="Inter" pitchFamily="34" charset="-122"/>
+                <a:cs typeface="Inter" pitchFamily="34" charset="-120"/>
+              </a:rPr>
+              <a:t> Choose the text, graph, model, data set, or investigation result.</a:t>
+            </a:r>
+            <a:endParaRPr lang="en-US" sz="2400" dirty="0"/>
+          </a:p>
+        </p:txBody>
+      </p:sp>
+      <p:sp>
+        <p:nvSpPr>
+          <p:cNvPr id="12" name="q2"/>
+          <p:cNvSpPr/>
+          <p:nvPr/>
+        </p:nvSpPr>
+        <p:spPr>
+          <a:xfrm>
+            <a:off x="5143500" y="3924300"/>
+            <a:ext cx="9334500" cy="787400"/>
+          </a:xfrm>
+          <a:prstGeom prst="rect">
+            <a:avLst/>
+          </a:prstGeom>
+          <a:noFill/>
+          <a:ln/>
+        </p:spPr>
+        <p:txBody>
+          <a:bodyPr wrap="square" lIns="0" tIns="0" rIns="0" bIns="0" rtlCol="0" anchor="t"/>
+          <a:lstStyle/>
+          <a:p>
+            <a:pPr algn="l" indent="0" marL="0">
+              <a:lnSpc>
+                <a:spcPts val="2880"/>
+              </a:lnSpc>
+              <a:buNone/>
+            </a:pPr>
+            <a:r>
+              <a:rPr lang="en-US" altLang="en-US" sz="2400" b="1" dirty="0">
+                <a:solidFill>
+                  <a:srgbClr val="C41220"/>
+                </a:solidFill>
+                <a:latin typeface="Inter" pitchFamily="34" charset="0"/>
+                <a:ea typeface="Inter" pitchFamily="34" charset="-122"/>
+                <a:cs typeface="Inter" pitchFamily="34" charset="-120"/>
+              </a:rPr>
+              <a:t>2. What will students do?</a:t>
+            </a:r>
+            <a:r>
+              <a:rPr lang="en-US" altLang="en-US" sz="2400" dirty="0">
+                <a:solidFill>
+                  <a:srgbClr val="343A40"/>
+                </a:solidFill>
+                <a:latin typeface="Inter" pitchFamily="34" charset="0"/>
+                <a:ea typeface="Inter" pitchFamily="34" charset="-122"/>
+                <a:cs typeface="Inter" pitchFamily="34" charset="-120"/>
+              </a:rPr>
+              <a:t> Choose one CUBS move and one CER expectation.</a:t>
+            </a:r>
+            <a:endParaRPr lang="en-US" sz="2400" dirty="0"/>
+          </a:p>
+        </p:txBody>
+      </p:sp>
+      <p:sp>
+        <p:nvSpPr>
+          <p:cNvPr id="13" name="q3"/>
+          <p:cNvSpPr/>
+          <p:nvPr/>
+        </p:nvSpPr>
+        <p:spPr>
+          <a:xfrm>
+            <a:off x="5143500" y="5905500"/>
+            <a:ext cx="9334500" cy="990600"/>
+          </a:xfrm>
+          <a:prstGeom prst="rect">
+            <a:avLst/>
+          </a:prstGeom>
+          <a:noFill/>
+          <a:ln/>
+        </p:spPr>
+        <p:txBody>
+          <a:bodyPr wrap="square" lIns="0" tIns="0" rIns="0" bIns="0" rtlCol="0" anchor="t"/>
+          <a:lstStyle/>
+          <a:p>
+            <a:pPr algn="l" indent="0" marL="0">
+              <a:lnSpc>
+                <a:spcPts val="2880"/>
+              </a:lnSpc>
+              <a:buNone/>
+            </a:pPr>
+            <a:r>
+              <a:rPr lang="en-US" altLang="en-US" sz="2400" b="1" dirty="0">
+                <a:solidFill>
+                  <a:srgbClr val="C41220"/>
+                </a:solidFill>
+                <a:latin typeface="Inter" pitchFamily="34" charset="0"/>
+                <a:ea typeface="Inter" pitchFamily="34" charset="-122"/>
+                <a:cs typeface="Inter" pitchFamily="34" charset="-120"/>
+              </a:rPr>
+              <a:t>3. What will students revise?</a:t>
+            </a:r>
+            <a:r>
+              <a:rPr lang="en-US" altLang="en-US" sz="2400" dirty="0">
+                <a:solidFill>
+                  <a:srgbClr val="343A40"/>
+                </a:solidFill>
+                <a:latin typeface="Inter" pitchFamily="34" charset="0"/>
+                <a:ea typeface="Inter" pitchFamily="34" charset="-122"/>
+                <a:cs typeface="Inter" pitchFamily="34" charset="-120"/>
+              </a:rPr>
+              <a:t> Plan one feedback prompt and one next action. Share one useful idea with a colleague.</a:t>
+            </a:r>
+            <a:endParaRPr lang="en-US" sz="2400" dirty="0"/>
+          </a:p>
+        </p:txBody>
+      </p:sp>
+      <p:sp>
+        <p:nvSpPr>
+          <p:cNvPr id="14" name="page"/>
           <p:cNvSpPr/>
           <p:nvPr/>
         </p:nvSpPr>
@@ -7415,7 +6591,7 @@
             <a:r>
               <a:rPr lang="en-US" altLang="en-US" sz="1300" dirty="0">
                 <a:solidFill>
-                  <a:srgbClr val="3C4043"/>
+                  <a:srgbClr val="343A40"/>
                 </a:solidFill>
                 <a:latin typeface="Inter" pitchFamily="34" charset="0"/>
                 <a:ea typeface="Inter" pitchFamily="34" charset="-122"/>
@@ -7429,7 +6605,7 @@
       </p:sp>
       <p:sp>
         <p:nvSpPr>
-          <p:cNvPr id="17" name="worktime-shape-16"/>
+          <p:cNvPr id="15" name="worktime-shape-14"/>
           <p:cNvSpPr/>
           <p:nvPr/>
         </p:nvSpPr>
@@ -7532,7 +6708,7 @@
                 <a:ea typeface="Inter" pitchFamily="34" charset="-122"/>
                 <a:cs typeface="Inter" pitchFamily="34" charset="-120"/>
               </a:rPr>
-              <a:t>CLOSE + PREPARE FOR STUDENT WORK REVIEW  •  3:28–3:30 P.M.  •  2 MIN</a:t>
+              <a:t>CLOSE  •  3:28–3:30 P.M.  •  2 MIN</a:t>
             </a:r>
             <a:endParaRPr lang="en-US" sz="1600" dirty="0"/>
           </a:p>
@@ -7546,7 +6722,7 @@
         </p:nvSpPr>
         <p:spPr>
           <a:xfrm>
-            <a:off x="736600" y="1689100"/>
+            <a:off x="736600" y="1676400"/>
             <a:ext cx="13843000" cy="787400"/>
           </a:xfrm>
           <a:prstGeom prst="rect">
@@ -7556,16 +6732,14 @@
           <a:ln/>
         </p:spPr>
         <p:txBody>
-          <a:bodyPr wrap="square" lIns="0" tIns="0" rIns="0" bIns="0" rtlCol="0" anchor="t">
-            <a:normAutofit/>
-          </a:bodyPr>
+          <a:bodyPr wrap="square" lIns="0" tIns="0" rIns="0" bIns="0" rtlCol="0" anchor="t"/>
           <a:lstStyle/>
           <a:p>
             <a:pPr algn="l" indent="0" marL="0">
               <a:buNone/>
             </a:pPr>
             <a:r>
-              <a:rPr lang="en-US" altLang="en-US" sz="3900" dirty="0">
+              <a:rPr lang="en-US" altLang="en-US" sz="4000" dirty="0">
                 <a:solidFill>
                   <a:srgbClr val="202124"/>
                 </a:solidFill>
@@ -7573,32 +6747,71 @@
                 <a:ea typeface="Inter" pitchFamily="34" charset="-122"/>
                 <a:cs typeface="Inter" pitchFamily="34" charset="-120"/>
               </a:rPr>
-              <a:t>Adapt the routine. Capture the next step. Revisit student evidence Friday.</a:t>
-            </a:r>
-            <a:endParaRPr lang="en-US" sz="3900" dirty="0"/>
-          </a:p>
-        </p:txBody>
-      </p:sp>
-      <p:sp>
-        <p:nvSpPr>
-          <p:cNvPr id="5" name="close-shape-4"/>
-          <p:cNvSpPr/>
-          <p:nvPr/>
-        </p:nvSpPr>
-        <p:spPr>
-          <a:xfrm>
-            <a:off x="736600" y="3136900"/>
-            <a:ext cx="14706600" cy="3505200"/>
-          </a:xfrm>
-          <a:prstGeom prst="rect">
-            <a:avLst/>
-          </a:prstGeom>
-          <a:solidFill>
-            <a:srgbClr val="F3F4F6"/>
+              <a:t>Before You Leave</a:t>
+            </a:r>
+            <a:endParaRPr lang="en-US" sz="4000" dirty="0"/>
+          </a:p>
+        </p:txBody>
+      </p:sp>
+      <p:sp>
+        <p:nvSpPr>
+          <p:cNvPr id="5" name="subtitle"/>
+          <p:cNvSpPr/>
+          <p:nvPr/>
+        </p:nvSpPr>
+        <p:spPr>
+          <a:xfrm>
+            <a:off x="736600" y="2667000"/>
+            <a:ext cx="13208000" cy="482600"/>
+          </a:xfrm>
+          <a:prstGeom prst="rect">
+            <a:avLst/>
+          </a:prstGeom>
+          <a:noFill/>
+          <a:ln/>
+        </p:spPr>
+        <p:txBody>
+          <a:bodyPr wrap="square" lIns="0" tIns="0" rIns="0" bIns="0" rtlCol="0" anchor="t"/>
+          <a:lstStyle/>
+          <a:p>
+            <a:pPr algn="l" indent="0" marL="0">
+              <a:buNone/>
+            </a:pPr>
+            <a:r>
+              <a:rPr lang="en-US" altLang="en-US" sz="2400" dirty="0">
+                <a:solidFill>
+                  <a:srgbClr val="343A40"/>
+                </a:solidFill>
+                <a:latin typeface="Inter" pitchFamily="34" charset="0"/>
+                <a:ea typeface="Inter" pitchFamily="34" charset="-122"/>
+                <a:cs typeface="Inter" pitchFamily="34" charset="-120"/>
+              </a:rPr>
+              <a:t>Choose one small next step. Bring evidence back on Friday.</a:t>
+            </a:r>
+            <a:endParaRPr lang="en-US" sz="2400" dirty="0"/>
+          </a:p>
+        </p:txBody>
+      </p:sp>
+      <p:sp>
+        <p:nvSpPr>
+          <p:cNvPr id="6" name="close-shape-5"/>
+          <p:cNvSpPr/>
+          <p:nvPr/>
+        </p:nvSpPr>
+        <p:spPr>
+          <a:xfrm>
+            <a:off x="736600" y="3746500"/>
+            <a:ext cx="4445000" cy="2730500"/>
+          </a:xfrm>
+          <a:prstGeom prst="rect">
+            <a:avLst/>
+          </a:prstGeom>
+          <a:solidFill>
+            <a:srgbClr val="F5F6F8"/>
           </a:solidFill>
           <a:ln w="12700">
             <a:solidFill>
-              <a:srgbClr val="D1D5DB"/>
+              <a:srgbClr val="D4D8DE"/>
             </a:solidFill>
             <a:prstDash val="solid"/>
           </a:ln>
@@ -7606,14 +6819,39 @@
       </p:sp>
       <p:sp>
         <p:nvSpPr>
-          <p:cNvPr id="6" name="close-shape-5"/>
-          <p:cNvSpPr/>
-          <p:nvPr/>
-        </p:nvSpPr>
-        <p:spPr>
-          <a:xfrm>
-            <a:off x="1092200" y="3543300"/>
-            <a:ext cx="4292600" cy="2324100"/>
+          <p:cNvPr id="7" name="close-shape-6"/>
+          <p:cNvSpPr/>
+          <p:nvPr/>
+        </p:nvSpPr>
+        <p:spPr>
+          <a:xfrm>
+            <a:off x="5905500" y="3746500"/>
+            <a:ext cx="4445000" cy="2730500"/>
+          </a:xfrm>
+          <a:prstGeom prst="rect">
+            <a:avLst/>
+          </a:prstGeom>
+          <a:solidFill>
+            <a:srgbClr val="F5F6F8"/>
+          </a:solidFill>
+          <a:ln w="12700">
+            <a:solidFill>
+              <a:srgbClr val="D4D8DE"/>
+            </a:solidFill>
+            <a:prstDash val="solid"/>
+          </a:ln>
+        </p:spPr>
+      </p:sp>
+      <p:sp>
+        <p:nvSpPr>
+          <p:cNvPr id="8" name="close-shape-7"/>
+          <p:cNvSpPr/>
+          <p:nvPr/>
+        </p:nvSpPr>
+        <p:spPr>
+          <a:xfrm>
+            <a:off x="11074400" y="3746500"/>
+            <a:ext cx="4368800" cy="2730500"/>
           </a:xfrm>
           <a:prstGeom prst="rect">
             <a:avLst/>
@@ -7621,7 +6859,7 @@
           <a:solidFill>
             <a:srgbClr val="FCE8EA"/>
           </a:solidFill>
-          <a:ln w="12700">
+          <a:ln w="25400">
             <a:solidFill>
               <a:srgbClr val="C41220"/>
             </a:solidFill>
@@ -7631,64 +6869,14 @@
       </p:sp>
       <p:sp>
         <p:nvSpPr>
-          <p:cNvPr id="7" name="close-shape-6"/>
-          <p:cNvSpPr/>
-          <p:nvPr/>
-        </p:nvSpPr>
-        <p:spPr>
-          <a:xfrm>
-            <a:off x="5981700" y="3543300"/>
-            <a:ext cx="4292600" cy="2324100"/>
-          </a:xfrm>
-          <a:prstGeom prst="rect">
-            <a:avLst/>
-          </a:prstGeom>
-          <a:solidFill>
-            <a:srgbClr val="F8F9FA"/>
-          </a:solidFill>
-          <a:ln w="12700">
-            <a:solidFill>
-              <a:srgbClr val="D1D5DB"/>
-            </a:solidFill>
-            <a:prstDash val="solid"/>
-          </a:ln>
-        </p:spPr>
-      </p:sp>
-      <p:sp>
-        <p:nvSpPr>
-          <p:cNvPr id="8" name="close-shape-7"/>
-          <p:cNvSpPr/>
-          <p:nvPr/>
-        </p:nvSpPr>
-        <p:spPr>
-          <a:xfrm>
-            <a:off x="10871200" y="3543300"/>
-            <a:ext cx="4216400" cy="2324100"/>
-          </a:xfrm>
-          <a:prstGeom prst="rect">
-            <a:avLst/>
-          </a:prstGeom>
-          <a:solidFill>
-            <a:srgbClr val="F8F9FA"/>
-          </a:solidFill>
-          <a:ln w="12700">
-            <a:solidFill>
-              <a:srgbClr val="D1D5DB"/>
-            </a:solidFill>
-            <a:prstDash val="solid"/>
-          </a:ln>
-        </p:spPr>
-      </p:sp>
-      <p:sp>
-        <p:nvSpPr>
-          <p:cNvPr id="9" name="use"/>
-          <p:cNvSpPr/>
-          <p:nvPr/>
-        </p:nvSpPr>
-        <p:spPr>
-          <a:xfrm>
-            <a:off x="1346200" y="3835400"/>
-            <a:ext cx="3784600" cy="1714500"/>
+          <p:cNvPr id="9" name="step1"/>
+          <p:cNvSpPr/>
+          <p:nvPr/>
+        </p:nvSpPr>
+        <p:spPr>
+          <a:xfrm>
+            <a:off x="1117600" y="4216400"/>
+            <a:ext cx="3683000" cy="1714500"/>
           </a:xfrm>
           <a:prstGeom prst="rect">
             <a:avLst/>
@@ -7700,14 +6888,14 @@
           <a:bodyPr wrap="square" lIns="0" tIns="0" rIns="0" bIns="0" rtlCol="0" anchor="t"/>
           <a:lstStyle/>
           <a:p>
-            <a:pPr algn="l" indent="0" marL="0">
+            <a:pPr algn="ctr" indent="0" marL="0">
               <a:lnSpc>
-                <a:spcPts val="1680"/>
+                <a:spcPts val="2232"/>
               </a:lnSpc>
               <a:buNone/>
             </a:pPr>
             <a:r>
-              <a:rPr lang="en-US" altLang="en-US" sz="1400" b="1" dirty="0">
+              <a:rPr lang="en-US" altLang="en-US" sz="1800" b="1" dirty="0">
                 <a:solidFill>
                   <a:srgbClr val="C41220"/>
                 </a:solidFill>
@@ -7715,45 +6903,45 @@
                 <a:ea typeface="Inter" pitchFamily="34" charset="-122"/>
                 <a:cs typeface="Inter" pitchFamily="34" charset="-120"/>
               </a:rPr>
-              <a:t>ADAPT</a:t>
-            </a:r>
-            <a:endParaRPr lang="en-US" sz="2000" dirty="0"/>
-          </a:p>
-          <a:p>
-            <a:pPr algn="l" indent="0" marL="0">
+              <a:t>1. TEACH</a:t>
+            </a:r>
+            <a:endParaRPr lang="en-US" sz="2500" dirty="0"/>
+          </a:p>
+          <a:p>
+            <a:pPr algn="ctr" indent="0" marL="0">
               <a:lnSpc>
-                <a:spcPts val="2400"/>
+                <a:spcPts val="3100"/>
               </a:lnSpc>
               <a:spcBef>
-                <a:spcPts val="900"/>
+                <a:spcPts val="1500"/>
               </a:spcBef>
               <a:buNone/>
             </a:pPr>
             <a:r>
-              <a:rPr lang="en-US" altLang="en-US" sz="2000" b="1" dirty="0">
-                <a:solidFill>
-                  <a:srgbClr val="3C4043"/>
-                </a:solidFill>
-                <a:latin typeface="Inter" pitchFamily="34" charset="0"/>
-                <a:ea typeface="Inter" pitchFamily="34" charset="-122"/>
-                <a:cs typeface="Inter" pitchFamily="34" charset="-120"/>
-              </a:rPr>
-              <a:t>Teach the CUBS/CER routine with an appropriate course source and response task.</a:t>
-            </a:r>
-            <a:endParaRPr lang="en-US" sz="2000" dirty="0"/>
-          </a:p>
-        </p:txBody>
-      </p:sp>
-      <p:sp>
-        <p:nvSpPr>
-          <p:cNvPr id="10" name="collect"/>
-          <p:cNvSpPr/>
-          <p:nvPr/>
-        </p:nvSpPr>
-        <p:spPr>
-          <a:xfrm>
-            <a:off x="6235700" y="3835400"/>
-            <a:ext cx="3784600" cy="1714500"/>
+              <a:rPr lang="en-US" altLang="en-US" sz="2500" dirty="0">
+                <a:solidFill>
+                  <a:srgbClr val="343A40"/>
+                </a:solidFill>
+                <a:latin typeface="Inter" pitchFamily="34" charset="0"/>
+                <a:ea typeface="Inter" pitchFamily="34" charset="-122"/>
+                <a:cs typeface="Inter" pitchFamily="34" charset="-120"/>
+              </a:rPr>
+              <a:t>Use CUBS or CER with one source in an upcoming lesson.</a:t>
+            </a:r>
+            <a:endParaRPr lang="en-US" sz="2500" dirty="0"/>
+          </a:p>
+        </p:txBody>
+      </p:sp>
+      <p:sp>
+        <p:nvSpPr>
+          <p:cNvPr id="10" name="step2"/>
+          <p:cNvSpPr/>
+          <p:nvPr/>
+        </p:nvSpPr>
+        <p:spPr>
+          <a:xfrm>
+            <a:off x="6286500" y="4216400"/>
+            <a:ext cx="3683000" cy="1714500"/>
           </a:xfrm>
           <a:prstGeom prst="rect">
             <a:avLst/>
@@ -7765,14 +6953,14 @@
           <a:bodyPr wrap="square" lIns="0" tIns="0" rIns="0" bIns="0" rtlCol="0" anchor="t"/>
           <a:lstStyle/>
           <a:p>
-            <a:pPr algn="l" indent="0" marL="0">
+            <a:pPr algn="ctr" indent="0" marL="0">
               <a:lnSpc>
-                <a:spcPts val="1652"/>
+                <a:spcPts val="2232"/>
               </a:lnSpc>
               <a:buNone/>
             </a:pPr>
             <a:r>
-              <a:rPr lang="en-US" altLang="en-US" sz="1400" b="1" dirty="0">
+              <a:rPr lang="en-US" altLang="en-US" sz="1800" b="1" dirty="0">
                 <a:solidFill>
                   <a:srgbClr val="C41220"/>
                 </a:solidFill>
@@ -7780,45 +6968,45 @@
                 <a:ea typeface="Inter" pitchFamily="34" charset="-122"/>
                 <a:cs typeface="Inter" pitchFamily="34" charset="-120"/>
               </a:rPr>
-              <a:t>PLAN + REFLECT</a:t>
-            </a:r>
-            <a:endParaRPr lang="en-US" sz="1900" dirty="0"/>
-          </a:p>
-          <a:p>
-            <a:pPr algn="l" indent="0" marL="0">
+              <a:t>2. COLLECT</a:t>
+            </a:r>
+            <a:endParaRPr lang="en-US" sz="2500" dirty="0"/>
+          </a:p>
+          <a:p>
+            <a:pPr algn="ctr" indent="0" marL="0">
               <a:lnSpc>
-                <a:spcPts val="2242"/>
+                <a:spcPts val="3100"/>
               </a:lnSpc>
               <a:spcBef>
-                <a:spcPts val="900"/>
+                <a:spcPts val="1500"/>
               </a:spcBef>
               <a:buNone/>
             </a:pPr>
             <a:r>
-              <a:rPr lang="en-US" altLang="en-US" sz="1900" b="1" dirty="0">
-                <a:solidFill>
-                  <a:srgbClr val="3C4043"/>
-                </a:solidFill>
-                <a:latin typeface="Inter" pitchFamily="34" charset="0"/>
-                <a:ea typeface="Inter" pitchFamily="34" charset="-122"/>
-                <a:cs typeface="Inter" pitchFamily="34" charset="-120"/>
-              </a:rPr>
-              <a:t>Use the Lesson Planning &amp; Reflection Sheet to record the student strategy, data-based need, feedback/revision action, colleague idea, and evidence you will collect.</a:t>
-            </a:r>
-            <a:endParaRPr lang="en-US" sz="1900" dirty="0"/>
-          </a:p>
-        </p:txBody>
-      </p:sp>
-      <p:sp>
-        <p:nvSpPr>
-          <p:cNvPr id="11" name="revisit"/>
-          <p:cNvSpPr/>
-          <p:nvPr/>
-        </p:nvSpPr>
-        <p:spPr>
-          <a:xfrm>
-            <a:off x="11125200" y="3835400"/>
-            <a:ext cx="3708400" cy="1714500"/>
+              <a:rPr lang="en-US" altLang="en-US" sz="2500" dirty="0">
+                <a:solidFill>
+                  <a:srgbClr val="343A40"/>
+                </a:solidFill>
+                <a:latin typeface="Inter" pitchFamily="34" charset="0"/>
+                <a:ea typeface="Inter" pitchFamily="34" charset="-122"/>
+                <a:cs typeface="Inter" pitchFamily="34" charset="-120"/>
+              </a:rPr>
+              <a:t>Save one or two de-identified student responses.</a:t>
+            </a:r>
+            <a:endParaRPr lang="en-US" sz="2500" dirty="0"/>
+          </a:p>
+        </p:txBody>
+      </p:sp>
+      <p:sp>
+        <p:nvSpPr>
+          <p:cNvPr id="11" name="step3"/>
+          <p:cNvSpPr/>
+          <p:nvPr/>
+        </p:nvSpPr>
+        <p:spPr>
+          <a:xfrm>
+            <a:off x="11455400" y="4216400"/>
+            <a:ext cx="3606800" cy="1714500"/>
           </a:xfrm>
           <a:prstGeom prst="rect">
             <a:avLst/>
@@ -7830,14 +7018,14 @@
           <a:bodyPr wrap="square" lIns="0" tIns="0" rIns="0" bIns="0" rtlCol="0" anchor="t"/>
           <a:lstStyle/>
           <a:p>
-            <a:pPr algn="l" indent="0" marL="0">
+            <a:pPr algn="ctr" indent="0" marL="0">
               <a:lnSpc>
-                <a:spcPts val="1680"/>
+                <a:spcPts val="2232"/>
               </a:lnSpc>
               <a:buNone/>
             </a:pPr>
             <a:r>
-              <a:rPr lang="en-US" altLang="en-US" sz="1400" b="1" dirty="0">
+              <a:rPr lang="en-US" altLang="en-US" sz="1800" b="1" dirty="0">
                 <a:solidFill>
                   <a:srgbClr val="C41220"/>
                 </a:solidFill>
@@ -7845,45 +7033,65 @@
                 <a:ea typeface="Inter" pitchFamily="34" charset="-122"/>
                 <a:cs typeface="Inter" pitchFamily="34" charset="-120"/>
               </a:rPr>
-              <a:t>REVISIT FRIDAY</a:t>
-            </a:r>
-            <a:endParaRPr lang="en-US" sz="2000" dirty="0"/>
-          </a:p>
-          <a:p>
-            <a:pPr algn="l" indent="0" marL="0">
+              <a:t>3. BRING FRIDAY</a:t>
+            </a:r>
+            <a:endParaRPr lang="en-US" sz="2500" dirty="0"/>
+          </a:p>
+          <a:p>
+            <a:pPr algn="ctr" indent="0" marL="0">
               <a:lnSpc>
-                <a:spcPts val="2400"/>
+                <a:spcPts val="3100"/>
               </a:lnSpc>
               <a:spcBef>
-                <a:spcPts val="900"/>
+                <a:spcPts val="1500"/>
               </a:spcBef>
               <a:buNone/>
             </a:pPr>
             <a:r>
-              <a:rPr lang="en-US" altLang="en-US" sz="2000" b="1" dirty="0">
-                <a:solidFill>
-                  <a:srgbClr val="3C4043"/>
-                </a:solidFill>
-                <a:latin typeface="Inter" pitchFamily="34" charset="0"/>
-                <a:ea typeface="Inter" pitchFamily="34" charset="-122"/>
-                <a:cs typeface="Inter" pitchFamily="34" charset="-120"/>
-              </a:rPr>
-              <a:t>Use completed writing and feedback evidence to plan a precise, standard-focused next step.</a:t>
-            </a:r>
-            <a:endParaRPr lang="en-US" sz="2000" dirty="0"/>
-          </a:p>
-        </p:txBody>
-      </p:sp>
-      <p:sp>
-        <p:nvSpPr>
-          <p:cNvPr id="12" name="bottom"/>
-          <p:cNvSpPr/>
-          <p:nvPr/>
-        </p:nvSpPr>
-        <p:spPr>
-          <a:xfrm>
-            <a:off x="736600" y="7289800"/>
-            <a:ext cx="14198600" cy="457200"/>
+              <a:rPr lang="en-US" altLang="en-US" sz="2500" dirty="0">
+                <a:solidFill>
+                  <a:srgbClr val="343A40"/>
+                </a:solidFill>
+                <a:latin typeface="Inter" pitchFamily="34" charset="0"/>
+                <a:ea typeface="Inter" pitchFamily="34" charset="-122"/>
+                <a:cs typeface="Inter" pitchFamily="34" charset="-120"/>
+              </a:rPr>
+              <a:t>Bring student work and the feedback you gave.</a:t>
+            </a:r>
+            <a:endParaRPr lang="en-US" sz="2500" dirty="0"/>
+          </a:p>
+        </p:txBody>
+      </p:sp>
+      <p:sp>
+        <p:nvSpPr>
+          <p:cNvPr id="12" name="close-shape-11"/>
+          <p:cNvSpPr/>
+          <p:nvPr/>
+        </p:nvSpPr>
+        <p:spPr>
+          <a:xfrm>
+            <a:off x="736600" y="7302500"/>
+            <a:ext cx="14706600" cy="736600"/>
+          </a:xfrm>
+          <a:prstGeom prst="rect">
+            <a:avLst/>
+          </a:prstGeom>
+          <a:solidFill>
+            <a:srgbClr val="202124"/>
+          </a:solidFill>
+          <a:ln/>
+        </p:spPr>
+      </p:sp>
+      <p:sp>
+        <p:nvSpPr>
+          <p:cNvPr id="13" name="bottom"/>
+          <p:cNvSpPr/>
+          <p:nvPr/>
+        </p:nvSpPr>
+        <p:spPr>
+          <a:xfrm>
+            <a:off x="1117600" y="7518400"/>
+            <a:ext cx="13944600" cy="330200"/>
           </a:xfrm>
           <a:prstGeom prst="rect">
             <a:avLst/>
@@ -7899,9 +7107,9 @@
               <a:buNone/>
             </a:pPr>
             <a:r>
-              <a:rPr lang="en-US" altLang="en-US" sz="2200" b="1" dirty="0">
-                <a:solidFill>
-                  <a:srgbClr val="C41220"/>
+              <a:rPr lang="en-US" altLang="en-US" sz="2100" b="1" dirty="0">
+                <a:solidFill>
+                  <a:srgbClr val="F6B4BA"/>
                 </a:solidFill>
                 <a:latin typeface="Inter" pitchFamily="34" charset="0"/>
                 <a:ea typeface="Inter" pitchFamily="34" charset="-122"/>
@@ -7910,23 +7118,23 @@
               <a:t>Remember:</a:t>
             </a:r>
             <a:r>
-              <a:rPr lang="en-US" altLang="en-US" sz="2200" dirty="0">
-                <a:solidFill>
-                  <a:srgbClr val="3C4043"/>
-                </a:solidFill>
-                <a:latin typeface="Inter" pitchFamily="34" charset="0"/>
-                <a:ea typeface="Inter" pitchFamily="34" charset="-122"/>
-                <a:cs typeface="Inter" pitchFamily="34" charset="-120"/>
-              </a:rPr>
-              <a:t> the routine supports students’ own analysis and explanation; it does not provide the answer.</a:t>
-            </a:r>
-            <a:endParaRPr lang="en-US" sz="2200" dirty="0"/>
-          </a:p>
-        </p:txBody>
-      </p:sp>
-      <p:sp>
-        <p:nvSpPr>
-          <p:cNvPr id="13" name="page"/>
+              <a:rPr lang="en-US" altLang="en-US" sz="2100" dirty="0">
+                <a:solidFill>
+                  <a:srgbClr val="FFFFFF"/>
+                </a:solidFill>
+                <a:latin typeface="Inter" pitchFamily="34" charset="0"/>
+                <a:ea typeface="Inter" pitchFamily="34" charset="-122"/>
+                <a:cs typeface="Inter" pitchFamily="34" charset="-120"/>
+              </a:rPr>
+              <a:t> students need practice thinking, writing, and revising—not a completed answer.</a:t>
+            </a:r>
+            <a:endParaRPr lang="en-US" sz="2100" dirty="0"/>
+          </a:p>
+        </p:txBody>
+      </p:sp>
+      <p:sp>
+        <p:nvSpPr>
+          <p:cNvPr id="14" name="page"/>
           <p:cNvSpPr/>
           <p:nvPr/>
         </p:nvSpPr>
@@ -7951,7 +7159,7 @@
             <a:r>
               <a:rPr lang="en-US" altLang="en-US" sz="1300" dirty="0">
                 <a:solidFill>
-                  <a:srgbClr val="6B7280"/>
+                  <a:srgbClr val="667085"/>
                 </a:solidFill>
                 <a:latin typeface="Inter" pitchFamily="34" charset="0"/>
                 <a:ea typeface="Inter" pitchFamily="34" charset="-122"/>
@@ -7965,7 +7173,7 @@
       </p:sp>
       <p:sp>
         <p:nvSpPr>
-          <p:cNvPr id="14" name="close-shape-13"/>
+          <p:cNvPr id="15" name="close-shape-14"/>
           <p:cNvSpPr/>
           <p:nvPr/>
         </p:nvSpPr>

--- a/assets/plc/2026-10-28_Science_Department_PD_Strengthening_Science_Literacy.pptx
+++ b/assets/plc/2026-10-28_Science_Department_PD_Strengthening_Science_Literacy.pptx
@@ -1947,7 +1947,7 @@
                 <a:ea typeface="Inter" pitchFamily="34" charset="-122"/>
                 <a:cs typeface="Inter" pitchFamily="34" charset="-120"/>
               </a:rPr>
-              <a:t>Bring:</a:t>
+              <a:t>Please bring:</a:t>
             </a:r>
             <a:r>
               <a:rPr lang="en-US" altLang="en-US" sz="2200" dirty="0">
@@ -1958,7 +1958,7 @@
                 <a:ea typeface="Inter" pitchFamily="34" charset="-122"/>
                 <a:cs typeface="Inter" pitchFamily="34" charset="-120"/>
               </a:rPr>
-              <a:t> one course source or task and one de-identified student writing sample. Use a source that students will read, view, or analyze in an upcoming lesson.</a:t>
+              <a:t> one science source or task from an upcoming lesson and one de-identified sample of student writing.</a:t>
             </a:r>
             <a:endParaRPr lang="en-US" sz="2200" dirty="0"/>
           </a:p>

--- a/assets/plc/2026-10-28_Science_Department_PD_Strengthening_Science_Literacy.pptx
+++ b/assets/plc/2026-10-28_Science_Department_PD_Strengthening_Science_Literacy.pptx
@@ -1681,7 +1681,46 @@
         <p:spPr>
           <a:xfrm>
             <a:off x="736600" y="1676400"/>
-            <a:ext cx="10414000" cy="1955800"/>
+            <a:ext cx="10160000" cy="889000"/>
+          </a:xfrm>
+          <a:prstGeom prst="rect">
+            <a:avLst/>
+          </a:prstGeom>
+          <a:noFill/>
+          <a:ln/>
+        </p:spPr>
+        <p:txBody>
+          <a:bodyPr wrap="square" lIns="0" tIns="0" rIns="0" bIns="0" rtlCol="0" anchor="t"/>
+          <a:lstStyle/>
+          <a:p>
+            <a:pPr algn="l" indent="0" marL="0">
+              <a:buNone/>
+            </a:pPr>
+            <a:r>
+              <a:rPr lang="en-US" altLang="en-US" sz="4200" dirty="0">
+                <a:solidFill>
+                  <a:srgbClr val="202124"/>
+                </a:solidFill>
+                <a:latin typeface="Inter" pitchFamily="34" charset="0"/>
+                <a:ea typeface="Inter" pitchFamily="34" charset="-122"/>
+                <a:cs typeface="Inter" pitchFamily="34" charset="-120"/>
+              </a:rPr>
+              <a:t>Strengthening Science Literacy</a:t>
+            </a:r>
+            <a:endParaRPr lang="en-US" sz="4200" dirty="0"/>
+          </a:p>
+        </p:txBody>
+      </p:sp>
+      <p:sp>
+        <p:nvSpPr>
+          <p:cNvPr id="6" name="subtitle"/>
+          <p:cNvSpPr/>
+          <p:nvPr/>
+        </p:nvSpPr>
+        <p:spPr>
+          <a:xfrm>
+            <a:off x="736600" y="2794000"/>
+            <a:ext cx="10414000" cy="1117600"/>
           </a:xfrm>
           <a:prstGeom prst="rect">
             <a:avLst/>
@@ -1695,93 +1734,53 @@
           <a:p>
             <a:pPr algn="l" indent="0" marL="0">
               <a:lnSpc>
-                <a:spcPts val="4028"/>
+                <a:spcPts val="3360"/>
               </a:lnSpc>
               <a:buNone/>
             </a:pPr>
             <a:r>
-              <a:rPr lang="en-US" altLang="en-US" sz="3800" dirty="0">
-                <a:solidFill>
-                  <a:srgbClr val="202124"/>
-                </a:solidFill>
-                <a:latin typeface="Inter" pitchFamily="34" charset="0"/>
-                <a:ea typeface="Inter" pitchFamily="34" charset="-122"/>
-                <a:cs typeface="Inter" pitchFamily="34" charset="-120"/>
-              </a:rPr>
-              <a:t>Strengthening Science Literacy:</a:t>
-            </a:r>
-            <a:endParaRPr lang="en-US" sz="3800" dirty="0"/>
-          </a:p>
+              <a:rPr lang="en-US" altLang="en-US" sz="2800" dirty="0">
+                <a:solidFill>
+                  <a:srgbClr val="343A40"/>
+                </a:solidFill>
+                <a:latin typeface="Inter" pitchFamily="34" charset="0"/>
+                <a:ea typeface="Inter" pitchFamily="34" charset="-122"/>
+                <a:cs typeface="Inter" pitchFamily="34" charset="-120"/>
+              </a:rPr>
+              <a:t>Calibrating Writing Benchmarks, Feedback, and Revision</a:t>
+            </a:r>
+            <a:endParaRPr lang="en-US" sz="2800" dirty="0"/>
+          </a:p>
+        </p:txBody>
+      </p:sp>
+      <p:sp>
+        <p:nvSpPr>
+          <p:cNvPr id="7" name="purpose"/>
+          <p:cNvSpPr/>
+          <p:nvPr/>
+        </p:nvSpPr>
+        <p:spPr>
+          <a:xfrm>
+            <a:off x="736600" y="4191000"/>
+            <a:ext cx="10033000" cy="1168400"/>
+          </a:xfrm>
+          <a:prstGeom prst="rect">
+            <a:avLst/>
+          </a:prstGeom>
+          <a:noFill/>
+          <a:ln/>
+        </p:spPr>
+        <p:txBody>
+          <a:bodyPr wrap="square" lIns="0" tIns="0" rIns="0" bIns="0" rtlCol="0" anchor="t"/>
+          <a:lstStyle/>
           <a:p>
             <a:pPr algn="l" indent="0" marL="0">
               <a:lnSpc>
-                <a:spcPts val="4028"/>
+                <a:spcPts val="3000"/>
               </a:lnSpc>
               <a:buNone/>
             </a:pPr>
             <a:r>
-              <a:rPr lang="en-US" altLang="en-US" sz="3800" dirty="0">
-                <a:solidFill>
-                  <a:srgbClr val="202124"/>
-                </a:solidFill>
-                <a:latin typeface="Inter" pitchFamily="34" charset="0"/>
-                <a:ea typeface="Inter" pitchFamily="34" charset="-122"/>
-                <a:cs typeface="Inter" pitchFamily="34" charset="-120"/>
-              </a:rPr>
-              <a:t>Calibrating Writing Benchmarks,</a:t>
-            </a:r>
-            <a:endParaRPr lang="en-US" sz="3800" dirty="0"/>
-          </a:p>
-          <a:p>
-            <a:pPr algn="l" indent="0" marL="0">
-              <a:lnSpc>
-                <a:spcPts val="4028"/>
-              </a:lnSpc>
-              <a:buNone/>
-            </a:pPr>
-            <a:r>
-              <a:rPr lang="en-US" altLang="en-US" sz="3800" dirty="0">
-                <a:solidFill>
-                  <a:srgbClr val="202124"/>
-                </a:solidFill>
-                <a:latin typeface="Inter" pitchFamily="34" charset="0"/>
-                <a:ea typeface="Inter" pitchFamily="34" charset="-122"/>
-                <a:cs typeface="Inter" pitchFamily="34" charset="-120"/>
-              </a:rPr>
-              <a:t>Feedback, and Revision</a:t>
-            </a:r>
-            <a:endParaRPr lang="en-US" sz="3800" dirty="0"/>
-          </a:p>
-        </p:txBody>
-      </p:sp>
-      <p:sp>
-        <p:nvSpPr>
-          <p:cNvPr id="6" name="subtitle"/>
-          <p:cNvSpPr/>
-          <p:nvPr/>
-        </p:nvSpPr>
-        <p:spPr>
-          <a:xfrm>
-            <a:off x="736600" y="4013200"/>
-            <a:ext cx="9906000" cy="1016000"/>
-          </a:xfrm>
-          <a:prstGeom prst="rect">
-            <a:avLst/>
-          </a:prstGeom>
-          <a:noFill/>
-          <a:ln/>
-        </p:spPr>
-        <p:txBody>
-          <a:bodyPr wrap="square" lIns="0" tIns="0" rIns="0" bIns="0" rtlCol="0" anchor="t"/>
-          <a:lstStyle/>
-          <a:p>
-            <a:pPr algn="l" indent="0" marL="0">
-              <a:lnSpc>
-                <a:spcPts val="2928"/>
-              </a:lnSpc>
-              <a:buNone/>
-            </a:pPr>
-            <a:r>
               <a:rPr lang="en-US" altLang="en-US" sz="2400" dirty="0">
                 <a:solidFill>
                   <a:srgbClr val="343A40"/>
@@ -1790,7 +1789,7 @@
                 <a:ea typeface="Inter" pitchFamily="34" charset="-122"/>
                 <a:cs typeface="Inter" pitchFamily="34" charset="-120"/>
               </a:rPr>
-              <a:t>A simple routine for helping students read a science source, write an explanation, and revise their thinking.</a:t>
+              <a:t>Today’s focus: help students analyze a science source, write a color-coded CER, use feedback, and revise.</a:t>
             </a:r>
             <a:endParaRPr lang="en-US" sz="2400" dirty="0"/>
           </a:p>
@@ -1798,7 +1797,7 @@
       </p:sp>
       <p:sp>
         <p:nvSpPr>
-          <p:cNvPr id="7" name="cover-shape-6"/>
+          <p:cNvPr id="8" name="cover-shape-7"/>
           <p:cNvSpPr/>
           <p:nvPr/>
         </p:nvSpPr>
@@ -1823,7 +1822,7 @@
       </p:sp>
       <p:sp>
         <p:nvSpPr>
-          <p:cNvPr id="8" name="today"/>
+          <p:cNvPr id="9" name="today"/>
           <p:cNvSpPr/>
           <p:nvPr/>
         </p:nvSpPr>
@@ -1857,7 +1856,7 @@
                 <a:ea typeface="Inter" pitchFamily="34" charset="-122"/>
                 <a:cs typeface="Inter" pitchFamily="34" charset="-120"/>
               </a:rPr>
-              <a:t>TODAY'S GOAL</a:t>
+              <a:t>TODAY'S OUTCOME</a:t>
             </a:r>
             <a:endParaRPr lang="en-US" sz="2300" dirty="0"/>
           </a:p>
@@ -1880,7 +1879,7 @@
                 <a:ea typeface="Inter" pitchFamily="34" charset="-122"/>
                 <a:cs typeface="Inter" pitchFamily="34" charset="-120"/>
               </a:rPr>
-              <a:t>Leave with one simple strategy to use with your students.</a:t>
+              <a:t>Leave with one clear routine to use in an upcoming lesson.</a:t>
             </a:r>
             <a:endParaRPr lang="en-US" sz="2300" dirty="0"/>
           </a:p>
@@ -1888,7 +1887,7 @@
       </p:sp>
       <p:sp>
         <p:nvSpPr>
-          <p:cNvPr id="9" name="cover-shape-8"/>
+          <p:cNvPr id="10" name="cover-shape-9"/>
           <p:cNvSpPr/>
           <p:nvPr/>
         </p:nvSpPr>
@@ -1913,7 +1912,7 @@
       </p:sp>
       <p:sp>
         <p:nvSpPr>
-          <p:cNvPr id="10" name="bring"/>
+          <p:cNvPr id="11" name="materials"/>
           <p:cNvSpPr/>
           <p:nvPr/>
         </p:nvSpPr>
@@ -1947,7 +1946,7 @@
                 <a:ea typeface="Inter" pitchFamily="34" charset="-122"/>
                 <a:cs typeface="Inter" pitchFamily="34" charset="-120"/>
               </a:rPr>
-              <a:t>Please bring:</a:t>
+              <a:t>Work with today:</a:t>
             </a:r>
             <a:r>
               <a:rPr lang="en-US" altLang="en-US" sz="2200" dirty="0">
@@ -1958,7 +1957,7 @@
                 <a:ea typeface="Inter" pitchFamily="34" charset="-122"/>
                 <a:cs typeface="Inter" pitchFamily="34" charset="-120"/>
               </a:rPr>
-              <a:t> one science source or task from an upcoming lesson and one de-identified sample of student writing.</a:t>
+              <a:t> an upcoming science source or task  •  one anonymous student response</a:t>
             </a:r>
             <a:endParaRPr lang="en-US" sz="2200" dirty="0"/>
           </a:p>
@@ -1966,7 +1965,7 @@
       </p:sp>
       <p:sp>
         <p:nvSpPr>
-          <p:cNvPr id="11" name="footer"/>
+          <p:cNvPr id="12" name="footer"/>
           <p:cNvSpPr/>
           <p:nvPr/>
         </p:nvSpPr>
@@ -2016,7 +2015,7 @@
       </p:sp>
       <p:sp>
         <p:nvSpPr>
-          <p:cNvPr id="12" name="page"/>
+          <p:cNvPr id="13" name="page"/>
           <p:cNvSpPr/>
           <p:nvPr/>
         </p:nvSpPr>
@@ -2055,7 +2054,7 @@
       </p:sp>
       <p:sp>
         <p:nvSpPr>
-          <p:cNvPr id="13" name="cover-shape-12"/>
+          <p:cNvPr id="14" name="cover-shape-13"/>
           <p:cNvSpPr/>
           <p:nvPr/>
         </p:nvSpPr>
@@ -2158,7 +2157,7 @@
                 <a:ea typeface="Inter" pitchFamily="34" charset="-122"/>
                 <a:cs typeface="Inter" pitchFamily="34" charset="-120"/>
               </a:rPr>
-              <a:t>The Simple Routine for Today</a:t>
+              <a:t>A Practical Outcome for Today</a:t>
             </a:r>
             <a:endParaRPr lang="en-US" sz="3000" dirty="0"/>
           </a:p>
@@ -2236,7 +2235,7 @@
                 <a:ea typeface="Inter" pitchFamily="34" charset="-122"/>
                 <a:cs typeface="Inter" pitchFamily="34" charset="-120"/>
               </a:rPr>
-              <a:t>Students first make sense of a source. Then they use that thinking to write and improve an explanation.</a:t>
+              <a:t>By the end of the session, each teacher will have a simple plan for one upcoming lesson.</a:t>
             </a:r>
             <a:endParaRPr lang="en-US" sz="2400" dirty="0"/>
           </a:p>
@@ -2401,7 +2400,7 @@
                 <a:ea typeface="Inter" pitchFamily="34" charset="-122"/>
                 <a:cs typeface="Inter" pitchFamily="34" charset="-120"/>
               </a:rPr>
-              <a:t>Read the source</a:t>
+              <a:t>Choose a source</a:t>
             </a:r>
             <a:endParaRPr lang="en-US" sz="2300" dirty="0"/>
           </a:p>
@@ -2424,7 +2423,7 @@
                 <a:ea typeface="Inter" pitchFamily="34" charset="-122"/>
                 <a:cs typeface="Inter" pitchFamily="34" charset="-120"/>
               </a:rPr>
-              <a:t>Students notice the important information.</a:t>
+              <a:t>Select what students will read, view, or analyze.</a:t>
             </a:r>
             <a:endParaRPr lang="en-US" sz="2300" dirty="0"/>
           </a:p>
@@ -2489,7 +2488,7 @@
                 <a:ea typeface="Inter" pitchFamily="34" charset="-122"/>
                 <a:cs typeface="Inter" pitchFamily="34" charset="-120"/>
               </a:rPr>
-              <a:t>Write a CER</a:t>
+              <a:t>Plan the routine</a:t>
             </a:r>
             <a:endParaRPr lang="en-US" sz="2300" dirty="0"/>
           </a:p>
@@ -2512,7 +2511,7 @@
                 <a:ea typeface="Inter" pitchFamily="34" charset="-122"/>
                 <a:cs typeface="Inter" pitchFamily="34" charset="-120"/>
               </a:rPr>
-              <a:t>Students explain what the source shows.</a:t>
+              <a:t>Decide what students will do with CUBS and CER.</a:t>
             </a:r>
             <a:endParaRPr lang="en-US" sz="2300" dirty="0"/>
           </a:p>
@@ -2577,7 +2576,7 @@
                 <a:ea typeface="Inter" pitchFamily="34" charset="-122"/>
                 <a:cs typeface="Inter" pitchFamily="34" charset="-120"/>
               </a:rPr>
-              <a:t>Use feedback</a:t>
+              <a:t>Plan feedback</a:t>
             </a:r>
             <a:endParaRPr lang="en-US" sz="2300" dirty="0"/>
           </a:p>
@@ -2600,7 +2599,7 @@
                 <a:ea typeface="Inter" pitchFamily="34" charset="-122"/>
                 <a:cs typeface="Inter" pitchFamily="34" charset="-120"/>
               </a:rPr>
-              <a:t>Students find one part to improve.</a:t>
+              <a:t>Choose one prompt that directs a revision.</a:t>
             </a:r>
             <a:endParaRPr lang="en-US" sz="2300" dirty="0"/>
           </a:p>
@@ -2665,7 +2664,7 @@
                 <a:ea typeface="Inter" pitchFamily="34" charset="-122"/>
                 <a:cs typeface="Inter" pitchFamily="34" charset="-120"/>
               </a:rPr>
-              <a:t>Revise</a:t>
+              <a:t>Check the evidence</a:t>
             </a:r>
             <a:endParaRPr lang="en-US" sz="2300" dirty="0"/>
           </a:p>
@@ -2688,7 +2687,7 @@
                 <a:ea typeface="Inter" pitchFamily="34" charset="-122"/>
                 <a:cs typeface="Inter" pitchFamily="34" charset="-120"/>
               </a:rPr>
-              <a:t>Students add, change, or strengthen their explanation.</a:t>
+              <a:t>Collect student work and use it to plan next steps.</a:t>
             </a:r>
             <a:endParaRPr lang="en-US" sz="2300" dirty="0"/>
           </a:p>
@@ -2739,17 +2738,6 @@
               <a:buNone/>
             </a:pPr>
             <a:r>
-              <a:rPr lang="en-US" altLang="en-US" sz="2100" b="1" dirty="0">
-                <a:solidFill>
-                  <a:srgbClr val="F6B4BA"/>
-                </a:solidFill>
-                <a:latin typeface="Inter" pitchFamily="34" charset="0"/>
-                <a:ea typeface="Inter" pitchFamily="34" charset="-122"/>
-                <a:cs typeface="Inter" pitchFamily="34" charset="-120"/>
-              </a:rPr>
-              <a:t>Important:</a:t>
-            </a:r>
-            <a:r>
               <a:rPr lang="en-US" altLang="en-US" sz="2100" dirty="0">
                 <a:solidFill>
                   <a:srgbClr val="FFFFFF"/>
@@ -2758,7 +2746,7 @@
                 <a:ea typeface="Inter" pitchFamily="34" charset="-122"/>
                 <a:cs typeface="Inter" pitchFamily="34" charset="-120"/>
               </a:rPr>
-              <a:t> The routine supports student thinking. It does not give students the answer.</a:t>
+              <a:t>The routine supports student thinking. It does not give students the answer.</a:t>
             </a:r>
             <a:endParaRPr lang="en-US" sz="2100" dirty="0"/>
           </a:p>
@@ -2908,7 +2896,7 @@
                 <a:ea typeface="Inter" pitchFamily="34" charset="-122"/>
                 <a:cs typeface="Inter" pitchFamily="34" charset="-120"/>
               </a:rPr>
-              <a:t>How This Connects to This Week's PLCs</a:t>
+              <a:t>How Today Connects to This Week</a:t>
             </a:r>
             <a:endParaRPr lang="en-US" sz="3000" dirty="0"/>
           </a:p>
@@ -2986,7 +2974,7 @@
                 <a:ea typeface="Inter" pitchFamily="34" charset="-122"/>
                 <a:cs typeface="Inter" pitchFamily="34" charset="-120"/>
               </a:rPr>
-              <a:t>The same simple question guides the week: What are students doing, and what will help them meet the standard?</a:t>
+              <a:t>The goal is one continuous cycle: prepare students, study their work, and respond to what the evidence shows.</a:t>
             </a:r>
             <a:endParaRPr lang="en-US" sz="2400" dirty="0"/>
           </a:p>
@@ -3146,7 +3134,7 @@
                 <a:ea typeface="Inter" pitchFamily="34" charset="-122"/>
                 <a:cs typeface="Inter" pitchFamily="34" charset="-120"/>
               </a:rPr>
-              <a:t>Teachers did the task.</a:t>
+              <a:t>Rehearse the task</a:t>
             </a:r>
             <a:endParaRPr lang="en-US" sz="2300" dirty="0"/>
           </a:p>
@@ -3169,7 +3157,7 @@
                 <a:ea typeface="Inter" pitchFamily="34" charset="-122"/>
                 <a:cs typeface="Inter" pitchFamily="34" charset="-120"/>
               </a:rPr>
-              <a:t>What might students find hard?</a:t>
+              <a:t>Anticipate student thinking and common errors.</a:t>
             </a:r>
             <a:endParaRPr lang="en-US" sz="2300" dirty="0"/>
           </a:p>
@@ -3234,7 +3222,7 @@
                 <a:ea typeface="Inter" pitchFamily="34" charset="-122"/>
                 <a:cs typeface="Inter" pitchFamily="34" charset="-120"/>
               </a:rPr>
-              <a:t>Teachers planned support.</a:t>
+              <a:t>Plan the lesson</a:t>
             </a:r>
             <a:endParaRPr lang="en-US" sz="2300" dirty="0"/>
           </a:p>
@@ -3257,7 +3245,7 @@
                 <a:ea typeface="Inter" pitchFamily="34" charset="-122"/>
                 <a:cs typeface="Inter" pitchFamily="34" charset="-120"/>
               </a:rPr>
-              <a:t>What will students do, say, and write?</a:t>
+              <a:t>Plan supports, feedback, and student revision.</a:t>
             </a:r>
             <a:endParaRPr lang="en-US" sz="2300" dirty="0"/>
           </a:p>
@@ -3322,7 +3310,7 @@
                 <a:ea typeface="Inter" pitchFamily="34" charset="-122"/>
                 <a:cs typeface="Inter" pitchFamily="34" charset="-120"/>
               </a:rPr>
-              <a:t>Practice the routine.</a:t>
+              <a:t>Build the routine</a:t>
             </a:r>
             <a:endParaRPr lang="en-US" sz="2300" dirty="0"/>
           </a:p>
@@ -3345,7 +3333,7 @@
                 <a:ea typeface="Inter" pitchFamily="34" charset="-122"/>
                 <a:cs typeface="Inter" pitchFamily="34" charset="-120"/>
               </a:rPr>
-              <a:t>How will CUBS and CER help students?</a:t>
+              <a:t>Use CUBS and CER to make thinking visible.</a:t>
             </a:r>
             <a:endParaRPr lang="en-US" sz="2300" dirty="0"/>
           </a:p>
@@ -3410,7 +3398,7 @@
                 <a:ea typeface="Inter" pitchFamily="34" charset="-122"/>
                 <a:cs typeface="Inter" pitchFamily="34" charset="-120"/>
               </a:rPr>
-              <a:t>Read student work.</a:t>
+              <a:t>Study student work</a:t>
             </a:r>
             <a:endParaRPr lang="en-US" sz="2300" dirty="0"/>
           </a:p>
@@ -3433,7 +3421,7 @@
                 <a:ea typeface="Inter" pitchFamily="34" charset="-122"/>
                 <a:cs typeface="Inter" pitchFamily="34" charset="-120"/>
               </a:rPr>
-              <a:t>What should students revise or learn next?</a:t>
+              <a:t>Use evidence to decide the next learning step.</a:t>
             </a:r>
             <a:endParaRPr lang="en-US" sz="2300" dirty="0"/>
           </a:p>
@@ -3497,7 +3485,7 @@
                 <a:ea typeface="Inter" pitchFamily="34" charset="-122"/>
                 <a:cs typeface="Inter" pitchFamily="34" charset="-120"/>
               </a:rPr>
-              <a:t>Use the same routine in every science course. Change the source—not the student-thinking goal.</a:t>
+              <a:t>Use the same thinking process in every science course. The source may change; the learning goal does not.</a:t>
             </a:r>
             <a:endParaRPr lang="en-US" sz="2200" dirty="0"/>
           </a:p>
@@ -3647,7 +3635,7 @@
                 <a:ea typeface="Inter" pitchFamily="34" charset="-122"/>
                 <a:cs typeface="Inter" pitchFamily="34" charset="-120"/>
               </a:rPr>
-              <a:t>CUBS: A Simple Way to Read a Science Source</a:t>
+              <a:t>CUBS: A Routine for Reading a Science Source</a:t>
             </a:r>
             <a:endParaRPr lang="en-US" sz="3000" dirty="0"/>
           </a:p>
@@ -3725,7 +3713,7 @@
                 <a:ea typeface="Inter" pitchFamily="34" charset="-122"/>
                 <a:cs typeface="Inter" pitchFamily="34" charset="-120"/>
               </a:rPr>
-              <a:t>Use CUBS before students write. It helps them slow down and find the information they will need.</a:t>
+              <a:t>Use CUBS before students write. It helps them identify the information they will use in an explanation.</a:t>
             </a:r>
             <a:endParaRPr lang="en-US" sz="2400" dirty="0"/>
           </a:p>
@@ -3913,7 +3901,7 @@
                 <a:ea typeface="Inter" pitchFamily="34" charset="-122"/>
                 <a:cs typeface="Inter" pitchFamily="34" charset="-120"/>
               </a:rPr>
-              <a:t>Circle the question students need to answer.</a:t>
+              <a:t>Circle the question you need to answer.</a:t>
             </a:r>
             <a:endParaRPr lang="en-US" sz="2400" dirty="0"/>
           </a:p>
@@ -4001,7 +3989,7 @@
                 <a:ea typeface="Inter" pitchFamily="34" charset="-122"/>
                 <a:cs typeface="Inter" pitchFamily="34" charset="-120"/>
               </a:rPr>
-              <a:t>Underline details, data, or observations.</a:t>
+              <a:t>Underline details, data, and observations.</a:t>
             </a:r>
             <a:endParaRPr lang="en-US" sz="2400" dirty="0"/>
           </a:p>
@@ -4089,7 +4077,7 @@
                 <a:ea typeface="Inter" pitchFamily="34" charset="-122"/>
                 <a:cs typeface="Inter" pitchFamily="34" charset="-120"/>
               </a:rPr>
-              <a:t>Box words, units, or labels that need attention.</a:t>
+              <a:t>Box key words, units, labels, or ideas.</a:t>
             </a:r>
             <a:endParaRPr lang="en-US" sz="2400" dirty="0"/>
           </a:p>
@@ -4228,17 +4216,6 @@
               <a:buNone/>
             </a:pPr>
             <a:r>
-              <a:rPr lang="en-US" altLang="en-US" sz="2100" b="1" dirty="0">
-                <a:solidFill>
-                  <a:srgbClr val="F6B4BA"/>
-                </a:solidFill>
-                <a:latin typeface="Inter" pitchFamily="34" charset="0"/>
-                <a:ea typeface="Inter" pitchFamily="34" charset="-122"/>
-                <a:cs typeface="Inter" pitchFamily="34" charset="-120"/>
-              </a:rPr>
-              <a:t>Student direction:</a:t>
-            </a:r>
-            <a:r>
               <a:rPr lang="en-US" altLang="en-US" sz="2100" dirty="0">
                 <a:solidFill>
                   <a:srgbClr val="FFFFFF"/>
@@ -4247,7 +4224,7 @@
                 <a:ea typeface="Inter" pitchFamily="34" charset="-122"/>
                 <a:cs typeface="Inter" pitchFamily="34" charset="-120"/>
               </a:rPr>
-              <a:t> “Use CUBS on the source. Then use your notes to help you write.”</a:t>
+              <a:t>Student direction: “Use CUBS on the source. Then use your notes to help you write.”</a:t>
             </a:r>
             <a:endParaRPr lang="en-US" sz="2100" dirty="0"/>
           </a:p>
@@ -4397,7 +4374,7 @@
                 <a:ea typeface="Inter" pitchFamily="34" charset="-122"/>
                 <a:cs typeface="Inter" pitchFamily="34" charset="-120"/>
               </a:rPr>
-              <a:t>Try CUBS With a Source From Your Course</a:t>
+              <a:t>Model It Briefly, Then Let Students Do It</a:t>
             </a:r>
             <a:endParaRPr lang="en-US" sz="3000" dirty="0"/>
           </a:p>
@@ -4475,7 +4452,7 @@
                 <a:ea typeface="Inter" pitchFamily="34" charset="-122"/>
                 <a:cs typeface="Inter" pitchFamily="34" charset="-120"/>
               </a:rPr>
-              <a:t>Choose a text, graph, data set, diagram, model, or investigation result that students will use in an upcoming lesson.</a:t>
+              <a:t>Use an upcoming science source. The routine can work with text, data, diagrams, models, or investigation results.</a:t>
             </a:r>
             <a:endParaRPr lang="en-US" sz="2400" dirty="0"/>
           </a:p>
@@ -4592,7 +4569,7 @@
                 <a:ea typeface="Inter" pitchFamily="34" charset="-122"/>
                 <a:cs typeface="Inter" pitchFamily="34" charset="-120"/>
               </a:rPr>
-              <a:t>1. PICK A SOURCE</a:t>
+              <a:t>1. CHOOSE</a:t>
             </a:r>
             <a:endParaRPr lang="en-US" sz="2500" dirty="0"/>
           </a:p>
@@ -4657,7 +4634,7 @@
                 <a:ea typeface="Inter" pitchFamily="34" charset="-122"/>
                 <a:cs typeface="Inter" pitchFamily="34" charset="-120"/>
               </a:rPr>
-              <a:t>2. DO CUBS</a:t>
+              <a:t>2. MODEL ONE MOVE</a:t>
             </a:r>
             <a:endParaRPr lang="en-US" sz="2500" dirty="0"/>
           </a:p>
@@ -4680,7 +4657,7 @@
                 <a:ea typeface="Inter" pitchFamily="34" charset="-122"/>
                 <a:cs typeface="Inter" pitchFamily="34" charset="-120"/>
               </a:rPr>
-              <a:t>What should students circle, underline, box, and summarize?</a:t>
+              <a:t>Show one CUBS action. Name what you are noticing.</a:t>
             </a:r>
             <a:endParaRPr lang="en-US" sz="2500" dirty="0"/>
           </a:p>
@@ -4722,7 +4699,7 @@
                 <a:ea typeface="Inter" pitchFamily="34" charset="-122"/>
                 <a:cs typeface="Inter" pitchFamily="34" charset="-120"/>
               </a:rPr>
-              <a:t>3. TALK WITH A PARTNER</a:t>
+              <a:t>3. RELEASE THE THINKING</a:t>
             </a:r>
             <a:endParaRPr lang="en-US" sz="2500" dirty="0"/>
           </a:p>
@@ -4745,7 +4722,7 @@
                 <a:ea typeface="Inter" pitchFamily="34" charset="-122"/>
                 <a:cs typeface="Inter" pitchFamily="34" charset="-120"/>
               </a:rPr>
-              <a:t>What will students need to notice before they can write?</a:t>
+              <a:t>Students complete CUBS and use their notes to write.</a:t>
             </a:r>
             <a:endParaRPr lang="en-US" sz="2500" dirty="0"/>
           </a:p>
@@ -4804,7 +4781,7 @@
                 <a:ea typeface="Inter" pitchFamily="34" charset="-122"/>
                 <a:cs typeface="Inter" pitchFamily="34" charset="-120"/>
               </a:rPr>
-              <a:t>Keep it simple: model the first step, then let students do the thinking.</a:t>
+              <a:t>Model a small part of the process. Let students do the thinking that follows.</a:t>
             </a:r>
             <a:endParaRPr lang="en-US" sz="2100" dirty="0"/>
           </a:p>
@@ -4954,7 +4931,7 @@
                 <a:ea typeface="Inter" pitchFamily="34" charset="-122"/>
                 <a:cs typeface="Inter" pitchFamily="34" charset="-120"/>
               </a:rPr>
-              <a:t>CER Color Key: Help Students See Their Thinking</a:t>
+              <a:t>Color-Code What Students Have Written</a:t>
             </a:r>
             <a:endParaRPr lang="en-US" sz="3000" dirty="0"/>
           </a:p>
@@ -5032,7 +5009,7 @@
                 <a:ea typeface="Inter" pitchFamily="34" charset="-122"/>
                 <a:cs typeface="Inter" pitchFamily="34" charset="-120"/>
               </a:rPr>
-              <a:t>After students write, have them color-code what is already in their response. Do not color-code what is missing.</a:t>
+              <a:t>After students write, color-code the thinking that is already in the response. Then decide what to strengthen.</a:t>
             </a:r>
             <a:endParaRPr lang="en-US" sz="2400" dirty="0"/>
           </a:p>
@@ -5422,17 +5399,6 @@
               <a:buNone/>
             </a:pPr>
             <a:r>
-              <a:rPr lang="en-US" altLang="en-US" sz="2100" b="1" dirty="0">
-                <a:solidFill>
-                  <a:srgbClr val="F6B4BA"/>
-                </a:solidFill>
-                <a:latin typeface="Inter" pitchFamily="34" charset="0"/>
-                <a:ea typeface="Inter" pitchFamily="34" charset="-122"/>
-                <a:cs typeface="Inter" pitchFamily="34" charset="-120"/>
-              </a:rPr>
-              <a:t>Student check:</a:t>
-            </a:r>
-            <a:r>
               <a:rPr lang="en-US" altLang="en-US" sz="2100" dirty="0">
                 <a:solidFill>
                   <a:srgbClr val="FFFFFF"/>
@@ -5441,7 +5407,7 @@
                 <a:ea typeface="Inter" pitchFamily="34" charset="-122"/>
                 <a:cs typeface="Inter" pitchFamily="34" charset="-120"/>
               </a:rPr>
-              <a:t> “What color is missing or needs to be stronger?”</a:t>
+              <a:t>Student check: “Which part needs to be added or made stronger?”</a:t>
             </a:r>
             <a:endParaRPr lang="en-US" sz="2100" dirty="0"/>
           </a:p>
@@ -5591,7 +5557,7 @@
                 <a:ea typeface="Inter" pitchFamily="34" charset="-122"/>
                 <a:cs typeface="Inter" pitchFamily="34" charset="-120"/>
               </a:rPr>
-              <a:t>Feedback Should Tell Students What to Do Next</a:t>
+              <a:t>Feedback That Leads to Revision</a:t>
             </a:r>
             <a:endParaRPr lang="en-US" sz="3000" dirty="0"/>
           </a:p>
@@ -5669,7 +5635,7 @@
                 <a:ea typeface="Inter" pitchFamily="34" charset="-122"/>
                 <a:cs typeface="Inter" pitchFamily="34" charset="-120"/>
               </a:rPr>
-              <a:t>Choose one part of the response to improve. Then give students a clear action—not the answer.</a:t>
+              <a:t>Keep feedback short, specific, and connected to one action the student can complete.</a:t>
             </a:r>
             <a:endParaRPr lang="en-US" sz="2400" dirty="0"/>
           </a:p>
@@ -5809,7 +5775,7 @@
                 <a:ea typeface="Inter" pitchFamily="34" charset="-122"/>
                 <a:cs typeface="Inter" pitchFamily="34" charset="-120"/>
               </a:rPr>
-              <a:t>What is missing or weak: claim, evidence, or reasoning?</a:t>
+              <a:t>Identify one part that is missing or needs to be stronger.</a:t>
             </a:r>
             <a:endParaRPr lang="en-US" sz="2500" dirty="0"/>
           </a:p>
@@ -5851,7 +5817,7 @@
                 <a:ea typeface="Inter" pitchFamily="34" charset="-122"/>
                 <a:cs typeface="Inter" pitchFamily="34" charset="-120"/>
               </a:rPr>
-              <a:t>2. PROMPT</a:t>
+              <a:t>2. ASK</a:t>
             </a:r>
             <a:endParaRPr lang="en-US" sz="2500" dirty="0"/>
           </a:p>
@@ -5874,7 +5840,7 @@
                 <a:ea typeface="Inter" pitchFamily="34" charset="-122"/>
                 <a:cs typeface="Inter" pitchFamily="34" charset="-120"/>
               </a:rPr>
-              <a:t>Ask a question that sends students back to the source.</a:t>
+              <a:t>Ask a question that sends students back to their source or response.</a:t>
             </a:r>
             <a:endParaRPr lang="en-US" sz="2500" dirty="0"/>
           </a:p>
@@ -5939,7 +5905,7 @@
                 <a:ea typeface="Inter" pitchFamily="34" charset="-122"/>
                 <a:cs typeface="Inter" pitchFamily="34" charset="-120"/>
               </a:rPr>
-              <a:t>Students add or improve one part of their own response.</a:t>
+              <a:t>Students add, change, or explain one part of their own writing.</a:t>
             </a:r>
             <a:endParaRPr lang="en-US" sz="2500" dirty="0"/>
           </a:p>
@@ -6017,7 +5983,7 @@
                 <a:ea typeface="Inter" pitchFamily="34" charset="-122"/>
                 <a:cs typeface="Inter" pitchFamily="34" charset="-120"/>
               </a:rPr>
-              <a:t> “Find your green evidence. Add a blue sentence that explains why it supports your claim.”</a:t>
+              <a:t> “Find your green evidence. Add a blue sentence that explains how it supports your pink claim.”</a:t>
             </a:r>
             <a:endParaRPr lang="en-US" sz="2200" dirty="0"/>
           </a:p>
@@ -6167,7 +6133,7 @@
                 <a:ea typeface="Inter" pitchFamily="34" charset="-122"/>
                 <a:cs typeface="Inter" pitchFamily="34" charset="-120"/>
               </a:rPr>
-              <a:t>Planning Time: Make This Work in Your Course</a:t>
+              <a:t>Planning Time: Use the Routine in Your Course</a:t>
             </a:r>
             <a:endParaRPr lang="en-US" sz="3000" dirty="0"/>
           </a:p>
@@ -6441,7 +6407,7 @@
                 <a:ea typeface="Inter" pitchFamily="34" charset="-122"/>
                 <a:cs typeface="Inter" pitchFamily="34" charset="-120"/>
               </a:rPr>
-              <a:t>1. What source will students analyze?</a:t>
+              <a:t>1. Choose the source.</a:t>
             </a:r>
             <a:r>
               <a:rPr lang="en-US" altLang="en-US" sz="2400" dirty="0">
@@ -6452,7 +6418,7 @@
                 <a:ea typeface="Inter" pitchFamily="34" charset="-122"/>
                 <a:cs typeface="Inter" pitchFamily="34" charset="-120"/>
               </a:rPr>
-              <a:t> Choose the text, graph, model, data set, or investigation result.</a:t>
+              <a:t> What will students read, view, or analyze?</a:t>
             </a:r>
             <a:endParaRPr lang="en-US" sz="2400" dirty="0"/>
           </a:p>
@@ -6494,7 +6460,7 @@
                 <a:ea typeface="Inter" pitchFamily="34" charset="-122"/>
                 <a:cs typeface="Inter" pitchFamily="34" charset="-120"/>
               </a:rPr>
-              <a:t>2. What will students do?</a:t>
+              <a:t>2. Choose the student moves.</a:t>
             </a:r>
             <a:r>
               <a:rPr lang="en-US" altLang="en-US" sz="2400" dirty="0">
@@ -6505,7 +6471,7 @@
                 <a:ea typeface="Inter" pitchFamily="34" charset="-122"/>
                 <a:cs typeface="Inter" pitchFamily="34" charset="-120"/>
               </a:rPr>
-              <a:t> Choose one CUBS move and one CER expectation.</a:t>
+              <a:t> What will students do with CUBS and CER?</a:t>
             </a:r>
             <a:endParaRPr lang="en-US" sz="2400" dirty="0"/>
           </a:p>
@@ -6547,7 +6513,7 @@
                 <a:ea typeface="Inter" pitchFamily="34" charset="-122"/>
                 <a:cs typeface="Inter" pitchFamily="34" charset="-120"/>
               </a:rPr>
-              <a:t>3. What will students revise?</a:t>
+              <a:t>3. Choose the next step.</a:t>
             </a:r>
             <a:r>
               <a:rPr lang="en-US" altLang="en-US" sz="2400" dirty="0">
@@ -6558,7 +6524,7 @@
                 <a:ea typeface="Inter" pitchFamily="34" charset="-122"/>
                 <a:cs typeface="Inter" pitchFamily="34" charset="-120"/>
               </a:rPr>
-              <a:t> Plan one feedback prompt and one next action. Share one useful idea with a colleague.</a:t>
+              <a:t> What feedback prompt will lead students to revise? Share one useful idea with a colleague.</a:t>
             </a:r>
             <a:endParaRPr lang="en-US" sz="2400" dirty="0"/>
           </a:p>
@@ -6786,7 +6752,7 @@
                 <a:ea typeface="Inter" pitchFamily="34" charset="-122"/>
                 <a:cs typeface="Inter" pitchFamily="34" charset="-120"/>
               </a:rPr>
-              <a:t>Choose one small next step. Bring evidence back on Friday.</a:t>
+              <a:t>Choose one small move to use in an upcoming lesson. Bring the evidence back on Friday.</a:t>
             </a:r>
             <a:endParaRPr lang="en-US" sz="2400" dirty="0"/>
           </a:p>
@@ -6903,7 +6869,7 @@
                 <a:ea typeface="Inter" pitchFamily="34" charset="-122"/>
                 <a:cs typeface="Inter" pitchFamily="34" charset="-120"/>
               </a:rPr>
-              <a:t>1. TEACH</a:t>
+              <a:t>1. USE THE ROUTINE</a:t>
             </a:r>
             <a:endParaRPr lang="en-US" sz="2500" dirty="0"/>
           </a:p>
@@ -6926,7 +6892,7 @@
                 <a:ea typeface="Inter" pitchFamily="34" charset="-122"/>
                 <a:cs typeface="Inter" pitchFamily="34" charset="-120"/>
               </a:rPr>
-              <a:t>Use CUBS or CER with one source in an upcoming lesson.</a:t>
+              <a:t>Use CUBS and/or color-coded CER with one class.</a:t>
             </a:r>
             <a:endParaRPr lang="en-US" sz="2500" dirty="0"/>
           </a:p>
@@ -6968,7 +6934,7 @@
                 <a:ea typeface="Inter" pitchFamily="34" charset="-122"/>
                 <a:cs typeface="Inter" pitchFamily="34" charset="-120"/>
               </a:rPr>
-              <a:t>2. COLLECT</a:t>
+              <a:t>2. SAVE EVIDENCE</a:t>
             </a:r>
             <a:endParaRPr lang="en-US" sz="2500" dirty="0"/>
           </a:p>
@@ -6991,7 +6957,7 @@
                 <a:ea typeface="Inter" pitchFamily="34" charset="-122"/>
                 <a:cs typeface="Inter" pitchFamily="34" charset="-120"/>
               </a:rPr>
-              <a:t>Save one or two de-identified student responses.</a:t>
+              <a:t>Keep one or two anonymous student responses.</a:t>
             </a:r>
             <a:endParaRPr lang="en-US" sz="2500" dirty="0"/>
           </a:p>
@@ -7033,7 +6999,7 @@
                 <a:ea typeface="Inter" pitchFamily="34" charset="-122"/>
                 <a:cs typeface="Inter" pitchFamily="34" charset="-120"/>
               </a:rPr>
-              <a:t>3. BRING FRIDAY</a:t>
+              <a:t>3. PLAN FROM IT</a:t>
             </a:r>
             <a:endParaRPr lang="en-US" sz="2500" dirty="0"/>
           </a:p>
@@ -7056,7 +7022,7 @@
                 <a:ea typeface="Inter" pitchFamily="34" charset="-122"/>
                 <a:cs typeface="Inter" pitchFamily="34" charset="-120"/>
               </a:rPr>
-              <a:t>Bring student work and the feedback you gave.</a:t>
+              <a:t>Use the writing and feedback to decide the next lesson step.</a:t>
             </a:r>
             <a:endParaRPr lang="en-US" sz="2500" dirty="0"/>
           </a:p>
@@ -7107,17 +7073,6 @@
               <a:buNone/>
             </a:pPr>
             <a:r>
-              <a:rPr lang="en-US" altLang="en-US" sz="2100" b="1" dirty="0">
-                <a:solidFill>
-                  <a:srgbClr val="F6B4BA"/>
-                </a:solidFill>
-                <a:latin typeface="Inter" pitchFamily="34" charset="0"/>
-                <a:ea typeface="Inter" pitchFamily="34" charset="-122"/>
-                <a:cs typeface="Inter" pitchFamily="34" charset="-120"/>
-              </a:rPr>
-              <a:t>Remember:</a:t>
-            </a:r>
-            <a:r>
               <a:rPr lang="en-US" altLang="en-US" sz="2100" dirty="0">
                 <a:solidFill>
                   <a:srgbClr val="FFFFFF"/>
@@ -7126,7 +7081,7 @@
                 <a:ea typeface="Inter" pitchFamily="34" charset="-122"/>
                 <a:cs typeface="Inter" pitchFamily="34" charset="-120"/>
               </a:rPr>
-              <a:t> students need practice thinking, writing, and revising—not a completed answer.</a:t>
+              <a:t>Students need practice thinking, writing, receiving feedback, and revising.</a:t>
             </a:r>
             <a:endParaRPr lang="en-US" sz="2100" dirty="0"/>
           </a:p>
